--- a/output/wordlabs-fear-3day.pptx
+++ b/output/wordlabs-fear-3day.pptx
@@ -4279,7 +4279,7 @@
                 <a:ea typeface="Calibri" pitchFamily="34" charset="-122"/>
                 <a:cs typeface="Calibri" pitchFamily="34" charset="-120"/>
               </a:rPr>
-              <a:t>Origin: Latin: periculum</a:t>
+              <a:t>Origin: Latin: feare</a:t>
             </a:r>
             <a:endParaRPr lang="en-US" sz="1300" dirty="0"/>
           </a:p>
@@ -5622,7 +5622,7 @@
                 <a:ea typeface="Trebuchet MS" pitchFamily="34" charset="-122"/>
                 <a:cs typeface="Trebuchet MS" pitchFamily="34" charset="-120"/>
               </a:rPr>
-              <a:t>0</a:t>
+              <a:t>1</a:t>
             </a:r>
             <a:pPr algn="ctr" indent="0" marL="0">
               <a:buNone/>
@@ -6071,7 +6071,7 @@
                 <a:ea typeface="Calibri" pitchFamily="34" charset="-122"/>
                 <a:cs typeface="Calibri" pitchFamily="34" charset="-120"/>
               </a:rPr>
-              <a:t> knight was </a:t>
+              <a:t> knight was admired by all, but even he felt </a:t>
             </a:r>
             <a:pPr algn="l" indent="0" marL="0">
               <a:buNone/>
@@ -6102,7 +6102,7 @@
                 <a:ea typeface="Calibri" pitchFamily="34" charset="-122"/>
                 <a:cs typeface="Calibri" pitchFamily="34" charset="-120"/>
               </a:rPr>
-              <a:t> that the dragon would return before sunrise.</a:t>
+              <a:t> when the storm struck.</a:t>
             </a:r>
             <a:endParaRPr lang="en-US" sz="1800" dirty="0"/>
           </a:p>
@@ -7860,7 +7860,7 @@
                 <a:ea typeface="Calibri" pitchFamily="34" charset="-122"/>
                 <a:cs typeface="Calibri" pitchFamily="34" charset="-120"/>
               </a:rPr>
-              <a:t>feeling of dread or danger</a:t>
+              <a:t>feeling of danger or dread</a:t>
             </a:r>
             <a:endParaRPr lang="en-US" sz="850" dirty="0"/>
           </a:p>
@@ -8845,7 +8845,7 @@
                 <a:ea typeface="Calibri" pitchFamily="34" charset="-122"/>
                 <a:cs typeface="Calibri" pitchFamily="34" charset="-120"/>
               </a:rPr>
-              <a:t>feeling of dread or danger</a:t>
+              <a:t>feeling of danger or dread</a:t>
             </a:r>
             <a:endParaRPr lang="en-US" sz="850" dirty="0"/>
           </a:p>
@@ -9962,7 +9962,7 @@
                 <a:ea typeface="Calibri" pitchFamily="34" charset="-122"/>
                 <a:cs typeface="Calibri" pitchFamily="34" charset="-120"/>
               </a:rPr>
-              <a:t>feeling of dread or danger</a:t>
+              <a:t>feeling of danger or dread</a:t>
             </a:r>
             <a:endParaRPr lang="en-US" sz="850" dirty="0"/>
           </a:p>
@@ -12197,7 +12197,7 @@
                 <a:ea typeface="Calibri" pitchFamily="34" charset="-122"/>
                 <a:cs typeface="Calibri" pitchFamily="34" charset="-120"/>
               </a:rPr>
-              <a:t>feeling of dread or danger</a:t>
+              <a:t>feeling of danger or dread</a:t>
             </a:r>
             <a:endParaRPr lang="en-US" sz="850" dirty="0"/>
           </a:p>
@@ -13182,7 +13182,7 @@
                 <a:ea typeface="Calibri" pitchFamily="34" charset="-122"/>
                 <a:cs typeface="Calibri" pitchFamily="34" charset="-120"/>
               </a:rPr>
-              <a:t>feeling of dread or danger</a:t>
+              <a:t>feeling of danger or dread</a:t>
             </a:r>
             <a:endParaRPr lang="en-US" sz="850" dirty="0"/>
           </a:p>
@@ -14564,7 +14564,7 @@
                 <a:ea typeface="Calibri" pitchFamily="34" charset="-122"/>
                 <a:cs typeface="Calibri" pitchFamily="34" charset="-120"/>
               </a:rPr>
-              <a:t>feeling of dread or danger</a:t>
+              <a:t>feeling of danger or dread</a:t>
             </a:r>
             <a:endParaRPr lang="en-US" sz="850" dirty="0"/>
           </a:p>
@@ -16720,7 +16720,7 @@
                 <a:ea typeface="Calibri" pitchFamily="34" charset="-122"/>
                 <a:cs typeface="Calibri" pitchFamily="34" charset="-120"/>
               </a:rPr>
-              <a:t> beast let out a roar, and the </a:t>
+              <a:t> beast let out a roar, and the villagers, </a:t>
             </a:r>
             <a:pPr algn="l" indent="0" marL="0">
               <a:buNone/>
@@ -16737,7 +16737,7 @@
                 <a:ea typeface="Calibri" pitchFamily="34" charset="-122"/>
                 <a:cs typeface="Calibri" pitchFamily="34" charset="-120"/>
               </a:rPr>
-              <a:t>fearful</a:t>
+              <a:t>fearing</a:t>
             </a:r>
             <a:pPr algn="l" indent="0" marL="0">
               <a:buNone/>
@@ -16751,7 +16751,7 @@
                 <a:ea typeface="Calibri" pitchFamily="34" charset="-122"/>
                 <a:cs typeface="Calibri" pitchFamily="34" charset="-120"/>
               </a:rPr>
-              <a:t> villagers ran away, </a:t>
+              <a:t> the worst, ran away </a:t>
             </a:r>
             <a:pPr algn="l" indent="0" marL="0">
               <a:buNone/>
@@ -16768,7 +16768,7 @@
                 <a:ea typeface="Calibri" pitchFamily="34" charset="-122"/>
                 <a:cs typeface="Calibri" pitchFamily="34" charset="-120"/>
               </a:rPr>
-              <a:t>fearing</a:t>
+              <a:t>fearfully</a:t>
             </a:r>
             <a:pPr algn="l" indent="0" marL="0">
               <a:buNone/>
@@ -16782,7 +16782,7 @@
                 <a:ea typeface="Calibri" pitchFamily="34" charset="-122"/>
                 <a:cs typeface="Calibri" pitchFamily="34" charset="-120"/>
               </a:rPr>
-              <a:t> they would never be safe again.</a:t>
+              <a:t> into the forest.</a:t>
             </a:r>
             <a:endParaRPr lang="en-US" sz="1800" dirty="0"/>
           </a:p>
@@ -17065,7 +17065,7 @@
                 <a:ea typeface="Trebuchet MS" pitchFamily="34" charset="-122"/>
                 <a:cs typeface="Trebuchet MS" pitchFamily="34" charset="-120"/>
               </a:rPr>
-              <a:t>fearful</a:t>
+              <a:t>fearing</a:t>
             </a:r>
             <a:endParaRPr lang="en-US" sz="1400" dirty="0"/>
           </a:p>
@@ -17193,7 +17193,7 @@
                 <a:ea typeface="Trebuchet MS" pitchFamily="34" charset="-122"/>
                 <a:cs typeface="Trebuchet MS" pitchFamily="34" charset="-120"/>
               </a:rPr>
-              <a:t>fearing</a:t>
+              <a:t>fearfully</a:t>
             </a:r>
             <a:endParaRPr lang="en-US" sz="1400" dirty="0"/>
           </a:p>
@@ -18668,7 +18668,7 @@
                 <a:ea typeface="Calibri" pitchFamily="34" charset="-122"/>
                 <a:cs typeface="Calibri" pitchFamily="34" charset="-120"/>
               </a:rPr>
-              <a:t>feeling of dread or danger</a:t>
+              <a:t>feeling of danger or dread</a:t>
             </a:r>
             <a:endParaRPr lang="en-US" sz="850" dirty="0"/>
           </a:p>
@@ -18780,7 +18780,7 @@
                 <a:ea typeface="Calibri" pitchFamily="34" charset="-122"/>
                 <a:cs typeface="Calibri" pitchFamily="34" charset="-120"/>
               </a:rPr>
-              <a:t>causing or having a quality</a:t>
+              <a:t>causing or tending to</a:t>
             </a:r>
             <a:endParaRPr lang="en-US" sz="850" dirty="0"/>
           </a:p>
@@ -19653,7 +19653,7 @@
                 <a:ea typeface="Calibri" pitchFamily="34" charset="-122"/>
                 <a:cs typeface="Calibri" pitchFamily="34" charset="-120"/>
               </a:rPr>
-              <a:t>feeling of dread or danger</a:t>
+              <a:t>feeling of danger or dread</a:t>
             </a:r>
             <a:endParaRPr lang="en-US" sz="850" dirty="0"/>
           </a:p>
@@ -19765,7 +19765,7 @@
                 <a:ea typeface="Calibri" pitchFamily="34" charset="-122"/>
                 <a:cs typeface="Calibri" pitchFamily="34" charset="-120"/>
               </a:rPr>
-              <a:t>causing or having a quality</a:t>
+              <a:t>causing or tending to</a:t>
             </a:r>
             <a:endParaRPr lang="en-US" sz="850" dirty="0"/>
           </a:p>
@@ -20770,7 +20770,7 @@
                 <a:ea typeface="Calibri" pitchFamily="34" charset="-122"/>
                 <a:cs typeface="Calibri" pitchFamily="34" charset="-120"/>
               </a:rPr>
-              <a:t>feeling of dread or danger</a:t>
+              <a:t>feeling of danger or dread</a:t>
             </a:r>
             <a:endParaRPr lang="en-US" sz="850" dirty="0"/>
           </a:p>
@@ -20882,7 +20882,7 @@
                 <a:ea typeface="Calibri" pitchFamily="34" charset="-122"/>
                 <a:cs typeface="Calibri" pitchFamily="34" charset="-120"/>
               </a:rPr>
-              <a:t>causing or having a quality</a:t>
+              <a:t>causing or tending to</a:t>
             </a:r>
             <a:endParaRPr lang="en-US" sz="850" dirty="0"/>
           </a:p>
@@ -21253,7 +21253,7 @@
         </p:nvSpPr>
         <p:spPr>
           <a:xfrm>
-            <a:off x="2254649" y="4169664"/>
+            <a:off x="2427732" y="4169664"/>
             <a:ext cx="685800" cy="475488"/>
           </a:xfrm>
           <a:prstGeom prst="rect">
@@ -21280,7 +21280,7 @@
         </p:nvSpPr>
         <p:spPr>
           <a:xfrm>
-            <a:off x="2254649" y="4169664"/>
+            <a:off x="2427732" y="4169664"/>
             <a:ext cx="685800" cy="475488"/>
           </a:xfrm>
           <a:prstGeom prst="rect">
@@ -21319,7 +21319,7 @@
         </p:nvSpPr>
         <p:spPr>
           <a:xfrm>
-            <a:off x="3293146" y="4169664"/>
+            <a:off x="3639312" y="4169664"/>
             <a:ext cx="685800" cy="475488"/>
           </a:xfrm>
           <a:prstGeom prst="rect">
@@ -21346,7 +21346,7 @@
         </p:nvSpPr>
         <p:spPr>
           <a:xfrm>
-            <a:off x="3293146" y="4169664"/>
+            <a:off x="3639312" y="4169664"/>
             <a:ext cx="685800" cy="475488"/>
           </a:xfrm>
           <a:prstGeom prst="rect">
@@ -21385,7 +21385,7 @@
         </p:nvSpPr>
         <p:spPr>
           <a:xfrm>
-            <a:off x="4331643" y="4169664"/>
+            <a:off x="4850892" y="4169664"/>
             <a:ext cx="685800" cy="475488"/>
           </a:xfrm>
           <a:prstGeom prst="rect">
@@ -21412,7 +21412,7 @@
         </p:nvSpPr>
         <p:spPr>
           <a:xfrm>
-            <a:off x="4331643" y="4169664"/>
+            <a:off x="4850892" y="4169664"/>
             <a:ext cx="685800" cy="475488"/>
           </a:xfrm>
           <a:prstGeom prst="rect">
@@ -21451,7 +21451,7 @@
         </p:nvSpPr>
         <p:spPr>
           <a:xfrm>
-            <a:off x="5370141" y="4169664"/>
+            <a:off x="6062472" y="4169664"/>
             <a:ext cx="685800" cy="475488"/>
           </a:xfrm>
           <a:prstGeom prst="rect">
@@ -21478,7 +21478,7 @@
         </p:nvSpPr>
         <p:spPr>
           <a:xfrm>
-            <a:off x="5370141" y="4169664"/>
+            <a:off x="6062472" y="4169664"/>
             <a:ext cx="685800" cy="475488"/>
           </a:xfrm>
           <a:prstGeom prst="rect">
@@ -21503,7 +21503,7 @@
                 <a:ea typeface="Trebuchet MS" pitchFamily="34" charset="-122"/>
                 <a:cs typeface="Trebuchet MS" pitchFamily="34" charset="-120"/>
               </a:rPr>
-              <a:t>u</a:t>
+              <a:t>o</a:t>
             </a:r>
             <a:endParaRPr lang="en-US" sz="900" dirty="0"/>
           </a:p>
@@ -21517,7 +21517,7 @@
         </p:nvSpPr>
         <p:spPr>
           <a:xfrm>
-            <a:off x="6408638" y="4169664"/>
+            <a:off x="7274052" y="4169664"/>
             <a:ext cx="685800" cy="475488"/>
           </a:xfrm>
           <a:prstGeom prst="rect">
@@ -21544,7 +21544,7 @@
         </p:nvSpPr>
         <p:spPr>
           <a:xfrm>
-            <a:off x="6408638" y="4169664"/>
+            <a:off x="7274052" y="4169664"/>
             <a:ext cx="685800" cy="475488"/>
           </a:xfrm>
           <a:prstGeom prst="rect">
@@ -21569,73 +21569,7 @@
                 <a:ea typeface="Trebuchet MS" pitchFamily="34" charset="-122"/>
                 <a:cs typeface="Trebuchet MS" pitchFamily="34" charset="-120"/>
               </a:rPr>
-              <a:t>m</a:t>
-            </a:r>
-            <a:endParaRPr lang="en-US" sz="900" dirty="0"/>
-          </a:p>
-        </p:txBody>
-      </p:sp>
-      <p:sp>
-        <p:nvSpPr>
-          <p:cNvPr id="43" name="Shape 41"/>
-          <p:cNvSpPr/>
-          <p:nvPr/>
-        </p:nvSpPr>
-        <p:spPr>
-          <a:xfrm>
-            <a:off x="7447135" y="4169664"/>
-            <a:ext cx="685800" cy="475488"/>
-          </a:xfrm>
-          <a:prstGeom prst="rect">
-            <a:avLst>
-              <a:gd name="adj" fmla="val 7692"/>
-            </a:avLst>
-          </a:prstGeom>
-          <a:solidFill>
-            <a:srgbClr val="FFFFFF"/>
-          </a:solidFill>
-          <a:ln w="12700">
-            <a:solidFill>
-              <a:srgbClr val="DB2777"/>
-            </a:solidFill>
-            <a:prstDash val="solid"/>
-          </a:ln>
-        </p:spPr>
-      </p:sp>
-      <p:sp>
-        <p:nvSpPr>
-          <p:cNvPr id="44" name="Text 42"/>
-          <p:cNvSpPr/>
-          <p:nvPr/>
-        </p:nvSpPr>
-        <p:spPr>
-          <a:xfrm>
-            <a:off x="7447135" y="4169664"/>
-            <a:ext cx="685800" cy="475488"/>
-          </a:xfrm>
-          <a:prstGeom prst="rect">
-            <a:avLst/>
-          </a:prstGeom>
-          <a:noFill/>
-          <a:ln/>
-        </p:spPr>
-        <p:txBody>
-          <a:bodyPr wrap="square" lIns="0" tIns="0" rIns="0" bIns="0" rtlCol="0" anchor="ctr"/>
-          <a:lstStyle/>
-          <a:p>
-            <a:pPr algn="ctr" indent="0" marL="0">
-              <a:buNone/>
-            </a:pPr>
-            <a:r>
-              <a:rPr lang="en-US" sz="900" b="1" dirty="0">
-                <a:solidFill>
-                  <a:srgbClr val="9D174D"/>
-                </a:solidFill>
-                <a:latin typeface="Trebuchet MS" pitchFamily="34" charset="0"/>
-                <a:ea typeface="Trebuchet MS" pitchFamily="34" charset="-122"/>
-                <a:cs typeface="Trebuchet MS" pitchFamily="34" charset="-120"/>
-              </a:rPr>
-              <a:t>e</a:t>
+              <a:t>me</a:t>
             </a:r>
             <a:endParaRPr lang="en-US" sz="900" dirty="0"/>
           </a:p>
@@ -22066,7 +22000,7 @@
                 <a:ea typeface="Trebuchet MS" pitchFamily="34" charset="-122"/>
                 <a:cs typeface="Trebuchet MS" pitchFamily="34" charset="-120"/>
               </a:rPr>
-              <a:t>fearful</a:t>
+              <a:t>fearing</a:t>
             </a:r>
             <a:endParaRPr lang="en-US" sz="2800" dirty="0"/>
           </a:p>
@@ -22893,7 +22827,7 @@
                 <a:ea typeface="Trebuchet MS" pitchFamily="34" charset="-122"/>
                 <a:cs typeface="Trebuchet MS" pitchFamily="34" charset="-120"/>
               </a:rPr>
-              <a:t>fearful</a:t>
+              <a:t>fearing</a:t>
             </a:r>
             <a:endParaRPr lang="en-US" sz="2800" dirty="0"/>
           </a:p>
@@ -23071,7 +23005,7 @@
                 <a:ea typeface="Calibri" pitchFamily="34" charset="-122"/>
                 <a:cs typeface="Calibri" pitchFamily="34" charset="-120"/>
               </a:rPr>
-              <a:t>feeling of dread or danger</a:t>
+              <a:t>feeling of danger or dread</a:t>
             </a:r>
             <a:endParaRPr lang="en-US" sz="850" dirty="0"/>
           </a:p>
@@ -23144,7 +23078,7 @@
                 <a:ea typeface="Trebuchet MS" pitchFamily="34" charset="-122"/>
                 <a:cs typeface="Trebuchet MS" pitchFamily="34" charset="-120"/>
               </a:rPr>
-              <a:t>ful</a:t>
+              <a:t>ing</a:t>
             </a:r>
             <a:endParaRPr lang="en-US" sz="1300" dirty="0"/>
           </a:p>
@@ -23183,7 +23117,7 @@
                 <a:ea typeface="Calibri" pitchFamily="34" charset="-122"/>
                 <a:cs typeface="Calibri" pitchFamily="34" charset="-120"/>
               </a:rPr>
-              <a:t>full of</a:t>
+              <a:t>action happening now</a:t>
             </a:r>
             <a:endParaRPr lang="en-US" sz="850" dirty="0"/>
           </a:p>
@@ -24597,7 +24531,7 @@
                 <a:ea typeface="Trebuchet MS" pitchFamily="34" charset="-122"/>
                 <a:cs typeface="Trebuchet MS" pitchFamily="34" charset="-120"/>
               </a:rPr>
-              <a:t>fearful</a:t>
+              <a:t>fearing</a:t>
             </a:r>
             <a:endParaRPr lang="en-US" sz="2800" dirty="0"/>
           </a:p>
@@ -24775,7 +24709,7 @@
                 <a:ea typeface="Calibri" pitchFamily="34" charset="-122"/>
                 <a:cs typeface="Calibri" pitchFamily="34" charset="-120"/>
               </a:rPr>
-              <a:t>feeling of dread or danger</a:t>
+              <a:t>feeling of danger or dread</a:t>
             </a:r>
             <a:endParaRPr lang="en-US" sz="850" dirty="0"/>
           </a:p>
@@ -24848,7 +24782,7 @@
                 <a:ea typeface="Trebuchet MS" pitchFamily="34" charset="-122"/>
                 <a:cs typeface="Trebuchet MS" pitchFamily="34" charset="-120"/>
               </a:rPr>
-              <a:t>ful</a:t>
+              <a:t>ing</a:t>
             </a:r>
             <a:endParaRPr lang="en-US" sz="1300" dirty="0"/>
           </a:p>
@@ -24887,7 +24821,7 @@
                 <a:ea typeface="Calibri" pitchFamily="34" charset="-122"/>
                 <a:cs typeface="Calibri" pitchFamily="34" charset="-120"/>
               </a:rPr>
-              <a:t>full of</a:t>
+              <a:t>action happening now</a:t>
             </a:r>
             <a:endParaRPr lang="en-US" sz="850" dirty="0"/>
           </a:p>
@@ -25151,7 +25085,7 @@
                 <a:ea typeface="Trebuchet MS" pitchFamily="34" charset="-122"/>
                 <a:cs typeface="Trebuchet MS" pitchFamily="34" charset="-120"/>
               </a:rPr>
-              <a:t>ful</a:t>
+              <a:t>ing</a:t>
             </a:r>
             <a:endParaRPr lang="en-US" sz="1400" dirty="0"/>
           </a:p>
@@ -25714,7 +25648,7 @@
                 <a:ea typeface="Trebuchet MS" pitchFamily="34" charset="-122"/>
                 <a:cs typeface="Trebuchet MS" pitchFamily="34" charset="-120"/>
               </a:rPr>
-              <a:t>fearful</a:t>
+              <a:t>fearing</a:t>
             </a:r>
             <a:endParaRPr lang="en-US" sz="2800" dirty="0"/>
           </a:p>
@@ -25892,7 +25826,7 @@
                 <a:ea typeface="Calibri" pitchFamily="34" charset="-122"/>
                 <a:cs typeface="Calibri" pitchFamily="34" charset="-120"/>
               </a:rPr>
-              <a:t>feeling of dread or danger</a:t>
+              <a:t>feeling of danger or dread</a:t>
             </a:r>
             <a:endParaRPr lang="en-US" sz="850" dirty="0"/>
           </a:p>
@@ -25965,7 +25899,7 @@
                 <a:ea typeface="Trebuchet MS" pitchFamily="34" charset="-122"/>
                 <a:cs typeface="Trebuchet MS" pitchFamily="34" charset="-120"/>
               </a:rPr>
-              <a:t>ful</a:t>
+              <a:t>ing</a:t>
             </a:r>
             <a:endParaRPr lang="en-US" sz="1300" dirty="0"/>
           </a:p>
@@ -26004,7 +25938,7 @@
                 <a:ea typeface="Calibri" pitchFamily="34" charset="-122"/>
                 <a:cs typeface="Calibri" pitchFamily="34" charset="-120"/>
               </a:rPr>
-              <a:t>full of</a:t>
+              <a:t>action happening now</a:t>
             </a:r>
             <a:endParaRPr lang="en-US" sz="850" dirty="0"/>
           </a:p>
@@ -26268,7 +26202,7 @@
                 <a:ea typeface="Trebuchet MS" pitchFamily="34" charset="-122"/>
                 <a:cs typeface="Trebuchet MS" pitchFamily="34" charset="-120"/>
               </a:rPr>
-              <a:t>ful</a:t>
+              <a:t>ing</a:t>
             </a:r>
             <a:endParaRPr lang="en-US" sz="1400" dirty="0"/>
           </a:p>
@@ -26375,7 +26309,7 @@
         </p:nvSpPr>
         <p:spPr>
           <a:xfrm>
-            <a:off x="2427732" y="4169664"/>
+            <a:off x="2670048" y="4169664"/>
             <a:ext cx="685800" cy="475488"/>
           </a:xfrm>
           <a:prstGeom prst="rect">
@@ -26402,7 +26336,7 @@
         </p:nvSpPr>
         <p:spPr>
           <a:xfrm>
-            <a:off x="2427732" y="4169664"/>
+            <a:off x="2670048" y="4169664"/>
             <a:ext cx="685800" cy="475488"/>
           </a:xfrm>
           <a:prstGeom prst="rect">
@@ -26441,7 +26375,7 @@
         </p:nvSpPr>
         <p:spPr>
           <a:xfrm>
-            <a:off x="3639312" y="4169664"/>
+            <a:off x="4123944" y="4169664"/>
             <a:ext cx="685800" cy="475488"/>
           </a:xfrm>
           <a:prstGeom prst="rect">
@@ -26468,7 +26402,7 @@
         </p:nvSpPr>
         <p:spPr>
           <a:xfrm>
-            <a:off x="3639312" y="4169664"/>
+            <a:off x="4123944" y="4169664"/>
             <a:ext cx="685800" cy="475488"/>
           </a:xfrm>
           <a:prstGeom prst="rect">
@@ -26507,7 +26441,7 @@
         </p:nvSpPr>
         <p:spPr>
           <a:xfrm>
-            <a:off x="4850892" y="4169664"/>
+            <a:off x="5577840" y="4169664"/>
             <a:ext cx="685800" cy="475488"/>
           </a:xfrm>
           <a:prstGeom prst="rect">
@@ -26534,7 +26468,7 @@
         </p:nvSpPr>
         <p:spPr>
           <a:xfrm>
-            <a:off x="4850892" y="4169664"/>
+            <a:off x="5577840" y="4169664"/>
             <a:ext cx="685800" cy="475488"/>
           </a:xfrm>
           <a:prstGeom prst="rect">
@@ -26559,7 +26493,7 @@
                 <a:ea typeface="Trebuchet MS" pitchFamily="34" charset="-122"/>
                 <a:cs typeface="Trebuchet MS" pitchFamily="34" charset="-120"/>
               </a:rPr>
-              <a:t>f</a:t>
+              <a:t>i</a:t>
             </a:r>
             <a:endParaRPr lang="en-US" sz="900" dirty="0"/>
           </a:p>
@@ -26573,7 +26507,7 @@
         </p:nvSpPr>
         <p:spPr>
           <a:xfrm>
-            <a:off x="6062472" y="4169664"/>
+            <a:off x="7031736" y="4169664"/>
             <a:ext cx="685800" cy="475488"/>
           </a:xfrm>
           <a:prstGeom prst="rect">
@@ -26600,7 +26534,7 @@
         </p:nvSpPr>
         <p:spPr>
           <a:xfrm>
-            <a:off x="6062472" y="4169664"/>
+            <a:off x="7031736" y="4169664"/>
             <a:ext cx="685800" cy="475488"/>
           </a:xfrm>
           <a:prstGeom prst="rect">
@@ -26625,73 +26559,7 @@
                 <a:ea typeface="Trebuchet MS" pitchFamily="34" charset="-122"/>
                 <a:cs typeface="Trebuchet MS" pitchFamily="34" charset="-120"/>
               </a:rPr>
-              <a:t>u</a:t>
-            </a:r>
-            <a:endParaRPr lang="en-US" sz="900" dirty="0"/>
-          </a:p>
-        </p:txBody>
-      </p:sp>
-      <p:sp>
-        <p:nvSpPr>
-          <p:cNvPr id="41" name="Shape 39"/>
-          <p:cNvSpPr/>
-          <p:nvPr/>
-        </p:nvSpPr>
-        <p:spPr>
-          <a:xfrm>
-            <a:off x="7274052" y="4169664"/>
-            <a:ext cx="685800" cy="475488"/>
-          </a:xfrm>
-          <a:prstGeom prst="rect">
-            <a:avLst>
-              <a:gd name="adj" fmla="val 7692"/>
-            </a:avLst>
-          </a:prstGeom>
-          <a:solidFill>
-            <a:srgbClr val="FFFFFF"/>
-          </a:solidFill>
-          <a:ln w="12700">
-            <a:solidFill>
-              <a:srgbClr val="DB2777"/>
-            </a:solidFill>
-            <a:prstDash val="solid"/>
-          </a:ln>
-        </p:spPr>
-      </p:sp>
-      <p:sp>
-        <p:nvSpPr>
-          <p:cNvPr id="42" name="Text 40"/>
-          <p:cNvSpPr/>
-          <p:nvPr/>
-        </p:nvSpPr>
-        <p:spPr>
-          <a:xfrm>
-            <a:off x="7274052" y="4169664"/>
-            <a:ext cx="685800" cy="475488"/>
-          </a:xfrm>
-          <a:prstGeom prst="rect">
-            <a:avLst/>
-          </a:prstGeom>
-          <a:noFill/>
-          <a:ln/>
-        </p:spPr>
-        <p:txBody>
-          <a:bodyPr wrap="square" lIns="0" tIns="0" rIns="0" bIns="0" rtlCol="0" anchor="ctr"/>
-          <a:lstStyle/>
-          <a:p>
-            <a:pPr algn="ctr" indent="0" marL="0">
-              <a:buNone/>
-            </a:pPr>
-            <a:r>
-              <a:rPr lang="en-US" sz="900" b="1" dirty="0">
-                <a:solidFill>
-                  <a:srgbClr val="9D174D"/>
-                </a:solidFill>
-                <a:latin typeface="Trebuchet MS" pitchFamily="34" charset="0"/>
-                <a:ea typeface="Trebuchet MS" pitchFamily="34" charset="-122"/>
-                <a:cs typeface="Trebuchet MS" pitchFamily="34" charset="-120"/>
-              </a:rPr>
-              <a:t>l</a:t>
+              <a:t>ng</a:t>
             </a:r>
             <a:endParaRPr lang="en-US" sz="900" dirty="0"/>
           </a:p>
@@ -27122,7 +26990,7 @@
                 <a:ea typeface="Trebuchet MS" pitchFamily="34" charset="-122"/>
                 <a:cs typeface="Trebuchet MS" pitchFamily="34" charset="-120"/>
               </a:rPr>
-              <a:t>fearing</a:t>
+              <a:t>fearfully</a:t>
             </a:r>
             <a:endParaRPr lang="en-US" sz="2800" dirty="0"/>
           </a:p>
@@ -27949,7 +27817,7 @@
                 <a:ea typeface="Trebuchet MS" pitchFamily="34" charset="-122"/>
                 <a:cs typeface="Trebuchet MS" pitchFamily="34" charset="-120"/>
               </a:rPr>
-              <a:t>fearing</a:t>
+              <a:t>fearfully</a:t>
             </a:r>
             <a:endParaRPr lang="en-US" sz="2800" dirty="0"/>
           </a:p>
@@ -28029,7 +27897,7 @@
         </p:nvSpPr>
         <p:spPr>
           <a:xfrm>
-            <a:off x="2938272" y="2258568"/>
+            <a:off x="2221992" y="2258568"/>
             <a:ext cx="1828800" cy="292608"/>
           </a:xfrm>
           <a:prstGeom prst="rect">
@@ -28063,7 +27931,7 @@
         </p:nvSpPr>
         <p:spPr>
           <a:xfrm>
-            <a:off x="2938272" y="2258568"/>
+            <a:off x="2221992" y="2258568"/>
             <a:ext cx="1828800" cy="292608"/>
           </a:xfrm>
           <a:prstGeom prst="rect">
@@ -28102,7 +27970,7 @@
         </p:nvSpPr>
         <p:spPr>
           <a:xfrm>
-            <a:off x="2938272" y="2569464"/>
+            <a:off x="2221992" y="2569464"/>
             <a:ext cx="1828800" cy="201168"/>
           </a:xfrm>
           <a:prstGeom prst="rect">
@@ -28127,7 +27995,7 @@
                 <a:ea typeface="Calibri" pitchFamily="34" charset="-122"/>
                 <a:cs typeface="Calibri" pitchFamily="34" charset="-120"/>
               </a:rPr>
-              <a:t>feeling of dread or danger</a:t>
+              <a:t>feeling of danger or dread</a:t>
             </a:r>
             <a:endParaRPr lang="en-US" sz="850" dirty="0"/>
           </a:p>
@@ -28141,7 +28009,7 @@
         </p:nvSpPr>
         <p:spPr>
           <a:xfrm>
-            <a:off x="5803392" y="2258568"/>
+            <a:off x="4370832" y="2258568"/>
             <a:ext cx="1828800" cy="292608"/>
           </a:xfrm>
           <a:prstGeom prst="rect">
@@ -28175,7 +28043,7 @@
         </p:nvSpPr>
         <p:spPr>
           <a:xfrm>
-            <a:off x="5803392" y="2258568"/>
+            <a:off x="4370832" y="2258568"/>
             <a:ext cx="1828800" cy="292608"/>
           </a:xfrm>
           <a:prstGeom prst="rect">
@@ -28200,7 +28068,7 @@
                 <a:ea typeface="Trebuchet MS" pitchFamily="34" charset="-122"/>
                 <a:cs typeface="Trebuchet MS" pitchFamily="34" charset="-120"/>
               </a:rPr>
-              <a:t>ing</a:t>
+              <a:t>ful</a:t>
             </a:r>
             <a:endParaRPr lang="en-US" sz="1300" dirty="0"/>
           </a:p>
@@ -28214,7 +28082,7 @@
         </p:nvSpPr>
         <p:spPr>
           <a:xfrm>
-            <a:off x="5803392" y="2569464"/>
+            <a:off x="4370832" y="2569464"/>
             <a:ext cx="1828800" cy="201168"/>
           </a:xfrm>
           <a:prstGeom prst="rect">
@@ -28239,7 +28107,7 @@
                 <a:ea typeface="Calibri" pitchFamily="34" charset="-122"/>
                 <a:cs typeface="Calibri" pitchFamily="34" charset="-120"/>
               </a:rPr>
-              <a:t>doing an action right now</a:t>
+              <a:t>full of</a:t>
             </a:r>
             <a:endParaRPr lang="en-US" sz="850" dirty="0"/>
           </a:p>
@@ -28248,6 +28116,118 @@
       <p:sp>
         <p:nvSpPr>
           <p:cNvPr id="22" name="Shape 20"/>
+          <p:cNvSpPr/>
+          <p:nvPr/>
+        </p:nvSpPr>
+        <p:spPr>
+          <a:xfrm>
+            <a:off x="6519672" y="2258568"/>
+            <a:ext cx="1828800" cy="292608"/>
+          </a:xfrm>
+          <a:prstGeom prst="rect">
+            <a:avLst>
+              <a:gd name="adj" fmla="val 25000"/>
+            </a:avLst>
+          </a:prstGeom>
+          <a:solidFill>
+            <a:srgbClr val="FCE7F3"/>
+          </a:solidFill>
+          <a:ln w="19050">
+            <a:solidFill>
+              <a:srgbClr val="DB2777"/>
+            </a:solidFill>
+            <a:prstDash val="solid"/>
+          </a:ln>
+          <a:effectLst>
+            <a:outerShdw sx="100000" sy="100000" kx="0" ky="0" algn="bl" rotWithShape="0" blurRad="101600" dist="38100" dir="8100000">
+              <a:srgbClr val="000000">
+                <a:alpha val="12000"/>
+              </a:srgbClr>
+            </a:outerShdw>
+          </a:effectLst>
+        </p:spPr>
+      </p:sp>
+      <p:sp>
+        <p:nvSpPr>
+          <p:cNvPr id="23" name="Text 21"/>
+          <p:cNvSpPr/>
+          <p:nvPr/>
+        </p:nvSpPr>
+        <p:spPr>
+          <a:xfrm>
+            <a:off x="6519672" y="2258568"/>
+            <a:ext cx="1828800" cy="292608"/>
+          </a:xfrm>
+          <a:prstGeom prst="rect">
+            <a:avLst/>
+          </a:prstGeom>
+          <a:noFill/>
+          <a:ln/>
+        </p:spPr>
+        <p:txBody>
+          <a:bodyPr wrap="square" lIns="0" tIns="0" rIns="0" bIns="0" rtlCol="0" anchor="ctr"/>
+          <a:lstStyle/>
+          <a:p>
+            <a:pPr algn="ctr" indent="0" marL="0">
+              <a:buNone/>
+            </a:pPr>
+            <a:r>
+              <a:rPr lang="en-US" sz="1300" b="1" dirty="0">
+                <a:solidFill>
+                  <a:srgbClr val="9D174D"/>
+                </a:solidFill>
+                <a:latin typeface="Trebuchet MS" pitchFamily="34" charset="0"/>
+                <a:ea typeface="Trebuchet MS" pitchFamily="34" charset="-122"/>
+                <a:cs typeface="Trebuchet MS" pitchFamily="34" charset="-120"/>
+              </a:rPr>
+              <a:t>ly</a:t>
+            </a:r>
+            <a:endParaRPr lang="en-US" sz="1300" dirty="0"/>
+          </a:p>
+        </p:txBody>
+      </p:sp>
+      <p:sp>
+        <p:nvSpPr>
+          <p:cNvPr id="24" name="Text 22"/>
+          <p:cNvSpPr/>
+          <p:nvPr/>
+        </p:nvSpPr>
+        <p:spPr>
+          <a:xfrm>
+            <a:off x="6519672" y="2569464"/>
+            <a:ext cx="1828800" cy="201168"/>
+          </a:xfrm>
+          <a:prstGeom prst="rect">
+            <a:avLst/>
+          </a:prstGeom>
+          <a:noFill/>
+          <a:ln/>
+        </p:spPr>
+        <p:txBody>
+          <a:bodyPr wrap="square" lIns="0" tIns="0" rIns="0" bIns="0" rtlCol="0" anchor="t"/>
+          <a:lstStyle/>
+          <a:p>
+            <a:pPr algn="ctr" indent="0" marL="0">
+              <a:buNone/>
+            </a:pPr>
+            <a:r>
+              <a:rPr lang="en-US" sz="850" dirty="0">
+                <a:solidFill>
+                  <a:srgbClr val="475569"/>
+                </a:solidFill>
+                <a:latin typeface="Calibri" pitchFamily="34" charset="0"/>
+                <a:ea typeface="Calibri" pitchFamily="34" charset="-122"/>
+                <a:cs typeface="Calibri" pitchFamily="34" charset="-120"/>
+              </a:rPr>
+              <a:t>in a way that is</a:t>
+            </a:r>
+            <a:endParaRPr lang="en-US" sz="850" dirty="0"/>
+          </a:p>
+        </p:txBody>
+      </p:sp>
+      <p:sp>
+        <p:nvSpPr>
+          <p:cNvPr id="25" name="Shape 23"/>
           <p:cNvSpPr/>
           <p:nvPr/>
         </p:nvSpPr>
@@ -28274,7 +28254,7 @@
       </p:sp>
       <p:sp>
         <p:nvSpPr>
-          <p:cNvPr id="23" name="Text 21"/>
+          <p:cNvPr id="26" name="Text 24"/>
           <p:cNvSpPr/>
           <p:nvPr/>
         </p:nvSpPr>
@@ -28313,7 +28293,7 @@
       </p:sp>
       <p:sp>
         <p:nvSpPr>
-          <p:cNvPr id="24" name="Shape 22"/>
+          <p:cNvPr id="27" name="Shape 25"/>
           <p:cNvSpPr/>
           <p:nvPr/>
         </p:nvSpPr>
@@ -28340,7 +28320,7 @@
       </p:sp>
       <p:sp>
         <p:nvSpPr>
-          <p:cNvPr id="25" name="Text 23"/>
+          <p:cNvPr id="28" name="Text 26"/>
           <p:cNvSpPr/>
           <p:nvPr/>
         </p:nvSpPr>
@@ -28379,7 +28359,7 @@
       </p:sp>
       <p:sp>
         <p:nvSpPr>
-          <p:cNvPr id="26" name="Shape 24"/>
+          <p:cNvPr id="29" name="Shape 27"/>
           <p:cNvSpPr/>
           <p:nvPr/>
         </p:nvSpPr>
@@ -28406,7 +28386,7 @@
       </p:sp>
       <p:sp>
         <p:nvSpPr>
-          <p:cNvPr id="27" name="Text 25"/>
+          <p:cNvPr id="30" name="Text 28"/>
           <p:cNvSpPr/>
           <p:nvPr/>
         </p:nvSpPr>
@@ -28445,7 +28425,7 @@
       </p:sp>
       <p:sp>
         <p:nvSpPr>
-          <p:cNvPr id="28" name="Shape 26"/>
+          <p:cNvPr id="31" name="Shape 29"/>
           <p:cNvSpPr/>
           <p:nvPr/>
         </p:nvSpPr>
@@ -28472,7 +28452,7 @@
       </p:sp>
       <p:sp>
         <p:nvSpPr>
-          <p:cNvPr id="29" name="Text 27"/>
+          <p:cNvPr id="32" name="Text 30"/>
           <p:cNvSpPr/>
           <p:nvPr/>
         </p:nvSpPr>
@@ -28934,7 +28914,7 @@
                 <a:ea typeface="Trebuchet MS" pitchFamily="34" charset="-122"/>
                 <a:cs typeface="Trebuchet MS" pitchFamily="34" charset="-120"/>
               </a:rPr>
-              <a:t>fearing</a:t>
+              <a:t>fearfully</a:t>
             </a:r>
             <a:endParaRPr lang="en-US" sz="2800" dirty="0"/>
           </a:p>
@@ -29014,7 +28994,7 @@
         </p:nvSpPr>
         <p:spPr>
           <a:xfrm>
-            <a:off x="2938272" y="2258568"/>
+            <a:off x="2221992" y="2258568"/>
             <a:ext cx="1828800" cy="292608"/>
           </a:xfrm>
           <a:prstGeom prst="rect">
@@ -29048,7 +29028,7 @@
         </p:nvSpPr>
         <p:spPr>
           <a:xfrm>
-            <a:off x="2938272" y="2258568"/>
+            <a:off x="2221992" y="2258568"/>
             <a:ext cx="1828800" cy="292608"/>
           </a:xfrm>
           <a:prstGeom prst="rect">
@@ -29087,7 +29067,7 @@
         </p:nvSpPr>
         <p:spPr>
           <a:xfrm>
-            <a:off x="2938272" y="2569464"/>
+            <a:off x="2221992" y="2569464"/>
             <a:ext cx="1828800" cy="201168"/>
           </a:xfrm>
           <a:prstGeom prst="rect">
@@ -29112,7 +29092,7 @@
                 <a:ea typeface="Calibri" pitchFamily="34" charset="-122"/>
                 <a:cs typeface="Calibri" pitchFamily="34" charset="-120"/>
               </a:rPr>
-              <a:t>feeling of dread or danger</a:t>
+              <a:t>feeling of danger or dread</a:t>
             </a:r>
             <a:endParaRPr lang="en-US" sz="850" dirty="0"/>
           </a:p>
@@ -29126,7 +29106,7 @@
         </p:nvSpPr>
         <p:spPr>
           <a:xfrm>
-            <a:off x="5803392" y="2258568"/>
+            <a:off x="4370832" y="2258568"/>
             <a:ext cx="1828800" cy="292608"/>
           </a:xfrm>
           <a:prstGeom prst="rect">
@@ -29160,7 +29140,7 @@
         </p:nvSpPr>
         <p:spPr>
           <a:xfrm>
-            <a:off x="5803392" y="2258568"/>
+            <a:off x="4370832" y="2258568"/>
             <a:ext cx="1828800" cy="292608"/>
           </a:xfrm>
           <a:prstGeom prst="rect">
@@ -29185,7 +29165,7 @@
                 <a:ea typeface="Trebuchet MS" pitchFamily="34" charset="-122"/>
                 <a:cs typeface="Trebuchet MS" pitchFamily="34" charset="-120"/>
               </a:rPr>
-              <a:t>ing</a:t>
+              <a:t>ful</a:t>
             </a:r>
             <a:endParaRPr lang="en-US" sz="1300" dirty="0"/>
           </a:p>
@@ -29199,7 +29179,7 @@
         </p:nvSpPr>
         <p:spPr>
           <a:xfrm>
-            <a:off x="5803392" y="2569464"/>
+            <a:off x="4370832" y="2569464"/>
             <a:ext cx="1828800" cy="201168"/>
           </a:xfrm>
           <a:prstGeom prst="rect">
@@ -29224,7 +29204,7 @@
                 <a:ea typeface="Calibri" pitchFamily="34" charset="-122"/>
                 <a:cs typeface="Calibri" pitchFamily="34" charset="-120"/>
               </a:rPr>
-              <a:t>doing an action right now</a:t>
+              <a:t>full of</a:t>
             </a:r>
             <a:endParaRPr lang="en-US" sz="850" dirty="0"/>
           </a:p>
@@ -29233,6 +29213,118 @@
       <p:sp>
         <p:nvSpPr>
           <p:cNvPr id="22" name="Shape 20"/>
+          <p:cNvSpPr/>
+          <p:nvPr/>
+        </p:nvSpPr>
+        <p:spPr>
+          <a:xfrm>
+            <a:off x="6519672" y="2258568"/>
+            <a:ext cx="1828800" cy="292608"/>
+          </a:xfrm>
+          <a:prstGeom prst="rect">
+            <a:avLst>
+              <a:gd name="adj" fmla="val 25000"/>
+            </a:avLst>
+          </a:prstGeom>
+          <a:solidFill>
+            <a:srgbClr val="FCE7F3"/>
+          </a:solidFill>
+          <a:ln w="19050">
+            <a:solidFill>
+              <a:srgbClr val="DB2777"/>
+            </a:solidFill>
+            <a:prstDash val="solid"/>
+          </a:ln>
+          <a:effectLst>
+            <a:outerShdw sx="100000" sy="100000" kx="0" ky="0" algn="bl" rotWithShape="0" blurRad="101600" dist="38100" dir="8100000">
+              <a:srgbClr val="000000">
+                <a:alpha val="12000"/>
+              </a:srgbClr>
+            </a:outerShdw>
+          </a:effectLst>
+        </p:spPr>
+      </p:sp>
+      <p:sp>
+        <p:nvSpPr>
+          <p:cNvPr id="23" name="Text 21"/>
+          <p:cNvSpPr/>
+          <p:nvPr/>
+        </p:nvSpPr>
+        <p:spPr>
+          <a:xfrm>
+            <a:off x="6519672" y="2258568"/>
+            <a:ext cx="1828800" cy="292608"/>
+          </a:xfrm>
+          <a:prstGeom prst="rect">
+            <a:avLst/>
+          </a:prstGeom>
+          <a:noFill/>
+          <a:ln/>
+        </p:spPr>
+        <p:txBody>
+          <a:bodyPr wrap="square" lIns="0" tIns="0" rIns="0" bIns="0" rtlCol="0" anchor="ctr"/>
+          <a:lstStyle/>
+          <a:p>
+            <a:pPr algn="ctr" indent="0" marL="0">
+              <a:buNone/>
+            </a:pPr>
+            <a:r>
+              <a:rPr lang="en-US" sz="1300" b="1" dirty="0">
+                <a:solidFill>
+                  <a:srgbClr val="9D174D"/>
+                </a:solidFill>
+                <a:latin typeface="Trebuchet MS" pitchFamily="34" charset="0"/>
+                <a:ea typeface="Trebuchet MS" pitchFamily="34" charset="-122"/>
+                <a:cs typeface="Trebuchet MS" pitchFamily="34" charset="-120"/>
+              </a:rPr>
+              <a:t>ly</a:t>
+            </a:r>
+            <a:endParaRPr lang="en-US" sz="1300" dirty="0"/>
+          </a:p>
+        </p:txBody>
+      </p:sp>
+      <p:sp>
+        <p:nvSpPr>
+          <p:cNvPr id="24" name="Text 22"/>
+          <p:cNvSpPr/>
+          <p:nvPr/>
+        </p:nvSpPr>
+        <p:spPr>
+          <a:xfrm>
+            <a:off x="6519672" y="2569464"/>
+            <a:ext cx="1828800" cy="201168"/>
+          </a:xfrm>
+          <a:prstGeom prst="rect">
+            <a:avLst/>
+          </a:prstGeom>
+          <a:noFill/>
+          <a:ln/>
+        </p:spPr>
+        <p:txBody>
+          <a:bodyPr wrap="square" lIns="0" tIns="0" rIns="0" bIns="0" rtlCol="0" anchor="t"/>
+          <a:lstStyle/>
+          <a:p>
+            <a:pPr algn="ctr" indent="0" marL="0">
+              <a:buNone/>
+            </a:pPr>
+            <a:r>
+              <a:rPr lang="en-US" sz="850" dirty="0">
+                <a:solidFill>
+                  <a:srgbClr val="475569"/>
+                </a:solidFill>
+                <a:latin typeface="Calibri" pitchFamily="34" charset="0"/>
+                <a:ea typeface="Calibri" pitchFamily="34" charset="-122"/>
+                <a:cs typeface="Calibri" pitchFamily="34" charset="-120"/>
+              </a:rPr>
+              <a:t>in a way that is</a:t>
+            </a:r>
+            <a:endParaRPr lang="en-US" sz="850" dirty="0"/>
+          </a:p>
+        </p:txBody>
+      </p:sp>
+      <p:sp>
+        <p:nvSpPr>
+          <p:cNvPr id="25" name="Shape 23"/>
           <p:cNvSpPr/>
           <p:nvPr/>
         </p:nvSpPr>
@@ -29259,7 +29351,7 @@
       </p:sp>
       <p:sp>
         <p:nvSpPr>
-          <p:cNvPr id="23" name="Text 21"/>
+          <p:cNvPr id="26" name="Text 24"/>
           <p:cNvSpPr/>
           <p:nvPr/>
         </p:nvSpPr>
@@ -29298,7 +29390,7 @@
       </p:sp>
       <p:sp>
         <p:nvSpPr>
-          <p:cNvPr id="24" name="Shape 22"/>
+          <p:cNvPr id="27" name="Shape 25"/>
           <p:cNvSpPr/>
           <p:nvPr/>
         </p:nvSpPr>
@@ -29325,13 +29417,13 @@
       </p:sp>
       <p:sp>
         <p:nvSpPr>
-          <p:cNvPr id="25" name="Shape 23"/>
-          <p:cNvSpPr/>
-          <p:nvPr/>
-        </p:nvSpPr>
-        <p:spPr>
-          <a:xfrm>
-            <a:off x="2999232" y="3364992"/>
+          <p:cNvPr id="28" name="Shape 26"/>
+          <p:cNvSpPr/>
+          <p:nvPr/>
+        </p:nvSpPr>
+        <p:spPr>
+          <a:xfrm>
+            <a:off x="2313432" y="3364992"/>
             <a:ext cx="1645920" cy="475488"/>
           </a:xfrm>
           <a:prstGeom prst="rect">
@@ -29352,13 +29444,13 @@
       </p:sp>
       <p:sp>
         <p:nvSpPr>
-          <p:cNvPr id="26" name="Text 24"/>
-          <p:cNvSpPr/>
-          <p:nvPr/>
-        </p:nvSpPr>
-        <p:spPr>
-          <a:xfrm>
-            <a:off x="2999232" y="3364992"/>
+          <p:cNvPr id="29" name="Text 27"/>
+          <p:cNvSpPr/>
+          <p:nvPr/>
+        </p:nvSpPr>
+        <p:spPr>
+          <a:xfrm>
+            <a:off x="2313432" y="3364992"/>
             <a:ext cx="1645920" cy="475488"/>
           </a:xfrm>
           <a:prstGeom prst="rect">
@@ -29391,14 +29483,14 @@
       </p:sp>
       <p:sp>
         <p:nvSpPr>
-          <p:cNvPr id="27" name="Text 25"/>
-          <p:cNvSpPr/>
-          <p:nvPr/>
-        </p:nvSpPr>
-        <p:spPr>
-          <a:xfrm>
-            <a:off x="4645152" y="3364992"/>
-            <a:ext cx="1097280" cy="475488"/>
+          <p:cNvPr id="30" name="Text 28"/>
+          <p:cNvSpPr/>
+          <p:nvPr/>
+        </p:nvSpPr>
+        <p:spPr>
+          <a:xfrm>
+            <a:off x="3959352" y="3364992"/>
+            <a:ext cx="411480" cy="475488"/>
           </a:xfrm>
           <a:prstGeom prst="rect">
             <a:avLst/>
@@ -29430,13 +29522,13 @@
       </p:sp>
       <p:sp>
         <p:nvSpPr>
-          <p:cNvPr id="28" name="Shape 26"/>
-          <p:cNvSpPr/>
-          <p:nvPr/>
-        </p:nvSpPr>
-        <p:spPr>
-          <a:xfrm>
-            <a:off x="5742432" y="3364992"/>
+          <p:cNvPr id="31" name="Shape 29"/>
+          <p:cNvSpPr/>
+          <p:nvPr/>
+        </p:nvSpPr>
+        <p:spPr>
+          <a:xfrm>
+            <a:off x="4370832" y="3364992"/>
             <a:ext cx="1645920" cy="475488"/>
           </a:xfrm>
           <a:prstGeom prst="rect">
@@ -29457,13 +29549,13 @@
       </p:sp>
       <p:sp>
         <p:nvSpPr>
-          <p:cNvPr id="29" name="Text 27"/>
-          <p:cNvSpPr/>
-          <p:nvPr/>
-        </p:nvSpPr>
-        <p:spPr>
-          <a:xfrm>
-            <a:off x="5742432" y="3364992"/>
+          <p:cNvPr id="32" name="Text 30"/>
+          <p:cNvSpPr/>
+          <p:nvPr/>
+        </p:nvSpPr>
+        <p:spPr>
+          <a:xfrm>
+            <a:off x="4370832" y="3364992"/>
             <a:ext cx="1645920" cy="475488"/>
           </a:xfrm>
           <a:prstGeom prst="rect">
@@ -29488,7 +29580,7 @@
                 <a:ea typeface="Trebuchet MS" pitchFamily="34" charset="-122"/>
                 <a:cs typeface="Trebuchet MS" pitchFamily="34" charset="-120"/>
               </a:rPr>
-              <a:t>ing</a:t>
+              <a:t>ful</a:t>
             </a:r>
             <a:endParaRPr lang="en-US" sz="1400" dirty="0"/>
           </a:p>
@@ -29496,7 +29588,112 @@
       </p:sp>
       <p:sp>
         <p:nvSpPr>
-          <p:cNvPr id="30" name="Shape 28"/>
+          <p:cNvPr id="33" name="Text 31"/>
+          <p:cNvSpPr/>
+          <p:nvPr/>
+        </p:nvSpPr>
+        <p:spPr>
+          <a:xfrm>
+            <a:off x="6016752" y="3364992"/>
+            <a:ext cx="411480" cy="475488"/>
+          </a:xfrm>
+          <a:prstGeom prst="rect">
+            <a:avLst/>
+          </a:prstGeom>
+          <a:noFill/>
+          <a:ln/>
+        </p:spPr>
+        <p:txBody>
+          <a:bodyPr wrap="square" lIns="0" tIns="0" rIns="0" bIns="0" rtlCol="0" anchor="ctr"/>
+          <a:lstStyle/>
+          <a:p>
+            <a:pPr algn="ctr" indent="0" marL="0">
+              <a:buNone/>
+            </a:pPr>
+            <a:r>
+              <a:rPr lang="en-US" sz="1600" b="1" dirty="0">
+                <a:solidFill>
+                  <a:srgbClr val="0D9488"/>
+                </a:solidFill>
+                <a:latin typeface="Trebuchet MS" pitchFamily="34" charset="0"/>
+                <a:ea typeface="Trebuchet MS" pitchFamily="34" charset="-122"/>
+                <a:cs typeface="Trebuchet MS" pitchFamily="34" charset="-120"/>
+              </a:rPr>
+              <a:t>·</a:t>
+            </a:r>
+            <a:endParaRPr lang="en-US" sz="1600" dirty="0"/>
+          </a:p>
+        </p:txBody>
+      </p:sp>
+      <p:sp>
+        <p:nvSpPr>
+          <p:cNvPr id="34" name="Shape 32"/>
+          <p:cNvSpPr/>
+          <p:nvPr/>
+        </p:nvSpPr>
+        <p:spPr>
+          <a:xfrm>
+            <a:off x="6428232" y="3364992"/>
+            <a:ext cx="1645920" cy="475488"/>
+          </a:xfrm>
+          <a:prstGeom prst="rect">
+            <a:avLst>
+              <a:gd name="adj" fmla="val 9615"/>
+            </a:avLst>
+          </a:prstGeom>
+          <a:solidFill>
+            <a:srgbClr val="FFFFFF"/>
+          </a:solidFill>
+          <a:ln w="12700">
+            <a:solidFill>
+              <a:srgbClr val="0D9488"/>
+            </a:solidFill>
+            <a:prstDash val="solid"/>
+          </a:ln>
+        </p:spPr>
+      </p:sp>
+      <p:sp>
+        <p:nvSpPr>
+          <p:cNvPr id="35" name="Text 33"/>
+          <p:cNvSpPr/>
+          <p:nvPr/>
+        </p:nvSpPr>
+        <p:spPr>
+          <a:xfrm>
+            <a:off x="6428232" y="3364992"/>
+            <a:ext cx="1645920" cy="475488"/>
+          </a:xfrm>
+          <a:prstGeom prst="rect">
+            <a:avLst/>
+          </a:prstGeom>
+          <a:noFill/>
+          <a:ln/>
+        </p:spPr>
+        <p:txBody>
+          <a:bodyPr wrap="square" lIns="0" tIns="0" rIns="0" bIns="0" rtlCol="0" anchor="ctr"/>
+          <a:lstStyle/>
+          <a:p>
+            <a:pPr algn="ctr" indent="0" marL="0">
+              <a:buNone/>
+            </a:pPr>
+            <a:r>
+              <a:rPr lang="en-US" sz="1400" b="1" dirty="0">
+                <a:solidFill>
+                  <a:srgbClr val="0D9488"/>
+                </a:solidFill>
+                <a:latin typeface="Trebuchet MS" pitchFamily="34" charset="0"/>
+                <a:ea typeface="Trebuchet MS" pitchFamily="34" charset="-122"/>
+                <a:cs typeface="Trebuchet MS" pitchFamily="34" charset="-120"/>
+              </a:rPr>
+              <a:t>ly</a:t>
+            </a:r>
+            <a:endParaRPr lang="en-US" sz="1400" dirty="0"/>
+          </a:p>
+        </p:txBody>
+      </p:sp>
+      <p:sp>
+        <p:nvSpPr>
+          <p:cNvPr id="36" name="Shape 34"/>
           <p:cNvSpPr/>
           <p:nvPr/>
         </p:nvSpPr>
@@ -29523,7 +29720,7 @@
       </p:sp>
       <p:sp>
         <p:nvSpPr>
-          <p:cNvPr id="31" name="Text 29"/>
+          <p:cNvPr id="37" name="Text 35"/>
           <p:cNvSpPr/>
           <p:nvPr/>
         </p:nvSpPr>
@@ -29562,7 +29759,7 @@
       </p:sp>
       <p:sp>
         <p:nvSpPr>
-          <p:cNvPr id="32" name="Shape 30"/>
+          <p:cNvPr id="38" name="Shape 36"/>
           <p:cNvSpPr/>
           <p:nvPr/>
         </p:nvSpPr>
@@ -29589,7 +29786,7 @@
       </p:sp>
       <p:sp>
         <p:nvSpPr>
-          <p:cNvPr id="33" name="Text 31"/>
+          <p:cNvPr id="39" name="Text 37"/>
           <p:cNvSpPr/>
           <p:nvPr/>
         </p:nvSpPr>
@@ -30051,7 +30248,7 @@
                 <a:ea typeface="Trebuchet MS" pitchFamily="34" charset="-122"/>
                 <a:cs typeface="Trebuchet MS" pitchFamily="34" charset="-120"/>
               </a:rPr>
-              <a:t>fearing</a:t>
+              <a:t>fearfully</a:t>
             </a:r>
             <a:endParaRPr lang="en-US" sz="2800" dirty="0"/>
           </a:p>
@@ -30131,7 +30328,7 @@
         </p:nvSpPr>
         <p:spPr>
           <a:xfrm>
-            <a:off x="2938272" y="2258568"/>
+            <a:off x="2221992" y="2258568"/>
             <a:ext cx="1828800" cy="292608"/>
           </a:xfrm>
           <a:prstGeom prst="rect">
@@ -30165,7 +30362,7 @@
         </p:nvSpPr>
         <p:spPr>
           <a:xfrm>
-            <a:off x="2938272" y="2258568"/>
+            <a:off x="2221992" y="2258568"/>
             <a:ext cx="1828800" cy="292608"/>
           </a:xfrm>
           <a:prstGeom prst="rect">
@@ -30204,7 +30401,7 @@
         </p:nvSpPr>
         <p:spPr>
           <a:xfrm>
-            <a:off x="2938272" y="2569464"/>
+            <a:off x="2221992" y="2569464"/>
             <a:ext cx="1828800" cy="201168"/>
           </a:xfrm>
           <a:prstGeom prst="rect">
@@ -30229,7 +30426,7 @@
                 <a:ea typeface="Calibri" pitchFamily="34" charset="-122"/>
                 <a:cs typeface="Calibri" pitchFamily="34" charset="-120"/>
               </a:rPr>
-              <a:t>feeling of dread or danger</a:t>
+              <a:t>feeling of danger or dread</a:t>
             </a:r>
             <a:endParaRPr lang="en-US" sz="850" dirty="0"/>
           </a:p>
@@ -30243,7 +30440,7 @@
         </p:nvSpPr>
         <p:spPr>
           <a:xfrm>
-            <a:off x="5803392" y="2258568"/>
+            <a:off x="4370832" y="2258568"/>
             <a:ext cx="1828800" cy="292608"/>
           </a:xfrm>
           <a:prstGeom prst="rect">
@@ -30277,7 +30474,7 @@
         </p:nvSpPr>
         <p:spPr>
           <a:xfrm>
-            <a:off x="5803392" y="2258568"/>
+            <a:off x="4370832" y="2258568"/>
             <a:ext cx="1828800" cy="292608"/>
           </a:xfrm>
           <a:prstGeom prst="rect">
@@ -30302,7 +30499,7 @@
                 <a:ea typeface="Trebuchet MS" pitchFamily="34" charset="-122"/>
                 <a:cs typeface="Trebuchet MS" pitchFamily="34" charset="-120"/>
               </a:rPr>
-              <a:t>ing</a:t>
+              <a:t>ful</a:t>
             </a:r>
             <a:endParaRPr lang="en-US" sz="1300" dirty="0"/>
           </a:p>
@@ -30316,7 +30513,7 @@
         </p:nvSpPr>
         <p:spPr>
           <a:xfrm>
-            <a:off x="5803392" y="2569464"/>
+            <a:off x="4370832" y="2569464"/>
             <a:ext cx="1828800" cy="201168"/>
           </a:xfrm>
           <a:prstGeom prst="rect">
@@ -30341,7 +30538,7 @@
                 <a:ea typeface="Calibri" pitchFamily="34" charset="-122"/>
                 <a:cs typeface="Calibri" pitchFamily="34" charset="-120"/>
               </a:rPr>
-              <a:t>doing an action right now</a:t>
+              <a:t>full of</a:t>
             </a:r>
             <a:endParaRPr lang="en-US" sz="850" dirty="0"/>
           </a:p>
@@ -30350,6 +30547,118 @@
       <p:sp>
         <p:nvSpPr>
           <p:cNvPr id="22" name="Shape 20"/>
+          <p:cNvSpPr/>
+          <p:nvPr/>
+        </p:nvSpPr>
+        <p:spPr>
+          <a:xfrm>
+            <a:off x="6519672" y="2258568"/>
+            <a:ext cx="1828800" cy="292608"/>
+          </a:xfrm>
+          <a:prstGeom prst="rect">
+            <a:avLst>
+              <a:gd name="adj" fmla="val 25000"/>
+            </a:avLst>
+          </a:prstGeom>
+          <a:solidFill>
+            <a:srgbClr val="FCE7F3"/>
+          </a:solidFill>
+          <a:ln w="19050">
+            <a:solidFill>
+              <a:srgbClr val="DB2777"/>
+            </a:solidFill>
+            <a:prstDash val="solid"/>
+          </a:ln>
+          <a:effectLst>
+            <a:outerShdw sx="100000" sy="100000" kx="0" ky="0" algn="bl" rotWithShape="0" blurRad="101600" dist="38100" dir="8100000">
+              <a:srgbClr val="000000">
+                <a:alpha val="12000"/>
+              </a:srgbClr>
+            </a:outerShdw>
+          </a:effectLst>
+        </p:spPr>
+      </p:sp>
+      <p:sp>
+        <p:nvSpPr>
+          <p:cNvPr id="23" name="Text 21"/>
+          <p:cNvSpPr/>
+          <p:nvPr/>
+        </p:nvSpPr>
+        <p:spPr>
+          <a:xfrm>
+            <a:off x="6519672" y="2258568"/>
+            <a:ext cx="1828800" cy="292608"/>
+          </a:xfrm>
+          <a:prstGeom prst="rect">
+            <a:avLst/>
+          </a:prstGeom>
+          <a:noFill/>
+          <a:ln/>
+        </p:spPr>
+        <p:txBody>
+          <a:bodyPr wrap="square" lIns="0" tIns="0" rIns="0" bIns="0" rtlCol="0" anchor="ctr"/>
+          <a:lstStyle/>
+          <a:p>
+            <a:pPr algn="ctr" indent="0" marL="0">
+              <a:buNone/>
+            </a:pPr>
+            <a:r>
+              <a:rPr lang="en-US" sz="1300" b="1" dirty="0">
+                <a:solidFill>
+                  <a:srgbClr val="9D174D"/>
+                </a:solidFill>
+                <a:latin typeface="Trebuchet MS" pitchFamily="34" charset="0"/>
+                <a:ea typeface="Trebuchet MS" pitchFamily="34" charset="-122"/>
+                <a:cs typeface="Trebuchet MS" pitchFamily="34" charset="-120"/>
+              </a:rPr>
+              <a:t>ly</a:t>
+            </a:r>
+            <a:endParaRPr lang="en-US" sz="1300" dirty="0"/>
+          </a:p>
+        </p:txBody>
+      </p:sp>
+      <p:sp>
+        <p:nvSpPr>
+          <p:cNvPr id="24" name="Text 22"/>
+          <p:cNvSpPr/>
+          <p:nvPr/>
+        </p:nvSpPr>
+        <p:spPr>
+          <a:xfrm>
+            <a:off x="6519672" y="2569464"/>
+            <a:ext cx="1828800" cy="201168"/>
+          </a:xfrm>
+          <a:prstGeom prst="rect">
+            <a:avLst/>
+          </a:prstGeom>
+          <a:noFill/>
+          <a:ln/>
+        </p:spPr>
+        <p:txBody>
+          <a:bodyPr wrap="square" lIns="0" tIns="0" rIns="0" bIns="0" rtlCol="0" anchor="t"/>
+          <a:lstStyle/>
+          <a:p>
+            <a:pPr algn="ctr" indent="0" marL="0">
+              <a:buNone/>
+            </a:pPr>
+            <a:r>
+              <a:rPr lang="en-US" sz="850" dirty="0">
+                <a:solidFill>
+                  <a:srgbClr val="475569"/>
+                </a:solidFill>
+                <a:latin typeface="Calibri" pitchFamily="34" charset="0"/>
+                <a:ea typeface="Calibri" pitchFamily="34" charset="-122"/>
+                <a:cs typeface="Calibri" pitchFamily="34" charset="-120"/>
+              </a:rPr>
+              <a:t>in a way that is</a:t>
+            </a:r>
+            <a:endParaRPr lang="en-US" sz="850" dirty="0"/>
+          </a:p>
+        </p:txBody>
+      </p:sp>
+      <p:sp>
+        <p:nvSpPr>
+          <p:cNvPr id="25" name="Shape 23"/>
           <p:cNvSpPr/>
           <p:nvPr/>
         </p:nvSpPr>
@@ -30376,7 +30685,7 @@
       </p:sp>
       <p:sp>
         <p:nvSpPr>
-          <p:cNvPr id="23" name="Text 21"/>
+          <p:cNvPr id="26" name="Text 24"/>
           <p:cNvSpPr/>
           <p:nvPr/>
         </p:nvSpPr>
@@ -30415,7 +30724,7 @@
       </p:sp>
       <p:sp>
         <p:nvSpPr>
-          <p:cNvPr id="24" name="Shape 22"/>
+          <p:cNvPr id="27" name="Shape 25"/>
           <p:cNvSpPr/>
           <p:nvPr/>
         </p:nvSpPr>
@@ -30442,13 +30751,13 @@
       </p:sp>
       <p:sp>
         <p:nvSpPr>
-          <p:cNvPr id="25" name="Shape 23"/>
-          <p:cNvSpPr/>
-          <p:nvPr/>
-        </p:nvSpPr>
-        <p:spPr>
-          <a:xfrm>
-            <a:off x="2999232" y="3364992"/>
+          <p:cNvPr id="28" name="Shape 26"/>
+          <p:cNvSpPr/>
+          <p:nvPr/>
+        </p:nvSpPr>
+        <p:spPr>
+          <a:xfrm>
+            <a:off x="2313432" y="3364992"/>
             <a:ext cx="1645920" cy="475488"/>
           </a:xfrm>
           <a:prstGeom prst="rect">
@@ -30469,13 +30778,13 @@
       </p:sp>
       <p:sp>
         <p:nvSpPr>
-          <p:cNvPr id="26" name="Text 24"/>
-          <p:cNvSpPr/>
-          <p:nvPr/>
-        </p:nvSpPr>
-        <p:spPr>
-          <a:xfrm>
-            <a:off x="2999232" y="3364992"/>
+          <p:cNvPr id="29" name="Text 27"/>
+          <p:cNvSpPr/>
+          <p:nvPr/>
+        </p:nvSpPr>
+        <p:spPr>
+          <a:xfrm>
+            <a:off x="2313432" y="3364992"/>
             <a:ext cx="1645920" cy="475488"/>
           </a:xfrm>
           <a:prstGeom prst="rect">
@@ -30508,14 +30817,14 @@
       </p:sp>
       <p:sp>
         <p:nvSpPr>
-          <p:cNvPr id="27" name="Text 25"/>
-          <p:cNvSpPr/>
-          <p:nvPr/>
-        </p:nvSpPr>
-        <p:spPr>
-          <a:xfrm>
-            <a:off x="4645152" y="3364992"/>
-            <a:ext cx="1097280" cy="475488"/>
+          <p:cNvPr id="30" name="Text 28"/>
+          <p:cNvSpPr/>
+          <p:nvPr/>
+        </p:nvSpPr>
+        <p:spPr>
+          <a:xfrm>
+            <a:off x="3959352" y="3364992"/>
+            <a:ext cx="411480" cy="475488"/>
           </a:xfrm>
           <a:prstGeom prst="rect">
             <a:avLst/>
@@ -30547,13 +30856,13 @@
       </p:sp>
       <p:sp>
         <p:nvSpPr>
-          <p:cNvPr id="28" name="Shape 26"/>
-          <p:cNvSpPr/>
-          <p:nvPr/>
-        </p:nvSpPr>
-        <p:spPr>
-          <a:xfrm>
-            <a:off x="5742432" y="3364992"/>
+          <p:cNvPr id="31" name="Shape 29"/>
+          <p:cNvSpPr/>
+          <p:nvPr/>
+        </p:nvSpPr>
+        <p:spPr>
+          <a:xfrm>
+            <a:off x="4370832" y="3364992"/>
             <a:ext cx="1645920" cy="475488"/>
           </a:xfrm>
           <a:prstGeom prst="rect">
@@ -30574,13 +30883,13 @@
       </p:sp>
       <p:sp>
         <p:nvSpPr>
-          <p:cNvPr id="29" name="Text 27"/>
-          <p:cNvSpPr/>
-          <p:nvPr/>
-        </p:nvSpPr>
-        <p:spPr>
-          <a:xfrm>
-            <a:off x="5742432" y="3364992"/>
+          <p:cNvPr id="32" name="Text 30"/>
+          <p:cNvSpPr/>
+          <p:nvPr/>
+        </p:nvSpPr>
+        <p:spPr>
+          <a:xfrm>
+            <a:off x="4370832" y="3364992"/>
             <a:ext cx="1645920" cy="475488"/>
           </a:xfrm>
           <a:prstGeom prst="rect">
@@ -30605,7 +30914,7 @@
                 <a:ea typeface="Trebuchet MS" pitchFamily="34" charset="-122"/>
                 <a:cs typeface="Trebuchet MS" pitchFamily="34" charset="-120"/>
               </a:rPr>
-              <a:t>ing</a:t>
+              <a:t>ful</a:t>
             </a:r>
             <a:endParaRPr lang="en-US" sz="1400" dirty="0"/>
           </a:p>
@@ -30613,7 +30922,112 @@
       </p:sp>
       <p:sp>
         <p:nvSpPr>
-          <p:cNvPr id="30" name="Shape 28"/>
+          <p:cNvPr id="33" name="Text 31"/>
+          <p:cNvSpPr/>
+          <p:nvPr/>
+        </p:nvSpPr>
+        <p:spPr>
+          <a:xfrm>
+            <a:off x="6016752" y="3364992"/>
+            <a:ext cx="411480" cy="475488"/>
+          </a:xfrm>
+          <a:prstGeom prst="rect">
+            <a:avLst/>
+          </a:prstGeom>
+          <a:noFill/>
+          <a:ln/>
+        </p:spPr>
+        <p:txBody>
+          <a:bodyPr wrap="square" lIns="0" tIns="0" rIns="0" bIns="0" rtlCol="0" anchor="ctr"/>
+          <a:lstStyle/>
+          <a:p>
+            <a:pPr algn="ctr" indent="0" marL="0">
+              <a:buNone/>
+            </a:pPr>
+            <a:r>
+              <a:rPr lang="en-US" sz="1600" b="1" dirty="0">
+                <a:solidFill>
+                  <a:srgbClr val="0D9488"/>
+                </a:solidFill>
+                <a:latin typeface="Trebuchet MS" pitchFamily="34" charset="0"/>
+                <a:ea typeface="Trebuchet MS" pitchFamily="34" charset="-122"/>
+                <a:cs typeface="Trebuchet MS" pitchFamily="34" charset="-120"/>
+              </a:rPr>
+              <a:t>·</a:t>
+            </a:r>
+            <a:endParaRPr lang="en-US" sz="1600" dirty="0"/>
+          </a:p>
+        </p:txBody>
+      </p:sp>
+      <p:sp>
+        <p:nvSpPr>
+          <p:cNvPr id="34" name="Shape 32"/>
+          <p:cNvSpPr/>
+          <p:nvPr/>
+        </p:nvSpPr>
+        <p:spPr>
+          <a:xfrm>
+            <a:off x="6428232" y="3364992"/>
+            <a:ext cx="1645920" cy="475488"/>
+          </a:xfrm>
+          <a:prstGeom prst="rect">
+            <a:avLst>
+              <a:gd name="adj" fmla="val 9615"/>
+            </a:avLst>
+          </a:prstGeom>
+          <a:solidFill>
+            <a:srgbClr val="FFFFFF"/>
+          </a:solidFill>
+          <a:ln w="12700">
+            <a:solidFill>
+              <a:srgbClr val="0D9488"/>
+            </a:solidFill>
+            <a:prstDash val="solid"/>
+          </a:ln>
+        </p:spPr>
+      </p:sp>
+      <p:sp>
+        <p:nvSpPr>
+          <p:cNvPr id="35" name="Text 33"/>
+          <p:cNvSpPr/>
+          <p:nvPr/>
+        </p:nvSpPr>
+        <p:spPr>
+          <a:xfrm>
+            <a:off x="6428232" y="3364992"/>
+            <a:ext cx="1645920" cy="475488"/>
+          </a:xfrm>
+          <a:prstGeom prst="rect">
+            <a:avLst/>
+          </a:prstGeom>
+          <a:noFill/>
+          <a:ln/>
+        </p:spPr>
+        <p:txBody>
+          <a:bodyPr wrap="square" lIns="0" tIns="0" rIns="0" bIns="0" rtlCol="0" anchor="ctr"/>
+          <a:lstStyle/>
+          <a:p>
+            <a:pPr algn="ctr" indent="0" marL="0">
+              <a:buNone/>
+            </a:pPr>
+            <a:r>
+              <a:rPr lang="en-US" sz="1400" b="1" dirty="0">
+                <a:solidFill>
+                  <a:srgbClr val="0D9488"/>
+                </a:solidFill>
+                <a:latin typeface="Trebuchet MS" pitchFamily="34" charset="0"/>
+                <a:ea typeface="Trebuchet MS" pitchFamily="34" charset="-122"/>
+                <a:cs typeface="Trebuchet MS" pitchFamily="34" charset="-120"/>
+              </a:rPr>
+              <a:t>ly</a:t>
+            </a:r>
+            <a:endParaRPr lang="en-US" sz="1400" dirty="0"/>
+          </a:p>
+        </p:txBody>
+      </p:sp>
+      <p:sp>
+        <p:nvSpPr>
+          <p:cNvPr id="36" name="Shape 34"/>
           <p:cNvSpPr/>
           <p:nvPr/>
         </p:nvSpPr>
@@ -30640,7 +31054,7 @@
       </p:sp>
       <p:sp>
         <p:nvSpPr>
-          <p:cNvPr id="31" name="Text 29"/>
+          <p:cNvPr id="37" name="Text 35"/>
           <p:cNvSpPr/>
           <p:nvPr/>
         </p:nvSpPr>
@@ -30679,7 +31093,7 @@
       </p:sp>
       <p:sp>
         <p:nvSpPr>
-          <p:cNvPr id="32" name="Shape 30"/>
+          <p:cNvPr id="38" name="Shape 36"/>
           <p:cNvSpPr/>
           <p:nvPr/>
         </p:nvSpPr>
@@ -30706,13 +31120,13 @@
       </p:sp>
       <p:sp>
         <p:nvSpPr>
-          <p:cNvPr id="33" name="Shape 31"/>
-          <p:cNvSpPr/>
-          <p:nvPr/>
-        </p:nvSpPr>
-        <p:spPr>
-          <a:xfrm>
-            <a:off x="2670048" y="4169664"/>
+          <p:cNvPr id="39" name="Shape 37"/>
+          <p:cNvSpPr/>
+          <p:nvPr/>
+        </p:nvSpPr>
+        <p:spPr>
+          <a:xfrm>
+            <a:off x="2124837" y="4169664"/>
             <a:ext cx="685800" cy="475488"/>
           </a:xfrm>
           <a:prstGeom prst="rect">
@@ -30733,13 +31147,13 @@
       </p:sp>
       <p:sp>
         <p:nvSpPr>
-          <p:cNvPr id="34" name="Text 32"/>
-          <p:cNvSpPr/>
-          <p:nvPr/>
-        </p:nvSpPr>
-        <p:spPr>
-          <a:xfrm>
-            <a:off x="2670048" y="4169664"/>
+          <p:cNvPr id="40" name="Text 38"/>
+          <p:cNvSpPr/>
+          <p:nvPr/>
+        </p:nvSpPr>
+        <p:spPr>
+          <a:xfrm>
+            <a:off x="2124837" y="4169664"/>
             <a:ext cx="685800" cy="475488"/>
           </a:xfrm>
           <a:prstGeom prst="rect">
@@ -30772,13 +31186,13 @@
       </p:sp>
       <p:sp>
         <p:nvSpPr>
-          <p:cNvPr id="35" name="Shape 33"/>
-          <p:cNvSpPr/>
-          <p:nvPr/>
-        </p:nvSpPr>
-        <p:spPr>
-          <a:xfrm>
-            <a:off x="4123944" y="4169664"/>
+          <p:cNvPr id="41" name="Shape 39"/>
+          <p:cNvSpPr/>
+          <p:nvPr/>
+        </p:nvSpPr>
+        <p:spPr>
+          <a:xfrm>
+            <a:off x="3033522" y="4169664"/>
             <a:ext cx="685800" cy="475488"/>
           </a:xfrm>
           <a:prstGeom prst="rect">
@@ -30799,13 +31213,13 @@
       </p:sp>
       <p:sp>
         <p:nvSpPr>
-          <p:cNvPr id="36" name="Text 34"/>
-          <p:cNvSpPr/>
-          <p:nvPr/>
-        </p:nvSpPr>
-        <p:spPr>
-          <a:xfrm>
-            <a:off x="4123944" y="4169664"/>
+          <p:cNvPr id="42" name="Text 40"/>
+          <p:cNvSpPr/>
+          <p:nvPr/>
+        </p:nvSpPr>
+        <p:spPr>
+          <a:xfrm>
+            <a:off x="3033522" y="4169664"/>
             <a:ext cx="685800" cy="475488"/>
           </a:xfrm>
           <a:prstGeom prst="rect">
@@ -30838,13 +31252,13 @@
       </p:sp>
       <p:sp>
         <p:nvSpPr>
-          <p:cNvPr id="37" name="Shape 35"/>
-          <p:cNvSpPr/>
-          <p:nvPr/>
-        </p:nvSpPr>
-        <p:spPr>
-          <a:xfrm>
-            <a:off x="5577840" y="4169664"/>
+          <p:cNvPr id="43" name="Shape 41"/>
+          <p:cNvSpPr/>
+          <p:nvPr/>
+        </p:nvSpPr>
+        <p:spPr>
+          <a:xfrm>
+            <a:off x="3942207" y="4169664"/>
             <a:ext cx="685800" cy="475488"/>
           </a:xfrm>
           <a:prstGeom prst="rect">
@@ -30865,13 +31279,13 @@
       </p:sp>
       <p:sp>
         <p:nvSpPr>
-          <p:cNvPr id="38" name="Text 36"/>
-          <p:cNvSpPr/>
-          <p:nvPr/>
-        </p:nvSpPr>
-        <p:spPr>
-          <a:xfrm>
-            <a:off x="5577840" y="4169664"/>
+          <p:cNvPr id="44" name="Text 42"/>
+          <p:cNvSpPr/>
+          <p:nvPr/>
+        </p:nvSpPr>
+        <p:spPr>
+          <a:xfrm>
+            <a:off x="3942207" y="4169664"/>
             <a:ext cx="685800" cy="475488"/>
           </a:xfrm>
           <a:prstGeom prst="rect">
@@ -30896,7 +31310,7 @@
                 <a:ea typeface="Trebuchet MS" pitchFamily="34" charset="-122"/>
                 <a:cs typeface="Trebuchet MS" pitchFamily="34" charset="-120"/>
               </a:rPr>
-              <a:t>i</a:t>
+              <a:t>f</a:t>
             </a:r>
             <a:endParaRPr lang="en-US" sz="900" dirty="0"/>
           </a:p>
@@ -30904,13 +31318,13 @@
       </p:sp>
       <p:sp>
         <p:nvSpPr>
-          <p:cNvPr id="39" name="Shape 37"/>
-          <p:cNvSpPr/>
-          <p:nvPr/>
-        </p:nvSpPr>
-        <p:spPr>
-          <a:xfrm>
-            <a:off x="7031736" y="4169664"/>
+          <p:cNvPr id="45" name="Shape 43"/>
+          <p:cNvSpPr/>
+          <p:nvPr/>
+        </p:nvSpPr>
+        <p:spPr>
+          <a:xfrm>
+            <a:off x="4850892" y="4169664"/>
             <a:ext cx="685800" cy="475488"/>
           </a:xfrm>
           <a:prstGeom prst="rect">
@@ -30931,13 +31345,13 @@
       </p:sp>
       <p:sp>
         <p:nvSpPr>
-          <p:cNvPr id="40" name="Text 38"/>
-          <p:cNvSpPr/>
-          <p:nvPr/>
-        </p:nvSpPr>
-        <p:spPr>
-          <a:xfrm>
-            <a:off x="7031736" y="4169664"/>
+          <p:cNvPr id="46" name="Text 44"/>
+          <p:cNvSpPr/>
+          <p:nvPr/>
+        </p:nvSpPr>
+        <p:spPr>
+          <a:xfrm>
+            <a:off x="4850892" y="4169664"/>
             <a:ext cx="685800" cy="475488"/>
           </a:xfrm>
           <a:prstGeom prst="rect">
@@ -30962,7 +31376,205 @@
                 <a:ea typeface="Trebuchet MS" pitchFamily="34" charset="-122"/>
                 <a:cs typeface="Trebuchet MS" pitchFamily="34" charset="-120"/>
               </a:rPr>
-              <a:t>ng</a:t>
+              <a:t>u</a:t>
+            </a:r>
+            <a:endParaRPr lang="en-US" sz="900" dirty="0"/>
+          </a:p>
+        </p:txBody>
+      </p:sp>
+      <p:sp>
+        <p:nvSpPr>
+          <p:cNvPr id="47" name="Shape 45"/>
+          <p:cNvSpPr/>
+          <p:nvPr/>
+        </p:nvSpPr>
+        <p:spPr>
+          <a:xfrm>
+            <a:off x="5759577" y="4169664"/>
+            <a:ext cx="685800" cy="475488"/>
+          </a:xfrm>
+          <a:prstGeom prst="rect">
+            <a:avLst>
+              <a:gd name="adj" fmla="val 7692"/>
+            </a:avLst>
+          </a:prstGeom>
+          <a:solidFill>
+            <a:srgbClr val="FFFFFF"/>
+          </a:solidFill>
+          <a:ln w="12700">
+            <a:solidFill>
+              <a:srgbClr val="DB2777"/>
+            </a:solidFill>
+            <a:prstDash val="solid"/>
+          </a:ln>
+        </p:spPr>
+      </p:sp>
+      <p:sp>
+        <p:nvSpPr>
+          <p:cNvPr id="48" name="Text 46"/>
+          <p:cNvSpPr/>
+          <p:nvPr/>
+        </p:nvSpPr>
+        <p:spPr>
+          <a:xfrm>
+            <a:off x="5759577" y="4169664"/>
+            <a:ext cx="685800" cy="475488"/>
+          </a:xfrm>
+          <a:prstGeom prst="rect">
+            <a:avLst/>
+          </a:prstGeom>
+          <a:noFill/>
+          <a:ln/>
+        </p:spPr>
+        <p:txBody>
+          <a:bodyPr wrap="square" lIns="0" tIns="0" rIns="0" bIns="0" rtlCol="0" anchor="ctr"/>
+          <a:lstStyle/>
+          <a:p>
+            <a:pPr algn="ctr" indent="0" marL="0">
+              <a:buNone/>
+            </a:pPr>
+            <a:r>
+              <a:rPr lang="en-US" sz="900" b="1" dirty="0">
+                <a:solidFill>
+                  <a:srgbClr val="9D174D"/>
+                </a:solidFill>
+                <a:latin typeface="Trebuchet MS" pitchFamily="34" charset="0"/>
+                <a:ea typeface="Trebuchet MS" pitchFamily="34" charset="-122"/>
+                <a:cs typeface="Trebuchet MS" pitchFamily="34" charset="-120"/>
+              </a:rPr>
+              <a:t>l</a:t>
+            </a:r>
+            <a:endParaRPr lang="en-US" sz="900" dirty="0"/>
+          </a:p>
+        </p:txBody>
+      </p:sp>
+      <p:sp>
+        <p:nvSpPr>
+          <p:cNvPr id="49" name="Shape 47"/>
+          <p:cNvSpPr/>
+          <p:nvPr/>
+        </p:nvSpPr>
+        <p:spPr>
+          <a:xfrm>
+            <a:off x="6668262" y="4169664"/>
+            <a:ext cx="685800" cy="475488"/>
+          </a:xfrm>
+          <a:prstGeom prst="rect">
+            <a:avLst>
+              <a:gd name="adj" fmla="val 7692"/>
+            </a:avLst>
+          </a:prstGeom>
+          <a:solidFill>
+            <a:srgbClr val="FFFFFF"/>
+          </a:solidFill>
+          <a:ln w="12700">
+            <a:solidFill>
+              <a:srgbClr val="DB2777"/>
+            </a:solidFill>
+            <a:prstDash val="solid"/>
+          </a:ln>
+        </p:spPr>
+      </p:sp>
+      <p:sp>
+        <p:nvSpPr>
+          <p:cNvPr id="50" name="Text 48"/>
+          <p:cNvSpPr/>
+          <p:nvPr/>
+        </p:nvSpPr>
+        <p:spPr>
+          <a:xfrm>
+            <a:off x="6668262" y="4169664"/>
+            <a:ext cx="685800" cy="475488"/>
+          </a:xfrm>
+          <a:prstGeom prst="rect">
+            <a:avLst/>
+          </a:prstGeom>
+          <a:noFill/>
+          <a:ln/>
+        </p:spPr>
+        <p:txBody>
+          <a:bodyPr wrap="square" lIns="0" tIns="0" rIns="0" bIns="0" rtlCol="0" anchor="ctr"/>
+          <a:lstStyle/>
+          <a:p>
+            <a:pPr algn="ctr" indent="0" marL="0">
+              <a:buNone/>
+            </a:pPr>
+            <a:r>
+              <a:rPr lang="en-US" sz="900" b="1" dirty="0">
+                <a:solidFill>
+                  <a:srgbClr val="9D174D"/>
+                </a:solidFill>
+                <a:latin typeface="Trebuchet MS" pitchFamily="34" charset="0"/>
+                <a:ea typeface="Trebuchet MS" pitchFamily="34" charset="-122"/>
+                <a:cs typeface="Trebuchet MS" pitchFamily="34" charset="-120"/>
+              </a:rPr>
+              <a:t>l</a:t>
+            </a:r>
+            <a:endParaRPr lang="en-US" sz="900" dirty="0"/>
+          </a:p>
+        </p:txBody>
+      </p:sp>
+      <p:sp>
+        <p:nvSpPr>
+          <p:cNvPr id="51" name="Shape 49"/>
+          <p:cNvSpPr/>
+          <p:nvPr/>
+        </p:nvSpPr>
+        <p:spPr>
+          <a:xfrm>
+            <a:off x="7576947" y="4169664"/>
+            <a:ext cx="685800" cy="475488"/>
+          </a:xfrm>
+          <a:prstGeom prst="rect">
+            <a:avLst>
+              <a:gd name="adj" fmla="val 7692"/>
+            </a:avLst>
+          </a:prstGeom>
+          <a:solidFill>
+            <a:srgbClr val="FFFFFF"/>
+          </a:solidFill>
+          <a:ln w="12700">
+            <a:solidFill>
+              <a:srgbClr val="DB2777"/>
+            </a:solidFill>
+            <a:prstDash val="solid"/>
+          </a:ln>
+        </p:spPr>
+      </p:sp>
+      <p:sp>
+        <p:nvSpPr>
+          <p:cNvPr id="52" name="Text 50"/>
+          <p:cNvSpPr/>
+          <p:nvPr/>
+        </p:nvSpPr>
+        <p:spPr>
+          <a:xfrm>
+            <a:off x="7576947" y="4169664"/>
+            <a:ext cx="685800" cy="475488"/>
+          </a:xfrm>
+          <a:prstGeom prst="rect">
+            <a:avLst/>
+          </a:prstGeom>
+          <a:noFill/>
+          <a:ln/>
+        </p:spPr>
+        <p:txBody>
+          <a:bodyPr wrap="square" lIns="0" tIns="0" rIns="0" bIns="0" rtlCol="0" anchor="ctr"/>
+          <a:lstStyle/>
+          <a:p>
+            <a:pPr algn="ctr" indent="0" marL="0">
+              <a:buNone/>
+            </a:pPr>
+            <a:r>
+              <a:rPr lang="en-US" sz="900" b="1" dirty="0">
+                <a:solidFill>
+                  <a:srgbClr val="9D174D"/>
+                </a:solidFill>
+                <a:latin typeface="Trebuchet MS" pitchFamily="34" charset="0"/>
+                <a:ea typeface="Trebuchet MS" pitchFamily="34" charset="-122"/>
+                <a:cs typeface="Trebuchet MS" pitchFamily="34" charset="-120"/>
+              </a:rPr>
+              <a:t>y</a:t>
             </a:r>
             <a:endParaRPr lang="en-US" sz="900" dirty="0"/>
           </a:p>
@@ -33069,7 +33681,7 @@
                 <a:ea typeface="Trebuchet MS" pitchFamily="34" charset="-122"/>
                 <a:cs typeface="Trebuchet MS" pitchFamily="34" charset="-120"/>
               </a:rPr>
-              <a:t>god-</a:t>
+              <a:t>out-</a:t>
             </a:r>
             <a:endParaRPr lang="en-US" sz="1300" dirty="0"/>
           </a:p>
@@ -33375,7 +33987,7 @@
                 <a:ea typeface="Trebuchet MS" pitchFamily="34" charset="-122"/>
                 <a:cs typeface="Trebuchet MS" pitchFamily="34" charset="-120"/>
               </a:rPr>
-              <a:t>out-</a:t>
+              <a:t>re-</a:t>
             </a:r>
             <a:endParaRPr lang="en-US" sz="1300" dirty="0"/>
           </a:p>
@@ -33701,7 +34313,7 @@
                 <a:ea typeface="Trebuchet MS" pitchFamily="34" charset="-122"/>
                 <a:cs typeface="Trebuchet MS" pitchFamily="34" charset="-120"/>
               </a:rPr>
-              <a:t>fearfully</a:t>
+              <a:t>feared</a:t>
             </a:r>
             <a:endParaRPr lang="en-US" sz="1200" dirty="0"/>
           </a:p>
@@ -33833,7 +34445,7 @@
                 <a:ea typeface="Trebuchet MS" pitchFamily="34" charset="-122"/>
                 <a:cs typeface="Trebuchet MS" pitchFamily="34" charset="-120"/>
               </a:rPr>
-              <a:t>feared</a:t>
+              <a:t>fearsome</a:t>
             </a:r>
             <a:endParaRPr lang="en-US" sz="1200" dirty="0"/>
           </a:p>
@@ -33899,7 +34511,7 @@
                 <a:ea typeface="Trebuchet MS" pitchFamily="34" charset="-122"/>
                 <a:cs typeface="Trebuchet MS" pitchFamily="34" charset="-120"/>
               </a:rPr>
-              <a:t>fearsome</a:t>
+              <a:t>unfeared</a:t>
             </a:r>
             <a:endParaRPr lang="en-US" sz="1200" dirty="0"/>
           </a:p>
@@ -33965,7 +34577,7 @@
                 <a:ea typeface="Trebuchet MS" pitchFamily="34" charset="-122"/>
                 <a:cs typeface="Trebuchet MS" pitchFamily="34" charset="-120"/>
               </a:rPr>
-              <a:t>unfearing</a:t>
+              <a:t>fearfully</a:t>
             </a:r>
             <a:endParaRPr lang="en-US" sz="1200" dirty="0"/>
           </a:p>
@@ -35219,7 +35831,7 @@
                 <a:ea typeface="Calibri" pitchFamily="34" charset="-122"/>
                 <a:cs typeface="Calibri" pitchFamily="34" charset="-120"/>
               </a:rPr>
-              <a:t>1.  The word 'fearless' means without any fear.</a:t>
+              <a:t>1.  'Fearless' means someone who is very easily frightened.</a:t>
             </a:r>
             <a:endParaRPr lang="en-US" sz="1300" dirty="0"/>
           </a:p>
@@ -35242,11 +35854,11 @@
             </a:avLst>
           </a:prstGeom>
           <a:solidFill>
-            <a:srgbClr val="DCFCE7"/>
-          </a:solidFill>
-          <a:ln w="12700">
-            <a:solidFill>
-              <a:srgbClr val="16A34A"/>
+            <a:srgbClr val="FEE2E2"/>
+          </a:solidFill>
+          <a:ln w="12700">
+            <a:solidFill>
+              <a:srgbClr val="DC2626"/>
             </a:solidFill>
             <a:prstDash val="solid"/>
           </a:ln>
@@ -35279,13 +35891,13 @@
             <a:r>
               <a:rPr lang="en-US" sz="1100" b="1" dirty="0">
                 <a:solidFill>
-                  <a:srgbClr val="16A34A"/>
+                  <a:srgbClr val="DC2626"/>
                 </a:solidFill>
                 <a:latin typeface="Trebuchet MS" pitchFamily="34" charset="0"/>
                 <a:ea typeface="Trebuchet MS" pitchFamily="34" charset="-122"/>
                 <a:cs typeface="Trebuchet MS" pitchFamily="34" charset="-120"/>
               </a:rPr>
-              <a:t>TRUE</a:t>
+              <a:t>FALSE</a:t>
             </a:r>
             <a:endParaRPr lang="en-US" sz="1100" dirty="0"/>
           </a:p>
@@ -35358,7 +35970,7 @@
                 <a:ea typeface="Calibri" pitchFamily="34" charset="-122"/>
                 <a:cs typeface="Calibri" pitchFamily="34" charset="-120"/>
               </a:rPr>
-              <a:t>2.  The suffix '-ful' means without or lacking something.</a:t>
+              <a:t>2.  The word 'fearless' contains the root 'fear' and the suffix '-less'.</a:t>
             </a:r>
             <a:endParaRPr lang="en-US" sz="1300" dirty="0"/>
           </a:p>
@@ -35381,11 +35993,11 @@
             </a:avLst>
           </a:prstGeom>
           <a:solidFill>
-            <a:srgbClr val="FEE2E2"/>
-          </a:solidFill>
-          <a:ln w="12700">
-            <a:solidFill>
-              <a:srgbClr val="DC2626"/>
+            <a:srgbClr val="DCFCE7"/>
+          </a:solidFill>
+          <a:ln w="12700">
+            <a:solidFill>
+              <a:srgbClr val="16A34A"/>
             </a:solidFill>
             <a:prstDash val="solid"/>
           </a:ln>
@@ -35418,13 +36030,13 @@
             <a:r>
               <a:rPr lang="en-US" sz="1100" b="1" dirty="0">
                 <a:solidFill>
-                  <a:srgbClr val="DC2626"/>
+                  <a:srgbClr val="16A34A"/>
                 </a:solidFill>
                 <a:latin typeface="Trebuchet MS" pitchFamily="34" charset="0"/>
                 <a:ea typeface="Trebuchet MS" pitchFamily="34" charset="-122"/>
                 <a:cs typeface="Trebuchet MS" pitchFamily="34" charset="-120"/>
               </a:rPr>
-              <a:t>FALSE</a:t>
+              <a:t>TRUE</a:t>
             </a:r>
             <a:endParaRPr lang="en-US" sz="1100" dirty="0"/>
           </a:p>
@@ -35497,7 +36109,7 @@
                 <a:ea typeface="Calibri" pitchFamily="34" charset="-122"/>
                 <a:cs typeface="Calibri" pitchFamily="34" charset="-120"/>
               </a:rPr>
-              <a:t>3.  The word 'fearsome' can describe a powerful animal that frightens people.</a:t>
+              <a:t>3.  'Fearsome' means something that causes great fright or alarm.</a:t>
             </a:r>
             <a:endParaRPr lang="en-US" sz="1300" dirty="0"/>
           </a:p>
@@ -35636,7 +36248,7 @@
                 <a:ea typeface="Calibri" pitchFamily="34" charset="-122"/>
                 <a:cs typeface="Calibri" pitchFamily="34" charset="-120"/>
               </a:rPr>
-              <a:t>4.  A fearless person shows great bravery and courage.</a:t>
+              <a:t>4.  Adding '-ful' to 'fear' creates the word 'fearful', meaning full of fear.</a:t>
             </a:r>
             <a:endParaRPr lang="en-US" sz="1300" dirty="0"/>
           </a:p>
@@ -35775,7 +36387,7 @@
                 <a:ea typeface="Calibri" pitchFamily="34" charset="-122"/>
                 <a:cs typeface="Calibri" pitchFamily="34" charset="-120"/>
               </a:rPr>
-              <a:t>5.  The root 'fear' comes from the Greek word for love.</a:t>
+              <a:t>5.  The root 'fear' comes from ancient Greek.</a:t>
             </a:r>
             <a:endParaRPr lang="en-US" sz="1300" dirty="0"/>
           </a:p>
@@ -36309,7 +36921,7 @@
                 <a:ea typeface="Calibri" pitchFamily="34" charset="-122"/>
                 <a:cs typeface="Calibri" pitchFamily="34" charset="-120"/>
               </a:rPr>
-              <a:t>Origin: Latin: periculum</a:t>
+              <a:t>Origin: Latin: feare</a:t>
             </a:r>
             <a:endParaRPr lang="en-US" sz="1100" dirty="0"/>
           </a:p>
@@ -36546,7 +37158,7 @@
                 <a:ea typeface="Trebuchet MS" pitchFamily="34" charset="-122"/>
                 <a:cs typeface="Trebuchet MS" pitchFamily="34" charset="-120"/>
               </a:rPr>
-              <a:t>fearfully</a:t>
+              <a:t>feared</a:t>
             </a:r>
             <a:endParaRPr lang="en-US" sz="1300" dirty="0"/>
           </a:p>
@@ -36678,7 +37290,7 @@
                 <a:ea typeface="Trebuchet MS" pitchFamily="34" charset="-122"/>
                 <a:cs typeface="Trebuchet MS" pitchFamily="34" charset="-120"/>
               </a:rPr>
-              <a:t>feared</a:t>
+              <a:t>fearsome</a:t>
             </a:r>
             <a:endParaRPr lang="en-US" sz="1300" dirty="0"/>
           </a:p>
@@ -36744,7 +37356,7 @@
                 <a:ea typeface="Trebuchet MS" pitchFamily="34" charset="-122"/>
                 <a:cs typeface="Trebuchet MS" pitchFamily="34" charset="-120"/>
               </a:rPr>
-              <a:t>fearsome</a:t>
+              <a:t>unfeared</a:t>
             </a:r>
             <a:endParaRPr lang="en-US" sz="1300" dirty="0"/>
           </a:p>
@@ -36810,7 +37422,7 @@
                 <a:ea typeface="Trebuchet MS" pitchFamily="34" charset="-122"/>
                 <a:cs typeface="Trebuchet MS" pitchFamily="34" charset="-120"/>
               </a:rPr>
-              <a:t>unfearing</a:t>
+              <a:t>fearfully</a:t>
             </a:r>
             <a:endParaRPr lang="en-US" sz="1300" dirty="0"/>
           </a:p>
@@ -37748,7 +38360,7 @@
                 <a:ea typeface="Trebuchet MS" pitchFamily="34" charset="-122"/>
                 <a:cs typeface="Trebuchet MS" pitchFamily="34" charset="-120"/>
               </a:rPr>
-              <a:t>god-</a:t>
+              <a:t>out-</a:t>
             </a:r>
             <a:endParaRPr lang="en-US" sz="1300" dirty="0"/>
           </a:p>
@@ -38054,7 +38666,7 @@
                 <a:ea typeface="Trebuchet MS" pitchFamily="34" charset="-122"/>
                 <a:cs typeface="Trebuchet MS" pitchFamily="34" charset="-120"/>
               </a:rPr>
-              <a:t>out-</a:t>
+              <a:t>re-</a:t>
             </a:r>
             <a:endParaRPr lang="en-US" sz="1300" dirty="0"/>
           </a:p>
@@ -39193,7 +39805,7 @@
                 <a:ea typeface="Calibri" pitchFamily="34" charset="-122"/>
                 <a:cs typeface="Calibri" pitchFamily="34" charset="-120"/>
               </a:rPr>
-              <a:t>Feeling afraid of something that might happen.</a:t>
+              <a:t>Feeling scared about something right now.</a:t>
             </a:r>
             <a:endParaRPr lang="en-US" sz="1200" dirty="0"/>
           </a:p>
@@ -39266,7 +39878,7 @@
                 <a:ea typeface="Trebuchet MS" pitchFamily="34" charset="-122"/>
                 <a:cs typeface="Trebuchet MS" pitchFamily="34" charset="-120"/>
               </a:rPr>
-              <a:t>fearfully</a:t>
+              <a:t>feared</a:t>
             </a:r>
             <a:endParaRPr lang="en-US" sz="1200" dirty="0"/>
           </a:p>
@@ -39332,7 +39944,7 @@
                 <a:ea typeface="Calibri" pitchFamily="34" charset="-122"/>
                 <a:cs typeface="Calibri" pitchFamily="34" charset="-120"/>
               </a:rPr>
-              <a:t>In a way that shows you are very scared or nervous.</a:t>
+              <a:t>Was scared of something or someone.</a:t>
             </a:r>
             <a:endParaRPr lang="en-US" sz="1200" dirty="0"/>
           </a:p>
@@ -39471,7 +40083,7 @@
                 <a:ea typeface="Calibri" pitchFamily="34" charset="-122"/>
                 <a:cs typeface="Calibri" pitchFamily="34" charset="-120"/>
               </a:rPr>
-              <a:t>Was scared of something, or was thought of as very scary by others.</a:t>
+              <a:t>Something that looks or seems very frightening.</a:t>
             </a:r>
             <a:endParaRPr lang="en-US" sz="1200" dirty="0"/>
           </a:p>
@@ -39544,7 +40156,7 @@
                 <a:ea typeface="Trebuchet MS" pitchFamily="34" charset="-122"/>
                 <a:cs typeface="Trebuchet MS" pitchFamily="34" charset="-120"/>
               </a:rPr>
-              <a:t>feared</a:t>
+              <a:t>fearsome</a:t>
             </a:r>
             <a:endParaRPr lang="en-US" sz="1200" dirty="0"/>
           </a:p>
@@ -39610,7 +40222,7 @@
                 <a:ea typeface="Calibri" pitchFamily="34" charset="-122"/>
                 <a:cs typeface="Calibri" pitchFamily="34" charset="-120"/>
               </a:rPr>
-              <a:t>Not showing or feeling any fear; very courageous.</a:t>
+              <a:t>Done in a way that shows you are very scared.</a:t>
             </a:r>
             <a:endParaRPr lang="en-US" sz="1200" dirty="0"/>
           </a:p>
@@ -39683,7 +40295,7 @@
                 <a:ea typeface="Trebuchet MS" pitchFamily="34" charset="-122"/>
                 <a:cs typeface="Trebuchet MS" pitchFamily="34" charset="-120"/>
               </a:rPr>
-              <a:t>fearsome</a:t>
+              <a:t>unfeared</a:t>
             </a:r>
             <a:endParaRPr lang="en-US" sz="1200" dirty="0"/>
           </a:p>
@@ -39749,7 +40361,7 @@
                 <a:ea typeface="Calibri" pitchFamily="34" charset="-122"/>
                 <a:cs typeface="Calibri" pitchFamily="34" charset="-120"/>
               </a:rPr>
-              <a:t>Something so scary or powerful that it makes you frightened.</a:t>
+              <a:t>Not feared or treated as scary by others.</a:t>
             </a:r>
             <a:endParaRPr lang="en-US" sz="1200" dirty="0"/>
           </a:p>
@@ -39822,7 +40434,7 @@
                 <a:ea typeface="Trebuchet MS" pitchFamily="34" charset="-122"/>
                 <a:cs typeface="Trebuchet MS" pitchFamily="34" charset="-120"/>
               </a:rPr>
-              <a:t>unfearing</a:t>
+              <a:t>fearfully</a:t>
             </a:r>
             <a:endParaRPr lang="en-US" sz="1200" dirty="0"/>
           </a:p>
@@ -39888,7 +40500,7 @@
                 <a:ea typeface="Calibri" pitchFamily="34" charset="-122"/>
                 <a:cs typeface="Calibri" pitchFamily="34" charset="-120"/>
               </a:rPr>
-              <a:t>Having no fear at all; very brave and daring.</a:t>
+              <a:t>Having no fear at all; very brave.</a:t>
             </a:r>
             <a:endParaRPr lang="en-US" sz="1200" dirty="0"/>
           </a:p>
@@ -40383,7 +40995,7 @@
                 <a:ea typeface="Calibri" pitchFamily="34" charset="-122"/>
                 <a:cs typeface="Calibri" pitchFamily="34" charset="-120"/>
               </a:rPr>
-              <a:t>The fearless firefighter ran into the burning building to save the trapped kitten.</a:t>
+              <a:t>The fearless firefighter ran into the burning building without hesitating.</a:t>
             </a:r>
             <a:endParaRPr lang="en-US" sz="1500" dirty="0"/>
           </a:p>
@@ -40547,7 +41159,7 @@
                 <a:ea typeface="Calibri" pitchFamily="34" charset="-122"/>
                 <a:cs typeface="Calibri" pitchFamily="34" charset="-120"/>
               </a:rPr>
-              <a:t>Everyone in the village was fearful of the dark storm clouds gathering overhead.</a:t>
+              <a:t>The young child looked fearfully at the large dog barking behind the fence.</a:t>
             </a:r>
             <a:endParaRPr lang="en-US" sz="1500" dirty="0"/>
           </a:p>
@@ -40711,7 +41323,7 @@
                 <a:ea typeface="Calibri" pitchFamily="34" charset="-122"/>
                 <a:cs typeface="Calibri" pitchFamily="34" charset="-120"/>
               </a:rPr>
-              <a:t>The fearsome dragon in the story breathed fire and guarded a mountain of gold.</a:t>
+              <a:t>The fearsome dragon in the story breathed fire and guarded a pile of gold.</a:t>
             </a:r>
             <a:endParaRPr lang="en-US" sz="1500" dirty="0"/>
           </a:p>

--- a/output/wordlabs-fear-3day.pptx
+++ b/output/wordlabs-fear-3day.pptx
@@ -4240,7 +4240,7 @@
                 <a:ea typeface="Calibri" pitchFamily="34" charset="-122"/>
                 <a:cs typeface="Calibri" pitchFamily="34" charset="-120"/>
               </a:rPr>
-              <a:t>"feeling of danger or dread"</a:t>
+              <a:t>"to be afraid of"</a:t>
             </a:r>
             <a:endParaRPr lang="en-US" sz="2200" dirty="0"/>
           </a:p>
@@ -4279,7 +4279,7 @@
                 <a:ea typeface="Calibri" pitchFamily="34" charset="-122"/>
                 <a:cs typeface="Calibri" pitchFamily="34" charset="-120"/>
               </a:rPr>
-              <a:t>Origin: Latin: feare</a:t>
+              <a:t>Origin: Anglo-Saxon (Old English) root</a:t>
             </a:r>
             <a:endParaRPr lang="en-US" sz="1300" dirty="0"/>
           </a:p>
@@ -5288,7 +5288,7 @@
                 <a:ea typeface="Calibri" pitchFamily="34" charset="-122"/>
                 <a:cs typeface="Calibri" pitchFamily="34" charset="-120"/>
               </a:rPr>
-              <a:t>Word Labs  •  wordlabs.app  •  Root: 'fear' = feeling of danger or dread</a:t>
+              <a:t>Word Labs  •  wordlabs.app  •  Root: 'fear' = to be afraid of</a:t>
             </a:r>
             <a:endParaRPr lang="en-US" sz="800" dirty="0"/>
           </a:p>
@@ -5622,7 +5622,7 @@
                 <a:ea typeface="Trebuchet MS" pitchFamily="34" charset="-122"/>
                 <a:cs typeface="Trebuchet MS" pitchFamily="34" charset="-120"/>
               </a:rPr>
-              <a:t>1</a:t>
+              <a:t>0</a:t>
             </a:r>
             <a:pPr algn="ctr" indent="0" marL="0">
               <a:buNone/>
@@ -5928,7 +5928,7 @@
                 <a:ea typeface="Calibri" pitchFamily="34" charset="-122"/>
                 <a:cs typeface="Calibri" pitchFamily="34" charset="-120"/>
               </a:rPr>
-              <a:t>Word Labs  •  wordlabs.app  •  Root: 'fear' = feeling of danger or dread</a:t>
+              <a:t>Word Labs  •  wordlabs.app  •  Root: 'fear' = to be afraid of</a:t>
             </a:r>
             <a:endParaRPr lang="en-US" sz="800" dirty="0"/>
           </a:p>
@@ -6071,7 +6071,7 @@
                 <a:ea typeface="Calibri" pitchFamily="34" charset="-122"/>
                 <a:cs typeface="Calibri" pitchFamily="34" charset="-120"/>
               </a:rPr>
-              <a:t> knight was admired by all, but even he felt </a:t>
+              <a:t> firefighter ran into the burning building. The child </a:t>
             </a:r>
             <a:pPr algn="l" indent="0" marL="0">
               <a:buNone/>
@@ -6088,7 +6088,7 @@
                 <a:ea typeface="Calibri" pitchFamily="34" charset="-122"/>
                 <a:cs typeface="Calibri" pitchFamily="34" charset="-120"/>
               </a:rPr>
-              <a:t>fearful</a:t>
+              <a:t>fearfully</a:t>
             </a:r>
             <a:pPr algn="l" indent="0" marL="0">
               <a:buNone/>
@@ -6102,7 +6102,7 @@
                 <a:ea typeface="Calibri" pitchFamily="34" charset="-122"/>
                 <a:cs typeface="Calibri" pitchFamily="34" charset="-120"/>
               </a:rPr>
-              <a:t> when the storm struck.</a:t>
+              <a:t> peeked around the corner.</a:t>
             </a:r>
             <a:endParaRPr lang="en-US" sz="1800" dirty="0"/>
           </a:p>
@@ -6385,7 +6385,7 @@
                 <a:ea typeface="Trebuchet MS" pitchFamily="34" charset="-122"/>
                 <a:cs typeface="Trebuchet MS" pitchFamily="34" charset="-120"/>
               </a:rPr>
-              <a:t>fearful</a:t>
+              <a:t>fearfully</a:t>
             </a:r>
             <a:endParaRPr lang="en-US" sz="1400" dirty="0"/>
           </a:p>
@@ -6716,7 +6716,7 @@
                 <a:ea typeface="Calibri" pitchFamily="34" charset="-122"/>
                 <a:cs typeface="Calibri" pitchFamily="34" charset="-120"/>
               </a:rPr>
-              <a:t>Word Labs  •  wordlabs.app  •  Root: 'fear' = feeling of danger or dread</a:t>
+              <a:t>Word Labs  •  wordlabs.app  •  Root: 'fear' = to be afraid of</a:t>
             </a:r>
             <a:endParaRPr lang="en-US" sz="800" dirty="0"/>
           </a:p>
@@ -7543,7 +7543,7 @@
                 <a:ea typeface="Calibri" pitchFamily="34" charset="-122"/>
                 <a:cs typeface="Calibri" pitchFamily="34" charset="-120"/>
               </a:rPr>
-              <a:t>Word Labs  •  wordlabs.app  •  Root: 'fear' = feeling of danger or dread</a:t>
+              <a:t>Word Labs  •  wordlabs.app  •  Root: 'fear' = to be afraid of</a:t>
             </a:r>
             <a:endParaRPr lang="en-US" sz="800" dirty="0"/>
           </a:p>
@@ -7860,7 +7860,7 @@
                 <a:ea typeface="Calibri" pitchFamily="34" charset="-122"/>
                 <a:cs typeface="Calibri" pitchFamily="34" charset="-120"/>
               </a:rPr>
-              <a:t>feeling of danger or dread</a:t>
+              <a:t>to be afraid of</a:t>
             </a:r>
             <a:endParaRPr lang="en-US" sz="850" dirty="0"/>
           </a:p>
@@ -8528,7 +8528,7 @@
                 <a:ea typeface="Calibri" pitchFamily="34" charset="-122"/>
                 <a:cs typeface="Calibri" pitchFamily="34" charset="-120"/>
               </a:rPr>
-              <a:t>Word Labs  •  wordlabs.app  •  Root: 'fear' = feeling of danger or dread</a:t>
+              <a:t>Word Labs  •  wordlabs.app  •  Root: 'fear' = to be afraid of</a:t>
             </a:r>
             <a:endParaRPr lang="en-US" sz="800" dirty="0"/>
           </a:p>
@@ -8845,7 +8845,7 @@
                 <a:ea typeface="Calibri" pitchFamily="34" charset="-122"/>
                 <a:cs typeface="Calibri" pitchFamily="34" charset="-120"/>
               </a:rPr>
-              <a:t>feeling of danger or dread</a:t>
+              <a:t>to be afraid of</a:t>
             </a:r>
             <a:endParaRPr lang="en-US" sz="850" dirty="0"/>
           </a:p>
@@ -9645,7 +9645,7 @@
                 <a:ea typeface="Calibri" pitchFamily="34" charset="-122"/>
                 <a:cs typeface="Calibri" pitchFamily="34" charset="-120"/>
               </a:rPr>
-              <a:t>Word Labs  •  wordlabs.app  •  Root: 'fear' = feeling of danger or dread</a:t>
+              <a:t>Word Labs  •  wordlabs.app  •  Root: 'fear' = to be afraid of</a:t>
             </a:r>
             <a:endParaRPr lang="en-US" sz="800" dirty="0"/>
           </a:p>
@@ -9962,7 +9962,7 @@
                 <a:ea typeface="Calibri" pitchFamily="34" charset="-122"/>
                 <a:cs typeface="Calibri" pitchFamily="34" charset="-120"/>
               </a:rPr>
-              <a:t>feeling of danger or dread</a:t>
+              <a:t>to be afraid of</a:t>
             </a:r>
             <a:endParaRPr lang="en-US" sz="850" dirty="0"/>
           </a:p>
@@ -11053,7 +11053,7 @@
                 <a:ea typeface="Calibri" pitchFamily="34" charset="-122"/>
                 <a:cs typeface="Calibri" pitchFamily="34" charset="-120"/>
               </a:rPr>
-              <a:t>Word Labs  •  wordlabs.app  •  Root: 'fear' = feeling of danger or dread</a:t>
+              <a:t>Word Labs  •  wordlabs.app  •  Root: 'fear' = to be afraid of</a:t>
             </a:r>
             <a:endParaRPr lang="en-US" sz="800" dirty="0"/>
           </a:p>
@@ -11192,7 +11192,7 @@
                 <a:ea typeface="Trebuchet MS" pitchFamily="34" charset="-122"/>
                 <a:cs typeface="Trebuchet MS" pitchFamily="34" charset="-120"/>
               </a:rPr>
-              <a:t>fearful</a:t>
+              <a:t>fearfully</a:t>
             </a:r>
             <a:endParaRPr lang="en-US" sz="2800" dirty="0"/>
           </a:p>
@@ -11880,7 +11880,7 @@
                 <a:ea typeface="Calibri" pitchFamily="34" charset="-122"/>
                 <a:cs typeface="Calibri" pitchFamily="34" charset="-120"/>
               </a:rPr>
-              <a:t>Word Labs  •  wordlabs.app  •  Root: 'fear' = feeling of danger or dread</a:t>
+              <a:t>Word Labs  •  wordlabs.app  •  Root: 'fear' = to be afraid of</a:t>
             </a:r>
             <a:endParaRPr lang="en-US" sz="800" dirty="0"/>
           </a:p>
@@ -12019,7 +12019,7 @@
                 <a:ea typeface="Trebuchet MS" pitchFamily="34" charset="-122"/>
                 <a:cs typeface="Trebuchet MS" pitchFamily="34" charset="-120"/>
               </a:rPr>
-              <a:t>fearful</a:t>
+              <a:t>fearfully</a:t>
             </a:r>
             <a:endParaRPr lang="en-US" sz="2800" dirty="0"/>
           </a:p>
@@ -12099,7 +12099,7 @@
         </p:nvSpPr>
         <p:spPr>
           <a:xfrm>
-            <a:off x="2938272" y="2258568"/>
+            <a:off x="2221992" y="2258568"/>
             <a:ext cx="1828800" cy="292608"/>
           </a:xfrm>
           <a:prstGeom prst="rect">
@@ -12133,7 +12133,7 @@
         </p:nvSpPr>
         <p:spPr>
           <a:xfrm>
-            <a:off x="2938272" y="2258568"/>
+            <a:off x="2221992" y="2258568"/>
             <a:ext cx="1828800" cy="292608"/>
           </a:xfrm>
           <a:prstGeom prst="rect">
@@ -12172,7 +12172,7 @@
         </p:nvSpPr>
         <p:spPr>
           <a:xfrm>
-            <a:off x="2938272" y="2569464"/>
+            <a:off x="2221992" y="2569464"/>
             <a:ext cx="1828800" cy="201168"/>
           </a:xfrm>
           <a:prstGeom prst="rect">
@@ -12197,7 +12197,7 @@
                 <a:ea typeface="Calibri" pitchFamily="34" charset="-122"/>
                 <a:cs typeface="Calibri" pitchFamily="34" charset="-120"/>
               </a:rPr>
-              <a:t>feeling of danger or dread</a:t>
+              <a:t>to be afraid of</a:t>
             </a:r>
             <a:endParaRPr lang="en-US" sz="850" dirty="0"/>
           </a:p>
@@ -12211,7 +12211,7 @@
         </p:nvSpPr>
         <p:spPr>
           <a:xfrm>
-            <a:off x="5803392" y="2258568"/>
+            <a:off x="4370832" y="2258568"/>
             <a:ext cx="1828800" cy="292608"/>
           </a:xfrm>
           <a:prstGeom prst="rect">
@@ -12245,7 +12245,7 @@
         </p:nvSpPr>
         <p:spPr>
           <a:xfrm>
-            <a:off x="5803392" y="2258568"/>
+            <a:off x="4370832" y="2258568"/>
             <a:ext cx="1828800" cy="292608"/>
           </a:xfrm>
           <a:prstGeom prst="rect">
@@ -12284,7 +12284,7 @@
         </p:nvSpPr>
         <p:spPr>
           <a:xfrm>
-            <a:off x="5803392" y="2569464"/>
+            <a:off x="4370832" y="2569464"/>
             <a:ext cx="1828800" cy="201168"/>
           </a:xfrm>
           <a:prstGeom prst="rect">
@@ -12323,6 +12323,118 @@
         </p:nvSpPr>
         <p:spPr>
           <a:xfrm>
+            <a:off x="6519672" y="2258568"/>
+            <a:ext cx="1828800" cy="292608"/>
+          </a:xfrm>
+          <a:prstGeom prst="rect">
+            <a:avLst>
+              <a:gd name="adj" fmla="val 25000"/>
+            </a:avLst>
+          </a:prstGeom>
+          <a:solidFill>
+            <a:srgbClr val="FCE7F3"/>
+          </a:solidFill>
+          <a:ln w="19050">
+            <a:solidFill>
+              <a:srgbClr val="DB2777"/>
+            </a:solidFill>
+            <a:prstDash val="solid"/>
+          </a:ln>
+          <a:effectLst>
+            <a:outerShdw sx="100000" sy="100000" kx="0" ky="0" algn="bl" rotWithShape="0" blurRad="101600" dist="38100" dir="8100000">
+              <a:srgbClr val="000000">
+                <a:alpha val="12000"/>
+              </a:srgbClr>
+            </a:outerShdw>
+          </a:effectLst>
+        </p:spPr>
+      </p:sp>
+      <p:sp>
+        <p:nvSpPr>
+          <p:cNvPr id="23" name="Text 21"/>
+          <p:cNvSpPr/>
+          <p:nvPr/>
+        </p:nvSpPr>
+        <p:spPr>
+          <a:xfrm>
+            <a:off x="6519672" y="2258568"/>
+            <a:ext cx="1828800" cy="292608"/>
+          </a:xfrm>
+          <a:prstGeom prst="rect">
+            <a:avLst/>
+          </a:prstGeom>
+          <a:noFill/>
+          <a:ln/>
+        </p:spPr>
+        <p:txBody>
+          <a:bodyPr wrap="square" lIns="0" tIns="0" rIns="0" bIns="0" rtlCol="0" anchor="ctr"/>
+          <a:lstStyle/>
+          <a:p>
+            <a:pPr algn="ctr" indent="0" marL="0">
+              <a:buNone/>
+            </a:pPr>
+            <a:r>
+              <a:rPr lang="en-US" sz="1300" b="1" dirty="0">
+                <a:solidFill>
+                  <a:srgbClr val="9D174D"/>
+                </a:solidFill>
+                <a:latin typeface="Trebuchet MS" pitchFamily="34" charset="0"/>
+                <a:ea typeface="Trebuchet MS" pitchFamily="34" charset="-122"/>
+                <a:cs typeface="Trebuchet MS" pitchFamily="34" charset="-120"/>
+              </a:rPr>
+              <a:t>ly</a:t>
+            </a:r>
+            <a:endParaRPr lang="en-US" sz="1300" dirty="0"/>
+          </a:p>
+        </p:txBody>
+      </p:sp>
+      <p:sp>
+        <p:nvSpPr>
+          <p:cNvPr id="24" name="Text 22"/>
+          <p:cNvSpPr/>
+          <p:nvPr/>
+        </p:nvSpPr>
+        <p:spPr>
+          <a:xfrm>
+            <a:off x="6519672" y="2569464"/>
+            <a:ext cx="1828800" cy="201168"/>
+          </a:xfrm>
+          <a:prstGeom prst="rect">
+            <a:avLst/>
+          </a:prstGeom>
+          <a:noFill/>
+          <a:ln/>
+        </p:spPr>
+        <p:txBody>
+          <a:bodyPr wrap="square" lIns="0" tIns="0" rIns="0" bIns="0" rtlCol="0" anchor="t"/>
+          <a:lstStyle/>
+          <a:p>
+            <a:pPr algn="ctr" indent="0" marL="0">
+              <a:buNone/>
+            </a:pPr>
+            <a:r>
+              <a:rPr lang="en-US" sz="850" dirty="0">
+                <a:solidFill>
+                  <a:srgbClr val="475569"/>
+                </a:solidFill>
+                <a:latin typeface="Calibri" pitchFamily="34" charset="0"/>
+                <a:ea typeface="Calibri" pitchFamily="34" charset="-122"/>
+                <a:cs typeface="Calibri" pitchFamily="34" charset="-120"/>
+              </a:rPr>
+              <a:t>in a way</a:t>
+            </a:r>
+            <a:endParaRPr lang="en-US" sz="850" dirty="0"/>
+          </a:p>
+        </p:txBody>
+      </p:sp>
+      <p:sp>
+        <p:nvSpPr>
+          <p:cNvPr id="25" name="Shape 23"/>
+          <p:cNvSpPr/>
+          <p:nvPr/>
+        </p:nvSpPr>
+        <p:spPr>
+          <a:xfrm>
             <a:off x="365760" y="3273552"/>
             <a:ext cx="1371600" cy="658368"/>
           </a:xfrm>
@@ -12344,7 +12456,7 @@
       </p:sp>
       <p:sp>
         <p:nvSpPr>
-          <p:cNvPr id="23" name="Text 21"/>
+          <p:cNvPr id="26" name="Text 24"/>
           <p:cNvSpPr/>
           <p:nvPr/>
         </p:nvSpPr>
@@ -12383,7 +12495,7 @@
       </p:sp>
       <p:sp>
         <p:nvSpPr>
-          <p:cNvPr id="24" name="Shape 22"/>
+          <p:cNvPr id="27" name="Shape 25"/>
           <p:cNvSpPr/>
           <p:nvPr/>
         </p:nvSpPr>
@@ -12410,7 +12522,7 @@
       </p:sp>
       <p:sp>
         <p:nvSpPr>
-          <p:cNvPr id="25" name="Text 23"/>
+          <p:cNvPr id="28" name="Text 26"/>
           <p:cNvSpPr/>
           <p:nvPr/>
         </p:nvSpPr>
@@ -12449,7 +12561,7 @@
       </p:sp>
       <p:sp>
         <p:nvSpPr>
-          <p:cNvPr id="26" name="Shape 24"/>
+          <p:cNvPr id="29" name="Shape 27"/>
           <p:cNvSpPr/>
           <p:nvPr/>
         </p:nvSpPr>
@@ -12476,7 +12588,7 @@
       </p:sp>
       <p:sp>
         <p:nvSpPr>
-          <p:cNvPr id="27" name="Text 25"/>
+          <p:cNvPr id="30" name="Text 28"/>
           <p:cNvSpPr/>
           <p:nvPr/>
         </p:nvSpPr>
@@ -12515,7 +12627,7 @@
       </p:sp>
       <p:sp>
         <p:nvSpPr>
-          <p:cNvPr id="28" name="Shape 26"/>
+          <p:cNvPr id="31" name="Shape 29"/>
           <p:cNvSpPr/>
           <p:nvPr/>
         </p:nvSpPr>
@@ -12542,7 +12654,7 @@
       </p:sp>
       <p:sp>
         <p:nvSpPr>
-          <p:cNvPr id="29" name="Text 27"/>
+          <p:cNvPr id="32" name="Text 30"/>
           <p:cNvSpPr/>
           <p:nvPr/>
         </p:nvSpPr>
@@ -12865,7 +12977,7 @@
                 <a:ea typeface="Calibri" pitchFamily="34" charset="-122"/>
                 <a:cs typeface="Calibri" pitchFamily="34" charset="-120"/>
               </a:rPr>
-              <a:t>Word Labs  •  wordlabs.app  •  Root: 'fear' = feeling of danger or dread</a:t>
+              <a:t>Word Labs  •  wordlabs.app  •  Root: 'fear' = to be afraid of</a:t>
             </a:r>
             <a:endParaRPr lang="en-US" sz="800" dirty="0"/>
           </a:p>
@@ -13004,7 +13116,7 @@
                 <a:ea typeface="Trebuchet MS" pitchFamily="34" charset="-122"/>
                 <a:cs typeface="Trebuchet MS" pitchFamily="34" charset="-120"/>
               </a:rPr>
-              <a:t>fearful</a:t>
+              <a:t>fearfully</a:t>
             </a:r>
             <a:endParaRPr lang="en-US" sz="2800" dirty="0"/>
           </a:p>
@@ -13084,7 +13196,7 @@
         </p:nvSpPr>
         <p:spPr>
           <a:xfrm>
-            <a:off x="2938272" y="2258568"/>
+            <a:off x="2221992" y="2258568"/>
             <a:ext cx="1828800" cy="292608"/>
           </a:xfrm>
           <a:prstGeom prst="rect">
@@ -13118,7 +13230,7 @@
         </p:nvSpPr>
         <p:spPr>
           <a:xfrm>
-            <a:off x="2938272" y="2258568"/>
+            <a:off x="2221992" y="2258568"/>
             <a:ext cx="1828800" cy="292608"/>
           </a:xfrm>
           <a:prstGeom prst="rect">
@@ -13157,7 +13269,7 @@
         </p:nvSpPr>
         <p:spPr>
           <a:xfrm>
-            <a:off x="2938272" y="2569464"/>
+            <a:off x="2221992" y="2569464"/>
             <a:ext cx="1828800" cy="201168"/>
           </a:xfrm>
           <a:prstGeom prst="rect">
@@ -13182,7 +13294,7 @@
                 <a:ea typeface="Calibri" pitchFamily="34" charset="-122"/>
                 <a:cs typeface="Calibri" pitchFamily="34" charset="-120"/>
               </a:rPr>
-              <a:t>feeling of danger or dread</a:t>
+              <a:t>to be afraid of</a:t>
             </a:r>
             <a:endParaRPr lang="en-US" sz="850" dirty="0"/>
           </a:p>
@@ -13196,7 +13308,7 @@
         </p:nvSpPr>
         <p:spPr>
           <a:xfrm>
-            <a:off x="5803392" y="2258568"/>
+            <a:off x="4370832" y="2258568"/>
             <a:ext cx="1828800" cy="292608"/>
           </a:xfrm>
           <a:prstGeom prst="rect">
@@ -13230,7 +13342,7 @@
         </p:nvSpPr>
         <p:spPr>
           <a:xfrm>
-            <a:off x="5803392" y="2258568"/>
+            <a:off x="4370832" y="2258568"/>
             <a:ext cx="1828800" cy="292608"/>
           </a:xfrm>
           <a:prstGeom prst="rect">
@@ -13269,7 +13381,7 @@
         </p:nvSpPr>
         <p:spPr>
           <a:xfrm>
-            <a:off x="5803392" y="2569464"/>
+            <a:off x="4370832" y="2569464"/>
             <a:ext cx="1828800" cy="201168"/>
           </a:xfrm>
           <a:prstGeom prst="rect">
@@ -13308,6 +13420,118 @@
         </p:nvSpPr>
         <p:spPr>
           <a:xfrm>
+            <a:off x="6519672" y="2258568"/>
+            <a:ext cx="1828800" cy="292608"/>
+          </a:xfrm>
+          <a:prstGeom prst="rect">
+            <a:avLst>
+              <a:gd name="adj" fmla="val 25000"/>
+            </a:avLst>
+          </a:prstGeom>
+          <a:solidFill>
+            <a:srgbClr val="FCE7F3"/>
+          </a:solidFill>
+          <a:ln w="19050">
+            <a:solidFill>
+              <a:srgbClr val="DB2777"/>
+            </a:solidFill>
+            <a:prstDash val="solid"/>
+          </a:ln>
+          <a:effectLst>
+            <a:outerShdw sx="100000" sy="100000" kx="0" ky="0" algn="bl" rotWithShape="0" blurRad="101600" dist="38100" dir="8100000">
+              <a:srgbClr val="000000">
+                <a:alpha val="12000"/>
+              </a:srgbClr>
+            </a:outerShdw>
+          </a:effectLst>
+        </p:spPr>
+      </p:sp>
+      <p:sp>
+        <p:nvSpPr>
+          <p:cNvPr id="23" name="Text 21"/>
+          <p:cNvSpPr/>
+          <p:nvPr/>
+        </p:nvSpPr>
+        <p:spPr>
+          <a:xfrm>
+            <a:off x="6519672" y="2258568"/>
+            <a:ext cx="1828800" cy="292608"/>
+          </a:xfrm>
+          <a:prstGeom prst="rect">
+            <a:avLst/>
+          </a:prstGeom>
+          <a:noFill/>
+          <a:ln/>
+        </p:spPr>
+        <p:txBody>
+          <a:bodyPr wrap="square" lIns="0" tIns="0" rIns="0" bIns="0" rtlCol="0" anchor="ctr"/>
+          <a:lstStyle/>
+          <a:p>
+            <a:pPr algn="ctr" indent="0" marL="0">
+              <a:buNone/>
+            </a:pPr>
+            <a:r>
+              <a:rPr lang="en-US" sz="1300" b="1" dirty="0">
+                <a:solidFill>
+                  <a:srgbClr val="9D174D"/>
+                </a:solidFill>
+                <a:latin typeface="Trebuchet MS" pitchFamily="34" charset="0"/>
+                <a:ea typeface="Trebuchet MS" pitchFamily="34" charset="-122"/>
+                <a:cs typeface="Trebuchet MS" pitchFamily="34" charset="-120"/>
+              </a:rPr>
+              <a:t>ly</a:t>
+            </a:r>
+            <a:endParaRPr lang="en-US" sz="1300" dirty="0"/>
+          </a:p>
+        </p:txBody>
+      </p:sp>
+      <p:sp>
+        <p:nvSpPr>
+          <p:cNvPr id="24" name="Text 22"/>
+          <p:cNvSpPr/>
+          <p:nvPr/>
+        </p:nvSpPr>
+        <p:spPr>
+          <a:xfrm>
+            <a:off x="6519672" y="2569464"/>
+            <a:ext cx="1828800" cy="201168"/>
+          </a:xfrm>
+          <a:prstGeom prst="rect">
+            <a:avLst/>
+          </a:prstGeom>
+          <a:noFill/>
+          <a:ln/>
+        </p:spPr>
+        <p:txBody>
+          <a:bodyPr wrap="square" lIns="0" tIns="0" rIns="0" bIns="0" rtlCol="0" anchor="t"/>
+          <a:lstStyle/>
+          <a:p>
+            <a:pPr algn="ctr" indent="0" marL="0">
+              <a:buNone/>
+            </a:pPr>
+            <a:r>
+              <a:rPr lang="en-US" sz="850" dirty="0">
+                <a:solidFill>
+                  <a:srgbClr val="475569"/>
+                </a:solidFill>
+                <a:latin typeface="Calibri" pitchFamily="34" charset="0"/>
+                <a:ea typeface="Calibri" pitchFamily="34" charset="-122"/>
+                <a:cs typeface="Calibri" pitchFamily="34" charset="-120"/>
+              </a:rPr>
+              <a:t>in a way</a:t>
+            </a:r>
+            <a:endParaRPr lang="en-US" sz="850" dirty="0"/>
+          </a:p>
+        </p:txBody>
+      </p:sp>
+      <p:sp>
+        <p:nvSpPr>
+          <p:cNvPr id="25" name="Shape 23"/>
+          <p:cNvSpPr/>
+          <p:nvPr/>
+        </p:nvSpPr>
+        <p:spPr>
+          <a:xfrm>
             <a:off x="365760" y="3273552"/>
             <a:ext cx="1371600" cy="658368"/>
           </a:xfrm>
@@ -13329,7 +13553,7 @@
       </p:sp>
       <p:sp>
         <p:nvSpPr>
-          <p:cNvPr id="23" name="Text 21"/>
+          <p:cNvPr id="26" name="Text 24"/>
           <p:cNvSpPr/>
           <p:nvPr/>
         </p:nvSpPr>
@@ -13368,7 +13592,7 @@
       </p:sp>
       <p:sp>
         <p:nvSpPr>
-          <p:cNvPr id="24" name="Shape 22"/>
+          <p:cNvPr id="27" name="Shape 25"/>
           <p:cNvSpPr/>
           <p:nvPr/>
         </p:nvSpPr>
@@ -13395,13 +13619,13 @@
       </p:sp>
       <p:sp>
         <p:nvSpPr>
-          <p:cNvPr id="25" name="Shape 23"/>
-          <p:cNvSpPr/>
-          <p:nvPr/>
-        </p:nvSpPr>
-        <p:spPr>
-          <a:xfrm>
-            <a:off x="2999232" y="3364992"/>
+          <p:cNvPr id="28" name="Shape 26"/>
+          <p:cNvSpPr/>
+          <p:nvPr/>
+        </p:nvSpPr>
+        <p:spPr>
+          <a:xfrm>
+            <a:off x="2313432" y="3364992"/>
             <a:ext cx="1645920" cy="475488"/>
           </a:xfrm>
           <a:prstGeom prst="rect">
@@ -13422,13 +13646,13 @@
       </p:sp>
       <p:sp>
         <p:nvSpPr>
-          <p:cNvPr id="26" name="Text 24"/>
-          <p:cNvSpPr/>
-          <p:nvPr/>
-        </p:nvSpPr>
-        <p:spPr>
-          <a:xfrm>
-            <a:off x="2999232" y="3364992"/>
+          <p:cNvPr id="29" name="Text 27"/>
+          <p:cNvSpPr/>
+          <p:nvPr/>
+        </p:nvSpPr>
+        <p:spPr>
+          <a:xfrm>
+            <a:off x="2313432" y="3364992"/>
             <a:ext cx="1645920" cy="475488"/>
           </a:xfrm>
           <a:prstGeom prst="rect">
@@ -13461,14 +13685,14 @@
       </p:sp>
       <p:sp>
         <p:nvSpPr>
-          <p:cNvPr id="27" name="Text 25"/>
-          <p:cNvSpPr/>
-          <p:nvPr/>
-        </p:nvSpPr>
-        <p:spPr>
-          <a:xfrm>
-            <a:off x="4645152" y="3364992"/>
-            <a:ext cx="1097280" cy="475488"/>
+          <p:cNvPr id="30" name="Text 28"/>
+          <p:cNvSpPr/>
+          <p:nvPr/>
+        </p:nvSpPr>
+        <p:spPr>
+          <a:xfrm>
+            <a:off x="3959352" y="3364992"/>
+            <a:ext cx="411480" cy="475488"/>
           </a:xfrm>
           <a:prstGeom prst="rect">
             <a:avLst/>
@@ -13500,13 +13724,13 @@
       </p:sp>
       <p:sp>
         <p:nvSpPr>
-          <p:cNvPr id="28" name="Shape 26"/>
-          <p:cNvSpPr/>
-          <p:nvPr/>
-        </p:nvSpPr>
-        <p:spPr>
-          <a:xfrm>
-            <a:off x="5742432" y="3364992"/>
+          <p:cNvPr id="31" name="Shape 29"/>
+          <p:cNvSpPr/>
+          <p:nvPr/>
+        </p:nvSpPr>
+        <p:spPr>
+          <a:xfrm>
+            <a:off x="4370832" y="3364992"/>
             <a:ext cx="1645920" cy="475488"/>
           </a:xfrm>
           <a:prstGeom prst="rect">
@@ -13527,13 +13751,13 @@
       </p:sp>
       <p:sp>
         <p:nvSpPr>
-          <p:cNvPr id="29" name="Text 27"/>
-          <p:cNvSpPr/>
-          <p:nvPr/>
-        </p:nvSpPr>
-        <p:spPr>
-          <a:xfrm>
-            <a:off x="5742432" y="3364992"/>
+          <p:cNvPr id="32" name="Text 30"/>
+          <p:cNvSpPr/>
+          <p:nvPr/>
+        </p:nvSpPr>
+        <p:spPr>
+          <a:xfrm>
+            <a:off x="4370832" y="3364992"/>
             <a:ext cx="1645920" cy="475488"/>
           </a:xfrm>
           <a:prstGeom prst="rect">
@@ -13566,7 +13790,112 @@
       </p:sp>
       <p:sp>
         <p:nvSpPr>
-          <p:cNvPr id="30" name="Shape 28"/>
+          <p:cNvPr id="33" name="Text 31"/>
+          <p:cNvSpPr/>
+          <p:nvPr/>
+        </p:nvSpPr>
+        <p:spPr>
+          <a:xfrm>
+            <a:off x="6016752" y="3364992"/>
+            <a:ext cx="411480" cy="475488"/>
+          </a:xfrm>
+          <a:prstGeom prst="rect">
+            <a:avLst/>
+          </a:prstGeom>
+          <a:noFill/>
+          <a:ln/>
+        </p:spPr>
+        <p:txBody>
+          <a:bodyPr wrap="square" lIns="0" tIns="0" rIns="0" bIns="0" rtlCol="0" anchor="ctr"/>
+          <a:lstStyle/>
+          <a:p>
+            <a:pPr algn="ctr" indent="0" marL="0">
+              <a:buNone/>
+            </a:pPr>
+            <a:r>
+              <a:rPr lang="en-US" sz="1600" b="1" dirty="0">
+                <a:solidFill>
+                  <a:srgbClr val="0D9488"/>
+                </a:solidFill>
+                <a:latin typeface="Trebuchet MS" pitchFamily="34" charset="0"/>
+                <a:ea typeface="Trebuchet MS" pitchFamily="34" charset="-122"/>
+                <a:cs typeface="Trebuchet MS" pitchFamily="34" charset="-120"/>
+              </a:rPr>
+              <a:t>·</a:t>
+            </a:r>
+            <a:endParaRPr lang="en-US" sz="1600" dirty="0"/>
+          </a:p>
+        </p:txBody>
+      </p:sp>
+      <p:sp>
+        <p:nvSpPr>
+          <p:cNvPr id="34" name="Shape 32"/>
+          <p:cNvSpPr/>
+          <p:nvPr/>
+        </p:nvSpPr>
+        <p:spPr>
+          <a:xfrm>
+            <a:off x="6428232" y="3364992"/>
+            <a:ext cx="1645920" cy="475488"/>
+          </a:xfrm>
+          <a:prstGeom prst="rect">
+            <a:avLst>
+              <a:gd name="adj" fmla="val 9615"/>
+            </a:avLst>
+          </a:prstGeom>
+          <a:solidFill>
+            <a:srgbClr val="FFFFFF"/>
+          </a:solidFill>
+          <a:ln w="12700">
+            <a:solidFill>
+              <a:srgbClr val="0D9488"/>
+            </a:solidFill>
+            <a:prstDash val="solid"/>
+          </a:ln>
+        </p:spPr>
+      </p:sp>
+      <p:sp>
+        <p:nvSpPr>
+          <p:cNvPr id="35" name="Text 33"/>
+          <p:cNvSpPr/>
+          <p:nvPr/>
+        </p:nvSpPr>
+        <p:spPr>
+          <a:xfrm>
+            <a:off x="6428232" y="3364992"/>
+            <a:ext cx="1645920" cy="475488"/>
+          </a:xfrm>
+          <a:prstGeom prst="rect">
+            <a:avLst/>
+          </a:prstGeom>
+          <a:noFill/>
+          <a:ln/>
+        </p:spPr>
+        <p:txBody>
+          <a:bodyPr wrap="square" lIns="0" tIns="0" rIns="0" bIns="0" rtlCol="0" anchor="ctr"/>
+          <a:lstStyle/>
+          <a:p>
+            <a:pPr algn="ctr" indent="0" marL="0">
+              <a:buNone/>
+            </a:pPr>
+            <a:r>
+              <a:rPr lang="en-US" sz="1400" b="1" dirty="0">
+                <a:solidFill>
+                  <a:srgbClr val="0D9488"/>
+                </a:solidFill>
+                <a:latin typeface="Trebuchet MS" pitchFamily="34" charset="0"/>
+                <a:ea typeface="Trebuchet MS" pitchFamily="34" charset="-122"/>
+                <a:cs typeface="Trebuchet MS" pitchFamily="34" charset="-120"/>
+              </a:rPr>
+              <a:t>ly</a:t>
+            </a:r>
+            <a:endParaRPr lang="en-US" sz="1400" dirty="0"/>
+          </a:p>
+        </p:txBody>
+      </p:sp>
+      <p:sp>
+        <p:nvSpPr>
+          <p:cNvPr id="36" name="Shape 34"/>
           <p:cNvSpPr/>
           <p:nvPr/>
         </p:nvSpPr>
@@ -13593,7 +13922,7 @@
       </p:sp>
       <p:sp>
         <p:nvSpPr>
-          <p:cNvPr id="31" name="Text 29"/>
+          <p:cNvPr id="37" name="Text 35"/>
           <p:cNvSpPr/>
           <p:nvPr/>
         </p:nvSpPr>
@@ -13632,7 +13961,7 @@
       </p:sp>
       <p:sp>
         <p:nvSpPr>
-          <p:cNvPr id="32" name="Shape 30"/>
+          <p:cNvPr id="38" name="Shape 36"/>
           <p:cNvSpPr/>
           <p:nvPr/>
         </p:nvSpPr>
@@ -13659,7 +13988,7 @@
       </p:sp>
       <p:sp>
         <p:nvSpPr>
-          <p:cNvPr id="33" name="Text 31"/>
+          <p:cNvPr id="39" name="Text 37"/>
           <p:cNvSpPr/>
           <p:nvPr/>
         </p:nvSpPr>
@@ -13891,7 +14220,7 @@
                 <a:ea typeface="Calibri" pitchFamily="34" charset="-122"/>
                 <a:cs typeface="Calibri" pitchFamily="34" charset="-120"/>
               </a:rPr>
-              <a:t>Root 'fear' — feeling of danger or dread</a:t>
+              <a:t>Root 'fear' — to be afraid of</a:t>
             </a:r>
             <a:endParaRPr lang="en-US" sz="1600" dirty="0"/>
           </a:p>
@@ -14247,7 +14576,7 @@
                 <a:ea typeface="Calibri" pitchFamily="34" charset="-122"/>
                 <a:cs typeface="Calibri" pitchFamily="34" charset="-120"/>
               </a:rPr>
-              <a:t>Word Labs  •  wordlabs.app  •  Root: 'fear' = feeling of danger or dread</a:t>
+              <a:t>Word Labs  •  wordlabs.app  •  Root: 'fear' = to be afraid of</a:t>
             </a:r>
             <a:endParaRPr lang="en-US" sz="800" dirty="0"/>
           </a:p>
@@ -14386,7 +14715,7 @@
                 <a:ea typeface="Trebuchet MS" pitchFamily="34" charset="-122"/>
                 <a:cs typeface="Trebuchet MS" pitchFamily="34" charset="-120"/>
               </a:rPr>
-              <a:t>fearful</a:t>
+              <a:t>fearfully</a:t>
             </a:r>
             <a:endParaRPr lang="en-US" sz="2800" dirty="0"/>
           </a:p>
@@ -14466,7 +14795,7 @@
         </p:nvSpPr>
         <p:spPr>
           <a:xfrm>
-            <a:off x="2938272" y="2258568"/>
+            <a:off x="2221992" y="2258568"/>
             <a:ext cx="1828800" cy="292608"/>
           </a:xfrm>
           <a:prstGeom prst="rect">
@@ -14500,7 +14829,7 @@
         </p:nvSpPr>
         <p:spPr>
           <a:xfrm>
-            <a:off x="2938272" y="2258568"/>
+            <a:off x="2221992" y="2258568"/>
             <a:ext cx="1828800" cy="292608"/>
           </a:xfrm>
           <a:prstGeom prst="rect">
@@ -14539,7 +14868,7 @@
         </p:nvSpPr>
         <p:spPr>
           <a:xfrm>
-            <a:off x="2938272" y="2569464"/>
+            <a:off x="2221992" y="2569464"/>
             <a:ext cx="1828800" cy="201168"/>
           </a:xfrm>
           <a:prstGeom prst="rect">
@@ -14564,7 +14893,7 @@
                 <a:ea typeface="Calibri" pitchFamily="34" charset="-122"/>
                 <a:cs typeface="Calibri" pitchFamily="34" charset="-120"/>
               </a:rPr>
-              <a:t>feeling of danger or dread</a:t>
+              <a:t>to be afraid of</a:t>
             </a:r>
             <a:endParaRPr lang="en-US" sz="850" dirty="0"/>
           </a:p>
@@ -14578,7 +14907,7 @@
         </p:nvSpPr>
         <p:spPr>
           <a:xfrm>
-            <a:off x="5803392" y="2258568"/>
+            <a:off x="4370832" y="2258568"/>
             <a:ext cx="1828800" cy="292608"/>
           </a:xfrm>
           <a:prstGeom prst="rect">
@@ -14612,7 +14941,7 @@
         </p:nvSpPr>
         <p:spPr>
           <a:xfrm>
-            <a:off x="5803392" y="2258568"/>
+            <a:off x="4370832" y="2258568"/>
             <a:ext cx="1828800" cy="292608"/>
           </a:xfrm>
           <a:prstGeom prst="rect">
@@ -14651,7 +14980,7 @@
         </p:nvSpPr>
         <p:spPr>
           <a:xfrm>
-            <a:off x="5803392" y="2569464"/>
+            <a:off x="4370832" y="2569464"/>
             <a:ext cx="1828800" cy="201168"/>
           </a:xfrm>
           <a:prstGeom prst="rect">
@@ -14690,6 +15019,118 @@
         </p:nvSpPr>
         <p:spPr>
           <a:xfrm>
+            <a:off x="6519672" y="2258568"/>
+            <a:ext cx="1828800" cy="292608"/>
+          </a:xfrm>
+          <a:prstGeom prst="rect">
+            <a:avLst>
+              <a:gd name="adj" fmla="val 25000"/>
+            </a:avLst>
+          </a:prstGeom>
+          <a:solidFill>
+            <a:srgbClr val="FCE7F3"/>
+          </a:solidFill>
+          <a:ln w="19050">
+            <a:solidFill>
+              <a:srgbClr val="DB2777"/>
+            </a:solidFill>
+            <a:prstDash val="solid"/>
+          </a:ln>
+          <a:effectLst>
+            <a:outerShdw sx="100000" sy="100000" kx="0" ky="0" algn="bl" rotWithShape="0" blurRad="101600" dist="38100" dir="8100000">
+              <a:srgbClr val="000000">
+                <a:alpha val="12000"/>
+              </a:srgbClr>
+            </a:outerShdw>
+          </a:effectLst>
+        </p:spPr>
+      </p:sp>
+      <p:sp>
+        <p:nvSpPr>
+          <p:cNvPr id="23" name="Text 21"/>
+          <p:cNvSpPr/>
+          <p:nvPr/>
+        </p:nvSpPr>
+        <p:spPr>
+          <a:xfrm>
+            <a:off x="6519672" y="2258568"/>
+            <a:ext cx="1828800" cy="292608"/>
+          </a:xfrm>
+          <a:prstGeom prst="rect">
+            <a:avLst/>
+          </a:prstGeom>
+          <a:noFill/>
+          <a:ln/>
+        </p:spPr>
+        <p:txBody>
+          <a:bodyPr wrap="square" lIns="0" tIns="0" rIns="0" bIns="0" rtlCol="0" anchor="ctr"/>
+          <a:lstStyle/>
+          <a:p>
+            <a:pPr algn="ctr" indent="0" marL="0">
+              <a:buNone/>
+            </a:pPr>
+            <a:r>
+              <a:rPr lang="en-US" sz="1300" b="1" dirty="0">
+                <a:solidFill>
+                  <a:srgbClr val="9D174D"/>
+                </a:solidFill>
+                <a:latin typeface="Trebuchet MS" pitchFamily="34" charset="0"/>
+                <a:ea typeface="Trebuchet MS" pitchFamily="34" charset="-122"/>
+                <a:cs typeface="Trebuchet MS" pitchFamily="34" charset="-120"/>
+              </a:rPr>
+              <a:t>ly</a:t>
+            </a:r>
+            <a:endParaRPr lang="en-US" sz="1300" dirty="0"/>
+          </a:p>
+        </p:txBody>
+      </p:sp>
+      <p:sp>
+        <p:nvSpPr>
+          <p:cNvPr id="24" name="Text 22"/>
+          <p:cNvSpPr/>
+          <p:nvPr/>
+        </p:nvSpPr>
+        <p:spPr>
+          <a:xfrm>
+            <a:off x="6519672" y="2569464"/>
+            <a:ext cx="1828800" cy="201168"/>
+          </a:xfrm>
+          <a:prstGeom prst="rect">
+            <a:avLst/>
+          </a:prstGeom>
+          <a:noFill/>
+          <a:ln/>
+        </p:spPr>
+        <p:txBody>
+          <a:bodyPr wrap="square" lIns="0" tIns="0" rIns="0" bIns="0" rtlCol="0" anchor="t"/>
+          <a:lstStyle/>
+          <a:p>
+            <a:pPr algn="ctr" indent="0" marL="0">
+              <a:buNone/>
+            </a:pPr>
+            <a:r>
+              <a:rPr lang="en-US" sz="850" dirty="0">
+                <a:solidFill>
+                  <a:srgbClr val="475569"/>
+                </a:solidFill>
+                <a:latin typeface="Calibri" pitchFamily="34" charset="0"/>
+                <a:ea typeface="Calibri" pitchFamily="34" charset="-122"/>
+                <a:cs typeface="Calibri" pitchFamily="34" charset="-120"/>
+              </a:rPr>
+              <a:t>in a way</a:t>
+            </a:r>
+            <a:endParaRPr lang="en-US" sz="850" dirty="0"/>
+          </a:p>
+        </p:txBody>
+      </p:sp>
+      <p:sp>
+        <p:nvSpPr>
+          <p:cNvPr id="25" name="Shape 23"/>
+          <p:cNvSpPr/>
+          <p:nvPr/>
+        </p:nvSpPr>
+        <p:spPr>
+          <a:xfrm>
             <a:off x="365760" y="3273552"/>
             <a:ext cx="1371600" cy="658368"/>
           </a:xfrm>
@@ -14711,7 +15152,7 @@
       </p:sp>
       <p:sp>
         <p:nvSpPr>
-          <p:cNvPr id="23" name="Text 21"/>
+          <p:cNvPr id="26" name="Text 24"/>
           <p:cNvSpPr/>
           <p:nvPr/>
         </p:nvSpPr>
@@ -14750,7 +15191,7 @@
       </p:sp>
       <p:sp>
         <p:nvSpPr>
-          <p:cNvPr id="24" name="Shape 22"/>
+          <p:cNvPr id="27" name="Shape 25"/>
           <p:cNvSpPr/>
           <p:nvPr/>
         </p:nvSpPr>
@@ -14777,13 +15218,13 @@
       </p:sp>
       <p:sp>
         <p:nvSpPr>
-          <p:cNvPr id="25" name="Shape 23"/>
-          <p:cNvSpPr/>
-          <p:nvPr/>
-        </p:nvSpPr>
-        <p:spPr>
-          <a:xfrm>
-            <a:off x="2999232" y="3364992"/>
+          <p:cNvPr id="28" name="Shape 26"/>
+          <p:cNvSpPr/>
+          <p:nvPr/>
+        </p:nvSpPr>
+        <p:spPr>
+          <a:xfrm>
+            <a:off x="2313432" y="3364992"/>
             <a:ext cx="1645920" cy="475488"/>
           </a:xfrm>
           <a:prstGeom prst="rect">
@@ -14804,13 +15245,13 @@
       </p:sp>
       <p:sp>
         <p:nvSpPr>
-          <p:cNvPr id="26" name="Text 24"/>
-          <p:cNvSpPr/>
-          <p:nvPr/>
-        </p:nvSpPr>
-        <p:spPr>
-          <a:xfrm>
-            <a:off x="2999232" y="3364992"/>
+          <p:cNvPr id="29" name="Text 27"/>
+          <p:cNvSpPr/>
+          <p:nvPr/>
+        </p:nvSpPr>
+        <p:spPr>
+          <a:xfrm>
+            <a:off x="2313432" y="3364992"/>
             <a:ext cx="1645920" cy="475488"/>
           </a:xfrm>
           <a:prstGeom prst="rect">
@@ -14843,14 +15284,14 @@
       </p:sp>
       <p:sp>
         <p:nvSpPr>
-          <p:cNvPr id="27" name="Text 25"/>
-          <p:cNvSpPr/>
-          <p:nvPr/>
-        </p:nvSpPr>
-        <p:spPr>
-          <a:xfrm>
-            <a:off x="4645152" y="3364992"/>
-            <a:ext cx="1097280" cy="475488"/>
+          <p:cNvPr id="30" name="Text 28"/>
+          <p:cNvSpPr/>
+          <p:nvPr/>
+        </p:nvSpPr>
+        <p:spPr>
+          <a:xfrm>
+            <a:off x="3959352" y="3364992"/>
+            <a:ext cx="411480" cy="475488"/>
           </a:xfrm>
           <a:prstGeom prst="rect">
             <a:avLst/>
@@ -14882,13 +15323,13 @@
       </p:sp>
       <p:sp>
         <p:nvSpPr>
-          <p:cNvPr id="28" name="Shape 26"/>
-          <p:cNvSpPr/>
-          <p:nvPr/>
-        </p:nvSpPr>
-        <p:spPr>
-          <a:xfrm>
-            <a:off x="5742432" y="3364992"/>
+          <p:cNvPr id="31" name="Shape 29"/>
+          <p:cNvSpPr/>
+          <p:nvPr/>
+        </p:nvSpPr>
+        <p:spPr>
+          <a:xfrm>
+            <a:off x="4370832" y="3364992"/>
             <a:ext cx="1645920" cy="475488"/>
           </a:xfrm>
           <a:prstGeom prst="rect">
@@ -14909,13 +15350,13 @@
       </p:sp>
       <p:sp>
         <p:nvSpPr>
-          <p:cNvPr id="29" name="Text 27"/>
-          <p:cNvSpPr/>
-          <p:nvPr/>
-        </p:nvSpPr>
-        <p:spPr>
-          <a:xfrm>
-            <a:off x="5742432" y="3364992"/>
+          <p:cNvPr id="32" name="Text 30"/>
+          <p:cNvSpPr/>
+          <p:nvPr/>
+        </p:nvSpPr>
+        <p:spPr>
+          <a:xfrm>
+            <a:off x="4370832" y="3364992"/>
             <a:ext cx="1645920" cy="475488"/>
           </a:xfrm>
           <a:prstGeom prst="rect">
@@ -14948,7 +15389,112 @@
       </p:sp>
       <p:sp>
         <p:nvSpPr>
-          <p:cNvPr id="30" name="Shape 28"/>
+          <p:cNvPr id="33" name="Text 31"/>
+          <p:cNvSpPr/>
+          <p:nvPr/>
+        </p:nvSpPr>
+        <p:spPr>
+          <a:xfrm>
+            <a:off x="6016752" y="3364992"/>
+            <a:ext cx="411480" cy="475488"/>
+          </a:xfrm>
+          <a:prstGeom prst="rect">
+            <a:avLst/>
+          </a:prstGeom>
+          <a:noFill/>
+          <a:ln/>
+        </p:spPr>
+        <p:txBody>
+          <a:bodyPr wrap="square" lIns="0" tIns="0" rIns="0" bIns="0" rtlCol="0" anchor="ctr"/>
+          <a:lstStyle/>
+          <a:p>
+            <a:pPr algn="ctr" indent="0" marL="0">
+              <a:buNone/>
+            </a:pPr>
+            <a:r>
+              <a:rPr lang="en-US" sz="1600" b="1" dirty="0">
+                <a:solidFill>
+                  <a:srgbClr val="0D9488"/>
+                </a:solidFill>
+                <a:latin typeface="Trebuchet MS" pitchFamily="34" charset="0"/>
+                <a:ea typeface="Trebuchet MS" pitchFamily="34" charset="-122"/>
+                <a:cs typeface="Trebuchet MS" pitchFamily="34" charset="-120"/>
+              </a:rPr>
+              <a:t>·</a:t>
+            </a:r>
+            <a:endParaRPr lang="en-US" sz="1600" dirty="0"/>
+          </a:p>
+        </p:txBody>
+      </p:sp>
+      <p:sp>
+        <p:nvSpPr>
+          <p:cNvPr id="34" name="Shape 32"/>
+          <p:cNvSpPr/>
+          <p:nvPr/>
+        </p:nvSpPr>
+        <p:spPr>
+          <a:xfrm>
+            <a:off x="6428232" y="3364992"/>
+            <a:ext cx="1645920" cy="475488"/>
+          </a:xfrm>
+          <a:prstGeom prst="rect">
+            <a:avLst>
+              <a:gd name="adj" fmla="val 9615"/>
+            </a:avLst>
+          </a:prstGeom>
+          <a:solidFill>
+            <a:srgbClr val="FFFFFF"/>
+          </a:solidFill>
+          <a:ln w="12700">
+            <a:solidFill>
+              <a:srgbClr val="0D9488"/>
+            </a:solidFill>
+            <a:prstDash val="solid"/>
+          </a:ln>
+        </p:spPr>
+      </p:sp>
+      <p:sp>
+        <p:nvSpPr>
+          <p:cNvPr id="35" name="Text 33"/>
+          <p:cNvSpPr/>
+          <p:nvPr/>
+        </p:nvSpPr>
+        <p:spPr>
+          <a:xfrm>
+            <a:off x="6428232" y="3364992"/>
+            <a:ext cx="1645920" cy="475488"/>
+          </a:xfrm>
+          <a:prstGeom prst="rect">
+            <a:avLst/>
+          </a:prstGeom>
+          <a:noFill/>
+          <a:ln/>
+        </p:spPr>
+        <p:txBody>
+          <a:bodyPr wrap="square" lIns="0" tIns="0" rIns="0" bIns="0" rtlCol="0" anchor="ctr"/>
+          <a:lstStyle/>
+          <a:p>
+            <a:pPr algn="ctr" indent="0" marL="0">
+              <a:buNone/>
+            </a:pPr>
+            <a:r>
+              <a:rPr lang="en-US" sz="1400" b="1" dirty="0">
+                <a:solidFill>
+                  <a:srgbClr val="0D9488"/>
+                </a:solidFill>
+                <a:latin typeface="Trebuchet MS" pitchFamily="34" charset="0"/>
+                <a:ea typeface="Trebuchet MS" pitchFamily="34" charset="-122"/>
+                <a:cs typeface="Trebuchet MS" pitchFamily="34" charset="-120"/>
+              </a:rPr>
+              <a:t>ly</a:t>
+            </a:r>
+            <a:endParaRPr lang="en-US" sz="1400" dirty="0"/>
+          </a:p>
+        </p:txBody>
+      </p:sp>
+      <p:sp>
+        <p:nvSpPr>
+          <p:cNvPr id="36" name="Shape 34"/>
           <p:cNvSpPr/>
           <p:nvPr/>
         </p:nvSpPr>
@@ -14975,7 +15521,7 @@
       </p:sp>
       <p:sp>
         <p:nvSpPr>
-          <p:cNvPr id="31" name="Text 29"/>
+          <p:cNvPr id="37" name="Text 35"/>
           <p:cNvSpPr/>
           <p:nvPr/>
         </p:nvSpPr>
@@ -15014,7 +15560,7 @@
       </p:sp>
       <p:sp>
         <p:nvSpPr>
-          <p:cNvPr id="32" name="Shape 30"/>
+          <p:cNvPr id="38" name="Shape 36"/>
           <p:cNvSpPr/>
           <p:nvPr/>
         </p:nvSpPr>
@@ -15041,13 +15587,13 @@
       </p:sp>
       <p:sp>
         <p:nvSpPr>
-          <p:cNvPr id="33" name="Shape 31"/>
-          <p:cNvSpPr/>
-          <p:nvPr/>
-        </p:nvSpPr>
-        <p:spPr>
-          <a:xfrm>
-            <a:off x="2427732" y="4169664"/>
+          <p:cNvPr id="39" name="Shape 37"/>
+          <p:cNvSpPr/>
+          <p:nvPr/>
+        </p:nvSpPr>
+        <p:spPr>
+          <a:xfrm>
+            <a:off x="2254649" y="4169664"/>
             <a:ext cx="685800" cy="475488"/>
           </a:xfrm>
           <a:prstGeom prst="rect">
@@ -15068,13 +15614,13 @@
       </p:sp>
       <p:sp>
         <p:nvSpPr>
-          <p:cNvPr id="34" name="Text 32"/>
-          <p:cNvSpPr/>
-          <p:nvPr/>
-        </p:nvSpPr>
-        <p:spPr>
-          <a:xfrm>
-            <a:off x="2427732" y="4169664"/>
+          <p:cNvPr id="40" name="Text 38"/>
+          <p:cNvSpPr/>
+          <p:nvPr/>
+        </p:nvSpPr>
+        <p:spPr>
+          <a:xfrm>
+            <a:off x="2254649" y="4169664"/>
             <a:ext cx="685800" cy="475488"/>
           </a:xfrm>
           <a:prstGeom prst="rect">
@@ -15107,13 +15653,13 @@
       </p:sp>
       <p:sp>
         <p:nvSpPr>
-          <p:cNvPr id="35" name="Shape 33"/>
-          <p:cNvSpPr/>
-          <p:nvPr/>
-        </p:nvSpPr>
-        <p:spPr>
-          <a:xfrm>
-            <a:off x="3639312" y="4169664"/>
+          <p:cNvPr id="41" name="Shape 39"/>
+          <p:cNvSpPr/>
+          <p:nvPr/>
+        </p:nvSpPr>
+        <p:spPr>
+          <a:xfrm>
+            <a:off x="3293146" y="4169664"/>
             <a:ext cx="685800" cy="475488"/>
           </a:xfrm>
           <a:prstGeom prst="rect">
@@ -15134,13 +15680,13 @@
       </p:sp>
       <p:sp>
         <p:nvSpPr>
-          <p:cNvPr id="36" name="Text 34"/>
-          <p:cNvSpPr/>
-          <p:nvPr/>
-        </p:nvSpPr>
-        <p:spPr>
-          <a:xfrm>
-            <a:off x="3639312" y="4169664"/>
+          <p:cNvPr id="42" name="Text 40"/>
+          <p:cNvSpPr/>
+          <p:nvPr/>
+        </p:nvSpPr>
+        <p:spPr>
+          <a:xfrm>
+            <a:off x="3293146" y="4169664"/>
             <a:ext cx="685800" cy="475488"/>
           </a:xfrm>
           <a:prstGeom prst="rect">
@@ -15173,13 +15719,13 @@
       </p:sp>
       <p:sp>
         <p:nvSpPr>
-          <p:cNvPr id="37" name="Shape 35"/>
-          <p:cNvSpPr/>
-          <p:nvPr/>
-        </p:nvSpPr>
-        <p:spPr>
-          <a:xfrm>
-            <a:off x="4850892" y="4169664"/>
+          <p:cNvPr id="43" name="Shape 41"/>
+          <p:cNvSpPr/>
+          <p:nvPr/>
+        </p:nvSpPr>
+        <p:spPr>
+          <a:xfrm>
+            <a:off x="4331643" y="4169664"/>
             <a:ext cx="685800" cy="475488"/>
           </a:xfrm>
           <a:prstGeom prst="rect">
@@ -15200,13 +15746,13 @@
       </p:sp>
       <p:sp>
         <p:nvSpPr>
-          <p:cNvPr id="38" name="Text 36"/>
-          <p:cNvSpPr/>
-          <p:nvPr/>
-        </p:nvSpPr>
-        <p:spPr>
-          <a:xfrm>
-            <a:off x="4850892" y="4169664"/>
+          <p:cNvPr id="44" name="Text 42"/>
+          <p:cNvSpPr/>
+          <p:nvPr/>
+        </p:nvSpPr>
+        <p:spPr>
+          <a:xfrm>
+            <a:off x="4331643" y="4169664"/>
             <a:ext cx="685800" cy="475488"/>
           </a:xfrm>
           <a:prstGeom prst="rect">
@@ -15239,13 +15785,13 @@
       </p:sp>
       <p:sp>
         <p:nvSpPr>
-          <p:cNvPr id="39" name="Shape 37"/>
-          <p:cNvSpPr/>
-          <p:nvPr/>
-        </p:nvSpPr>
-        <p:spPr>
-          <a:xfrm>
-            <a:off x="6062472" y="4169664"/>
+          <p:cNvPr id="45" name="Shape 43"/>
+          <p:cNvSpPr/>
+          <p:nvPr/>
+        </p:nvSpPr>
+        <p:spPr>
+          <a:xfrm>
+            <a:off x="5370141" y="4169664"/>
             <a:ext cx="685800" cy="475488"/>
           </a:xfrm>
           <a:prstGeom prst="rect">
@@ -15266,13 +15812,13 @@
       </p:sp>
       <p:sp>
         <p:nvSpPr>
-          <p:cNvPr id="40" name="Text 38"/>
-          <p:cNvSpPr/>
-          <p:nvPr/>
-        </p:nvSpPr>
-        <p:spPr>
-          <a:xfrm>
-            <a:off x="6062472" y="4169664"/>
+          <p:cNvPr id="46" name="Text 44"/>
+          <p:cNvSpPr/>
+          <p:nvPr/>
+        </p:nvSpPr>
+        <p:spPr>
+          <a:xfrm>
+            <a:off x="5370141" y="4169664"/>
             <a:ext cx="685800" cy="475488"/>
           </a:xfrm>
           <a:prstGeom prst="rect">
@@ -15305,13 +15851,13 @@
       </p:sp>
       <p:sp>
         <p:nvSpPr>
-          <p:cNvPr id="41" name="Shape 39"/>
-          <p:cNvSpPr/>
-          <p:nvPr/>
-        </p:nvSpPr>
-        <p:spPr>
-          <a:xfrm>
-            <a:off x="7274052" y="4169664"/>
+          <p:cNvPr id="47" name="Shape 45"/>
+          <p:cNvSpPr/>
+          <p:nvPr/>
+        </p:nvSpPr>
+        <p:spPr>
+          <a:xfrm>
+            <a:off x="6408638" y="4169664"/>
             <a:ext cx="685800" cy="475488"/>
           </a:xfrm>
           <a:prstGeom prst="rect">
@@ -15332,13 +15878,13 @@
       </p:sp>
       <p:sp>
         <p:nvSpPr>
-          <p:cNvPr id="42" name="Text 40"/>
-          <p:cNvSpPr/>
-          <p:nvPr/>
-        </p:nvSpPr>
-        <p:spPr>
-          <a:xfrm>
-            <a:off x="7274052" y="4169664"/>
+          <p:cNvPr id="48" name="Text 46"/>
+          <p:cNvSpPr/>
+          <p:nvPr/>
+        </p:nvSpPr>
+        <p:spPr>
+          <a:xfrm>
+            <a:off x="6408638" y="4169664"/>
             <a:ext cx="685800" cy="475488"/>
           </a:xfrm>
           <a:prstGeom prst="rect">
@@ -15363,7 +15909,73 @@
                 <a:ea typeface="Trebuchet MS" pitchFamily="34" charset="-122"/>
                 <a:cs typeface="Trebuchet MS" pitchFamily="34" charset="-120"/>
               </a:rPr>
-              <a:t>l</a:t>
+              <a:t>ll</a:t>
+            </a:r>
+            <a:endParaRPr lang="en-US" sz="900" dirty="0"/>
+          </a:p>
+        </p:txBody>
+      </p:sp>
+      <p:sp>
+        <p:nvSpPr>
+          <p:cNvPr id="49" name="Shape 47"/>
+          <p:cNvSpPr/>
+          <p:nvPr/>
+        </p:nvSpPr>
+        <p:spPr>
+          <a:xfrm>
+            <a:off x="7447135" y="4169664"/>
+            <a:ext cx="685800" cy="475488"/>
+          </a:xfrm>
+          <a:prstGeom prst="rect">
+            <a:avLst>
+              <a:gd name="adj" fmla="val 7692"/>
+            </a:avLst>
+          </a:prstGeom>
+          <a:solidFill>
+            <a:srgbClr val="FFFFFF"/>
+          </a:solidFill>
+          <a:ln w="12700">
+            <a:solidFill>
+              <a:srgbClr val="DB2777"/>
+            </a:solidFill>
+            <a:prstDash val="solid"/>
+          </a:ln>
+        </p:spPr>
+      </p:sp>
+      <p:sp>
+        <p:nvSpPr>
+          <p:cNvPr id="50" name="Text 48"/>
+          <p:cNvSpPr/>
+          <p:nvPr/>
+        </p:nvSpPr>
+        <p:spPr>
+          <a:xfrm>
+            <a:off x="7447135" y="4169664"/>
+            <a:ext cx="685800" cy="475488"/>
+          </a:xfrm>
+          <a:prstGeom prst="rect">
+            <a:avLst/>
+          </a:prstGeom>
+          <a:noFill/>
+          <a:ln/>
+        </p:spPr>
+        <p:txBody>
+          <a:bodyPr wrap="square" lIns="0" tIns="0" rIns="0" bIns="0" rtlCol="0" anchor="ctr"/>
+          <a:lstStyle/>
+          <a:p>
+            <a:pPr algn="ctr" indent="0" marL="0">
+              <a:buNone/>
+            </a:pPr>
+            <a:r>
+              <a:rPr lang="en-US" sz="900" b="1" dirty="0">
+                <a:solidFill>
+                  <a:srgbClr val="9D174D"/>
+                </a:solidFill>
+                <a:latin typeface="Trebuchet MS" pitchFamily="34" charset="0"/>
+                <a:ea typeface="Trebuchet MS" pitchFamily="34" charset="-122"/>
+                <a:cs typeface="Trebuchet MS" pitchFamily="34" charset="-120"/>
+              </a:rPr>
+              <a:t>y</a:t>
             </a:r>
             <a:endParaRPr lang="en-US" sz="900" dirty="0"/>
           </a:p>
@@ -15937,7 +16549,7 @@
                 <a:ea typeface="Calibri" pitchFamily="34" charset="-122"/>
                 <a:cs typeface="Calibri" pitchFamily="34" charset="-120"/>
               </a:rPr>
-              <a:t>Word Labs  •  wordlabs.app  •  Root: 'fear' = feeling of danger or dread</a:t>
+              <a:t>Word Labs  •  wordlabs.app  •  Root: 'fear' = to be afraid of</a:t>
             </a:r>
             <a:endParaRPr lang="en-US" sz="800" dirty="0"/>
           </a:p>
@@ -16271,7 +16883,7 @@
                 <a:ea typeface="Trebuchet MS" pitchFamily="34" charset="-122"/>
                 <a:cs typeface="Trebuchet MS" pitchFamily="34" charset="-120"/>
               </a:rPr>
-              <a:t>2</a:t>
+              <a:t>0</a:t>
             </a:r>
             <a:pPr algn="ctr" indent="0" marL="0">
               <a:buNone/>
@@ -16285,7 +16897,7 @@
                 <a:ea typeface="Trebuchet MS" pitchFamily="34" charset="-122"/>
                 <a:cs typeface="Trebuchet MS" pitchFamily="34" charset="-120"/>
               </a:rPr>
-              <a:t>  punctuation marks</a:t>
+              <a:t>  punctuation mark</a:t>
             </a:r>
             <a:endParaRPr lang="en-US" sz="2800" dirty="0"/>
           </a:p>
@@ -16577,7 +17189,7 @@
                 <a:ea typeface="Calibri" pitchFamily="34" charset="-122"/>
                 <a:cs typeface="Calibri" pitchFamily="34" charset="-120"/>
               </a:rPr>
-              <a:t>Word Labs  •  wordlabs.app  •  Root: 'fear' = feeling of danger or dread</a:t>
+              <a:t>Word Labs  •  wordlabs.app  •  Root: 'fear' = to be afraid of</a:t>
             </a:r>
             <a:endParaRPr lang="en-US" sz="800" dirty="0"/>
           </a:p>
@@ -16689,7 +17301,7 @@
                 <a:ea typeface="Calibri" pitchFamily="34" charset="-122"/>
                 <a:cs typeface="Calibri" pitchFamily="34" charset="-120"/>
               </a:rPr>
-              <a:t>The </a:t>
+              <a:t>She </a:t>
             </a:r>
             <a:pPr algn="l" indent="0" marL="0">
               <a:buNone/>
@@ -16706,7 +17318,7 @@
                 <a:ea typeface="Calibri" pitchFamily="34" charset="-122"/>
                 <a:cs typeface="Calibri" pitchFamily="34" charset="-120"/>
               </a:rPr>
-              <a:t>fearsome</a:t>
+              <a:t>fearlessly</a:t>
             </a:r>
             <a:pPr algn="l" indent="0" marL="0">
               <a:buNone/>
@@ -16720,7 +17332,7 @@
                 <a:ea typeface="Calibri" pitchFamily="34" charset="-122"/>
                 <a:cs typeface="Calibri" pitchFamily="34" charset="-120"/>
               </a:rPr>
-              <a:t> beast let out a roar, and the villagers, </a:t>
+              <a:t> climbed to the top of the mountain. Her </a:t>
             </a:r>
             <a:pPr algn="l" indent="0" marL="0">
               <a:buNone/>
@@ -16737,7 +17349,7 @@
                 <a:ea typeface="Calibri" pitchFamily="34" charset="-122"/>
                 <a:cs typeface="Calibri" pitchFamily="34" charset="-120"/>
               </a:rPr>
-              <a:t>fearing</a:t>
+              <a:t>fearfulness</a:t>
             </a:r>
             <a:pPr algn="l" indent="0" marL="0">
               <a:buNone/>
@@ -16751,7 +17363,7 @@
                 <a:ea typeface="Calibri" pitchFamily="34" charset="-122"/>
                 <a:cs typeface="Calibri" pitchFamily="34" charset="-120"/>
               </a:rPr>
-              <a:t> the worst, ran away </a:t>
+              <a:t> kept her from going near the edge of the cliff. His </a:t>
             </a:r>
             <a:pPr algn="l" indent="0" marL="0">
               <a:buNone/>
@@ -16768,7 +17380,7 @@
                 <a:ea typeface="Calibri" pitchFamily="34" charset="-122"/>
                 <a:cs typeface="Calibri" pitchFamily="34" charset="-120"/>
               </a:rPr>
-              <a:t>fearfully</a:t>
+              <a:t>fearlessness</a:t>
             </a:r>
             <a:pPr algn="l" indent="0" marL="0">
               <a:buNone/>
@@ -16782,7 +17394,7 @@
                 <a:ea typeface="Calibri" pitchFamily="34" charset="-122"/>
                 <a:cs typeface="Calibri" pitchFamily="34" charset="-120"/>
               </a:rPr>
-              <a:t> into the forest.</a:t>
+              <a:t> impressed everyone at the diving competition.</a:t>
             </a:r>
             <a:endParaRPr lang="en-US" sz="1800" dirty="0"/>
           </a:p>
@@ -16937,7 +17549,7 @@
                 <a:ea typeface="Trebuchet MS" pitchFamily="34" charset="-122"/>
                 <a:cs typeface="Trebuchet MS" pitchFamily="34" charset="-120"/>
               </a:rPr>
-              <a:t>fearsome</a:t>
+              <a:t>fearlessly</a:t>
             </a:r>
             <a:endParaRPr lang="en-US" sz="1400" dirty="0"/>
           </a:p>
@@ -17065,7 +17677,7 @@
                 <a:ea typeface="Trebuchet MS" pitchFamily="34" charset="-122"/>
                 <a:cs typeface="Trebuchet MS" pitchFamily="34" charset="-120"/>
               </a:rPr>
-              <a:t>fearing</a:t>
+              <a:t>fearfulness</a:t>
             </a:r>
             <a:endParaRPr lang="en-US" sz="1400" dirty="0"/>
           </a:p>
@@ -17193,7 +17805,7 @@
                 <a:ea typeface="Trebuchet MS" pitchFamily="34" charset="-122"/>
                 <a:cs typeface="Trebuchet MS" pitchFamily="34" charset="-120"/>
               </a:rPr>
-              <a:t>fearfully</a:t>
+              <a:t>fearlessness</a:t>
             </a:r>
             <a:endParaRPr lang="en-US" sz="1400" dirty="0"/>
           </a:p>
@@ -17524,7 +18136,7 @@
                 <a:ea typeface="Calibri" pitchFamily="34" charset="-122"/>
                 <a:cs typeface="Calibri" pitchFamily="34" charset="-120"/>
               </a:rPr>
-              <a:t>Word Labs  •  wordlabs.app  •  Root: 'fear' = feeling of danger or dread</a:t>
+              <a:t>Word Labs  •  wordlabs.app  •  Root: 'fear' = to be afraid of</a:t>
             </a:r>
             <a:endParaRPr lang="en-US" sz="800" dirty="0"/>
           </a:p>
@@ -17663,7 +18275,7 @@
                 <a:ea typeface="Trebuchet MS" pitchFamily="34" charset="-122"/>
                 <a:cs typeface="Trebuchet MS" pitchFamily="34" charset="-120"/>
               </a:rPr>
-              <a:t>fearsome</a:t>
+              <a:t>fearlessly</a:t>
             </a:r>
             <a:endParaRPr lang="en-US" sz="2800" dirty="0"/>
           </a:p>
@@ -18351,7 +18963,7 @@
                 <a:ea typeface="Calibri" pitchFamily="34" charset="-122"/>
                 <a:cs typeface="Calibri" pitchFamily="34" charset="-120"/>
               </a:rPr>
-              <a:t>Word Labs  •  wordlabs.app  •  Root: 'fear' = feeling of danger or dread</a:t>
+              <a:t>Word Labs  •  wordlabs.app  •  Root: 'fear' = to be afraid of</a:t>
             </a:r>
             <a:endParaRPr lang="en-US" sz="800" dirty="0"/>
           </a:p>
@@ -18490,7 +19102,7 @@
                 <a:ea typeface="Trebuchet MS" pitchFamily="34" charset="-122"/>
                 <a:cs typeface="Trebuchet MS" pitchFamily="34" charset="-120"/>
               </a:rPr>
-              <a:t>fearsome</a:t>
+              <a:t>fearlessly</a:t>
             </a:r>
             <a:endParaRPr lang="en-US" sz="2800" dirty="0"/>
           </a:p>
@@ -18570,7 +19182,7 @@
         </p:nvSpPr>
         <p:spPr>
           <a:xfrm>
-            <a:off x="2938272" y="2258568"/>
+            <a:off x="2221992" y="2258568"/>
             <a:ext cx="1828800" cy="292608"/>
           </a:xfrm>
           <a:prstGeom prst="rect">
@@ -18604,7 +19216,7 @@
         </p:nvSpPr>
         <p:spPr>
           <a:xfrm>
-            <a:off x="2938272" y="2258568"/>
+            <a:off x="2221992" y="2258568"/>
             <a:ext cx="1828800" cy="292608"/>
           </a:xfrm>
           <a:prstGeom prst="rect">
@@ -18643,7 +19255,7 @@
         </p:nvSpPr>
         <p:spPr>
           <a:xfrm>
-            <a:off x="2938272" y="2569464"/>
+            <a:off x="2221992" y="2569464"/>
             <a:ext cx="1828800" cy="201168"/>
           </a:xfrm>
           <a:prstGeom prst="rect">
@@ -18668,7 +19280,7 @@
                 <a:ea typeface="Calibri" pitchFamily="34" charset="-122"/>
                 <a:cs typeface="Calibri" pitchFamily="34" charset="-120"/>
               </a:rPr>
-              <a:t>feeling of danger or dread</a:t>
+              <a:t>to be afraid of</a:t>
             </a:r>
             <a:endParaRPr lang="en-US" sz="850" dirty="0"/>
           </a:p>
@@ -18682,7 +19294,7 @@
         </p:nvSpPr>
         <p:spPr>
           <a:xfrm>
-            <a:off x="5803392" y="2258568"/>
+            <a:off x="4370832" y="2258568"/>
             <a:ext cx="1828800" cy="292608"/>
           </a:xfrm>
           <a:prstGeom prst="rect">
@@ -18691,11 +19303,11 @@
             </a:avLst>
           </a:prstGeom>
           <a:solidFill>
-            <a:srgbClr val="FCE7F3"/>
+            <a:srgbClr val="DDD6FE"/>
           </a:solidFill>
           <a:ln w="19050">
             <a:solidFill>
-              <a:srgbClr val="DB2777"/>
+              <a:srgbClr val="7C3AED"/>
             </a:solidFill>
             <a:prstDash val="solid"/>
           </a:ln>
@@ -18716,7 +19328,7 @@
         </p:nvSpPr>
         <p:spPr>
           <a:xfrm>
-            <a:off x="5803392" y="2258568"/>
+            <a:off x="4370832" y="2258568"/>
             <a:ext cx="1828800" cy="292608"/>
           </a:xfrm>
           <a:prstGeom prst="rect">
@@ -18735,13 +19347,13 @@
             <a:r>
               <a:rPr lang="en-US" sz="1300" b="1" dirty="0">
                 <a:solidFill>
-                  <a:srgbClr val="9D174D"/>
+                  <a:srgbClr val="4C1D95"/>
                 </a:solidFill>
                 <a:latin typeface="Trebuchet MS" pitchFamily="34" charset="0"/>
                 <a:ea typeface="Trebuchet MS" pitchFamily="34" charset="-122"/>
                 <a:cs typeface="Trebuchet MS" pitchFamily="34" charset="-120"/>
               </a:rPr>
-              <a:t>some</a:t>
+              <a:t>less</a:t>
             </a:r>
             <a:endParaRPr lang="en-US" sz="1300" dirty="0"/>
           </a:p>
@@ -18755,7 +19367,7 @@
         </p:nvSpPr>
         <p:spPr>
           <a:xfrm>
-            <a:off x="5803392" y="2569464"/>
+            <a:off x="4370832" y="2569464"/>
             <a:ext cx="1828800" cy="201168"/>
           </a:xfrm>
           <a:prstGeom prst="rect">
@@ -18780,7 +19392,7 @@
                 <a:ea typeface="Calibri" pitchFamily="34" charset="-122"/>
                 <a:cs typeface="Calibri" pitchFamily="34" charset="-120"/>
               </a:rPr>
-              <a:t>causing or tending to</a:t>
+              <a:t>without</a:t>
             </a:r>
             <a:endParaRPr lang="en-US" sz="850" dirty="0"/>
           </a:p>
@@ -18789,6 +19401,118 @@
       <p:sp>
         <p:nvSpPr>
           <p:cNvPr id="22" name="Shape 20"/>
+          <p:cNvSpPr/>
+          <p:nvPr/>
+        </p:nvSpPr>
+        <p:spPr>
+          <a:xfrm>
+            <a:off x="6519672" y="2258568"/>
+            <a:ext cx="1828800" cy="292608"/>
+          </a:xfrm>
+          <a:prstGeom prst="rect">
+            <a:avLst>
+              <a:gd name="adj" fmla="val 25000"/>
+            </a:avLst>
+          </a:prstGeom>
+          <a:solidFill>
+            <a:srgbClr val="FCE7F3"/>
+          </a:solidFill>
+          <a:ln w="19050">
+            <a:solidFill>
+              <a:srgbClr val="DB2777"/>
+            </a:solidFill>
+            <a:prstDash val="solid"/>
+          </a:ln>
+          <a:effectLst>
+            <a:outerShdw sx="100000" sy="100000" kx="0" ky="0" algn="bl" rotWithShape="0" blurRad="101600" dist="38100" dir="8100000">
+              <a:srgbClr val="000000">
+                <a:alpha val="12000"/>
+              </a:srgbClr>
+            </a:outerShdw>
+          </a:effectLst>
+        </p:spPr>
+      </p:sp>
+      <p:sp>
+        <p:nvSpPr>
+          <p:cNvPr id="23" name="Text 21"/>
+          <p:cNvSpPr/>
+          <p:nvPr/>
+        </p:nvSpPr>
+        <p:spPr>
+          <a:xfrm>
+            <a:off x="6519672" y="2258568"/>
+            <a:ext cx="1828800" cy="292608"/>
+          </a:xfrm>
+          <a:prstGeom prst="rect">
+            <a:avLst/>
+          </a:prstGeom>
+          <a:noFill/>
+          <a:ln/>
+        </p:spPr>
+        <p:txBody>
+          <a:bodyPr wrap="square" lIns="0" tIns="0" rIns="0" bIns="0" rtlCol="0" anchor="ctr"/>
+          <a:lstStyle/>
+          <a:p>
+            <a:pPr algn="ctr" indent="0" marL="0">
+              <a:buNone/>
+            </a:pPr>
+            <a:r>
+              <a:rPr lang="en-US" sz="1300" b="1" dirty="0">
+                <a:solidFill>
+                  <a:srgbClr val="9D174D"/>
+                </a:solidFill>
+                <a:latin typeface="Trebuchet MS" pitchFamily="34" charset="0"/>
+                <a:ea typeface="Trebuchet MS" pitchFamily="34" charset="-122"/>
+                <a:cs typeface="Trebuchet MS" pitchFamily="34" charset="-120"/>
+              </a:rPr>
+              <a:t>ly</a:t>
+            </a:r>
+            <a:endParaRPr lang="en-US" sz="1300" dirty="0"/>
+          </a:p>
+        </p:txBody>
+      </p:sp>
+      <p:sp>
+        <p:nvSpPr>
+          <p:cNvPr id="24" name="Text 22"/>
+          <p:cNvSpPr/>
+          <p:nvPr/>
+        </p:nvSpPr>
+        <p:spPr>
+          <a:xfrm>
+            <a:off x="6519672" y="2569464"/>
+            <a:ext cx="1828800" cy="201168"/>
+          </a:xfrm>
+          <a:prstGeom prst="rect">
+            <a:avLst/>
+          </a:prstGeom>
+          <a:noFill/>
+          <a:ln/>
+        </p:spPr>
+        <p:txBody>
+          <a:bodyPr wrap="square" lIns="0" tIns="0" rIns="0" bIns="0" rtlCol="0" anchor="t"/>
+          <a:lstStyle/>
+          <a:p>
+            <a:pPr algn="ctr" indent="0" marL="0">
+              <a:buNone/>
+            </a:pPr>
+            <a:r>
+              <a:rPr lang="en-US" sz="850" dirty="0">
+                <a:solidFill>
+                  <a:srgbClr val="475569"/>
+                </a:solidFill>
+                <a:latin typeface="Calibri" pitchFamily="34" charset="0"/>
+                <a:ea typeface="Calibri" pitchFamily="34" charset="-122"/>
+                <a:cs typeface="Calibri" pitchFamily="34" charset="-120"/>
+              </a:rPr>
+              <a:t>in a way</a:t>
+            </a:r>
+            <a:endParaRPr lang="en-US" sz="850" dirty="0"/>
+          </a:p>
+        </p:txBody>
+      </p:sp>
+      <p:sp>
+        <p:nvSpPr>
+          <p:cNvPr id="25" name="Shape 23"/>
           <p:cNvSpPr/>
           <p:nvPr/>
         </p:nvSpPr>
@@ -18815,7 +19539,7 @@
       </p:sp>
       <p:sp>
         <p:nvSpPr>
-          <p:cNvPr id="23" name="Text 21"/>
+          <p:cNvPr id="26" name="Text 24"/>
           <p:cNvSpPr/>
           <p:nvPr/>
         </p:nvSpPr>
@@ -18854,7 +19578,7 @@
       </p:sp>
       <p:sp>
         <p:nvSpPr>
-          <p:cNvPr id="24" name="Shape 22"/>
+          <p:cNvPr id="27" name="Shape 25"/>
           <p:cNvSpPr/>
           <p:nvPr/>
         </p:nvSpPr>
@@ -18881,7 +19605,7 @@
       </p:sp>
       <p:sp>
         <p:nvSpPr>
-          <p:cNvPr id="25" name="Text 23"/>
+          <p:cNvPr id="28" name="Text 26"/>
           <p:cNvSpPr/>
           <p:nvPr/>
         </p:nvSpPr>
@@ -18920,7 +19644,7 @@
       </p:sp>
       <p:sp>
         <p:nvSpPr>
-          <p:cNvPr id="26" name="Shape 24"/>
+          <p:cNvPr id="29" name="Shape 27"/>
           <p:cNvSpPr/>
           <p:nvPr/>
         </p:nvSpPr>
@@ -18947,7 +19671,7 @@
       </p:sp>
       <p:sp>
         <p:nvSpPr>
-          <p:cNvPr id="27" name="Text 25"/>
+          <p:cNvPr id="30" name="Text 28"/>
           <p:cNvSpPr/>
           <p:nvPr/>
         </p:nvSpPr>
@@ -18986,7 +19710,7 @@
       </p:sp>
       <p:sp>
         <p:nvSpPr>
-          <p:cNvPr id="28" name="Shape 26"/>
+          <p:cNvPr id="31" name="Shape 29"/>
           <p:cNvSpPr/>
           <p:nvPr/>
         </p:nvSpPr>
@@ -19013,7 +19737,7 @@
       </p:sp>
       <p:sp>
         <p:nvSpPr>
-          <p:cNvPr id="29" name="Text 27"/>
+          <p:cNvPr id="32" name="Text 30"/>
           <p:cNvSpPr/>
           <p:nvPr/>
         </p:nvSpPr>
@@ -19336,7 +20060,7 @@
                 <a:ea typeface="Calibri" pitchFamily="34" charset="-122"/>
                 <a:cs typeface="Calibri" pitchFamily="34" charset="-120"/>
               </a:rPr>
-              <a:t>Word Labs  •  wordlabs.app  •  Root: 'fear' = feeling of danger or dread</a:t>
+              <a:t>Word Labs  •  wordlabs.app  •  Root: 'fear' = to be afraid of</a:t>
             </a:r>
             <a:endParaRPr lang="en-US" sz="800" dirty="0"/>
           </a:p>
@@ -19475,7 +20199,7 @@
                 <a:ea typeface="Trebuchet MS" pitchFamily="34" charset="-122"/>
                 <a:cs typeface="Trebuchet MS" pitchFamily="34" charset="-120"/>
               </a:rPr>
-              <a:t>fearsome</a:t>
+              <a:t>fearlessly</a:t>
             </a:r>
             <a:endParaRPr lang="en-US" sz="2800" dirty="0"/>
           </a:p>
@@ -19555,7 +20279,7 @@
         </p:nvSpPr>
         <p:spPr>
           <a:xfrm>
-            <a:off x="2938272" y="2258568"/>
+            <a:off x="2221992" y="2258568"/>
             <a:ext cx="1828800" cy="292608"/>
           </a:xfrm>
           <a:prstGeom prst="rect">
@@ -19589,7 +20313,7 @@
         </p:nvSpPr>
         <p:spPr>
           <a:xfrm>
-            <a:off x="2938272" y="2258568"/>
+            <a:off x="2221992" y="2258568"/>
             <a:ext cx="1828800" cy="292608"/>
           </a:xfrm>
           <a:prstGeom prst="rect">
@@ -19628,7 +20352,7 @@
         </p:nvSpPr>
         <p:spPr>
           <a:xfrm>
-            <a:off x="2938272" y="2569464"/>
+            <a:off x="2221992" y="2569464"/>
             <a:ext cx="1828800" cy="201168"/>
           </a:xfrm>
           <a:prstGeom prst="rect">
@@ -19653,7 +20377,7 @@
                 <a:ea typeface="Calibri" pitchFamily="34" charset="-122"/>
                 <a:cs typeface="Calibri" pitchFamily="34" charset="-120"/>
               </a:rPr>
-              <a:t>feeling of danger or dread</a:t>
+              <a:t>to be afraid of</a:t>
             </a:r>
             <a:endParaRPr lang="en-US" sz="850" dirty="0"/>
           </a:p>
@@ -19667,7 +20391,7 @@
         </p:nvSpPr>
         <p:spPr>
           <a:xfrm>
-            <a:off x="5803392" y="2258568"/>
+            <a:off x="4370832" y="2258568"/>
             <a:ext cx="1828800" cy="292608"/>
           </a:xfrm>
           <a:prstGeom prst="rect">
@@ -19676,11 +20400,11 @@
             </a:avLst>
           </a:prstGeom>
           <a:solidFill>
-            <a:srgbClr val="FCE7F3"/>
+            <a:srgbClr val="DDD6FE"/>
           </a:solidFill>
           <a:ln w="19050">
             <a:solidFill>
-              <a:srgbClr val="DB2777"/>
+              <a:srgbClr val="7C3AED"/>
             </a:solidFill>
             <a:prstDash val="solid"/>
           </a:ln>
@@ -19701,7 +20425,7 @@
         </p:nvSpPr>
         <p:spPr>
           <a:xfrm>
-            <a:off x="5803392" y="2258568"/>
+            <a:off x="4370832" y="2258568"/>
             <a:ext cx="1828800" cy="292608"/>
           </a:xfrm>
           <a:prstGeom prst="rect">
@@ -19720,13 +20444,13 @@
             <a:r>
               <a:rPr lang="en-US" sz="1300" b="1" dirty="0">
                 <a:solidFill>
-                  <a:srgbClr val="9D174D"/>
+                  <a:srgbClr val="4C1D95"/>
                 </a:solidFill>
                 <a:latin typeface="Trebuchet MS" pitchFamily="34" charset="0"/>
                 <a:ea typeface="Trebuchet MS" pitchFamily="34" charset="-122"/>
                 <a:cs typeface="Trebuchet MS" pitchFamily="34" charset="-120"/>
               </a:rPr>
-              <a:t>some</a:t>
+              <a:t>less</a:t>
             </a:r>
             <a:endParaRPr lang="en-US" sz="1300" dirty="0"/>
           </a:p>
@@ -19740,7 +20464,7 @@
         </p:nvSpPr>
         <p:spPr>
           <a:xfrm>
-            <a:off x="5803392" y="2569464"/>
+            <a:off x="4370832" y="2569464"/>
             <a:ext cx="1828800" cy="201168"/>
           </a:xfrm>
           <a:prstGeom prst="rect">
@@ -19765,7 +20489,7 @@
                 <a:ea typeface="Calibri" pitchFamily="34" charset="-122"/>
                 <a:cs typeface="Calibri" pitchFamily="34" charset="-120"/>
               </a:rPr>
-              <a:t>causing or tending to</a:t>
+              <a:t>without</a:t>
             </a:r>
             <a:endParaRPr lang="en-US" sz="850" dirty="0"/>
           </a:p>
@@ -19774,6 +20498,118 @@
       <p:sp>
         <p:nvSpPr>
           <p:cNvPr id="22" name="Shape 20"/>
+          <p:cNvSpPr/>
+          <p:nvPr/>
+        </p:nvSpPr>
+        <p:spPr>
+          <a:xfrm>
+            <a:off x="6519672" y="2258568"/>
+            <a:ext cx="1828800" cy="292608"/>
+          </a:xfrm>
+          <a:prstGeom prst="rect">
+            <a:avLst>
+              <a:gd name="adj" fmla="val 25000"/>
+            </a:avLst>
+          </a:prstGeom>
+          <a:solidFill>
+            <a:srgbClr val="FCE7F3"/>
+          </a:solidFill>
+          <a:ln w="19050">
+            <a:solidFill>
+              <a:srgbClr val="DB2777"/>
+            </a:solidFill>
+            <a:prstDash val="solid"/>
+          </a:ln>
+          <a:effectLst>
+            <a:outerShdw sx="100000" sy="100000" kx="0" ky="0" algn="bl" rotWithShape="0" blurRad="101600" dist="38100" dir="8100000">
+              <a:srgbClr val="000000">
+                <a:alpha val="12000"/>
+              </a:srgbClr>
+            </a:outerShdw>
+          </a:effectLst>
+        </p:spPr>
+      </p:sp>
+      <p:sp>
+        <p:nvSpPr>
+          <p:cNvPr id="23" name="Text 21"/>
+          <p:cNvSpPr/>
+          <p:nvPr/>
+        </p:nvSpPr>
+        <p:spPr>
+          <a:xfrm>
+            <a:off x="6519672" y="2258568"/>
+            <a:ext cx="1828800" cy="292608"/>
+          </a:xfrm>
+          <a:prstGeom prst="rect">
+            <a:avLst/>
+          </a:prstGeom>
+          <a:noFill/>
+          <a:ln/>
+        </p:spPr>
+        <p:txBody>
+          <a:bodyPr wrap="square" lIns="0" tIns="0" rIns="0" bIns="0" rtlCol="0" anchor="ctr"/>
+          <a:lstStyle/>
+          <a:p>
+            <a:pPr algn="ctr" indent="0" marL="0">
+              <a:buNone/>
+            </a:pPr>
+            <a:r>
+              <a:rPr lang="en-US" sz="1300" b="1" dirty="0">
+                <a:solidFill>
+                  <a:srgbClr val="9D174D"/>
+                </a:solidFill>
+                <a:latin typeface="Trebuchet MS" pitchFamily="34" charset="0"/>
+                <a:ea typeface="Trebuchet MS" pitchFamily="34" charset="-122"/>
+                <a:cs typeface="Trebuchet MS" pitchFamily="34" charset="-120"/>
+              </a:rPr>
+              <a:t>ly</a:t>
+            </a:r>
+            <a:endParaRPr lang="en-US" sz="1300" dirty="0"/>
+          </a:p>
+        </p:txBody>
+      </p:sp>
+      <p:sp>
+        <p:nvSpPr>
+          <p:cNvPr id="24" name="Text 22"/>
+          <p:cNvSpPr/>
+          <p:nvPr/>
+        </p:nvSpPr>
+        <p:spPr>
+          <a:xfrm>
+            <a:off x="6519672" y="2569464"/>
+            <a:ext cx="1828800" cy="201168"/>
+          </a:xfrm>
+          <a:prstGeom prst="rect">
+            <a:avLst/>
+          </a:prstGeom>
+          <a:noFill/>
+          <a:ln/>
+        </p:spPr>
+        <p:txBody>
+          <a:bodyPr wrap="square" lIns="0" tIns="0" rIns="0" bIns="0" rtlCol="0" anchor="t"/>
+          <a:lstStyle/>
+          <a:p>
+            <a:pPr algn="ctr" indent="0" marL="0">
+              <a:buNone/>
+            </a:pPr>
+            <a:r>
+              <a:rPr lang="en-US" sz="850" dirty="0">
+                <a:solidFill>
+                  <a:srgbClr val="475569"/>
+                </a:solidFill>
+                <a:latin typeface="Calibri" pitchFamily="34" charset="0"/>
+                <a:ea typeface="Calibri" pitchFamily="34" charset="-122"/>
+                <a:cs typeface="Calibri" pitchFamily="34" charset="-120"/>
+              </a:rPr>
+              <a:t>in a way</a:t>
+            </a:r>
+            <a:endParaRPr lang="en-US" sz="850" dirty="0"/>
+          </a:p>
+        </p:txBody>
+      </p:sp>
+      <p:sp>
+        <p:nvSpPr>
+          <p:cNvPr id="25" name="Shape 23"/>
           <p:cNvSpPr/>
           <p:nvPr/>
         </p:nvSpPr>
@@ -19800,7 +20636,7 @@
       </p:sp>
       <p:sp>
         <p:nvSpPr>
-          <p:cNvPr id="23" name="Text 21"/>
+          <p:cNvPr id="26" name="Text 24"/>
           <p:cNvSpPr/>
           <p:nvPr/>
         </p:nvSpPr>
@@ -19839,7 +20675,7 @@
       </p:sp>
       <p:sp>
         <p:nvSpPr>
-          <p:cNvPr id="24" name="Shape 22"/>
+          <p:cNvPr id="27" name="Shape 25"/>
           <p:cNvSpPr/>
           <p:nvPr/>
         </p:nvSpPr>
@@ -19866,13 +20702,13 @@
       </p:sp>
       <p:sp>
         <p:nvSpPr>
-          <p:cNvPr id="25" name="Shape 23"/>
-          <p:cNvSpPr/>
-          <p:nvPr/>
-        </p:nvSpPr>
-        <p:spPr>
-          <a:xfrm>
-            <a:off x="2999232" y="3364992"/>
+          <p:cNvPr id="28" name="Shape 26"/>
+          <p:cNvSpPr/>
+          <p:nvPr/>
+        </p:nvSpPr>
+        <p:spPr>
+          <a:xfrm>
+            <a:off x="2313432" y="3364992"/>
             <a:ext cx="1645920" cy="475488"/>
           </a:xfrm>
           <a:prstGeom prst="rect">
@@ -19893,13 +20729,13 @@
       </p:sp>
       <p:sp>
         <p:nvSpPr>
-          <p:cNvPr id="26" name="Text 24"/>
-          <p:cNvSpPr/>
-          <p:nvPr/>
-        </p:nvSpPr>
-        <p:spPr>
-          <a:xfrm>
-            <a:off x="2999232" y="3364992"/>
+          <p:cNvPr id="29" name="Text 27"/>
+          <p:cNvSpPr/>
+          <p:nvPr/>
+        </p:nvSpPr>
+        <p:spPr>
+          <a:xfrm>
+            <a:off x="2313432" y="3364992"/>
             <a:ext cx="1645920" cy="475488"/>
           </a:xfrm>
           <a:prstGeom prst="rect">
@@ -19932,14 +20768,14 @@
       </p:sp>
       <p:sp>
         <p:nvSpPr>
-          <p:cNvPr id="27" name="Text 25"/>
-          <p:cNvSpPr/>
-          <p:nvPr/>
-        </p:nvSpPr>
-        <p:spPr>
-          <a:xfrm>
-            <a:off x="4645152" y="3364992"/>
-            <a:ext cx="1097280" cy="475488"/>
+          <p:cNvPr id="30" name="Text 28"/>
+          <p:cNvSpPr/>
+          <p:nvPr/>
+        </p:nvSpPr>
+        <p:spPr>
+          <a:xfrm>
+            <a:off x="3959352" y="3364992"/>
+            <a:ext cx="411480" cy="475488"/>
           </a:xfrm>
           <a:prstGeom prst="rect">
             <a:avLst/>
@@ -19971,13 +20807,13 @@
       </p:sp>
       <p:sp>
         <p:nvSpPr>
-          <p:cNvPr id="28" name="Shape 26"/>
-          <p:cNvSpPr/>
-          <p:nvPr/>
-        </p:nvSpPr>
-        <p:spPr>
-          <a:xfrm>
-            <a:off x="5742432" y="3364992"/>
+          <p:cNvPr id="31" name="Shape 29"/>
+          <p:cNvSpPr/>
+          <p:nvPr/>
+        </p:nvSpPr>
+        <p:spPr>
+          <a:xfrm>
+            <a:off x="4370832" y="3364992"/>
             <a:ext cx="1645920" cy="475488"/>
           </a:xfrm>
           <a:prstGeom prst="rect">
@@ -19998,13 +20834,13 @@
       </p:sp>
       <p:sp>
         <p:nvSpPr>
-          <p:cNvPr id="29" name="Text 27"/>
-          <p:cNvSpPr/>
-          <p:nvPr/>
-        </p:nvSpPr>
-        <p:spPr>
-          <a:xfrm>
-            <a:off x="5742432" y="3364992"/>
+          <p:cNvPr id="32" name="Text 30"/>
+          <p:cNvSpPr/>
+          <p:nvPr/>
+        </p:nvSpPr>
+        <p:spPr>
+          <a:xfrm>
+            <a:off x="4370832" y="3364992"/>
             <a:ext cx="1645920" cy="475488"/>
           </a:xfrm>
           <a:prstGeom prst="rect">
@@ -20029,7 +20865,7 @@
                 <a:ea typeface="Trebuchet MS" pitchFamily="34" charset="-122"/>
                 <a:cs typeface="Trebuchet MS" pitchFamily="34" charset="-120"/>
               </a:rPr>
-              <a:t>some</a:t>
+              <a:t>less</a:t>
             </a:r>
             <a:endParaRPr lang="en-US" sz="1400" dirty="0"/>
           </a:p>
@@ -20037,7 +20873,112 @@
       </p:sp>
       <p:sp>
         <p:nvSpPr>
-          <p:cNvPr id="30" name="Shape 28"/>
+          <p:cNvPr id="33" name="Text 31"/>
+          <p:cNvSpPr/>
+          <p:nvPr/>
+        </p:nvSpPr>
+        <p:spPr>
+          <a:xfrm>
+            <a:off x="6016752" y="3364992"/>
+            <a:ext cx="411480" cy="475488"/>
+          </a:xfrm>
+          <a:prstGeom prst="rect">
+            <a:avLst/>
+          </a:prstGeom>
+          <a:noFill/>
+          <a:ln/>
+        </p:spPr>
+        <p:txBody>
+          <a:bodyPr wrap="square" lIns="0" tIns="0" rIns="0" bIns="0" rtlCol="0" anchor="ctr"/>
+          <a:lstStyle/>
+          <a:p>
+            <a:pPr algn="ctr" indent="0" marL="0">
+              <a:buNone/>
+            </a:pPr>
+            <a:r>
+              <a:rPr lang="en-US" sz="1600" b="1" dirty="0">
+                <a:solidFill>
+                  <a:srgbClr val="0D9488"/>
+                </a:solidFill>
+                <a:latin typeface="Trebuchet MS" pitchFamily="34" charset="0"/>
+                <a:ea typeface="Trebuchet MS" pitchFamily="34" charset="-122"/>
+                <a:cs typeface="Trebuchet MS" pitchFamily="34" charset="-120"/>
+              </a:rPr>
+              <a:t>·</a:t>
+            </a:r>
+            <a:endParaRPr lang="en-US" sz="1600" dirty="0"/>
+          </a:p>
+        </p:txBody>
+      </p:sp>
+      <p:sp>
+        <p:nvSpPr>
+          <p:cNvPr id="34" name="Shape 32"/>
+          <p:cNvSpPr/>
+          <p:nvPr/>
+        </p:nvSpPr>
+        <p:spPr>
+          <a:xfrm>
+            <a:off x="6428232" y="3364992"/>
+            <a:ext cx="1645920" cy="475488"/>
+          </a:xfrm>
+          <a:prstGeom prst="rect">
+            <a:avLst>
+              <a:gd name="adj" fmla="val 9615"/>
+            </a:avLst>
+          </a:prstGeom>
+          <a:solidFill>
+            <a:srgbClr val="FFFFFF"/>
+          </a:solidFill>
+          <a:ln w="12700">
+            <a:solidFill>
+              <a:srgbClr val="0D9488"/>
+            </a:solidFill>
+            <a:prstDash val="solid"/>
+          </a:ln>
+        </p:spPr>
+      </p:sp>
+      <p:sp>
+        <p:nvSpPr>
+          <p:cNvPr id="35" name="Text 33"/>
+          <p:cNvSpPr/>
+          <p:nvPr/>
+        </p:nvSpPr>
+        <p:spPr>
+          <a:xfrm>
+            <a:off x="6428232" y="3364992"/>
+            <a:ext cx="1645920" cy="475488"/>
+          </a:xfrm>
+          <a:prstGeom prst="rect">
+            <a:avLst/>
+          </a:prstGeom>
+          <a:noFill/>
+          <a:ln/>
+        </p:spPr>
+        <p:txBody>
+          <a:bodyPr wrap="square" lIns="0" tIns="0" rIns="0" bIns="0" rtlCol="0" anchor="ctr"/>
+          <a:lstStyle/>
+          <a:p>
+            <a:pPr algn="ctr" indent="0" marL="0">
+              <a:buNone/>
+            </a:pPr>
+            <a:r>
+              <a:rPr lang="en-US" sz="1400" b="1" dirty="0">
+                <a:solidFill>
+                  <a:srgbClr val="0D9488"/>
+                </a:solidFill>
+                <a:latin typeface="Trebuchet MS" pitchFamily="34" charset="0"/>
+                <a:ea typeface="Trebuchet MS" pitchFamily="34" charset="-122"/>
+                <a:cs typeface="Trebuchet MS" pitchFamily="34" charset="-120"/>
+              </a:rPr>
+              <a:t>ly</a:t>
+            </a:r>
+            <a:endParaRPr lang="en-US" sz="1400" dirty="0"/>
+          </a:p>
+        </p:txBody>
+      </p:sp>
+      <p:sp>
+        <p:nvSpPr>
+          <p:cNvPr id="36" name="Shape 34"/>
           <p:cNvSpPr/>
           <p:nvPr/>
         </p:nvSpPr>
@@ -20064,7 +21005,7 @@
       </p:sp>
       <p:sp>
         <p:nvSpPr>
-          <p:cNvPr id="31" name="Text 29"/>
+          <p:cNvPr id="37" name="Text 35"/>
           <p:cNvSpPr/>
           <p:nvPr/>
         </p:nvSpPr>
@@ -20103,7 +21044,7 @@
       </p:sp>
       <p:sp>
         <p:nvSpPr>
-          <p:cNvPr id="32" name="Shape 30"/>
+          <p:cNvPr id="38" name="Shape 36"/>
           <p:cNvSpPr/>
           <p:nvPr/>
         </p:nvSpPr>
@@ -20130,7 +21071,7 @@
       </p:sp>
       <p:sp>
         <p:nvSpPr>
-          <p:cNvPr id="33" name="Text 31"/>
+          <p:cNvPr id="39" name="Text 37"/>
           <p:cNvSpPr/>
           <p:nvPr/>
         </p:nvSpPr>
@@ -20453,7 +21394,7 @@
                 <a:ea typeface="Calibri" pitchFamily="34" charset="-122"/>
                 <a:cs typeface="Calibri" pitchFamily="34" charset="-120"/>
               </a:rPr>
-              <a:t>Word Labs  •  wordlabs.app  •  Root: 'fear' = feeling of danger or dread</a:t>
+              <a:t>Word Labs  •  wordlabs.app  •  Root: 'fear' = to be afraid of</a:t>
             </a:r>
             <a:endParaRPr lang="en-US" sz="800" dirty="0"/>
           </a:p>
@@ -20592,7 +21533,7 @@
                 <a:ea typeface="Trebuchet MS" pitchFamily="34" charset="-122"/>
                 <a:cs typeface="Trebuchet MS" pitchFamily="34" charset="-120"/>
               </a:rPr>
-              <a:t>fearsome</a:t>
+              <a:t>fearlessly</a:t>
             </a:r>
             <a:endParaRPr lang="en-US" sz="2800" dirty="0"/>
           </a:p>
@@ -20672,7 +21613,7 @@
         </p:nvSpPr>
         <p:spPr>
           <a:xfrm>
-            <a:off x="2938272" y="2258568"/>
+            <a:off x="2221992" y="2258568"/>
             <a:ext cx="1828800" cy="292608"/>
           </a:xfrm>
           <a:prstGeom prst="rect">
@@ -20706,7 +21647,7 @@
         </p:nvSpPr>
         <p:spPr>
           <a:xfrm>
-            <a:off x="2938272" y="2258568"/>
+            <a:off x="2221992" y="2258568"/>
             <a:ext cx="1828800" cy="292608"/>
           </a:xfrm>
           <a:prstGeom prst="rect">
@@ -20745,7 +21686,7 @@
         </p:nvSpPr>
         <p:spPr>
           <a:xfrm>
-            <a:off x="2938272" y="2569464"/>
+            <a:off x="2221992" y="2569464"/>
             <a:ext cx="1828800" cy="201168"/>
           </a:xfrm>
           <a:prstGeom prst="rect">
@@ -20770,7 +21711,7 @@
                 <a:ea typeface="Calibri" pitchFamily="34" charset="-122"/>
                 <a:cs typeface="Calibri" pitchFamily="34" charset="-120"/>
               </a:rPr>
-              <a:t>feeling of danger or dread</a:t>
+              <a:t>to be afraid of</a:t>
             </a:r>
             <a:endParaRPr lang="en-US" sz="850" dirty="0"/>
           </a:p>
@@ -20784,7 +21725,7 @@
         </p:nvSpPr>
         <p:spPr>
           <a:xfrm>
-            <a:off x="5803392" y="2258568"/>
+            <a:off x="4370832" y="2258568"/>
             <a:ext cx="1828800" cy="292608"/>
           </a:xfrm>
           <a:prstGeom prst="rect">
@@ -20793,11 +21734,11 @@
             </a:avLst>
           </a:prstGeom>
           <a:solidFill>
-            <a:srgbClr val="FCE7F3"/>
+            <a:srgbClr val="DDD6FE"/>
           </a:solidFill>
           <a:ln w="19050">
             <a:solidFill>
-              <a:srgbClr val="DB2777"/>
+              <a:srgbClr val="7C3AED"/>
             </a:solidFill>
             <a:prstDash val="solid"/>
           </a:ln>
@@ -20818,7 +21759,7 @@
         </p:nvSpPr>
         <p:spPr>
           <a:xfrm>
-            <a:off x="5803392" y="2258568"/>
+            <a:off x="4370832" y="2258568"/>
             <a:ext cx="1828800" cy="292608"/>
           </a:xfrm>
           <a:prstGeom prst="rect">
@@ -20837,13 +21778,13 @@
             <a:r>
               <a:rPr lang="en-US" sz="1300" b="1" dirty="0">
                 <a:solidFill>
-                  <a:srgbClr val="9D174D"/>
+                  <a:srgbClr val="4C1D95"/>
                 </a:solidFill>
                 <a:latin typeface="Trebuchet MS" pitchFamily="34" charset="0"/>
                 <a:ea typeface="Trebuchet MS" pitchFamily="34" charset="-122"/>
                 <a:cs typeface="Trebuchet MS" pitchFamily="34" charset="-120"/>
               </a:rPr>
-              <a:t>some</a:t>
+              <a:t>less</a:t>
             </a:r>
             <a:endParaRPr lang="en-US" sz="1300" dirty="0"/>
           </a:p>
@@ -20857,7 +21798,7 @@
         </p:nvSpPr>
         <p:spPr>
           <a:xfrm>
-            <a:off x="5803392" y="2569464"/>
+            <a:off x="4370832" y="2569464"/>
             <a:ext cx="1828800" cy="201168"/>
           </a:xfrm>
           <a:prstGeom prst="rect">
@@ -20882,7 +21823,7 @@
                 <a:ea typeface="Calibri" pitchFamily="34" charset="-122"/>
                 <a:cs typeface="Calibri" pitchFamily="34" charset="-120"/>
               </a:rPr>
-              <a:t>causing or tending to</a:t>
+              <a:t>without</a:t>
             </a:r>
             <a:endParaRPr lang="en-US" sz="850" dirty="0"/>
           </a:p>
@@ -20891,6 +21832,118 @@
       <p:sp>
         <p:nvSpPr>
           <p:cNvPr id="22" name="Shape 20"/>
+          <p:cNvSpPr/>
+          <p:nvPr/>
+        </p:nvSpPr>
+        <p:spPr>
+          <a:xfrm>
+            <a:off x="6519672" y="2258568"/>
+            <a:ext cx="1828800" cy="292608"/>
+          </a:xfrm>
+          <a:prstGeom prst="rect">
+            <a:avLst>
+              <a:gd name="adj" fmla="val 25000"/>
+            </a:avLst>
+          </a:prstGeom>
+          <a:solidFill>
+            <a:srgbClr val="FCE7F3"/>
+          </a:solidFill>
+          <a:ln w="19050">
+            <a:solidFill>
+              <a:srgbClr val="DB2777"/>
+            </a:solidFill>
+            <a:prstDash val="solid"/>
+          </a:ln>
+          <a:effectLst>
+            <a:outerShdw sx="100000" sy="100000" kx="0" ky="0" algn="bl" rotWithShape="0" blurRad="101600" dist="38100" dir="8100000">
+              <a:srgbClr val="000000">
+                <a:alpha val="12000"/>
+              </a:srgbClr>
+            </a:outerShdw>
+          </a:effectLst>
+        </p:spPr>
+      </p:sp>
+      <p:sp>
+        <p:nvSpPr>
+          <p:cNvPr id="23" name="Text 21"/>
+          <p:cNvSpPr/>
+          <p:nvPr/>
+        </p:nvSpPr>
+        <p:spPr>
+          <a:xfrm>
+            <a:off x="6519672" y="2258568"/>
+            <a:ext cx="1828800" cy="292608"/>
+          </a:xfrm>
+          <a:prstGeom prst="rect">
+            <a:avLst/>
+          </a:prstGeom>
+          <a:noFill/>
+          <a:ln/>
+        </p:spPr>
+        <p:txBody>
+          <a:bodyPr wrap="square" lIns="0" tIns="0" rIns="0" bIns="0" rtlCol="0" anchor="ctr"/>
+          <a:lstStyle/>
+          <a:p>
+            <a:pPr algn="ctr" indent="0" marL="0">
+              <a:buNone/>
+            </a:pPr>
+            <a:r>
+              <a:rPr lang="en-US" sz="1300" b="1" dirty="0">
+                <a:solidFill>
+                  <a:srgbClr val="9D174D"/>
+                </a:solidFill>
+                <a:latin typeface="Trebuchet MS" pitchFamily="34" charset="0"/>
+                <a:ea typeface="Trebuchet MS" pitchFamily="34" charset="-122"/>
+                <a:cs typeface="Trebuchet MS" pitchFamily="34" charset="-120"/>
+              </a:rPr>
+              <a:t>ly</a:t>
+            </a:r>
+            <a:endParaRPr lang="en-US" sz="1300" dirty="0"/>
+          </a:p>
+        </p:txBody>
+      </p:sp>
+      <p:sp>
+        <p:nvSpPr>
+          <p:cNvPr id="24" name="Text 22"/>
+          <p:cNvSpPr/>
+          <p:nvPr/>
+        </p:nvSpPr>
+        <p:spPr>
+          <a:xfrm>
+            <a:off x="6519672" y="2569464"/>
+            <a:ext cx="1828800" cy="201168"/>
+          </a:xfrm>
+          <a:prstGeom prst="rect">
+            <a:avLst/>
+          </a:prstGeom>
+          <a:noFill/>
+          <a:ln/>
+        </p:spPr>
+        <p:txBody>
+          <a:bodyPr wrap="square" lIns="0" tIns="0" rIns="0" bIns="0" rtlCol="0" anchor="t"/>
+          <a:lstStyle/>
+          <a:p>
+            <a:pPr algn="ctr" indent="0" marL="0">
+              <a:buNone/>
+            </a:pPr>
+            <a:r>
+              <a:rPr lang="en-US" sz="850" dirty="0">
+                <a:solidFill>
+                  <a:srgbClr val="475569"/>
+                </a:solidFill>
+                <a:latin typeface="Calibri" pitchFamily="34" charset="0"/>
+                <a:ea typeface="Calibri" pitchFamily="34" charset="-122"/>
+                <a:cs typeface="Calibri" pitchFamily="34" charset="-120"/>
+              </a:rPr>
+              <a:t>in a way</a:t>
+            </a:r>
+            <a:endParaRPr lang="en-US" sz="850" dirty="0"/>
+          </a:p>
+        </p:txBody>
+      </p:sp>
+      <p:sp>
+        <p:nvSpPr>
+          <p:cNvPr id="25" name="Shape 23"/>
           <p:cNvSpPr/>
           <p:nvPr/>
         </p:nvSpPr>
@@ -20917,7 +21970,7 @@
       </p:sp>
       <p:sp>
         <p:nvSpPr>
-          <p:cNvPr id="23" name="Text 21"/>
+          <p:cNvPr id="26" name="Text 24"/>
           <p:cNvSpPr/>
           <p:nvPr/>
         </p:nvSpPr>
@@ -20956,7 +22009,7 @@
       </p:sp>
       <p:sp>
         <p:nvSpPr>
-          <p:cNvPr id="24" name="Shape 22"/>
+          <p:cNvPr id="27" name="Shape 25"/>
           <p:cNvSpPr/>
           <p:nvPr/>
         </p:nvSpPr>
@@ -20983,13 +22036,13 @@
       </p:sp>
       <p:sp>
         <p:nvSpPr>
-          <p:cNvPr id="25" name="Shape 23"/>
-          <p:cNvSpPr/>
-          <p:nvPr/>
-        </p:nvSpPr>
-        <p:spPr>
-          <a:xfrm>
-            <a:off x="2999232" y="3364992"/>
+          <p:cNvPr id="28" name="Shape 26"/>
+          <p:cNvSpPr/>
+          <p:nvPr/>
+        </p:nvSpPr>
+        <p:spPr>
+          <a:xfrm>
+            <a:off x="2313432" y="3364992"/>
             <a:ext cx="1645920" cy="475488"/>
           </a:xfrm>
           <a:prstGeom prst="rect">
@@ -21010,13 +22063,13 @@
       </p:sp>
       <p:sp>
         <p:nvSpPr>
-          <p:cNvPr id="26" name="Text 24"/>
-          <p:cNvSpPr/>
-          <p:nvPr/>
-        </p:nvSpPr>
-        <p:spPr>
-          <a:xfrm>
-            <a:off x="2999232" y="3364992"/>
+          <p:cNvPr id="29" name="Text 27"/>
+          <p:cNvSpPr/>
+          <p:nvPr/>
+        </p:nvSpPr>
+        <p:spPr>
+          <a:xfrm>
+            <a:off x="2313432" y="3364992"/>
             <a:ext cx="1645920" cy="475488"/>
           </a:xfrm>
           <a:prstGeom prst="rect">
@@ -21049,14 +22102,14 @@
       </p:sp>
       <p:sp>
         <p:nvSpPr>
-          <p:cNvPr id="27" name="Text 25"/>
-          <p:cNvSpPr/>
-          <p:nvPr/>
-        </p:nvSpPr>
-        <p:spPr>
-          <a:xfrm>
-            <a:off x="4645152" y="3364992"/>
-            <a:ext cx="1097280" cy="475488"/>
+          <p:cNvPr id="30" name="Text 28"/>
+          <p:cNvSpPr/>
+          <p:nvPr/>
+        </p:nvSpPr>
+        <p:spPr>
+          <a:xfrm>
+            <a:off x="3959352" y="3364992"/>
+            <a:ext cx="411480" cy="475488"/>
           </a:xfrm>
           <a:prstGeom prst="rect">
             <a:avLst/>
@@ -21088,13 +22141,13 @@
       </p:sp>
       <p:sp>
         <p:nvSpPr>
-          <p:cNvPr id="28" name="Shape 26"/>
-          <p:cNvSpPr/>
-          <p:nvPr/>
-        </p:nvSpPr>
-        <p:spPr>
-          <a:xfrm>
-            <a:off x="5742432" y="3364992"/>
+          <p:cNvPr id="31" name="Shape 29"/>
+          <p:cNvSpPr/>
+          <p:nvPr/>
+        </p:nvSpPr>
+        <p:spPr>
+          <a:xfrm>
+            <a:off x="4370832" y="3364992"/>
             <a:ext cx="1645920" cy="475488"/>
           </a:xfrm>
           <a:prstGeom prst="rect">
@@ -21115,13 +22168,13 @@
       </p:sp>
       <p:sp>
         <p:nvSpPr>
-          <p:cNvPr id="29" name="Text 27"/>
-          <p:cNvSpPr/>
-          <p:nvPr/>
-        </p:nvSpPr>
-        <p:spPr>
-          <a:xfrm>
-            <a:off x="5742432" y="3364992"/>
+          <p:cNvPr id="32" name="Text 30"/>
+          <p:cNvSpPr/>
+          <p:nvPr/>
+        </p:nvSpPr>
+        <p:spPr>
+          <a:xfrm>
+            <a:off x="4370832" y="3364992"/>
             <a:ext cx="1645920" cy="475488"/>
           </a:xfrm>
           <a:prstGeom prst="rect">
@@ -21146,7 +22199,7 @@
                 <a:ea typeface="Trebuchet MS" pitchFamily="34" charset="-122"/>
                 <a:cs typeface="Trebuchet MS" pitchFamily="34" charset="-120"/>
               </a:rPr>
-              <a:t>some</a:t>
+              <a:t>less</a:t>
             </a:r>
             <a:endParaRPr lang="en-US" sz="1400" dirty="0"/>
           </a:p>
@@ -21154,7 +22207,112 @@
       </p:sp>
       <p:sp>
         <p:nvSpPr>
-          <p:cNvPr id="30" name="Shape 28"/>
+          <p:cNvPr id="33" name="Text 31"/>
+          <p:cNvSpPr/>
+          <p:nvPr/>
+        </p:nvSpPr>
+        <p:spPr>
+          <a:xfrm>
+            <a:off x="6016752" y="3364992"/>
+            <a:ext cx="411480" cy="475488"/>
+          </a:xfrm>
+          <a:prstGeom prst="rect">
+            <a:avLst/>
+          </a:prstGeom>
+          <a:noFill/>
+          <a:ln/>
+        </p:spPr>
+        <p:txBody>
+          <a:bodyPr wrap="square" lIns="0" tIns="0" rIns="0" bIns="0" rtlCol="0" anchor="ctr"/>
+          <a:lstStyle/>
+          <a:p>
+            <a:pPr algn="ctr" indent="0" marL="0">
+              <a:buNone/>
+            </a:pPr>
+            <a:r>
+              <a:rPr lang="en-US" sz="1600" b="1" dirty="0">
+                <a:solidFill>
+                  <a:srgbClr val="0D9488"/>
+                </a:solidFill>
+                <a:latin typeface="Trebuchet MS" pitchFamily="34" charset="0"/>
+                <a:ea typeface="Trebuchet MS" pitchFamily="34" charset="-122"/>
+                <a:cs typeface="Trebuchet MS" pitchFamily="34" charset="-120"/>
+              </a:rPr>
+              <a:t>·</a:t>
+            </a:r>
+            <a:endParaRPr lang="en-US" sz="1600" dirty="0"/>
+          </a:p>
+        </p:txBody>
+      </p:sp>
+      <p:sp>
+        <p:nvSpPr>
+          <p:cNvPr id="34" name="Shape 32"/>
+          <p:cNvSpPr/>
+          <p:nvPr/>
+        </p:nvSpPr>
+        <p:spPr>
+          <a:xfrm>
+            <a:off x="6428232" y="3364992"/>
+            <a:ext cx="1645920" cy="475488"/>
+          </a:xfrm>
+          <a:prstGeom prst="rect">
+            <a:avLst>
+              <a:gd name="adj" fmla="val 9615"/>
+            </a:avLst>
+          </a:prstGeom>
+          <a:solidFill>
+            <a:srgbClr val="FFFFFF"/>
+          </a:solidFill>
+          <a:ln w="12700">
+            <a:solidFill>
+              <a:srgbClr val="0D9488"/>
+            </a:solidFill>
+            <a:prstDash val="solid"/>
+          </a:ln>
+        </p:spPr>
+      </p:sp>
+      <p:sp>
+        <p:nvSpPr>
+          <p:cNvPr id="35" name="Text 33"/>
+          <p:cNvSpPr/>
+          <p:nvPr/>
+        </p:nvSpPr>
+        <p:spPr>
+          <a:xfrm>
+            <a:off x="6428232" y="3364992"/>
+            <a:ext cx="1645920" cy="475488"/>
+          </a:xfrm>
+          <a:prstGeom prst="rect">
+            <a:avLst/>
+          </a:prstGeom>
+          <a:noFill/>
+          <a:ln/>
+        </p:spPr>
+        <p:txBody>
+          <a:bodyPr wrap="square" lIns="0" tIns="0" rIns="0" bIns="0" rtlCol="0" anchor="ctr"/>
+          <a:lstStyle/>
+          <a:p>
+            <a:pPr algn="ctr" indent="0" marL="0">
+              <a:buNone/>
+            </a:pPr>
+            <a:r>
+              <a:rPr lang="en-US" sz="1400" b="1" dirty="0">
+                <a:solidFill>
+                  <a:srgbClr val="0D9488"/>
+                </a:solidFill>
+                <a:latin typeface="Trebuchet MS" pitchFamily="34" charset="0"/>
+                <a:ea typeface="Trebuchet MS" pitchFamily="34" charset="-122"/>
+                <a:cs typeface="Trebuchet MS" pitchFamily="34" charset="-120"/>
+              </a:rPr>
+              <a:t>ly</a:t>
+            </a:r>
+            <a:endParaRPr lang="en-US" sz="1400" dirty="0"/>
+          </a:p>
+        </p:txBody>
+      </p:sp>
+      <p:sp>
+        <p:nvSpPr>
+          <p:cNvPr id="36" name="Shape 34"/>
           <p:cNvSpPr/>
           <p:nvPr/>
         </p:nvSpPr>
@@ -21181,7 +22339,7 @@
       </p:sp>
       <p:sp>
         <p:nvSpPr>
-          <p:cNvPr id="31" name="Text 29"/>
+          <p:cNvPr id="37" name="Text 35"/>
           <p:cNvSpPr/>
           <p:nvPr/>
         </p:nvSpPr>
@@ -21220,7 +22378,7 @@
       </p:sp>
       <p:sp>
         <p:nvSpPr>
-          <p:cNvPr id="32" name="Shape 30"/>
+          <p:cNvPr id="38" name="Shape 36"/>
           <p:cNvSpPr/>
           <p:nvPr/>
         </p:nvSpPr>
@@ -21247,13 +22405,13 @@
       </p:sp>
       <p:sp>
         <p:nvSpPr>
-          <p:cNvPr id="33" name="Shape 31"/>
-          <p:cNvSpPr/>
-          <p:nvPr/>
-        </p:nvSpPr>
-        <p:spPr>
-          <a:xfrm>
-            <a:off x="2427732" y="4169664"/>
+          <p:cNvPr id="39" name="Shape 37"/>
+          <p:cNvSpPr/>
+          <p:nvPr/>
+        </p:nvSpPr>
+        <p:spPr>
+          <a:xfrm>
+            <a:off x="2124837" y="4169664"/>
             <a:ext cx="685800" cy="475488"/>
           </a:xfrm>
           <a:prstGeom prst="rect">
@@ -21274,13 +22432,13 @@
       </p:sp>
       <p:sp>
         <p:nvSpPr>
-          <p:cNvPr id="34" name="Text 32"/>
-          <p:cNvSpPr/>
-          <p:nvPr/>
-        </p:nvSpPr>
-        <p:spPr>
-          <a:xfrm>
-            <a:off x="2427732" y="4169664"/>
+          <p:cNvPr id="40" name="Text 38"/>
+          <p:cNvSpPr/>
+          <p:nvPr/>
+        </p:nvSpPr>
+        <p:spPr>
+          <a:xfrm>
+            <a:off x="2124837" y="4169664"/>
             <a:ext cx="685800" cy="475488"/>
           </a:xfrm>
           <a:prstGeom prst="rect">
@@ -21313,13 +22471,13 @@
       </p:sp>
       <p:sp>
         <p:nvSpPr>
-          <p:cNvPr id="35" name="Shape 33"/>
-          <p:cNvSpPr/>
-          <p:nvPr/>
-        </p:nvSpPr>
-        <p:spPr>
-          <a:xfrm>
-            <a:off x="3639312" y="4169664"/>
+          <p:cNvPr id="41" name="Shape 39"/>
+          <p:cNvSpPr/>
+          <p:nvPr/>
+        </p:nvSpPr>
+        <p:spPr>
+          <a:xfrm>
+            <a:off x="3033522" y="4169664"/>
             <a:ext cx="685800" cy="475488"/>
           </a:xfrm>
           <a:prstGeom prst="rect">
@@ -21340,13 +22498,13 @@
       </p:sp>
       <p:sp>
         <p:nvSpPr>
-          <p:cNvPr id="36" name="Text 34"/>
-          <p:cNvSpPr/>
-          <p:nvPr/>
-        </p:nvSpPr>
-        <p:spPr>
-          <a:xfrm>
-            <a:off x="3639312" y="4169664"/>
+          <p:cNvPr id="42" name="Text 40"/>
+          <p:cNvSpPr/>
+          <p:nvPr/>
+        </p:nvSpPr>
+        <p:spPr>
+          <a:xfrm>
+            <a:off x="3033522" y="4169664"/>
             <a:ext cx="685800" cy="475488"/>
           </a:xfrm>
           <a:prstGeom prst="rect">
@@ -21379,13 +22537,13 @@
       </p:sp>
       <p:sp>
         <p:nvSpPr>
-          <p:cNvPr id="37" name="Shape 35"/>
-          <p:cNvSpPr/>
-          <p:nvPr/>
-        </p:nvSpPr>
-        <p:spPr>
-          <a:xfrm>
-            <a:off x="4850892" y="4169664"/>
+          <p:cNvPr id="43" name="Shape 41"/>
+          <p:cNvSpPr/>
+          <p:nvPr/>
+        </p:nvSpPr>
+        <p:spPr>
+          <a:xfrm>
+            <a:off x="3942207" y="4169664"/>
             <a:ext cx="685800" cy="475488"/>
           </a:xfrm>
           <a:prstGeom prst="rect">
@@ -21406,13 +22564,13 @@
       </p:sp>
       <p:sp>
         <p:nvSpPr>
-          <p:cNvPr id="38" name="Text 36"/>
-          <p:cNvSpPr/>
-          <p:nvPr/>
-        </p:nvSpPr>
-        <p:spPr>
-          <a:xfrm>
-            <a:off x="4850892" y="4169664"/>
+          <p:cNvPr id="44" name="Text 42"/>
+          <p:cNvSpPr/>
+          <p:nvPr/>
+        </p:nvSpPr>
+        <p:spPr>
+          <a:xfrm>
+            <a:off x="3942207" y="4169664"/>
             <a:ext cx="685800" cy="475488"/>
           </a:xfrm>
           <a:prstGeom prst="rect">
@@ -21437,7 +22595,7 @@
                 <a:ea typeface="Trebuchet MS" pitchFamily="34" charset="-122"/>
                 <a:cs typeface="Trebuchet MS" pitchFamily="34" charset="-120"/>
               </a:rPr>
-              <a:t>s</a:t>
+              <a:t>l</a:t>
             </a:r>
             <a:endParaRPr lang="en-US" sz="900" dirty="0"/>
           </a:p>
@@ -21445,13 +22603,13 @@
       </p:sp>
       <p:sp>
         <p:nvSpPr>
-          <p:cNvPr id="39" name="Shape 37"/>
-          <p:cNvSpPr/>
-          <p:nvPr/>
-        </p:nvSpPr>
-        <p:spPr>
-          <a:xfrm>
-            <a:off x="6062472" y="4169664"/>
+          <p:cNvPr id="45" name="Shape 43"/>
+          <p:cNvSpPr/>
+          <p:nvPr/>
+        </p:nvSpPr>
+        <p:spPr>
+          <a:xfrm>
+            <a:off x="4850892" y="4169664"/>
             <a:ext cx="685800" cy="475488"/>
           </a:xfrm>
           <a:prstGeom prst="rect">
@@ -21472,13 +22630,13 @@
       </p:sp>
       <p:sp>
         <p:nvSpPr>
-          <p:cNvPr id="40" name="Text 38"/>
-          <p:cNvSpPr/>
-          <p:nvPr/>
-        </p:nvSpPr>
-        <p:spPr>
-          <a:xfrm>
-            <a:off x="6062472" y="4169664"/>
+          <p:cNvPr id="46" name="Text 44"/>
+          <p:cNvSpPr/>
+          <p:nvPr/>
+        </p:nvSpPr>
+        <p:spPr>
+          <a:xfrm>
+            <a:off x="4850892" y="4169664"/>
             <a:ext cx="685800" cy="475488"/>
           </a:xfrm>
           <a:prstGeom prst="rect">
@@ -21503,7 +22661,7 @@
                 <a:ea typeface="Trebuchet MS" pitchFamily="34" charset="-122"/>
                 <a:cs typeface="Trebuchet MS" pitchFamily="34" charset="-120"/>
               </a:rPr>
-              <a:t>o</a:t>
+              <a:t>e</a:t>
             </a:r>
             <a:endParaRPr lang="en-US" sz="900" dirty="0"/>
           </a:p>
@@ -21511,13 +22669,13 @@
       </p:sp>
       <p:sp>
         <p:nvSpPr>
-          <p:cNvPr id="41" name="Shape 39"/>
-          <p:cNvSpPr/>
-          <p:nvPr/>
-        </p:nvSpPr>
-        <p:spPr>
-          <a:xfrm>
-            <a:off x="7274052" y="4169664"/>
+          <p:cNvPr id="47" name="Shape 45"/>
+          <p:cNvSpPr/>
+          <p:nvPr/>
+        </p:nvSpPr>
+        <p:spPr>
+          <a:xfrm>
+            <a:off x="5759577" y="4169664"/>
             <a:ext cx="685800" cy="475488"/>
           </a:xfrm>
           <a:prstGeom prst="rect">
@@ -21538,13 +22696,13 @@
       </p:sp>
       <p:sp>
         <p:nvSpPr>
-          <p:cNvPr id="42" name="Text 40"/>
-          <p:cNvSpPr/>
-          <p:nvPr/>
-        </p:nvSpPr>
-        <p:spPr>
-          <a:xfrm>
-            <a:off x="7274052" y="4169664"/>
+          <p:cNvPr id="48" name="Text 46"/>
+          <p:cNvSpPr/>
+          <p:nvPr/>
+        </p:nvSpPr>
+        <p:spPr>
+          <a:xfrm>
+            <a:off x="5759577" y="4169664"/>
             <a:ext cx="685800" cy="475488"/>
           </a:xfrm>
           <a:prstGeom prst="rect">
@@ -21569,7 +22727,139 @@
                 <a:ea typeface="Trebuchet MS" pitchFamily="34" charset="-122"/>
                 <a:cs typeface="Trebuchet MS" pitchFamily="34" charset="-120"/>
               </a:rPr>
-              <a:t>me</a:t>
+              <a:t>ss</a:t>
+            </a:r>
+            <a:endParaRPr lang="en-US" sz="900" dirty="0"/>
+          </a:p>
+        </p:txBody>
+      </p:sp>
+      <p:sp>
+        <p:nvSpPr>
+          <p:cNvPr id="49" name="Shape 47"/>
+          <p:cNvSpPr/>
+          <p:nvPr/>
+        </p:nvSpPr>
+        <p:spPr>
+          <a:xfrm>
+            <a:off x="6668262" y="4169664"/>
+            <a:ext cx="685800" cy="475488"/>
+          </a:xfrm>
+          <a:prstGeom prst="rect">
+            <a:avLst>
+              <a:gd name="adj" fmla="val 7692"/>
+            </a:avLst>
+          </a:prstGeom>
+          <a:solidFill>
+            <a:srgbClr val="FFFFFF"/>
+          </a:solidFill>
+          <a:ln w="12700">
+            <a:solidFill>
+              <a:srgbClr val="DB2777"/>
+            </a:solidFill>
+            <a:prstDash val="solid"/>
+          </a:ln>
+        </p:spPr>
+      </p:sp>
+      <p:sp>
+        <p:nvSpPr>
+          <p:cNvPr id="50" name="Text 48"/>
+          <p:cNvSpPr/>
+          <p:nvPr/>
+        </p:nvSpPr>
+        <p:spPr>
+          <a:xfrm>
+            <a:off x="6668262" y="4169664"/>
+            <a:ext cx="685800" cy="475488"/>
+          </a:xfrm>
+          <a:prstGeom prst="rect">
+            <a:avLst/>
+          </a:prstGeom>
+          <a:noFill/>
+          <a:ln/>
+        </p:spPr>
+        <p:txBody>
+          <a:bodyPr wrap="square" lIns="0" tIns="0" rIns="0" bIns="0" rtlCol="0" anchor="ctr"/>
+          <a:lstStyle/>
+          <a:p>
+            <a:pPr algn="ctr" indent="0" marL="0">
+              <a:buNone/>
+            </a:pPr>
+            <a:r>
+              <a:rPr lang="en-US" sz="900" b="1" dirty="0">
+                <a:solidFill>
+                  <a:srgbClr val="9D174D"/>
+                </a:solidFill>
+                <a:latin typeface="Trebuchet MS" pitchFamily="34" charset="0"/>
+                <a:ea typeface="Trebuchet MS" pitchFamily="34" charset="-122"/>
+                <a:cs typeface="Trebuchet MS" pitchFamily="34" charset="-120"/>
+              </a:rPr>
+              <a:t>l</a:t>
+            </a:r>
+            <a:endParaRPr lang="en-US" sz="900" dirty="0"/>
+          </a:p>
+        </p:txBody>
+      </p:sp>
+      <p:sp>
+        <p:nvSpPr>
+          <p:cNvPr id="51" name="Shape 49"/>
+          <p:cNvSpPr/>
+          <p:nvPr/>
+        </p:nvSpPr>
+        <p:spPr>
+          <a:xfrm>
+            <a:off x="7576947" y="4169664"/>
+            <a:ext cx="685800" cy="475488"/>
+          </a:xfrm>
+          <a:prstGeom prst="rect">
+            <a:avLst>
+              <a:gd name="adj" fmla="val 7692"/>
+            </a:avLst>
+          </a:prstGeom>
+          <a:solidFill>
+            <a:srgbClr val="FFFFFF"/>
+          </a:solidFill>
+          <a:ln w="12700">
+            <a:solidFill>
+              <a:srgbClr val="DB2777"/>
+            </a:solidFill>
+            <a:prstDash val="solid"/>
+          </a:ln>
+        </p:spPr>
+      </p:sp>
+      <p:sp>
+        <p:nvSpPr>
+          <p:cNvPr id="52" name="Text 50"/>
+          <p:cNvSpPr/>
+          <p:nvPr/>
+        </p:nvSpPr>
+        <p:spPr>
+          <a:xfrm>
+            <a:off x="7576947" y="4169664"/>
+            <a:ext cx="685800" cy="475488"/>
+          </a:xfrm>
+          <a:prstGeom prst="rect">
+            <a:avLst/>
+          </a:prstGeom>
+          <a:noFill/>
+          <a:ln/>
+        </p:spPr>
+        <p:txBody>
+          <a:bodyPr wrap="square" lIns="0" tIns="0" rIns="0" bIns="0" rtlCol="0" anchor="ctr"/>
+          <a:lstStyle/>
+          <a:p>
+            <a:pPr algn="ctr" indent="0" marL="0">
+              <a:buNone/>
+            </a:pPr>
+            <a:r>
+              <a:rPr lang="en-US" sz="900" b="1" dirty="0">
+                <a:solidFill>
+                  <a:srgbClr val="9D174D"/>
+                </a:solidFill>
+                <a:latin typeface="Trebuchet MS" pitchFamily="34" charset="0"/>
+                <a:ea typeface="Trebuchet MS" pitchFamily="34" charset="-122"/>
+                <a:cs typeface="Trebuchet MS" pitchFamily="34" charset="-120"/>
+              </a:rPr>
+              <a:t>y</a:t>
             </a:r>
             <a:endParaRPr lang="en-US" sz="900" dirty="0"/>
           </a:p>
@@ -21861,7 +23151,7 @@
                 <a:ea typeface="Calibri" pitchFamily="34" charset="-122"/>
                 <a:cs typeface="Calibri" pitchFamily="34" charset="-120"/>
               </a:rPr>
-              <a:t>Word Labs  •  wordlabs.app  •  Root: 'fear' = feeling of danger or dread</a:t>
+              <a:t>Word Labs  •  wordlabs.app  •  Root: 'fear' = to be afraid of</a:t>
             </a:r>
             <a:endParaRPr lang="en-US" sz="800" dirty="0"/>
           </a:p>
@@ -22000,7 +23290,7 @@
                 <a:ea typeface="Trebuchet MS" pitchFamily="34" charset="-122"/>
                 <a:cs typeface="Trebuchet MS" pitchFamily="34" charset="-120"/>
               </a:rPr>
-              <a:t>fearing</a:t>
+              <a:t>fearfulness</a:t>
             </a:r>
             <a:endParaRPr lang="en-US" sz="2800" dirty="0"/>
           </a:p>
@@ -22688,7 +23978,7 @@
                 <a:ea typeface="Calibri" pitchFamily="34" charset="-122"/>
                 <a:cs typeface="Calibri" pitchFamily="34" charset="-120"/>
               </a:rPr>
-              <a:t>Word Labs  •  wordlabs.app  •  Root: 'fear' = feeling of danger or dread</a:t>
+              <a:t>Word Labs  •  wordlabs.app  •  Root: 'fear' = to be afraid of</a:t>
             </a:r>
             <a:endParaRPr lang="en-US" sz="800" dirty="0"/>
           </a:p>
@@ -22827,7 +24117,7 @@
                 <a:ea typeface="Trebuchet MS" pitchFamily="34" charset="-122"/>
                 <a:cs typeface="Trebuchet MS" pitchFamily="34" charset="-120"/>
               </a:rPr>
-              <a:t>fearing</a:t>
+              <a:t>fearfulness</a:t>
             </a:r>
             <a:endParaRPr lang="en-US" sz="2800" dirty="0"/>
           </a:p>
@@ -22907,7 +24197,7 @@
         </p:nvSpPr>
         <p:spPr>
           <a:xfrm>
-            <a:off x="2938272" y="2258568"/>
+            <a:off x="2221992" y="2258568"/>
             <a:ext cx="1828800" cy="292608"/>
           </a:xfrm>
           <a:prstGeom prst="rect">
@@ -22941,7 +24231,7 @@
         </p:nvSpPr>
         <p:spPr>
           <a:xfrm>
-            <a:off x="2938272" y="2258568"/>
+            <a:off x="2221992" y="2258568"/>
             <a:ext cx="1828800" cy="292608"/>
           </a:xfrm>
           <a:prstGeom prst="rect">
@@ -22980,7 +24270,7 @@
         </p:nvSpPr>
         <p:spPr>
           <a:xfrm>
-            <a:off x="2938272" y="2569464"/>
+            <a:off x="2221992" y="2569464"/>
             <a:ext cx="1828800" cy="201168"/>
           </a:xfrm>
           <a:prstGeom prst="rect">
@@ -23005,7 +24295,7 @@
                 <a:ea typeface="Calibri" pitchFamily="34" charset="-122"/>
                 <a:cs typeface="Calibri" pitchFamily="34" charset="-120"/>
               </a:rPr>
-              <a:t>feeling of danger or dread</a:t>
+              <a:t>to be afraid of</a:t>
             </a:r>
             <a:endParaRPr lang="en-US" sz="850" dirty="0"/>
           </a:p>
@@ -23019,7 +24309,7 @@
         </p:nvSpPr>
         <p:spPr>
           <a:xfrm>
-            <a:off x="5803392" y="2258568"/>
+            <a:off x="4370832" y="2258568"/>
             <a:ext cx="1828800" cy="292608"/>
           </a:xfrm>
           <a:prstGeom prst="rect">
@@ -23053,7 +24343,7 @@
         </p:nvSpPr>
         <p:spPr>
           <a:xfrm>
-            <a:off x="5803392" y="2258568"/>
+            <a:off x="4370832" y="2258568"/>
             <a:ext cx="1828800" cy="292608"/>
           </a:xfrm>
           <a:prstGeom prst="rect">
@@ -23078,7 +24368,7 @@
                 <a:ea typeface="Trebuchet MS" pitchFamily="34" charset="-122"/>
                 <a:cs typeface="Trebuchet MS" pitchFamily="34" charset="-120"/>
               </a:rPr>
-              <a:t>ing</a:t>
+              <a:t>ful</a:t>
             </a:r>
             <a:endParaRPr lang="en-US" sz="1300" dirty="0"/>
           </a:p>
@@ -23092,7 +24382,7 @@
         </p:nvSpPr>
         <p:spPr>
           <a:xfrm>
-            <a:off x="5803392" y="2569464"/>
+            <a:off x="4370832" y="2569464"/>
             <a:ext cx="1828800" cy="201168"/>
           </a:xfrm>
           <a:prstGeom prst="rect">
@@ -23117,7 +24407,7 @@
                 <a:ea typeface="Calibri" pitchFamily="34" charset="-122"/>
                 <a:cs typeface="Calibri" pitchFamily="34" charset="-120"/>
               </a:rPr>
-              <a:t>action happening now</a:t>
+              <a:t>full of</a:t>
             </a:r>
             <a:endParaRPr lang="en-US" sz="850" dirty="0"/>
           </a:p>
@@ -23126,6 +24416,118 @@
       <p:sp>
         <p:nvSpPr>
           <p:cNvPr id="22" name="Shape 20"/>
+          <p:cNvSpPr/>
+          <p:nvPr/>
+        </p:nvSpPr>
+        <p:spPr>
+          <a:xfrm>
+            <a:off x="6519672" y="2258568"/>
+            <a:ext cx="1828800" cy="292608"/>
+          </a:xfrm>
+          <a:prstGeom prst="rect">
+            <a:avLst>
+              <a:gd name="adj" fmla="val 25000"/>
+            </a:avLst>
+          </a:prstGeom>
+          <a:solidFill>
+            <a:srgbClr val="FCE7F3"/>
+          </a:solidFill>
+          <a:ln w="19050">
+            <a:solidFill>
+              <a:srgbClr val="DB2777"/>
+            </a:solidFill>
+            <a:prstDash val="solid"/>
+          </a:ln>
+          <a:effectLst>
+            <a:outerShdw sx="100000" sy="100000" kx="0" ky="0" algn="bl" rotWithShape="0" blurRad="101600" dist="38100" dir="8100000">
+              <a:srgbClr val="000000">
+                <a:alpha val="12000"/>
+              </a:srgbClr>
+            </a:outerShdw>
+          </a:effectLst>
+        </p:spPr>
+      </p:sp>
+      <p:sp>
+        <p:nvSpPr>
+          <p:cNvPr id="23" name="Text 21"/>
+          <p:cNvSpPr/>
+          <p:nvPr/>
+        </p:nvSpPr>
+        <p:spPr>
+          <a:xfrm>
+            <a:off x="6519672" y="2258568"/>
+            <a:ext cx="1828800" cy="292608"/>
+          </a:xfrm>
+          <a:prstGeom prst="rect">
+            <a:avLst/>
+          </a:prstGeom>
+          <a:noFill/>
+          <a:ln/>
+        </p:spPr>
+        <p:txBody>
+          <a:bodyPr wrap="square" lIns="0" tIns="0" rIns="0" bIns="0" rtlCol="0" anchor="ctr"/>
+          <a:lstStyle/>
+          <a:p>
+            <a:pPr algn="ctr" indent="0" marL="0">
+              <a:buNone/>
+            </a:pPr>
+            <a:r>
+              <a:rPr lang="en-US" sz="1300" b="1" dirty="0">
+                <a:solidFill>
+                  <a:srgbClr val="9D174D"/>
+                </a:solidFill>
+                <a:latin typeface="Trebuchet MS" pitchFamily="34" charset="0"/>
+                <a:ea typeface="Trebuchet MS" pitchFamily="34" charset="-122"/>
+                <a:cs typeface="Trebuchet MS" pitchFamily="34" charset="-120"/>
+              </a:rPr>
+              <a:t>ness</a:t>
+            </a:r>
+            <a:endParaRPr lang="en-US" sz="1300" dirty="0"/>
+          </a:p>
+        </p:txBody>
+      </p:sp>
+      <p:sp>
+        <p:nvSpPr>
+          <p:cNvPr id="24" name="Text 22"/>
+          <p:cNvSpPr/>
+          <p:nvPr/>
+        </p:nvSpPr>
+        <p:spPr>
+          <a:xfrm>
+            <a:off x="6519672" y="2569464"/>
+            <a:ext cx="1828800" cy="201168"/>
+          </a:xfrm>
+          <a:prstGeom prst="rect">
+            <a:avLst/>
+          </a:prstGeom>
+          <a:noFill/>
+          <a:ln/>
+        </p:spPr>
+        <p:txBody>
+          <a:bodyPr wrap="square" lIns="0" tIns="0" rIns="0" bIns="0" rtlCol="0" anchor="t"/>
+          <a:lstStyle/>
+          <a:p>
+            <a:pPr algn="ctr" indent="0" marL="0">
+              <a:buNone/>
+            </a:pPr>
+            <a:r>
+              <a:rPr lang="en-US" sz="850" dirty="0">
+                <a:solidFill>
+                  <a:srgbClr val="475569"/>
+                </a:solidFill>
+                <a:latin typeface="Calibri" pitchFamily="34" charset="0"/>
+                <a:ea typeface="Calibri" pitchFamily="34" charset="-122"/>
+                <a:cs typeface="Calibri" pitchFamily="34" charset="-120"/>
+              </a:rPr>
+              <a:t>state of</a:t>
+            </a:r>
+            <a:endParaRPr lang="en-US" sz="850" dirty="0"/>
+          </a:p>
+        </p:txBody>
+      </p:sp>
+      <p:sp>
+        <p:nvSpPr>
+          <p:cNvPr id="25" name="Shape 23"/>
           <p:cNvSpPr/>
           <p:nvPr/>
         </p:nvSpPr>
@@ -23152,7 +24554,7 @@
       </p:sp>
       <p:sp>
         <p:nvSpPr>
-          <p:cNvPr id="23" name="Text 21"/>
+          <p:cNvPr id="26" name="Text 24"/>
           <p:cNvSpPr/>
           <p:nvPr/>
         </p:nvSpPr>
@@ -23191,7 +24593,7 @@
       </p:sp>
       <p:sp>
         <p:nvSpPr>
-          <p:cNvPr id="24" name="Shape 22"/>
+          <p:cNvPr id="27" name="Shape 25"/>
           <p:cNvSpPr/>
           <p:nvPr/>
         </p:nvSpPr>
@@ -23218,7 +24620,7 @@
       </p:sp>
       <p:sp>
         <p:nvSpPr>
-          <p:cNvPr id="25" name="Text 23"/>
+          <p:cNvPr id="28" name="Text 26"/>
           <p:cNvSpPr/>
           <p:nvPr/>
         </p:nvSpPr>
@@ -23257,7 +24659,7 @@
       </p:sp>
       <p:sp>
         <p:nvSpPr>
-          <p:cNvPr id="26" name="Shape 24"/>
+          <p:cNvPr id="29" name="Shape 27"/>
           <p:cNvSpPr/>
           <p:nvPr/>
         </p:nvSpPr>
@@ -23284,7 +24686,7 @@
       </p:sp>
       <p:sp>
         <p:nvSpPr>
-          <p:cNvPr id="27" name="Text 25"/>
+          <p:cNvPr id="30" name="Text 28"/>
           <p:cNvSpPr/>
           <p:nvPr/>
         </p:nvSpPr>
@@ -23323,7 +24725,7 @@
       </p:sp>
       <p:sp>
         <p:nvSpPr>
-          <p:cNvPr id="28" name="Shape 26"/>
+          <p:cNvPr id="31" name="Shape 29"/>
           <p:cNvSpPr/>
           <p:nvPr/>
         </p:nvSpPr>
@@ -23350,7 +24752,7 @@
       </p:sp>
       <p:sp>
         <p:nvSpPr>
-          <p:cNvPr id="29" name="Text 27"/>
+          <p:cNvPr id="32" name="Text 30"/>
           <p:cNvSpPr/>
           <p:nvPr/>
         </p:nvSpPr>
@@ -23673,7 +25075,7 @@
                 <a:ea typeface="Calibri" pitchFamily="34" charset="-122"/>
                 <a:cs typeface="Calibri" pitchFamily="34" charset="-120"/>
               </a:rPr>
-              <a:t>Word Labs  •  wordlabs.app  •  Root: 'fear' = feeling of danger or dread</a:t>
+              <a:t>Word Labs  •  wordlabs.app  •  Root: 'fear' = to be afraid of</a:t>
             </a:r>
             <a:endParaRPr lang="en-US" sz="800" dirty="0"/>
           </a:p>
@@ -23746,7 +25148,7 @@
                 <a:ea typeface="Trebuchet MS" pitchFamily="34" charset="-122"/>
                 <a:cs typeface="Trebuchet MS" pitchFamily="34" charset="-120"/>
               </a:rPr>
-              <a:t>We are learning that the root 'fear' means 'feeling of danger or dread'.</a:t>
+              <a:t>We are learning that the root 'fear' means 'to be afraid of'.</a:t>
             </a:r>
             <a:endParaRPr lang="en-US" sz="2000" dirty="0"/>
           </a:p>
@@ -24392,7 +25794,7 @@
                 <a:ea typeface="Calibri" pitchFamily="34" charset="-122"/>
                 <a:cs typeface="Calibri" pitchFamily="34" charset="-120"/>
               </a:rPr>
-              <a:t>Word Labs  •  wordlabs.app  •  Root: 'fear' = feeling of danger or dread</a:t>
+              <a:t>Word Labs  •  wordlabs.app  •  Root: 'fear' = to be afraid of</a:t>
             </a:r>
             <a:endParaRPr lang="en-US" sz="800" dirty="0"/>
           </a:p>
@@ -24531,7 +25933,7 @@
                 <a:ea typeface="Trebuchet MS" pitchFamily="34" charset="-122"/>
                 <a:cs typeface="Trebuchet MS" pitchFamily="34" charset="-120"/>
               </a:rPr>
-              <a:t>fearing</a:t>
+              <a:t>fearfulness</a:t>
             </a:r>
             <a:endParaRPr lang="en-US" sz="2800" dirty="0"/>
           </a:p>
@@ -24611,7 +26013,7 @@
         </p:nvSpPr>
         <p:spPr>
           <a:xfrm>
-            <a:off x="2938272" y="2258568"/>
+            <a:off x="2221992" y="2258568"/>
             <a:ext cx="1828800" cy="292608"/>
           </a:xfrm>
           <a:prstGeom prst="rect">
@@ -24645,7 +26047,7 @@
         </p:nvSpPr>
         <p:spPr>
           <a:xfrm>
-            <a:off x="2938272" y="2258568"/>
+            <a:off x="2221992" y="2258568"/>
             <a:ext cx="1828800" cy="292608"/>
           </a:xfrm>
           <a:prstGeom prst="rect">
@@ -24684,7 +26086,7 @@
         </p:nvSpPr>
         <p:spPr>
           <a:xfrm>
-            <a:off x="2938272" y="2569464"/>
+            <a:off x="2221992" y="2569464"/>
             <a:ext cx="1828800" cy="201168"/>
           </a:xfrm>
           <a:prstGeom prst="rect">
@@ -24709,7 +26111,7 @@
                 <a:ea typeface="Calibri" pitchFamily="34" charset="-122"/>
                 <a:cs typeface="Calibri" pitchFamily="34" charset="-120"/>
               </a:rPr>
-              <a:t>feeling of danger or dread</a:t>
+              <a:t>to be afraid of</a:t>
             </a:r>
             <a:endParaRPr lang="en-US" sz="850" dirty="0"/>
           </a:p>
@@ -24723,7 +26125,7 @@
         </p:nvSpPr>
         <p:spPr>
           <a:xfrm>
-            <a:off x="5803392" y="2258568"/>
+            <a:off x="4370832" y="2258568"/>
             <a:ext cx="1828800" cy="292608"/>
           </a:xfrm>
           <a:prstGeom prst="rect">
@@ -24757,7 +26159,7 @@
         </p:nvSpPr>
         <p:spPr>
           <a:xfrm>
-            <a:off x="5803392" y="2258568"/>
+            <a:off x="4370832" y="2258568"/>
             <a:ext cx="1828800" cy="292608"/>
           </a:xfrm>
           <a:prstGeom prst="rect">
@@ -24782,7 +26184,7 @@
                 <a:ea typeface="Trebuchet MS" pitchFamily="34" charset="-122"/>
                 <a:cs typeface="Trebuchet MS" pitchFamily="34" charset="-120"/>
               </a:rPr>
-              <a:t>ing</a:t>
+              <a:t>ful</a:t>
             </a:r>
             <a:endParaRPr lang="en-US" sz="1300" dirty="0"/>
           </a:p>
@@ -24796,7 +26198,7 @@
         </p:nvSpPr>
         <p:spPr>
           <a:xfrm>
-            <a:off x="5803392" y="2569464"/>
+            <a:off x="4370832" y="2569464"/>
             <a:ext cx="1828800" cy="201168"/>
           </a:xfrm>
           <a:prstGeom prst="rect">
@@ -24821,7 +26223,7 @@
                 <a:ea typeface="Calibri" pitchFamily="34" charset="-122"/>
                 <a:cs typeface="Calibri" pitchFamily="34" charset="-120"/>
               </a:rPr>
-              <a:t>action happening now</a:t>
+              <a:t>full of</a:t>
             </a:r>
             <a:endParaRPr lang="en-US" sz="850" dirty="0"/>
           </a:p>
@@ -24830,6 +26232,118 @@
       <p:sp>
         <p:nvSpPr>
           <p:cNvPr id="22" name="Shape 20"/>
+          <p:cNvSpPr/>
+          <p:nvPr/>
+        </p:nvSpPr>
+        <p:spPr>
+          <a:xfrm>
+            <a:off x="6519672" y="2258568"/>
+            <a:ext cx="1828800" cy="292608"/>
+          </a:xfrm>
+          <a:prstGeom prst="rect">
+            <a:avLst>
+              <a:gd name="adj" fmla="val 25000"/>
+            </a:avLst>
+          </a:prstGeom>
+          <a:solidFill>
+            <a:srgbClr val="FCE7F3"/>
+          </a:solidFill>
+          <a:ln w="19050">
+            <a:solidFill>
+              <a:srgbClr val="DB2777"/>
+            </a:solidFill>
+            <a:prstDash val="solid"/>
+          </a:ln>
+          <a:effectLst>
+            <a:outerShdw sx="100000" sy="100000" kx="0" ky="0" algn="bl" rotWithShape="0" blurRad="101600" dist="38100" dir="8100000">
+              <a:srgbClr val="000000">
+                <a:alpha val="12000"/>
+              </a:srgbClr>
+            </a:outerShdw>
+          </a:effectLst>
+        </p:spPr>
+      </p:sp>
+      <p:sp>
+        <p:nvSpPr>
+          <p:cNvPr id="23" name="Text 21"/>
+          <p:cNvSpPr/>
+          <p:nvPr/>
+        </p:nvSpPr>
+        <p:spPr>
+          <a:xfrm>
+            <a:off x="6519672" y="2258568"/>
+            <a:ext cx="1828800" cy="292608"/>
+          </a:xfrm>
+          <a:prstGeom prst="rect">
+            <a:avLst/>
+          </a:prstGeom>
+          <a:noFill/>
+          <a:ln/>
+        </p:spPr>
+        <p:txBody>
+          <a:bodyPr wrap="square" lIns="0" tIns="0" rIns="0" bIns="0" rtlCol="0" anchor="ctr"/>
+          <a:lstStyle/>
+          <a:p>
+            <a:pPr algn="ctr" indent="0" marL="0">
+              <a:buNone/>
+            </a:pPr>
+            <a:r>
+              <a:rPr lang="en-US" sz="1300" b="1" dirty="0">
+                <a:solidFill>
+                  <a:srgbClr val="9D174D"/>
+                </a:solidFill>
+                <a:latin typeface="Trebuchet MS" pitchFamily="34" charset="0"/>
+                <a:ea typeface="Trebuchet MS" pitchFamily="34" charset="-122"/>
+                <a:cs typeface="Trebuchet MS" pitchFamily="34" charset="-120"/>
+              </a:rPr>
+              <a:t>ness</a:t>
+            </a:r>
+            <a:endParaRPr lang="en-US" sz="1300" dirty="0"/>
+          </a:p>
+        </p:txBody>
+      </p:sp>
+      <p:sp>
+        <p:nvSpPr>
+          <p:cNvPr id="24" name="Text 22"/>
+          <p:cNvSpPr/>
+          <p:nvPr/>
+        </p:nvSpPr>
+        <p:spPr>
+          <a:xfrm>
+            <a:off x="6519672" y="2569464"/>
+            <a:ext cx="1828800" cy="201168"/>
+          </a:xfrm>
+          <a:prstGeom prst="rect">
+            <a:avLst/>
+          </a:prstGeom>
+          <a:noFill/>
+          <a:ln/>
+        </p:spPr>
+        <p:txBody>
+          <a:bodyPr wrap="square" lIns="0" tIns="0" rIns="0" bIns="0" rtlCol="0" anchor="t"/>
+          <a:lstStyle/>
+          <a:p>
+            <a:pPr algn="ctr" indent="0" marL="0">
+              <a:buNone/>
+            </a:pPr>
+            <a:r>
+              <a:rPr lang="en-US" sz="850" dirty="0">
+                <a:solidFill>
+                  <a:srgbClr val="475569"/>
+                </a:solidFill>
+                <a:latin typeface="Calibri" pitchFamily="34" charset="0"/>
+                <a:ea typeface="Calibri" pitchFamily="34" charset="-122"/>
+                <a:cs typeface="Calibri" pitchFamily="34" charset="-120"/>
+              </a:rPr>
+              <a:t>state of</a:t>
+            </a:r>
+            <a:endParaRPr lang="en-US" sz="850" dirty="0"/>
+          </a:p>
+        </p:txBody>
+      </p:sp>
+      <p:sp>
+        <p:nvSpPr>
+          <p:cNvPr id="25" name="Shape 23"/>
           <p:cNvSpPr/>
           <p:nvPr/>
         </p:nvSpPr>
@@ -24856,7 +26370,7 @@
       </p:sp>
       <p:sp>
         <p:nvSpPr>
-          <p:cNvPr id="23" name="Text 21"/>
+          <p:cNvPr id="26" name="Text 24"/>
           <p:cNvSpPr/>
           <p:nvPr/>
         </p:nvSpPr>
@@ -24895,7 +26409,7 @@
       </p:sp>
       <p:sp>
         <p:nvSpPr>
-          <p:cNvPr id="24" name="Shape 22"/>
+          <p:cNvPr id="27" name="Shape 25"/>
           <p:cNvSpPr/>
           <p:nvPr/>
         </p:nvSpPr>
@@ -24922,13 +26436,13 @@
       </p:sp>
       <p:sp>
         <p:nvSpPr>
-          <p:cNvPr id="25" name="Shape 23"/>
-          <p:cNvSpPr/>
-          <p:nvPr/>
-        </p:nvSpPr>
-        <p:spPr>
-          <a:xfrm>
-            <a:off x="2999232" y="3364992"/>
+          <p:cNvPr id="28" name="Shape 26"/>
+          <p:cNvSpPr/>
+          <p:nvPr/>
+        </p:nvSpPr>
+        <p:spPr>
+          <a:xfrm>
+            <a:off x="2313432" y="3364992"/>
             <a:ext cx="1645920" cy="475488"/>
           </a:xfrm>
           <a:prstGeom prst="rect">
@@ -24949,13 +26463,13 @@
       </p:sp>
       <p:sp>
         <p:nvSpPr>
-          <p:cNvPr id="26" name="Text 24"/>
-          <p:cNvSpPr/>
-          <p:nvPr/>
-        </p:nvSpPr>
-        <p:spPr>
-          <a:xfrm>
-            <a:off x="2999232" y="3364992"/>
+          <p:cNvPr id="29" name="Text 27"/>
+          <p:cNvSpPr/>
+          <p:nvPr/>
+        </p:nvSpPr>
+        <p:spPr>
+          <a:xfrm>
+            <a:off x="2313432" y="3364992"/>
             <a:ext cx="1645920" cy="475488"/>
           </a:xfrm>
           <a:prstGeom prst="rect">
@@ -24988,14 +26502,14 @@
       </p:sp>
       <p:sp>
         <p:nvSpPr>
-          <p:cNvPr id="27" name="Text 25"/>
-          <p:cNvSpPr/>
-          <p:nvPr/>
-        </p:nvSpPr>
-        <p:spPr>
-          <a:xfrm>
-            <a:off x="4645152" y="3364992"/>
-            <a:ext cx="1097280" cy="475488"/>
+          <p:cNvPr id="30" name="Text 28"/>
+          <p:cNvSpPr/>
+          <p:nvPr/>
+        </p:nvSpPr>
+        <p:spPr>
+          <a:xfrm>
+            <a:off x="3959352" y="3364992"/>
+            <a:ext cx="411480" cy="475488"/>
           </a:xfrm>
           <a:prstGeom prst="rect">
             <a:avLst/>
@@ -25027,13 +26541,13 @@
       </p:sp>
       <p:sp>
         <p:nvSpPr>
-          <p:cNvPr id="28" name="Shape 26"/>
-          <p:cNvSpPr/>
-          <p:nvPr/>
-        </p:nvSpPr>
-        <p:spPr>
-          <a:xfrm>
-            <a:off x="5742432" y="3364992"/>
+          <p:cNvPr id="31" name="Shape 29"/>
+          <p:cNvSpPr/>
+          <p:nvPr/>
+        </p:nvSpPr>
+        <p:spPr>
+          <a:xfrm>
+            <a:off x="4370832" y="3364992"/>
             <a:ext cx="1645920" cy="475488"/>
           </a:xfrm>
           <a:prstGeom prst="rect">
@@ -25054,13 +26568,13 @@
       </p:sp>
       <p:sp>
         <p:nvSpPr>
-          <p:cNvPr id="29" name="Text 27"/>
-          <p:cNvSpPr/>
-          <p:nvPr/>
-        </p:nvSpPr>
-        <p:spPr>
-          <a:xfrm>
-            <a:off x="5742432" y="3364992"/>
+          <p:cNvPr id="32" name="Text 30"/>
+          <p:cNvSpPr/>
+          <p:nvPr/>
+        </p:nvSpPr>
+        <p:spPr>
+          <a:xfrm>
+            <a:off x="4370832" y="3364992"/>
             <a:ext cx="1645920" cy="475488"/>
           </a:xfrm>
           <a:prstGeom prst="rect">
@@ -25085,7 +26599,7 @@
                 <a:ea typeface="Trebuchet MS" pitchFamily="34" charset="-122"/>
                 <a:cs typeface="Trebuchet MS" pitchFamily="34" charset="-120"/>
               </a:rPr>
-              <a:t>ing</a:t>
+              <a:t>ful</a:t>
             </a:r>
             <a:endParaRPr lang="en-US" sz="1400" dirty="0"/>
           </a:p>
@@ -25093,7 +26607,112 @@
       </p:sp>
       <p:sp>
         <p:nvSpPr>
-          <p:cNvPr id="30" name="Shape 28"/>
+          <p:cNvPr id="33" name="Text 31"/>
+          <p:cNvSpPr/>
+          <p:nvPr/>
+        </p:nvSpPr>
+        <p:spPr>
+          <a:xfrm>
+            <a:off x="6016752" y="3364992"/>
+            <a:ext cx="411480" cy="475488"/>
+          </a:xfrm>
+          <a:prstGeom prst="rect">
+            <a:avLst/>
+          </a:prstGeom>
+          <a:noFill/>
+          <a:ln/>
+        </p:spPr>
+        <p:txBody>
+          <a:bodyPr wrap="square" lIns="0" tIns="0" rIns="0" bIns="0" rtlCol="0" anchor="ctr"/>
+          <a:lstStyle/>
+          <a:p>
+            <a:pPr algn="ctr" indent="0" marL="0">
+              <a:buNone/>
+            </a:pPr>
+            <a:r>
+              <a:rPr lang="en-US" sz="1600" b="1" dirty="0">
+                <a:solidFill>
+                  <a:srgbClr val="0D9488"/>
+                </a:solidFill>
+                <a:latin typeface="Trebuchet MS" pitchFamily="34" charset="0"/>
+                <a:ea typeface="Trebuchet MS" pitchFamily="34" charset="-122"/>
+                <a:cs typeface="Trebuchet MS" pitchFamily="34" charset="-120"/>
+              </a:rPr>
+              <a:t>·</a:t>
+            </a:r>
+            <a:endParaRPr lang="en-US" sz="1600" dirty="0"/>
+          </a:p>
+        </p:txBody>
+      </p:sp>
+      <p:sp>
+        <p:nvSpPr>
+          <p:cNvPr id="34" name="Shape 32"/>
+          <p:cNvSpPr/>
+          <p:nvPr/>
+        </p:nvSpPr>
+        <p:spPr>
+          <a:xfrm>
+            <a:off x="6428232" y="3364992"/>
+            <a:ext cx="1645920" cy="475488"/>
+          </a:xfrm>
+          <a:prstGeom prst="rect">
+            <a:avLst>
+              <a:gd name="adj" fmla="val 9615"/>
+            </a:avLst>
+          </a:prstGeom>
+          <a:solidFill>
+            <a:srgbClr val="FFFFFF"/>
+          </a:solidFill>
+          <a:ln w="12700">
+            <a:solidFill>
+              <a:srgbClr val="0D9488"/>
+            </a:solidFill>
+            <a:prstDash val="solid"/>
+          </a:ln>
+        </p:spPr>
+      </p:sp>
+      <p:sp>
+        <p:nvSpPr>
+          <p:cNvPr id="35" name="Text 33"/>
+          <p:cNvSpPr/>
+          <p:nvPr/>
+        </p:nvSpPr>
+        <p:spPr>
+          <a:xfrm>
+            <a:off x="6428232" y="3364992"/>
+            <a:ext cx="1645920" cy="475488"/>
+          </a:xfrm>
+          <a:prstGeom prst="rect">
+            <a:avLst/>
+          </a:prstGeom>
+          <a:noFill/>
+          <a:ln/>
+        </p:spPr>
+        <p:txBody>
+          <a:bodyPr wrap="square" lIns="0" tIns="0" rIns="0" bIns="0" rtlCol="0" anchor="ctr"/>
+          <a:lstStyle/>
+          <a:p>
+            <a:pPr algn="ctr" indent="0" marL="0">
+              <a:buNone/>
+            </a:pPr>
+            <a:r>
+              <a:rPr lang="en-US" sz="1400" b="1" dirty="0">
+                <a:solidFill>
+                  <a:srgbClr val="0D9488"/>
+                </a:solidFill>
+                <a:latin typeface="Trebuchet MS" pitchFamily="34" charset="0"/>
+                <a:ea typeface="Trebuchet MS" pitchFamily="34" charset="-122"/>
+                <a:cs typeface="Trebuchet MS" pitchFamily="34" charset="-120"/>
+              </a:rPr>
+              <a:t>ness</a:t>
+            </a:r>
+            <a:endParaRPr lang="en-US" sz="1400" dirty="0"/>
+          </a:p>
+        </p:txBody>
+      </p:sp>
+      <p:sp>
+        <p:nvSpPr>
+          <p:cNvPr id="36" name="Shape 34"/>
           <p:cNvSpPr/>
           <p:nvPr/>
         </p:nvSpPr>
@@ -25120,7 +26739,7 @@
       </p:sp>
       <p:sp>
         <p:nvSpPr>
-          <p:cNvPr id="31" name="Text 29"/>
+          <p:cNvPr id="37" name="Text 35"/>
           <p:cNvSpPr/>
           <p:nvPr/>
         </p:nvSpPr>
@@ -25159,7 +26778,7 @@
       </p:sp>
       <p:sp>
         <p:nvSpPr>
-          <p:cNvPr id="32" name="Shape 30"/>
+          <p:cNvPr id="38" name="Shape 36"/>
           <p:cNvSpPr/>
           <p:nvPr/>
         </p:nvSpPr>
@@ -25186,7 +26805,7 @@
       </p:sp>
       <p:sp>
         <p:nvSpPr>
-          <p:cNvPr id="33" name="Text 31"/>
+          <p:cNvPr id="39" name="Text 37"/>
           <p:cNvSpPr/>
           <p:nvPr/>
         </p:nvSpPr>
@@ -25509,7 +27128,7 @@
                 <a:ea typeface="Calibri" pitchFamily="34" charset="-122"/>
                 <a:cs typeface="Calibri" pitchFamily="34" charset="-120"/>
               </a:rPr>
-              <a:t>Word Labs  •  wordlabs.app  •  Root: 'fear' = feeling of danger or dread</a:t>
+              <a:t>Word Labs  •  wordlabs.app  •  Root: 'fear' = to be afraid of</a:t>
             </a:r>
             <a:endParaRPr lang="en-US" sz="800" dirty="0"/>
           </a:p>
@@ -25648,7 +27267,7 @@
                 <a:ea typeface="Trebuchet MS" pitchFamily="34" charset="-122"/>
                 <a:cs typeface="Trebuchet MS" pitchFamily="34" charset="-120"/>
               </a:rPr>
-              <a:t>fearing</a:t>
+              <a:t>fearfulness</a:t>
             </a:r>
             <a:endParaRPr lang="en-US" sz="2800" dirty="0"/>
           </a:p>
@@ -25728,7 +27347,7 @@
         </p:nvSpPr>
         <p:spPr>
           <a:xfrm>
-            <a:off x="2938272" y="2258568"/>
+            <a:off x="2221992" y="2258568"/>
             <a:ext cx="1828800" cy="292608"/>
           </a:xfrm>
           <a:prstGeom prst="rect">
@@ -25762,7 +27381,7 @@
         </p:nvSpPr>
         <p:spPr>
           <a:xfrm>
-            <a:off x="2938272" y="2258568"/>
+            <a:off x="2221992" y="2258568"/>
             <a:ext cx="1828800" cy="292608"/>
           </a:xfrm>
           <a:prstGeom prst="rect">
@@ -25801,7 +27420,7 @@
         </p:nvSpPr>
         <p:spPr>
           <a:xfrm>
-            <a:off x="2938272" y="2569464"/>
+            <a:off x="2221992" y="2569464"/>
             <a:ext cx="1828800" cy="201168"/>
           </a:xfrm>
           <a:prstGeom prst="rect">
@@ -25826,7 +27445,7 @@
                 <a:ea typeface="Calibri" pitchFamily="34" charset="-122"/>
                 <a:cs typeface="Calibri" pitchFamily="34" charset="-120"/>
               </a:rPr>
-              <a:t>feeling of danger or dread</a:t>
+              <a:t>to be afraid of</a:t>
             </a:r>
             <a:endParaRPr lang="en-US" sz="850" dirty="0"/>
           </a:p>
@@ -25840,7 +27459,7 @@
         </p:nvSpPr>
         <p:spPr>
           <a:xfrm>
-            <a:off x="5803392" y="2258568"/>
+            <a:off x="4370832" y="2258568"/>
             <a:ext cx="1828800" cy="292608"/>
           </a:xfrm>
           <a:prstGeom prst="rect">
@@ -25874,7 +27493,7 @@
         </p:nvSpPr>
         <p:spPr>
           <a:xfrm>
-            <a:off x="5803392" y="2258568"/>
+            <a:off x="4370832" y="2258568"/>
             <a:ext cx="1828800" cy="292608"/>
           </a:xfrm>
           <a:prstGeom prst="rect">
@@ -25899,7 +27518,7 @@
                 <a:ea typeface="Trebuchet MS" pitchFamily="34" charset="-122"/>
                 <a:cs typeface="Trebuchet MS" pitchFamily="34" charset="-120"/>
               </a:rPr>
-              <a:t>ing</a:t>
+              <a:t>ful</a:t>
             </a:r>
             <a:endParaRPr lang="en-US" sz="1300" dirty="0"/>
           </a:p>
@@ -25913,7 +27532,7 @@
         </p:nvSpPr>
         <p:spPr>
           <a:xfrm>
-            <a:off x="5803392" y="2569464"/>
+            <a:off x="4370832" y="2569464"/>
             <a:ext cx="1828800" cy="201168"/>
           </a:xfrm>
           <a:prstGeom prst="rect">
@@ -25938,7 +27557,7 @@
                 <a:ea typeface="Calibri" pitchFamily="34" charset="-122"/>
                 <a:cs typeface="Calibri" pitchFamily="34" charset="-120"/>
               </a:rPr>
-              <a:t>action happening now</a:t>
+              <a:t>full of</a:t>
             </a:r>
             <a:endParaRPr lang="en-US" sz="850" dirty="0"/>
           </a:p>
@@ -25947,6 +27566,118 @@
       <p:sp>
         <p:nvSpPr>
           <p:cNvPr id="22" name="Shape 20"/>
+          <p:cNvSpPr/>
+          <p:nvPr/>
+        </p:nvSpPr>
+        <p:spPr>
+          <a:xfrm>
+            <a:off x="6519672" y="2258568"/>
+            <a:ext cx="1828800" cy="292608"/>
+          </a:xfrm>
+          <a:prstGeom prst="rect">
+            <a:avLst>
+              <a:gd name="adj" fmla="val 25000"/>
+            </a:avLst>
+          </a:prstGeom>
+          <a:solidFill>
+            <a:srgbClr val="FCE7F3"/>
+          </a:solidFill>
+          <a:ln w="19050">
+            <a:solidFill>
+              <a:srgbClr val="DB2777"/>
+            </a:solidFill>
+            <a:prstDash val="solid"/>
+          </a:ln>
+          <a:effectLst>
+            <a:outerShdw sx="100000" sy="100000" kx="0" ky="0" algn="bl" rotWithShape="0" blurRad="101600" dist="38100" dir="8100000">
+              <a:srgbClr val="000000">
+                <a:alpha val="12000"/>
+              </a:srgbClr>
+            </a:outerShdw>
+          </a:effectLst>
+        </p:spPr>
+      </p:sp>
+      <p:sp>
+        <p:nvSpPr>
+          <p:cNvPr id="23" name="Text 21"/>
+          <p:cNvSpPr/>
+          <p:nvPr/>
+        </p:nvSpPr>
+        <p:spPr>
+          <a:xfrm>
+            <a:off x="6519672" y="2258568"/>
+            <a:ext cx="1828800" cy="292608"/>
+          </a:xfrm>
+          <a:prstGeom prst="rect">
+            <a:avLst/>
+          </a:prstGeom>
+          <a:noFill/>
+          <a:ln/>
+        </p:spPr>
+        <p:txBody>
+          <a:bodyPr wrap="square" lIns="0" tIns="0" rIns="0" bIns="0" rtlCol="0" anchor="ctr"/>
+          <a:lstStyle/>
+          <a:p>
+            <a:pPr algn="ctr" indent="0" marL="0">
+              <a:buNone/>
+            </a:pPr>
+            <a:r>
+              <a:rPr lang="en-US" sz="1300" b="1" dirty="0">
+                <a:solidFill>
+                  <a:srgbClr val="9D174D"/>
+                </a:solidFill>
+                <a:latin typeface="Trebuchet MS" pitchFamily="34" charset="0"/>
+                <a:ea typeface="Trebuchet MS" pitchFamily="34" charset="-122"/>
+                <a:cs typeface="Trebuchet MS" pitchFamily="34" charset="-120"/>
+              </a:rPr>
+              <a:t>ness</a:t>
+            </a:r>
+            <a:endParaRPr lang="en-US" sz="1300" dirty="0"/>
+          </a:p>
+        </p:txBody>
+      </p:sp>
+      <p:sp>
+        <p:nvSpPr>
+          <p:cNvPr id="24" name="Text 22"/>
+          <p:cNvSpPr/>
+          <p:nvPr/>
+        </p:nvSpPr>
+        <p:spPr>
+          <a:xfrm>
+            <a:off x="6519672" y="2569464"/>
+            <a:ext cx="1828800" cy="201168"/>
+          </a:xfrm>
+          <a:prstGeom prst="rect">
+            <a:avLst/>
+          </a:prstGeom>
+          <a:noFill/>
+          <a:ln/>
+        </p:spPr>
+        <p:txBody>
+          <a:bodyPr wrap="square" lIns="0" tIns="0" rIns="0" bIns="0" rtlCol="0" anchor="t"/>
+          <a:lstStyle/>
+          <a:p>
+            <a:pPr algn="ctr" indent="0" marL="0">
+              <a:buNone/>
+            </a:pPr>
+            <a:r>
+              <a:rPr lang="en-US" sz="850" dirty="0">
+                <a:solidFill>
+                  <a:srgbClr val="475569"/>
+                </a:solidFill>
+                <a:latin typeface="Calibri" pitchFamily="34" charset="0"/>
+                <a:ea typeface="Calibri" pitchFamily="34" charset="-122"/>
+                <a:cs typeface="Calibri" pitchFamily="34" charset="-120"/>
+              </a:rPr>
+              <a:t>state of</a:t>
+            </a:r>
+            <a:endParaRPr lang="en-US" sz="850" dirty="0"/>
+          </a:p>
+        </p:txBody>
+      </p:sp>
+      <p:sp>
+        <p:nvSpPr>
+          <p:cNvPr id="25" name="Shape 23"/>
           <p:cNvSpPr/>
           <p:nvPr/>
         </p:nvSpPr>
@@ -25973,7 +27704,7 @@
       </p:sp>
       <p:sp>
         <p:nvSpPr>
-          <p:cNvPr id="23" name="Text 21"/>
+          <p:cNvPr id="26" name="Text 24"/>
           <p:cNvSpPr/>
           <p:nvPr/>
         </p:nvSpPr>
@@ -26012,7 +27743,7 @@
       </p:sp>
       <p:sp>
         <p:nvSpPr>
-          <p:cNvPr id="24" name="Shape 22"/>
+          <p:cNvPr id="27" name="Shape 25"/>
           <p:cNvSpPr/>
           <p:nvPr/>
         </p:nvSpPr>
@@ -26039,13 +27770,13 @@
       </p:sp>
       <p:sp>
         <p:nvSpPr>
-          <p:cNvPr id="25" name="Shape 23"/>
-          <p:cNvSpPr/>
-          <p:nvPr/>
-        </p:nvSpPr>
-        <p:spPr>
-          <a:xfrm>
-            <a:off x="2999232" y="3364992"/>
+          <p:cNvPr id="28" name="Shape 26"/>
+          <p:cNvSpPr/>
+          <p:nvPr/>
+        </p:nvSpPr>
+        <p:spPr>
+          <a:xfrm>
+            <a:off x="2313432" y="3364992"/>
             <a:ext cx="1645920" cy="475488"/>
           </a:xfrm>
           <a:prstGeom prst="rect">
@@ -26066,13 +27797,13 @@
       </p:sp>
       <p:sp>
         <p:nvSpPr>
-          <p:cNvPr id="26" name="Text 24"/>
-          <p:cNvSpPr/>
-          <p:nvPr/>
-        </p:nvSpPr>
-        <p:spPr>
-          <a:xfrm>
-            <a:off x="2999232" y="3364992"/>
+          <p:cNvPr id="29" name="Text 27"/>
+          <p:cNvSpPr/>
+          <p:nvPr/>
+        </p:nvSpPr>
+        <p:spPr>
+          <a:xfrm>
+            <a:off x="2313432" y="3364992"/>
             <a:ext cx="1645920" cy="475488"/>
           </a:xfrm>
           <a:prstGeom prst="rect">
@@ -26105,14 +27836,14 @@
       </p:sp>
       <p:sp>
         <p:nvSpPr>
-          <p:cNvPr id="27" name="Text 25"/>
-          <p:cNvSpPr/>
-          <p:nvPr/>
-        </p:nvSpPr>
-        <p:spPr>
-          <a:xfrm>
-            <a:off x="4645152" y="3364992"/>
-            <a:ext cx="1097280" cy="475488"/>
+          <p:cNvPr id="30" name="Text 28"/>
+          <p:cNvSpPr/>
+          <p:nvPr/>
+        </p:nvSpPr>
+        <p:spPr>
+          <a:xfrm>
+            <a:off x="3959352" y="3364992"/>
+            <a:ext cx="411480" cy="475488"/>
           </a:xfrm>
           <a:prstGeom prst="rect">
             <a:avLst/>
@@ -26144,13 +27875,13 @@
       </p:sp>
       <p:sp>
         <p:nvSpPr>
-          <p:cNvPr id="28" name="Shape 26"/>
-          <p:cNvSpPr/>
-          <p:nvPr/>
-        </p:nvSpPr>
-        <p:spPr>
-          <a:xfrm>
-            <a:off x="5742432" y="3364992"/>
+          <p:cNvPr id="31" name="Shape 29"/>
+          <p:cNvSpPr/>
+          <p:nvPr/>
+        </p:nvSpPr>
+        <p:spPr>
+          <a:xfrm>
+            <a:off x="4370832" y="3364992"/>
             <a:ext cx="1645920" cy="475488"/>
           </a:xfrm>
           <a:prstGeom prst="rect">
@@ -26171,13 +27902,13 @@
       </p:sp>
       <p:sp>
         <p:nvSpPr>
-          <p:cNvPr id="29" name="Text 27"/>
-          <p:cNvSpPr/>
-          <p:nvPr/>
-        </p:nvSpPr>
-        <p:spPr>
-          <a:xfrm>
-            <a:off x="5742432" y="3364992"/>
+          <p:cNvPr id="32" name="Text 30"/>
+          <p:cNvSpPr/>
+          <p:nvPr/>
+        </p:nvSpPr>
+        <p:spPr>
+          <a:xfrm>
+            <a:off x="4370832" y="3364992"/>
             <a:ext cx="1645920" cy="475488"/>
           </a:xfrm>
           <a:prstGeom prst="rect">
@@ -26202,7 +27933,7 @@
                 <a:ea typeface="Trebuchet MS" pitchFamily="34" charset="-122"/>
                 <a:cs typeface="Trebuchet MS" pitchFamily="34" charset="-120"/>
               </a:rPr>
-              <a:t>ing</a:t>
+              <a:t>ful</a:t>
             </a:r>
             <a:endParaRPr lang="en-US" sz="1400" dirty="0"/>
           </a:p>
@@ -26210,7 +27941,112 @@
       </p:sp>
       <p:sp>
         <p:nvSpPr>
-          <p:cNvPr id="30" name="Shape 28"/>
+          <p:cNvPr id="33" name="Text 31"/>
+          <p:cNvSpPr/>
+          <p:nvPr/>
+        </p:nvSpPr>
+        <p:spPr>
+          <a:xfrm>
+            <a:off x="6016752" y="3364992"/>
+            <a:ext cx="411480" cy="475488"/>
+          </a:xfrm>
+          <a:prstGeom prst="rect">
+            <a:avLst/>
+          </a:prstGeom>
+          <a:noFill/>
+          <a:ln/>
+        </p:spPr>
+        <p:txBody>
+          <a:bodyPr wrap="square" lIns="0" tIns="0" rIns="0" bIns="0" rtlCol="0" anchor="ctr"/>
+          <a:lstStyle/>
+          <a:p>
+            <a:pPr algn="ctr" indent="0" marL="0">
+              <a:buNone/>
+            </a:pPr>
+            <a:r>
+              <a:rPr lang="en-US" sz="1600" b="1" dirty="0">
+                <a:solidFill>
+                  <a:srgbClr val="0D9488"/>
+                </a:solidFill>
+                <a:latin typeface="Trebuchet MS" pitchFamily="34" charset="0"/>
+                <a:ea typeface="Trebuchet MS" pitchFamily="34" charset="-122"/>
+                <a:cs typeface="Trebuchet MS" pitchFamily="34" charset="-120"/>
+              </a:rPr>
+              <a:t>·</a:t>
+            </a:r>
+            <a:endParaRPr lang="en-US" sz="1600" dirty="0"/>
+          </a:p>
+        </p:txBody>
+      </p:sp>
+      <p:sp>
+        <p:nvSpPr>
+          <p:cNvPr id="34" name="Shape 32"/>
+          <p:cNvSpPr/>
+          <p:nvPr/>
+        </p:nvSpPr>
+        <p:spPr>
+          <a:xfrm>
+            <a:off x="6428232" y="3364992"/>
+            <a:ext cx="1645920" cy="475488"/>
+          </a:xfrm>
+          <a:prstGeom prst="rect">
+            <a:avLst>
+              <a:gd name="adj" fmla="val 9615"/>
+            </a:avLst>
+          </a:prstGeom>
+          <a:solidFill>
+            <a:srgbClr val="FFFFFF"/>
+          </a:solidFill>
+          <a:ln w="12700">
+            <a:solidFill>
+              <a:srgbClr val="0D9488"/>
+            </a:solidFill>
+            <a:prstDash val="solid"/>
+          </a:ln>
+        </p:spPr>
+      </p:sp>
+      <p:sp>
+        <p:nvSpPr>
+          <p:cNvPr id="35" name="Text 33"/>
+          <p:cNvSpPr/>
+          <p:nvPr/>
+        </p:nvSpPr>
+        <p:spPr>
+          <a:xfrm>
+            <a:off x="6428232" y="3364992"/>
+            <a:ext cx="1645920" cy="475488"/>
+          </a:xfrm>
+          <a:prstGeom prst="rect">
+            <a:avLst/>
+          </a:prstGeom>
+          <a:noFill/>
+          <a:ln/>
+        </p:spPr>
+        <p:txBody>
+          <a:bodyPr wrap="square" lIns="0" tIns="0" rIns="0" bIns="0" rtlCol="0" anchor="ctr"/>
+          <a:lstStyle/>
+          <a:p>
+            <a:pPr algn="ctr" indent="0" marL="0">
+              <a:buNone/>
+            </a:pPr>
+            <a:r>
+              <a:rPr lang="en-US" sz="1400" b="1" dirty="0">
+                <a:solidFill>
+                  <a:srgbClr val="0D9488"/>
+                </a:solidFill>
+                <a:latin typeface="Trebuchet MS" pitchFamily="34" charset="0"/>
+                <a:ea typeface="Trebuchet MS" pitchFamily="34" charset="-122"/>
+                <a:cs typeface="Trebuchet MS" pitchFamily="34" charset="-120"/>
+              </a:rPr>
+              <a:t>ness</a:t>
+            </a:r>
+            <a:endParaRPr lang="en-US" sz="1400" dirty="0"/>
+          </a:p>
+        </p:txBody>
+      </p:sp>
+      <p:sp>
+        <p:nvSpPr>
+          <p:cNvPr id="36" name="Shape 34"/>
           <p:cNvSpPr/>
           <p:nvPr/>
         </p:nvSpPr>
@@ -26237,7 +28073,7 @@
       </p:sp>
       <p:sp>
         <p:nvSpPr>
-          <p:cNvPr id="31" name="Text 29"/>
+          <p:cNvPr id="37" name="Text 35"/>
           <p:cNvSpPr/>
           <p:nvPr/>
         </p:nvSpPr>
@@ -26276,7 +28112,7 @@
       </p:sp>
       <p:sp>
         <p:nvSpPr>
-          <p:cNvPr id="32" name="Shape 30"/>
+          <p:cNvPr id="38" name="Shape 36"/>
           <p:cNvSpPr/>
           <p:nvPr/>
         </p:nvSpPr>
@@ -26303,13 +28139,13 @@
       </p:sp>
       <p:sp>
         <p:nvSpPr>
-          <p:cNvPr id="33" name="Shape 31"/>
-          <p:cNvSpPr/>
-          <p:nvPr/>
-        </p:nvSpPr>
-        <p:spPr>
-          <a:xfrm>
-            <a:off x="2670048" y="4169664"/>
+          <p:cNvPr id="39" name="Shape 37"/>
+          <p:cNvSpPr/>
+          <p:nvPr/>
+        </p:nvSpPr>
+        <p:spPr>
+          <a:xfrm>
+            <a:off x="2023872" y="4169664"/>
             <a:ext cx="685800" cy="475488"/>
           </a:xfrm>
           <a:prstGeom prst="rect">
@@ -26330,13 +28166,13 @@
       </p:sp>
       <p:sp>
         <p:nvSpPr>
-          <p:cNvPr id="34" name="Text 32"/>
-          <p:cNvSpPr/>
-          <p:nvPr/>
-        </p:nvSpPr>
-        <p:spPr>
-          <a:xfrm>
-            <a:off x="2670048" y="4169664"/>
+          <p:cNvPr id="40" name="Text 38"/>
+          <p:cNvSpPr/>
+          <p:nvPr/>
+        </p:nvSpPr>
+        <p:spPr>
+          <a:xfrm>
+            <a:off x="2023872" y="4169664"/>
             <a:ext cx="685800" cy="475488"/>
           </a:xfrm>
           <a:prstGeom prst="rect">
@@ -26369,13 +28205,13 @@
       </p:sp>
       <p:sp>
         <p:nvSpPr>
-          <p:cNvPr id="35" name="Shape 33"/>
-          <p:cNvSpPr/>
-          <p:nvPr/>
-        </p:nvSpPr>
-        <p:spPr>
-          <a:xfrm>
-            <a:off x="4123944" y="4169664"/>
+          <p:cNvPr id="41" name="Shape 39"/>
+          <p:cNvSpPr/>
+          <p:nvPr/>
+        </p:nvSpPr>
+        <p:spPr>
+          <a:xfrm>
+            <a:off x="2831592" y="4169664"/>
             <a:ext cx="685800" cy="475488"/>
           </a:xfrm>
           <a:prstGeom prst="rect">
@@ -26396,13 +28232,13 @@
       </p:sp>
       <p:sp>
         <p:nvSpPr>
-          <p:cNvPr id="36" name="Text 34"/>
-          <p:cNvSpPr/>
-          <p:nvPr/>
-        </p:nvSpPr>
-        <p:spPr>
-          <a:xfrm>
-            <a:off x="4123944" y="4169664"/>
+          <p:cNvPr id="42" name="Text 40"/>
+          <p:cNvSpPr/>
+          <p:nvPr/>
+        </p:nvSpPr>
+        <p:spPr>
+          <a:xfrm>
+            <a:off x="2831592" y="4169664"/>
             <a:ext cx="685800" cy="475488"/>
           </a:xfrm>
           <a:prstGeom prst="rect">
@@ -26435,13 +28271,13 @@
       </p:sp>
       <p:sp>
         <p:nvSpPr>
-          <p:cNvPr id="37" name="Shape 35"/>
-          <p:cNvSpPr/>
-          <p:nvPr/>
-        </p:nvSpPr>
-        <p:spPr>
-          <a:xfrm>
-            <a:off x="5577840" y="4169664"/>
+          <p:cNvPr id="43" name="Shape 41"/>
+          <p:cNvSpPr/>
+          <p:nvPr/>
+        </p:nvSpPr>
+        <p:spPr>
+          <a:xfrm>
+            <a:off x="3639312" y="4169664"/>
             <a:ext cx="685800" cy="475488"/>
           </a:xfrm>
           <a:prstGeom prst="rect">
@@ -26462,13 +28298,13 @@
       </p:sp>
       <p:sp>
         <p:nvSpPr>
-          <p:cNvPr id="38" name="Text 36"/>
-          <p:cNvSpPr/>
-          <p:nvPr/>
-        </p:nvSpPr>
-        <p:spPr>
-          <a:xfrm>
-            <a:off x="5577840" y="4169664"/>
+          <p:cNvPr id="44" name="Text 42"/>
+          <p:cNvSpPr/>
+          <p:nvPr/>
+        </p:nvSpPr>
+        <p:spPr>
+          <a:xfrm>
+            <a:off x="3639312" y="4169664"/>
             <a:ext cx="685800" cy="475488"/>
           </a:xfrm>
           <a:prstGeom prst="rect">
@@ -26493,7 +28329,7 @@
                 <a:ea typeface="Trebuchet MS" pitchFamily="34" charset="-122"/>
                 <a:cs typeface="Trebuchet MS" pitchFamily="34" charset="-120"/>
               </a:rPr>
-              <a:t>i</a:t>
+              <a:t>f</a:t>
             </a:r>
             <a:endParaRPr lang="en-US" sz="900" dirty="0"/>
           </a:p>
@@ -26501,13 +28337,13 @@
       </p:sp>
       <p:sp>
         <p:nvSpPr>
-          <p:cNvPr id="39" name="Shape 37"/>
-          <p:cNvSpPr/>
-          <p:nvPr/>
-        </p:nvSpPr>
-        <p:spPr>
-          <a:xfrm>
-            <a:off x="7031736" y="4169664"/>
+          <p:cNvPr id="45" name="Shape 43"/>
+          <p:cNvSpPr/>
+          <p:nvPr/>
+        </p:nvSpPr>
+        <p:spPr>
+          <a:xfrm>
+            <a:off x="4447032" y="4169664"/>
             <a:ext cx="685800" cy="475488"/>
           </a:xfrm>
           <a:prstGeom prst="rect">
@@ -26528,13 +28364,13 @@
       </p:sp>
       <p:sp>
         <p:nvSpPr>
-          <p:cNvPr id="40" name="Text 38"/>
-          <p:cNvSpPr/>
-          <p:nvPr/>
-        </p:nvSpPr>
-        <p:spPr>
-          <a:xfrm>
-            <a:off x="7031736" y="4169664"/>
+          <p:cNvPr id="46" name="Text 44"/>
+          <p:cNvSpPr/>
+          <p:nvPr/>
+        </p:nvSpPr>
+        <p:spPr>
+          <a:xfrm>
+            <a:off x="4447032" y="4169664"/>
             <a:ext cx="685800" cy="475488"/>
           </a:xfrm>
           <a:prstGeom prst="rect">
@@ -26559,7 +28395,271 @@
                 <a:ea typeface="Trebuchet MS" pitchFamily="34" charset="-122"/>
                 <a:cs typeface="Trebuchet MS" pitchFamily="34" charset="-120"/>
               </a:rPr>
-              <a:t>ng</a:t>
+              <a:t>u</a:t>
+            </a:r>
+            <a:endParaRPr lang="en-US" sz="900" dirty="0"/>
+          </a:p>
+        </p:txBody>
+      </p:sp>
+      <p:sp>
+        <p:nvSpPr>
+          <p:cNvPr id="47" name="Shape 45"/>
+          <p:cNvSpPr/>
+          <p:nvPr/>
+        </p:nvSpPr>
+        <p:spPr>
+          <a:xfrm>
+            <a:off x="5254752" y="4169664"/>
+            <a:ext cx="685800" cy="475488"/>
+          </a:xfrm>
+          <a:prstGeom prst="rect">
+            <a:avLst>
+              <a:gd name="adj" fmla="val 7692"/>
+            </a:avLst>
+          </a:prstGeom>
+          <a:solidFill>
+            <a:srgbClr val="FFFFFF"/>
+          </a:solidFill>
+          <a:ln w="12700">
+            <a:solidFill>
+              <a:srgbClr val="DB2777"/>
+            </a:solidFill>
+            <a:prstDash val="solid"/>
+          </a:ln>
+        </p:spPr>
+      </p:sp>
+      <p:sp>
+        <p:nvSpPr>
+          <p:cNvPr id="48" name="Text 46"/>
+          <p:cNvSpPr/>
+          <p:nvPr/>
+        </p:nvSpPr>
+        <p:spPr>
+          <a:xfrm>
+            <a:off x="5254752" y="4169664"/>
+            <a:ext cx="685800" cy="475488"/>
+          </a:xfrm>
+          <a:prstGeom prst="rect">
+            <a:avLst/>
+          </a:prstGeom>
+          <a:noFill/>
+          <a:ln/>
+        </p:spPr>
+        <p:txBody>
+          <a:bodyPr wrap="square" lIns="0" tIns="0" rIns="0" bIns="0" rtlCol="0" anchor="ctr"/>
+          <a:lstStyle/>
+          <a:p>
+            <a:pPr algn="ctr" indent="0" marL="0">
+              <a:buNone/>
+            </a:pPr>
+            <a:r>
+              <a:rPr lang="en-US" sz="900" b="1" dirty="0">
+                <a:solidFill>
+                  <a:srgbClr val="9D174D"/>
+                </a:solidFill>
+                <a:latin typeface="Trebuchet MS" pitchFamily="34" charset="0"/>
+                <a:ea typeface="Trebuchet MS" pitchFamily="34" charset="-122"/>
+                <a:cs typeface="Trebuchet MS" pitchFamily="34" charset="-120"/>
+              </a:rPr>
+              <a:t>l</a:t>
+            </a:r>
+            <a:endParaRPr lang="en-US" sz="900" dirty="0"/>
+          </a:p>
+        </p:txBody>
+      </p:sp>
+      <p:sp>
+        <p:nvSpPr>
+          <p:cNvPr id="49" name="Shape 47"/>
+          <p:cNvSpPr/>
+          <p:nvPr/>
+        </p:nvSpPr>
+        <p:spPr>
+          <a:xfrm>
+            <a:off x="6062472" y="4169664"/>
+            <a:ext cx="685800" cy="475488"/>
+          </a:xfrm>
+          <a:prstGeom prst="rect">
+            <a:avLst>
+              <a:gd name="adj" fmla="val 7692"/>
+            </a:avLst>
+          </a:prstGeom>
+          <a:solidFill>
+            <a:srgbClr val="FFFFFF"/>
+          </a:solidFill>
+          <a:ln w="12700">
+            <a:solidFill>
+              <a:srgbClr val="DB2777"/>
+            </a:solidFill>
+            <a:prstDash val="solid"/>
+          </a:ln>
+        </p:spPr>
+      </p:sp>
+      <p:sp>
+        <p:nvSpPr>
+          <p:cNvPr id="50" name="Text 48"/>
+          <p:cNvSpPr/>
+          <p:nvPr/>
+        </p:nvSpPr>
+        <p:spPr>
+          <a:xfrm>
+            <a:off x="6062472" y="4169664"/>
+            <a:ext cx="685800" cy="475488"/>
+          </a:xfrm>
+          <a:prstGeom prst="rect">
+            <a:avLst/>
+          </a:prstGeom>
+          <a:noFill/>
+          <a:ln/>
+        </p:spPr>
+        <p:txBody>
+          <a:bodyPr wrap="square" lIns="0" tIns="0" rIns="0" bIns="0" rtlCol="0" anchor="ctr"/>
+          <a:lstStyle/>
+          <a:p>
+            <a:pPr algn="ctr" indent="0" marL="0">
+              <a:buNone/>
+            </a:pPr>
+            <a:r>
+              <a:rPr lang="en-US" sz="900" b="1" dirty="0">
+                <a:solidFill>
+                  <a:srgbClr val="9D174D"/>
+                </a:solidFill>
+                <a:latin typeface="Trebuchet MS" pitchFamily="34" charset="0"/>
+                <a:ea typeface="Trebuchet MS" pitchFamily="34" charset="-122"/>
+                <a:cs typeface="Trebuchet MS" pitchFamily="34" charset="-120"/>
+              </a:rPr>
+              <a:t>n</a:t>
+            </a:r>
+            <a:endParaRPr lang="en-US" sz="900" dirty="0"/>
+          </a:p>
+        </p:txBody>
+      </p:sp>
+      <p:sp>
+        <p:nvSpPr>
+          <p:cNvPr id="51" name="Shape 49"/>
+          <p:cNvSpPr/>
+          <p:nvPr/>
+        </p:nvSpPr>
+        <p:spPr>
+          <a:xfrm>
+            <a:off x="6870192" y="4169664"/>
+            <a:ext cx="685800" cy="475488"/>
+          </a:xfrm>
+          <a:prstGeom prst="rect">
+            <a:avLst>
+              <a:gd name="adj" fmla="val 7692"/>
+            </a:avLst>
+          </a:prstGeom>
+          <a:solidFill>
+            <a:srgbClr val="FFFFFF"/>
+          </a:solidFill>
+          <a:ln w="12700">
+            <a:solidFill>
+              <a:srgbClr val="DB2777"/>
+            </a:solidFill>
+            <a:prstDash val="solid"/>
+          </a:ln>
+        </p:spPr>
+      </p:sp>
+      <p:sp>
+        <p:nvSpPr>
+          <p:cNvPr id="52" name="Text 50"/>
+          <p:cNvSpPr/>
+          <p:nvPr/>
+        </p:nvSpPr>
+        <p:spPr>
+          <a:xfrm>
+            <a:off x="6870192" y="4169664"/>
+            <a:ext cx="685800" cy="475488"/>
+          </a:xfrm>
+          <a:prstGeom prst="rect">
+            <a:avLst/>
+          </a:prstGeom>
+          <a:noFill/>
+          <a:ln/>
+        </p:spPr>
+        <p:txBody>
+          <a:bodyPr wrap="square" lIns="0" tIns="0" rIns="0" bIns="0" rtlCol="0" anchor="ctr"/>
+          <a:lstStyle/>
+          <a:p>
+            <a:pPr algn="ctr" indent="0" marL="0">
+              <a:buNone/>
+            </a:pPr>
+            <a:r>
+              <a:rPr lang="en-US" sz="900" b="1" dirty="0">
+                <a:solidFill>
+                  <a:srgbClr val="9D174D"/>
+                </a:solidFill>
+                <a:latin typeface="Trebuchet MS" pitchFamily="34" charset="0"/>
+                <a:ea typeface="Trebuchet MS" pitchFamily="34" charset="-122"/>
+                <a:cs typeface="Trebuchet MS" pitchFamily="34" charset="-120"/>
+              </a:rPr>
+              <a:t>e</a:t>
+            </a:r>
+            <a:endParaRPr lang="en-US" sz="900" dirty="0"/>
+          </a:p>
+        </p:txBody>
+      </p:sp>
+      <p:sp>
+        <p:nvSpPr>
+          <p:cNvPr id="53" name="Shape 51"/>
+          <p:cNvSpPr/>
+          <p:nvPr/>
+        </p:nvSpPr>
+        <p:spPr>
+          <a:xfrm>
+            <a:off x="7677912" y="4169664"/>
+            <a:ext cx="685800" cy="475488"/>
+          </a:xfrm>
+          <a:prstGeom prst="rect">
+            <a:avLst>
+              <a:gd name="adj" fmla="val 7692"/>
+            </a:avLst>
+          </a:prstGeom>
+          <a:solidFill>
+            <a:srgbClr val="FFFFFF"/>
+          </a:solidFill>
+          <a:ln w="12700">
+            <a:solidFill>
+              <a:srgbClr val="DB2777"/>
+            </a:solidFill>
+            <a:prstDash val="solid"/>
+          </a:ln>
+        </p:spPr>
+      </p:sp>
+      <p:sp>
+        <p:nvSpPr>
+          <p:cNvPr id="54" name="Text 52"/>
+          <p:cNvSpPr/>
+          <p:nvPr/>
+        </p:nvSpPr>
+        <p:spPr>
+          <a:xfrm>
+            <a:off x="7677912" y="4169664"/>
+            <a:ext cx="685800" cy="475488"/>
+          </a:xfrm>
+          <a:prstGeom prst="rect">
+            <a:avLst/>
+          </a:prstGeom>
+          <a:noFill/>
+          <a:ln/>
+        </p:spPr>
+        <p:txBody>
+          <a:bodyPr wrap="square" lIns="0" tIns="0" rIns="0" bIns="0" rtlCol="0" anchor="ctr"/>
+          <a:lstStyle/>
+          <a:p>
+            <a:pPr algn="ctr" indent="0" marL="0">
+              <a:buNone/>
+            </a:pPr>
+            <a:r>
+              <a:rPr lang="en-US" sz="900" b="1" dirty="0">
+                <a:solidFill>
+                  <a:srgbClr val="9D174D"/>
+                </a:solidFill>
+                <a:latin typeface="Trebuchet MS" pitchFamily="34" charset="0"/>
+                <a:ea typeface="Trebuchet MS" pitchFamily="34" charset="-122"/>
+                <a:cs typeface="Trebuchet MS" pitchFamily="34" charset="-120"/>
+              </a:rPr>
+              <a:t>ss</a:t>
             </a:r>
             <a:endParaRPr lang="en-US" sz="900" dirty="0"/>
           </a:p>
@@ -26851,7 +28951,7 @@
                 <a:ea typeface="Calibri" pitchFamily="34" charset="-122"/>
                 <a:cs typeface="Calibri" pitchFamily="34" charset="-120"/>
               </a:rPr>
-              <a:t>Word Labs  •  wordlabs.app  •  Root: 'fear' = feeling of danger or dread</a:t>
+              <a:t>Word Labs  •  wordlabs.app  •  Root: 'fear' = to be afraid of</a:t>
             </a:r>
             <a:endParaRPr lang="en-US" sz="800" dirty="0"/>
           </a:p>
@@ -26990,7 +29090,7 @@
                 <a:ea typeface="Trebuchet MS" pitchFamily="34" charset="-122"/>
                 <a:cs typeface="Trebuchet MS" pitchFamily="34" charset="-120"/>
               </a:rPr>
-              <a:t>fearfully</a:t>
+              <a:t>fearlessness</a:t>
             </a:r>
             <a:endParaRPr lang="en-US" sz="2800" dirty="0"/>
           </a:p>
@@ -27678,7 +29778,7 @@
                 <a:ea typeface="Calibri" pitchFamily="34" charset="-122"/>
                 <a:cs typeface="Calibri" pitchFamily="34" charset="-120"/>
               </a:rPr>
-              <a:t>Word Labs  •  wordlabs.app  •  Root: 'fear' = feeling of danger or dread</a:t>
+              <a:t>Word Labs  •  wordlabs.app  •  Root: 'fear' = to be afraid of</a:t>
             </a:r>
             <a:endParaRPr lang="en-US" sz="800" dirty="0"/>
           </a:p>
@@ -27817,7 +29917,7 @@
                 <a:ea typeface="Trebuchet MS" pitchFamily="34" charset="-122"/>
                 <a:cs typeface="Trebuchet MS" pitchFamily="34" charset="-120"/>
               </a:rPr>
-              <a:t>fearfully</a:t>
+              <a:t>fearlessness</a:t>
             </a:r>
             <a:endParaRPr lang="en-US" sz="2800" dirty="0"/>
           </a:p>
@@ -27995,7 +30095,7 @@
                 <a:ea typeface="Calibri" pitchFamily="34" charset="-122"/>
                 <a:cs typeface="Calibri" pitchFamily="34" charset="-120"/>
               </a:rPr>
-              <a:t>feeling of danger or dread</a:t>
+              <a:t>to be afraid of</a:t>
             </a:r>
             <a:endParaRPr lang="en-US" sz="850" dirty="0"/>
           </a:p>
@@ -28018,11 +30118,11 @@
             </a:avLst>
           </a:prstGeom>
           <a:solidFill>
-            <a:srgbClr val="FCE7F3"/>
+            <a:srgbClr val="DDD6FE"/>
           </a:solidFill>
           <a:ln w="19050">
             <a:solidFill>
-              <a:srgbClr val="DB2777"/>
+              <a:srgbClr val="7C3AED"/>
             </a:solidFill>
             <a:prstDash val="solid"/>
           </a:ln>
@@ -28062,13 +30162,13 @@
             <a:r>
               <a:rPr lang="en-US" sz="1300" b="1" dirty="0">
                 <a:solidFill>
-                  <a:srgbClr val="9D174D"/>
+                  <a:srgbClr val="4C1D95"/>
                 </a:solidFill>
                 <a:latin typeface="Trebuchet MS" pitchFamily="34" charset="0"/>
                 <a:ea typeface="Trebuchet MS" pitchFamily="34" charset="-122"/>
                 <a:cs typeface="Trebuchet MS" pitchFamily="34" charset="-120"/>
               </a:rPr>
-              <a:t>ful</a:t>
+              <a:t>less</a:t>
             </a:r>
             <a:endParaRPr lang="en-US" sz="1300" dirty="0"/>
           </a:p>
@@ -28107,7 +30207,7 @@
                 <a:ea typeface="Calibri" pitchFamily="34" charset="-122"/>
                 <a:cs typeface="Calibri" pitchFamily="34" charset="-120"/>
               </a:rPr>
-              <a:t>full of</a:t>
+              <a:t>without</a:t>
             </a:r>
             <a:endParaRPr lang="en-US" sz="850" dirty="0"/>
           </a:p>
@@ -28180,7 +30280,7 @@
                 <a:ea typeface="Trebuchet MS" pitchFamily="34" charset="-122"/>
                 <a:cs typeface="Trebuchet MS" pitchFamily="34" charset="-120"/>
               </a:rPr>
-              <a:t>ly</a:t>
+              <a:t>ness</a:t>
             </a:r>
             <a:endParaRPr lang="en-US" sz="1300" dirty="0"/>
           </a:p>
@@ -28219,7 +30319,7 @@
                 <a:ea typeface="Calibri" pitchFamily="34" charset="-122"/>
                 <a:cs typeface="Calibri" pitchFamily="34" charset="-120"/>
               </a:rPr>
-              <a:t>in a way that is</a:t>
+              <a:t>state of</a:t>
             </a:r>
             <a:endParaRPr lang="en-US" sz="850" dirty="0"/>
           </a:p>
@@ -28775,7 +30875,7 @@
                 <a:ea typeface="Calibri" pitchFamily="34" charset="-122"/>
                 <a:cs typeface="Calibri" pitchFamily="34" charset="-120"/>
               </a:rPr>
-              <a:t>Word Labs  •  wordlabs.app  •  Root: 'fear' = feeling of danger or dread</a:t>
+              <a:t>Word Labs  •  wordlabs.app  •  Root: 'fear' = to be afraid of</a:t>
             </a:r>
             <a:endParaRPr lang="en-US" sz="800" dirty="0"/>
           </a:p>
@@ -28914,7 +31014,7 @@
                 <a:ea typeface="Trebuchet MS" pitchFamily="34" charset="-122"/>
                 <a:cs typeface="Trebuchet MS" pitchFamily="34" charset="-120"/>
               </a:rPr>
-              <a:t>fearfully</a:t>
+              <a:t>fearlessness</a:t>
             </a:r>
             <a:endParaRPr lang="en-US" sz="2800" dirty="0"/>
           </a:p>
@@ -29092,7 +31192,7 @@
                 <a:ea typeface="Calibri" pitchFamily="34" charset="-122"/>
                 <a:cs typeface="Calibri" pitchFamily="34" charset="-120"/>
               </a:rPr>
-              <a:t>feeling of danger or dread</a:t>
+              <a:t>to be afraid of</a:t>
             </a:r>
             <a:endParaRPr lang="en-US" sz="850" dirty="0"/>
           </a:p>
@@ -29115,11 +31215,11 @@
             </a:avLst>
           </a:prstGeom>
           <a:solidFill>
-            <a:srgbClr val="FCE7F3"/>
+            <a:srgbClr val="DDD6FE"/>
           </a:solidFill>
           <a:ln w="19050">
             <a:solidFill>
-              <a:srgbClr val="DB2777"/>
+              <a:srgbClr val="7C3AED"/>
             </a:solidFill>
             <a:prstDash val="solid"/>
           </a:ln>
@@ -29159,13 +31259,13 @@
             <a:r>
               <a:rPr lang="en-US" sz="1300" b="1" dirty="0">
                 <a:solidFill>
-                  <a:srgbClr val="9D174D"/>
+                  <a:srgbClr val="4C1D95"/>
                 </a:solidFill>
                 <a:latin typeface="Trebuchet MS" pitchFamily="34" charset="0"/>
                 <a:ea typeface="Trebuchet MS" pitchFamily="34" charset="-122"/>
                 <a:cs typeface="Trebuchet MS" pitchFamily="34" charset="-120"/>
               </a:rPr>
-              <a:t>ful</a:t>
+              <a:t>less</a:t>
             </a:r>
             <a:endParaRPr lang="en-US" sz="1300" dirty="0"/>
           </a:p>
@@ -29204,7 +31304,7 @@
                 <a:ea typeface="Calibri" pitchFamily="34" charset="-122"/>
                 <a:cs typeface="Calibri" pitchFamily="34" charset="-120"/>
               </a:rPr>
-              <a:t>full of</a:t>
+              <a:t>without</a:t>
             </a:r>
             <a:endParaRPr lang="en-US" sz="850" dirty="0"/>
           </a:p>
@@ -29277,7 +31377,7 @@
                 <a:ea typeface="Trebuchet MS" pitchFamily="34" charset="-122"/>
                 <a:cs typeface="Trebuchet MS" pitchFamily="34" charset="-120"/>
               </a:rPr>
-              <a:t>ly</a:t>
+              <a:t>ness</a:t>
             </a:r>
             <a:endParaRPr lang="en-US" sz="1300" dirty="0"/>
           </a:p>
@@ -29316,7 +31416,7 @@
                 <a:ea typeface="Calibri" pitchFamily="34" charset="-122"/>
                 <a:cs typeface="Calibri" pitchFamily="34" charset="-120"/>
               </a:rPr>
-              <a:t>in a way that is</a:t>
+              <a:t>state of</a:t>
             </a:r>
             <a:endParaRPr lang="en-US" sz="850" dirty="0"/>
           </a:p>
@@ -29580,7 +31680,7 @@
                 <a:ea typeface="Trebuchet MS" pitchFamily="34" charset="-122"/>
                 <a:cs typeface="Trebuchet MS" pitchFamily="34" charset="-120"/>
               </a:rPr>
-              <a:t>ful</a:t>
+              <a:t>less</a:t>
             </a:r>
             <a:endParaRPr lang="en-US" sz="1400" dirty="0"/>
           </a:p>
@@ -29685,7 +31785,7 @@
                 <a:ea typeface="Trebuchet MS" pitchFamily="34" charset="-122"/>
                 <a:cs typeface="Trebuchet MS" pitchFamily="34" charset="-120"/>
               </a:rPr>
-              <a:t>ly</a:t>
+              <a:t>ness</a:t>
             </a:r>
             <a:endParaRPr lang="en-US" sz="1400" dirty="0"/>
           </a:p>
@@ -30109,7 +32209,7 @@
                 <a:ea typeface="Calibri" pitchFamily="34" charset="-122"/>
                 <a:cs typeface="Calibri" pitchFamily="34" charset="-120"/>
               </a:rPr>
-              <a:t>Word Labs  •  wordlabs.app  •  Root: 'fear' = feeling of danger or dread</a:t>
+              <a:t>Word Labs  •  wordlabs.app  •  Root: 'fear' = to be afraid of</a:t>
             </a:r>
             <a:endParaRPr lang="en-US" sz="800" dirty="0"/>
           </a:p>
@@ -30248,7 +32348,7 @@
                 <a:ea typeface="Trebuchet MS" pitchFamily="34" charset="-122"/>
                 <a:cs typeface="Trebuchet MS" pitchFamily="34" charset="-120"/>
               </a:rPr>
-              <a:t>fearfully</a:t>
+              <a:t>fearlessness</a:t>
             </a:r>
             <a:endParaRPr lang="en-US" sz="2800" dirty="0"/>
           </a:p>
@@ -30426,7 +32526,7 @@
                 <a:ea typeface="Calibri" pitchFamily="34" charset="-122"/>
                 <a:cs typeface="Calibri" pitchFamily="34" charset="-120"/>
               </a:rPr>
-              <a:t>feeling of danger or dread</a:t>
+              <a:t>to be afraid of</a:t>
             </a:r>
             <a:endParaRPr lang="en-US" sz="850" dirty="0"/>
           </a:p>
@@ -30449,11 +32549,11 @@
             </a:avLst>
           </a:prstGeom>
           <a:solidFill>
-            <a:srgbClr val="FCE7F3"/>
+            <a:srgbClr val="DDD6FE"/>
           </a:solidFill>
           <a:ln w="19050">
             <a:solidFill>
-              <a:srgbClr val="DB2777"/>
+              <a:srgbClr val="7C3AED"/>
             </a:solidFill>
             <a:prstDash val="solid"/>
           </a:ln>
@@ -30493,13 +32593,13 @@
             <a:r>
               <a:rPr lang="en-US" sz="1300" b="1" dirty="0">
                 <a:solidFill>
-                  <a:srgbClr val="9D174D"/>
+                  <a:srgbClr val="4C1D95"/>
                 </a:solidFill>
                 <a:latin typeface="Trebuchet MS" pitchFamily="34" charset="0"/>
                 <a:ea typeface="Trebuchet MS" pitchFamily="34" charset="-122"/>
                 <a:cs typeface="Trebuchet MS" pitchFamily="34" charset="-120"/>
               </a:rPr>
-              <a:t>ful</a:t>
+              <a:t>less</a:t>
             </a:r>
             <a:endParaRPr lang="en-US" sz="1300" dirty="0"/>
           </a:p>
@@ -30538,7 +32638,7 @@
                 <a:ea typeface="Calibri" pitchFamily="34" charset="-122"/>
                 <a:cs typeface="Calibri" pitchFamily="34" charset="-120"/>
               </a:rPr>
-              <a:t>full of</a:t>
+              <a:t>without</a:t>
             </a:r>
             <a:endParaRPr lang="en-US" sz="850" dirty="0"/>
           </a:p>
@@ -30611,7 +32711,7 @@
                 <a:ea typeface="Trebuchet MS" pitchFamily="34" charset="-122"/>
                 <a:cs typeface="Trebuchet MS" pitchFamily="34" charset="-120"/>
               </a:rPr>
-              <a:t>ly</a:t>
+              <a:t>ness</a:t>
             </a:r>
             <a:endParaRPr lang="en-US" sz="1300" dirty="0"/>
           </a:p>
@@ -30650,7 +32750,7 @@
                 <a:ea typeface="Calibri" pitchFamily="34" charset="-122"/>
                 <a:cs typeface="Calibri" pitchFamily="34" charset="-120"/>
               </a:rPr>
-              <a:t>in a way that is</a:t>
+              <a:t>state of</a:t>
             </a:r>
             <a:endParaRPr lang="en-US" sz="850" dirty="0"/>
           </a:p>
@@ -30914,7 +33014,7 @@
                 <a:ea typeface="Trebuchet MS" pitchFamily="34" charset="-122"/>
                 <a:cs typeface="Trebuchet MS" pitchFamily="34" charset="-120"/>
               </a:rPr>
-              <a:t>ful</a:t>
+              <a:t>less</a:t>
             </a:r>
             <a:endParaRPr lang="en-US" sz="1400" dirty="0"/>
           </a:p>
@@ -31019,7 +33119,7 @@
                 <a:ea typeface="Trebuchet MS" pitchFamily="34" charset="-122"/>
                 <a:cs typeface="Trebuchet MS" pitchFamily="34" charset="-120"/>
               </a:rPr>
-              <a:t>ly</a:t>
+              <a:t>ness</a:t>
             </a:r>
             <a:endParaRPr lang="en-US" sz="1400" dirty="0"/>
           </a:p>
@@ -31126,7 +33226,7 @@
         </p:nvSpPr>
         <p:spPr>
           <a:xfrm>
-            <a:off x="2124837" y="4169664"/>
+            <a:off x="2023872" y="4169664"/>
             <a:ext cx="685800" cy="475488"/>
           </a:xfrm>
           <a:prstGeom prst="rect">
@@ -31153,7 +33253,7 @@
         </p:nvSpPr>
         <p:spPr>
           <a:xfrm>
-            <a:off x="2124837" y="4169664"/>
+            <a:off x="2023872" y="4169664"/>
             <a:ext cx="685800" cy="475488"/>
           </a:xfrm>
           <a:prstGeom prst="rect">
@@ -31192,7 +33292,7 @@
         </p:nvSpPr>
         <p:spPr>
           <a:xfrm>
-            <a:off x="3033522" y="4169664"/>
+            <a:off x="2831592" y="4169664"/>
             <a:ext cx="685800" cy="475488"/>
           </a:xfrm>
           <a:prstGeom prst="rect">
@@ -31219,7 +33319,7 @@
         </p:nvSpPr>
         <p:spPr>
           <a:xfrm>
-            <a:off x="3033522" y="4169664"/>
+            <a:off x="2831592" y="4169664"/>
             <a:ext cx="685800" cy="475488"/>
           </a:xfrm>
           <a:prstGeom prst="rect">
@@ -31258,7 +33358,7 @@
         </p:nvSpPr>
         <p:spPr>
           <a:xfrm>
-            <a:off x="3942207" y="4169664"/>
+            <a:off x="3639312" y="4169664"/>
             <a:ext cx="685800" cy="475488"/>
           </a:xfrm>
           <a:prstGeom prst="rect">
@@ -31285,7 +33385,7 @@
         </p:nvSpPr>
         <p:spPr>
           <a:xfrm>
-            <a:off x="3942207" y="4169664"/>
+            <a:off x="3639312" y="4169664"/>
             <a:ext cx="685800" cy="475488"/>
           </a:xfrm>
           <a:prstGeom prst="rect">
@@ -31310,7 +33410,7 @@
                 <a:ea typeface="Trebuchet MS" pitchFamily="34" charset="-122"/>
                 <a:cs typeface="Trebuchet MS" pitchFamily="34" charset="-120"/>
               </a:rPr>
-              <a:t>f</a:t>
+              <a:t>l</a:t>
             </a:r>
             <a:endParaRPr lang="en-US" sz="900" dirty="0"/>
           </a:p>
@@ -31324,7 +33424,7 @@
         </p:nvSpPr>
         <p:spPr>
           <a:xfrm>
-            <a:off x="4850892" y="4169664"/>
+            <a:off x="4447032" y="4169664"/>
             <a:ext cx="685800" cy="475488"/>
           </a:xfrm>
           <a:prstGeom prst="rect">
@@ -31351,7 +33451,7 @@
         </p:nvSpPr>
         <p:spPr>
           <a:xfrm>
-            <a:off x="4850892" y="4169664"/>
+            <a:off x="4447032" y="4169664"/>
             <a:ext cx="685800" cy="475488"/>
           </a:xfrm>
           <a:prstGeom prst="rect">
@@ -31376,7 +33476,7 @@
                 <a:ea typeface="Trebuchet MS" pitchFamily="34" charset="-122"/>
                 <a:cs typeface="Trebuchet MS" pitchFamily="34" charset="-120"/>
               </a:rPr>
-              <a:t>u</a:t>
+              <a:t>e</a:t>
             </a:r>
             <a:endParaRPr lang="en-US" sz="900" dirty="0"/>
           </a:p>
@@ -31390,7 +33490,7 @@
         </p:nvSpPr>
         <p:spPr>
           <a:xfrm>
-            <a:off x="5759577" y="4169664"/>
+            <a:off x="5254752" y="4169664"/>
             <a:ext cx="685800" cy="475488"/>
           </a:xfrm>
           <a:prstGeom prst="rect">
@@ -31417,7 +33517,7 @@
         </p:nvSpPr>
         <p:spPr>
           <a:xfrm>
-            <a:off x="5759577" y="4169664"/>
+            <a:off x="5254752" y="4169664"/>
             <a:ext cx="685800" cy="475488"/>
           </a:xfrm>
           <a:prstGeom prst="rect">
@@ -31442,7 +33542,7 @@
                 <a:ea typeface="Trebuchet MS" pitchFamily="34" charset="-122"/>
                 <a:cs typeface="Trebuchet MS" pitchFamily="34" charset="-120"/>
               </a:rPr>
-              <a:t>l</a:t>
+              <a:t>ss</a:t>
             </a:r>
             <a:endParaRPr lang="en-US" sz="900" dirty="0"/>
           </a:p>
@@ -31456,7 +33556,7 @@
         </p:nvSpPr>
         <p:spPr>
           <a:xfrm>
-            <a:off x="6668262" y="4169664"/>
+            <a:off x="6062472" y="4169664"/>
             <a:ext cx="685800" cy="475488"/>
           </a:xfrm>
           <a:prstGeom prst="rect">
@@ -31483,7 +33583,7 @@
         </p:nvSpPr>
         <p:spPr>
           <a:xfrm>
-            <a:off x="6668262" y="4169664"/>
+            <a:off x="6062472" y="4169664"/>
             <a:ext cx="685800" cy="475488"/>
           </a:xfrm>
           <a:prstGeom prst="rect">
@@ -31508,7 +33608,7 @@
                 <a:ea typeface="Trebuchet MS" pitchFamily="34" charset="-122"/>
                 <a:cs typeface="Trebuchet MS" pitchFamily="34" charset="-120"/>
               </a:rPr>
-              <a:t>l</a:t>
+              <a:t>n</a:t>
             </a:r>
             <a:endParaRPr lang="en-US" sz="900" dirty="0"/>
           </a:p>
@@ -31522,7 +33622,7 @@
         </p:nvSpPr>
         <p:spPr>
           <a:xfrm>
-            <a:off x="7576947" y="4169664"/>
+            <a:off x="6870192" y="4169664"/>
             <a:ext cx="685800" cy="475488"/>
           </a:xfrm>
           <a:prstGeom prst="rect">
@@ -31549,7 +33649,7 @@
         </p:nvSpPr>
         <p:spPr>
           <a:xfrm>
-            <a:off x="7576947" y="4169664"/>
+            <a:off x="6870192" y="4169664"/>
             <a:ext cx="685800" cy="475488"/>
           </a:xfrm>
           <a:prstGeom prst="rect">
@@ -31574,7 +33674,73 @@
                 <a:ea typeface="Trebuchet MS" pitchFamily="34" charset="-122"/>
                 <a:cs typeface="Trebuchet MS" pitchFamily="34" charset="-120"/>
               </a:rPr>
-              <a:t>y</a:t>
+              <a:t>e</a:t>
+            </a:r>
+            <a:endParaRPr lang="en-US" sz="900" dirty="0"/>
+          </a:p>
+        </p:txBody>
+      </p:sp>
+      <p:sp>
+        <p:nvSpPr>
+          <p:cNvPr id="53" name="Shape 51"/>
+          <p:cNvSpPr/>
+          <p:nvPr/>
+        </p:nvSpPr>
+        <p:spPr>
+          <a:xfrm>
+            <a:off x="7677912" y="4169664"/>
+            <a:ext cx="685800" cy="475488"/>
+          </a:xfrm>
+          <a:prstGeom prst="rect">
+            <a:avLst>
+              <a:gd name="adj" fmla="val 7692"/>
+            </a:avLst>
+          </a:prstGeom>
+          <a:solidFill>
+            <a:srgbClr val="FFFFFF"/>
+          </a:solidFill>
+          <a:ln w="12700">
+            <a:solidFill>
+              <a:srgbClr val="DB2777"/>
+            </a:solidFill>
+            <a:prstDash val="solid"/>
+          </a:ln>
+        </p:spPr>
+      </p:sp>
+      <p:sp>
+        <p:nvSpPr>
+          <p:cNvPr id="54" name="Text 52"/>
+          <p:cNvSpPr/>
+          <p:nvPr/>
+        </p:nvSpPr>
+        <p:spPr>
+          <a:xfrm>
+            <a:off x="7677912" y="4169664"/>
+            <a:ext cx="685800" cy="475488"/>
+          </a:xfrm>
+          <a:prstGeom prst="rect">
+            <a:avLst/>
+          </a:prstGeom>
+          <a:noFill/>
+          <a:ln/>
+        </p:spPr>
+        <p:txBody>
+          <a:bodyPr wrap="square" lIns="0" tIns="0" rIns="0" bIns="0" rtlCol="0" anchor="ctr"/>
+          <a:lstStyle/>
+          <a:p>
+            <a:pPr algn="ctr" indent="0" marL="0">
+              <a:buNone/>
+            </a:pPr>
+            <a:r>
+              <a:rPr lang="en-US" sz="900" b="1" dirty="0">
+                <a:solidFill>
+                  <a:srgbClr val="9D174D"/>
+                </a:solidFill>
+                <a:latin typeface="Trebuchet MS" pitchFamily="34" charset="0"/>
+                <a:ea typeface="Trebuchet MS" pitchFamily="34" charset="-122"/>
+                <a:cs typeface="Trebuchet MS" pitchFamily="34" charset="-120"/>
+              </a:rPr>
+              <a:t>ss</a:t>
             </a:r>
             <a:endParaRPr lang="en-US" sz="900" dirty="0"/>
           </a:p>
@@ -31866,7 +34032,7 @@
                 <a:ea typeface="Calibri" pitchFamily="34" charset="-122"/>
                 <a:cs typeface="Calibri" pitchFamily="34" charset="-120"/>
               </a:rPr>
-              <a:t>Word Labs  •  wordlabs.app  •  Root: 'fear' = feeling of danger or dread</a:t>
+              <a:t>Word Labs  •  wordlabs.app  •  Root: 'fear' = to be afraid of</a:t>
             </a:r>
             <a:endParaRPr lang="en-US" sz="800" dirty="0"/>
           </a:p>
@@ -33035,7 +35201,7 @@
                 <a:ea typeface="Calibri" pitchFamily="34" charset="-122"/>
                 <a:cs typeface="Calibri" pitchFamily="34" charset="-120"/>
               </a:rPr>
-              <a:t>Word Labs  •  wordlabs.app  •  Root: 'fear' = feeling of danger or dread</a:t>
+              <a:t>Word Labs  •  wordlabs.app  •  Root: 'fear' = to be afraid of</a:t>
             </a:r>
             <a:endParaRPr lang="en-US" sz="800" dirty="0"/>
           </a:p>
@@ -33293,7 +35459,7 @@
             <a:avLst/>
           </a:prstGeom>
           <a:solidFill>
-            <a:srgbClr val="DDD6FE"/>
+            <a:srgbClr val="F8FAFC"/>
           </a:solidFill>
           <a:ln w="12700">
             <a:solidFill>
@@ -33305,14 +35471,39 @@
       </p:sp>
       <p:sp>
         <p:nvSpPr>
-          <p:cNvPr id="18" name="Text 16"/>
-          <p:cNvSpPr/>
-          <p:nvPr/>
-        </p:nvSpPr>
-        <p:spPr>
-          <a:xfrm>
-            <a:off x="365760" y="1563624"/>
-            <a:ext cx="2468880" cy="402336"/>
+          <p:cNvPr id="18" name="Shape 16"/>
+          <p:cNvSpPr/>
+          <p:nvPr/>
+        </p:nvSpPr>
+        <p:spPr>
+          <a:xfrm>
+            <a:off x="2971800" y="1563624"/>
+            <a:ext cx="2834640" cy="402336"/>
+          </a:xfrm>
+          <a:prstGeom prst="rect">
+            <a:avLst/>
+          </a:prstGeom>
+          <a:solidFill>
+            <a:srgbClr val="CCFBF1"/>
+          </a:solidFill>
+          <a:ln w="12700">
+            <a:solidFill>
+              <a:srgbClr val="E2E8F0"/>
+            </a:solidFill>
+            <a:prstDash val="solid"/>
+          </a:ln>
+        </p:spPr>
+      </p:sp>
+      <p:sp>
+        <p:nvSpPr>
+          <p:cNvPr id="19" name="Text 17"/>
+          <p:cNvSpPr/>
+          <p:nvPr/>
+        </p:nvSpPr>
+        <p:spPr>
+          <a:xfrm>
+            <a:off x="2971800" y="1563624"/>
+            <a:ext cx="2834640" cy="402336"/>
           </a:xfrm>
           <a:prstGeom prst="rect">
             <a:avLst/>
@@ -33330,13 +35521,13 @@
             <a:r>
               <a:rPr lang="en-US" sz="1300" b="1" dirty="0">
                 <a:solidFill>
-                  <a:srgbClr val="4C1D95"/>
+                  <a:srgbClr val="0F766E"/>
                 </a:solidFill>
                 <a:latin typeface="Trebuchet MS" pitchFamily="34" charset="0"/>
                 <a:ea typeface="Trebuchet MS" pitchFamily="34" charset="-122"/>
                 <a:cs typeface="Trebuchet MS" pitchFamily="34" charset="-120"/>
               </a:rPr>
-              <a:t>un-</a:t>
+              <a:t>fear</a:t>
             </a:r>
             <a:endParaRPr lang="en-US" sz="1300" dirty="0"/>
           </a:p>
@@ -33344,20 +35535,20 @@
       </p:sp>
       <p:sp>
         <p:nvSpPr>
-          <p:cNvPr id="19" name="Shape 17"/>
-          <p:cNvSpPr/>
-          <p:nvPr/>
-        </p:nvSpPr>
-        <p:spPr>
-          <a:xfrm>
-            <a:off x="2971800" y="1563624"/>
+          <p:cNvPr id="20" name="Shape 18"/>
+          <p:cNvSpPr/>
+          <p:nvPr/>
+        </p:nvSpPr>
+        <p:spPr>
+          <a:xfrm>
+            <a:off x="5943600" y="1563624"/>
             <a:ext cx="2834640" cy="402336"/>
           </a:xfrm>
           <a:prstGeom prst="rect">
             <a:avLst/>
           </a:prstGeom>
           <a:solidFill>
-            <a:srgbClr val="CCFBF1"/>
+            <a:srgbClr val="FCE7F3"/>
           </a:solidFill>
           <a:ln w="12700">
             <a:solidFill>
@@ -33369,13 +35560,13 @@
       </p:sp>
       <p:sp>
         <p:nvSpPr>
-          <p:cNvPr id="20" name="Text 18"/>
-          <p:cNvSpPr/>
-          <p:nvPr/>
-        </p:nvSpPr>
-        <p:spPr>
-          <a:xfrm>
-            <a:off x="2971800" y="1563624"/>
+          <p:cNvPr id="21" name="Text 19"/>
+          <p:cNvSpPr/>
+          <p:nvPr/>
+        </p:nvSpPr>
+        <p:spPr>
+          <a:xfrm>
+            <a:off x="5943600" y="1563624"/>
             <a:ext cx="2834640" cy="402336"/>
           </a:xfrm>
           <a:prstGeom prst="rect">
@@ -33394,13 +35585,13 @@
             <a:r>
               <a:rPr lang="en-US" sz="1300" b="1" dirty="0">
                 <a:solidFill>
-                  <a:srgbClr val="0F766E"/>
+                  <a:srgbClr val="9D174D"/>
                 </a:solidFill>
                 <a:latin typeface="Trebuchet MS" pitchFamily="34" charset="0"/>
                 <a:ea typeface="Trebuchet MS" pitchFamily="34" charset="-122"/>
                 <a:cs typeface="Trebuchet MS" pitchFamily="34" charset="-120"/>
               </a:rPr>
-              <a:t>fear</a:t>
+              <a:t>-ed</a:t>
             </a:r>
             <a:endParaRPr lang="en-US" sz="1300" dirty="0"/>
           </a:p>
@@ -33408,19 +35599,69 @@
       </p:sp>
       <p:sp>
         <p:nvSpPr>
-          <p:cNvPr id="21" name="Shape 19"/>
-          <p:cNvSpPr/>
-          <p:nvPr/>
-        </p:nvSpPr>
-        <p:spPr>
-          <a:xfrm>
-            <a:off x="5943600" y="1563624"/>
+          <p:cNvPr id="22" name="Shape 20"/>
+          <p:cNvSpPr/>
+          <p:nvPr/>
+        </p:nvSpPr>
+        <p:spPr>
+          <a:xfrm>
+            <a:off x="365760" y="1984248"/>
+            <a:ext cx="2468880" cy="402336"/>
+          </a:xfrm>
+          <a:prstGeom prst="rect">
+            <a:avLst/>
+          </a:prstGeom>
+          <a:solidFill>
+            <a:srgbClr val="F1F5F9"/>
+          </a:solidFill>
+          <a:ln w="12700">
+            <a:solidFill>
+              <a:srgbClr val="E2E8F0"/>
+            </a:solidFill>
+            <a:prstDash val="solid"/>
+          </a:ln>
+        </p:spPr>
+      </p:sp>
+      <p:sp>
+        <p:nvSpPr>
+          <p:cNvPr id="23" name="Shape 21"/>
+          <p:cNvSpPr/>
+          <p:nvPr/>
+        </p:nvSpPr>
+        <p:spPr>
+          <a:xfrm>
+            <a:off x="2971800" y="1984248"/>
             <a:ext cx="2834640" cy="402336"/>
           </a:xfrm>
           <a:prstGeom prst="rect">
             <a:avLst/>
           </a:prstGeom>
           <a:solidFill>
+            <a:srgbClr val="F1F5F9"/>
+          </a:solidFill>
+          <a:ln w="12700">
+            <a:solidFill>
+              <a:srgbClr val="E2E8F0"/>
+            </a:solidFill>
+            <a:prstDash val="solid"/>
+          </a:ln>
+        </p:spPr>
+      </p:sp>
+      <p:sp>
+        <p:nvSpPr>
+          <p:cNvPr id="24" name="Shape 22"/>
+          <p:cNvSpPr/>
+          <p:nvPr/>
+        </p:nvSpPr>
+        <p:spPr>
+          <a:xfrm>
+            <a:off x="5943600" y="1984248"/>
+            <a:ext cx="2834640" cy="402336"/>
+          </a:xfrm>
+          <a:prstGeom prst="rect">
+            <a:avLst/>
+          </a:prstGeom>
+          <a:solidFill>
             <a:srgbClr val="FCE7F3"/>
           </a:solidFill>
           <a:ln w="12700">
@@ -33433,13 +35674,13 @@
       </p:sp>
       <p:sp>
         <p:nvSpPr>
-          <p:cNvPr id="22" name="Text 20"/>
-          <p:cNvSpPr/>
-          <p:nvPr/>
-        </p:nvSpPr>
-        <p:spPr>
-          <a:xfrm>
-            <a:off x="5943600" y="1563624"/>
+          <p:cNvPr id="25" name="Text 23"/>
+          <p:cNvSpPr/>
+          <p:nvPr/>
+        </p:nvSpPr>
+        <p:spPr>
+          <a:xfrm>
+            <a:off x="5943600" y="1984248"/>
             <a:ext cx="2834640" cy="402336"/>
           </a:xfrm>
           <a:prstGeom prst="rect">
@@ -33472,20 +35713,20 @@
       </p:sp>
       <p:sp>
         <p:nvSpPr>
-          <p:cNvPr id="23" name="Shape 21"/>
-          <p:cNvSpPr/>
-          <p:nvPr/>
-        </p:nvSpPr>
-        <p:spPr>
-          <a:xfrm>
-            <a:off x="365760" y="1984248"/>
+          <p:cNvPr id="26" name="Shape 24"/>
+          <p:cNvSpPr/>
+          <p:nvPr/>
+        </p:nvSpPr>
+        <p:spPr>
+          <a:xfrm>
+            <a:off x="365760" y="2404872"/>
             <a:ext cx="2468880" cy="402336"/>
           </a:xfrm>
           <a:prstGeom prst="rect">
             <a:avLst/>
           </a:prstGeom>
           <a:solidFill>
-            <a:srgbClr val="DDD6FE"/>
+            <a:srgbClr val="F8FAFC"/>
           </a:solidFill>
           <a:ln w="12700">
             <a:solidFill>
@@ -33497,14 +35738,64 @@
       </p:sp>
       <p:sp>
         <p:nvSpPr>
-          <p:cNvPr id="24" name="Text 22"/>
-          <p:cNvSpPr/>
-          <p:nvPr/>
-        </p:nvSpPr>
-        <p:spPr>
-          <a:xfrm>
-            <a:off x="365760" y="1984248"/>
-            <a:ext cx="2468880" cy="402336"/>
+          <p:cNvPr id="27" name="Shape 25"/>
+          <p:cNvSpPr/>
+          <p:nvPr/>
+        </p:nvSpPr>
+        <p:spPr>
+          <a:xfrm>
+            <a:off x="2971800" y="2404872"/>
+            <a:ext cx="2834640" cy="402336"/>
+          </a:xfrm>
+          <a:prstGeom prst="rect">
+            <a:avLst/>
+          </a:prstGeom>
+          <a:solidFill>
+            <a:srgbClr val="F8FAFC"/>
+          </a:solidFill>
+          <a:ln w="12700">
+            <a:solidFill>
+              <a:srgbClr val="E2E8F0"/>
+            </a:solidFill>
+            <a:prstDash val="solid"/>
+          </a:ln>
+        </p:spPr>
+      </p:sp>
+      <p:sp>
+        <p:nvSpPr>
+          <p:cNvPr id="28" name="Shape 26"/>
+          <p:cNvSpPr/>
+          <p:nvPr/>
+        </p:nvSpPr>
+        <p:spPr>
+          <a:xfrm>
+            <a:off x="5943600" y="2404872"/>
+            <a:ext cx="2834640" cy="402336"/>
+          </a:xfrm>
+          <a:prstGeom prst="rect">
+            <a:avLst/>
+          </a:prstGeom>
+          <a:solidFill>
+            <a:srgbClr val="FCE7F3"/>
+          </a:solidFill>
+          <a:ln w="12700">
+            <a:solidFill>
+              <a:srgbClr val="E2E8F0"/>
+            </a:solidFill>
+            <a:prstDash val="solid"/>
+          </a:ln>
+        </p:spPr>
+      </p:sp>
+      <p:sp>
+        <p:nvSpPr>
+          <p:cNvPr id="29" name="Text 27"/>
+          <p:cNvSpPr/>
+          <p:nvPr/>
+        </p:nvSpPr>
+        <p:spPr>
+          <a:xfrm>
+            <a:off x="5943600" y="2404872"/>
+            <a:ext cx="2834640" cy="402336"/>
           </a:xfrm>
           <a:prstGeom prst="rect">
             <a:avLst/>
@@ -33522,13 +35813,13 @@
             <a:r>
               <a:rPr lang="en-US" sz="1300" b="1" dirty="0">
                 <a:solidFill>
-                  <a:srgbClr val="4C1D95"/>
+                  <a:srgbClr val="9D174D"/>
                 </a:solidFill>
                 <a:latin typeface="Trebuchet MS" pitchFamily="34" charset="0"/>
                 <a:ea typeface="Trebuchet MS" pitchFamily="34" charset="-122"/>
                 <a:cs typeface="Trebuchet MS" pitchFamily="34" charset="-120"/>
               </a:rPr>
-              <a:t>over-</a:t>
+              <a:t>-ing</a:t>
             </a:r>
             <a:endParaRPr lang="en-US" sz="1300" dirty="0"/>
           </a:p>
@@ -33536,13 +35827,38 @@
       </p:sp>
       <p:sp>
         <p:nvSpPr>
-          <p:cNvPr id="25" name="Shape 23"/>
-          <p:cNvSpPr/>
-          <p:nvPr/>
-        </p:nvSpPr>
-        <p:spPr>
-          <a:xfrm>
-            <a:off x="2971800" y="1984248"/>
+          <p:cNvPr id="30" name="Shape 28"/>
+          <p:cNvSpPr/>
+          <p:nvPr/>
+        </p:nvSpPr>
+        <p:spPr>
+          <a:xfrm>
+            <a:off x="365760" y="2825496"/>
+            <a:ext cx="2468880" cy="402336"/>
+          </a:xfrm>
+          <a:prstGeom prst="rect">
+            <a:avLst/>
+          </a:prstGeom>
+          <a:solidFill>
+            <a:srgbClr val="F1F5F9"/>
+          </a:solidFill>
+          <a:ln w="12700">
+            <a:solidFill>
+              <a:srgbClr val="E2E8F0"/>
+            </a:solidFill>
+            <a:prstDash val="solid"/>
+          </a:ln>
+        </p:spPr>
+      </p:sp>
+      <p:sp>
+        <p:nvSpPr>
+          <p:cNvPr id="31" name="Shape 29"/>
+          <p:cNvSpPr/>
+          <p:nvPr/>
+        </p:nvSpPr>
+        <p:spPr>
+          <a:xfrm>
+            <a:off x="2971800" y="2825496"/>
             <a:ext cx="2834640" cy="402336"/>
           </a:xfrm>
           <a:prstGeom prst="rect">
@@ -33561,13 +35877,13 @@
       </p:sp>
       <p:sp>
         <p:nvSpPr>
-          <p:cNvPr id="26" name="Shape 24"/>
-          <p:cNvSpPr/>
-          <p:nvPr/>
-        </p:nvSpPr>
-        <p:spPr>
-          <a:xfrm>
-            <a:off x="5943600" y="1984248"/>
+          <p:cNvPr id="32" name="Shape 30"/>
+          <p:cNvSpPr/>
+          <p:nvPr/>
+        </p:nvSpPr>
+        <p:spPr>
+          <a:xfrm>
+            <a:off x="5943600" y="2825496"/>
             <a:ext cx="2834640" cy="402336"/>
           </a:xfrm>
           <a:prstGeom prst="rect">
@@ -33586,13 +35902,13 @@
       </p:sp>
       <p:sp>
         <p:nvSpPr>
-          <p:cNvPr id="27" name="Text 25"/>
-          <p:cNvSpPr/>
-          <p:nvPr/>
-        </p:nvSpPr>
-        <p:spPr>
-          <a:xfrm>
-            <a:off x="5943600" y="1984248"/>
+          <p:cNvPr id="33" name="Text 31"/>
+          <p:cNvSpPr/>
+          <p:nvPr/>
+        </p:nvSpPr>
+        <p:spPr>
+          <a:xfrm>
+            <a:off x="5943600" y="2825496"/>
             <a:ext cx="2834640" cy="402336"/>
           </a:xfrm>
           <a:prstGeom prst="rect">
@@ -33625,20 +35941,20 @@
       </p:sp>
       <p:sp>
         <p:nvSpPr>
-          <p:cNvPr id="28" name="Shape 26"/>
-          <p:cNvSpPr/>
-          <p:nvPr/>
-        </p:nvSpPr>
-        <p:spPr>
-          <a:xfrm>
-            <a:off x="365760" y="2404872"/>
+          <p:cNvPr id="34" name="Shape 32"/>
+          <p:cNvSpPr/>
+          <p:nvPr/>
+        </p:nvSpPr>
+        <p:spPr>
+          <a:xfrm>
+            <a:off x="365760" y="3246120"/>
             <a:ext cx="2468880" cy="402336"/>
           </a:xfrm>
           <a:prstGeom prst="rect">
             <a:avLst/>
           </a:prstGeom>
           <a:solidFill>
-            <a:srgbClr val="DDD6FE"/>
+            <a:srgbClr val="F8FAFC"/>
           </a:solidFill>
           <a:ln w="12700">
             <a:solidFill>
@@ -33650,14 +35966,64 @@
       </p:sp>
       <p:sp>
         <p:nvSpPr>
-          <p:cNvPr id="29" name="Text 27"/>
-          <p:cNvSpPr/>
-          <p:nvPr/>
-        </p:nvSpPr>
-        <p:spPr>
-          <a:xfrm>
-            <a:off x="365760" y="2404872"/>
-            <a:ext cx="2468880" cy="402336"/>
+          <p:cNvPr id="35" name="Shape 33"/>
+          <p:cNvSpPr/>
+          <p:nvPr/>
+        </p:nvSpPr>
+        <p:spPr>
+          <a:xfrm>
+            <a:off x="2971800" y="3246120"/>
+            <a:ext cx="2834640" cy="402336"/>
+          </a:xfrm>
+          <a:prstGeom prst="rect">
+            <a:avLst/>
+          </a:prstGeom>
+          <a:solidFill>
+            <a:srgbClr val="F8FAFC"/>
+          </a:solidFill>
+          <a:ln w="12700">
+            <a:solidFill>
+              <a:srgbClr val="E2E8F0"/>
+            </a:solidFill>
+            <a:prstDash val="solid"/>
+          </a:ln>
+        </p:spPr>
+      </p:sp>
+      <p:sp>
+        <p:nvSpPr>
+          <p:cNvPr id="36" name="Shape 34"/>
+          <p:cNvSpPr/>
+          <p:nvPr/>
+        </p:nvSpPr>
+        <p:spPr>
+          <a:xfrm>
+            <a:off x="5943600" y="3246120"/>
+            <a:ext cx="2834640" cy="402336"/>
+          </a:xfrm>
+          <a:prstGeom prst="rect">
+            <a:avLst/>
+          </a:prstGeom>
+          <a:solidFill>
+            <a:srgbClr val="FCE7F3"/>
+          </a:solidFill>
+          <a:ln w="12700">
+            <a:solidFill>
+              <a:srgbClr val="E2E8F0"/>
+            </a:solidFill>
+            <a:prstDash val="solid"/>
+          </a:ln>
+        </p:spPr>
+      </p:sp>
+      <p:sp>
+        <p:nvSpPr>
+          <p:cNvPr id="37" name="Text 35"/>
+          <p:cNvSpPr/>
+          <p:nvPr/>
+        </p:nvSpPr>
+        <p:spPr>
+          <a:xfrm>
+            <a:off x="5943600" y="3246120"/>
+            <a:ext cx="2834640" cy="402336"/>
           </a:xfrm>
           <a:prstGeom prst="rect">
             <a:avLst/>
@@ -33675,13 +36041,13 @@
             <a:r>
               <a:rPr lang="en-US" sz="1300" b="1" dirty="0">
                 <a:solidFill>
-                  <a:srgbClr val="4C1D95"/>
+                  <a:srgbClr val="9D174D"/>
                 </a:solidFill>
                 <a:latin typeface="Trebuchet MS" pitchFamily="34" charset="0"/>
                 <a:ea typeface="Trebuchet MS" pitchFamily="34" charset="-122"/>
                 <a:cs typeface="Trebuchet MS" pitchFamily="34" charset="-120"/>
               </a:rPr>
-              <a:t>out-</a:t>
+              <a:t>-s</a:t>
             </a:r>
             <a:endParaRPr lang="en-US" sz="1300" dirty="0"/>
           </a:p>
@@ -33689,64 +36055,14 @@
       </p:sp>
       <p:sp>
         <p:nvSpPr>
-          <p:cNvPr id="30" name="Shape 28"/>
-          <p:cNvSpPr/>
-          <p:nvPr/>
-        </p:nvSpPr>
-        <p:spPr>
-          <a:xfrm>
-            <a:off x="2971800" y="2404872"/>
-            <a:ext cx="2834640" cy="402336"/>
-          </a:xfrm>
-          <a:prstGeom prst="rect">
-            <a:avLst/>
-          </a:prstGeom>
-          <a:solidFill>
-            <a:srgbClr val="F8FAFC"/>
-          </a:solidFill>
-          <a:ln w="12700">
-            <a:solidFill>
-              <a:srgbClr val="E2E8F0"/>
-            </a:solidFill>
-            <a:prstDash val="solid"/>
-          </a:ln>
-        </p:spPr>
-      </p:sp>
-      <p:sp>
-        <p:nvSpPr>
-          <p:cNvPr id="31" name="Shape 29"/>
-          <p:cNvSpPr/>
-          <p:nvPr/>
-        </p:nvSpPr>
-        <p:spPr>
-          <a:xfrm>
-            <a:off x="5943600" y="2404872"/>
-            <a:ext cx="2834640" cy="402336"/>
-          </a:xfrm>
-          <a:prstGeom prst="rect">
-            <a:avLst/>
-          </a:prstGeom>
-          <a:solidFill>
-            <a:srgbClr val="FCE7F3"/>
-          </a:solidFill>
-          <a:ln w="12700">
-            <a:solidFill>
-              <a:srgbClr val="E2E8F0"/>
-            </a:solidFill>
-            <a:prstDash val="solid"/>
-          </a:ln>
-        </p:spPr>
-      </p:sp>
-      <p:sp>
-        <p:nvSpPr>
-          <p:cNvPr id="32" name="Text 30"/>
-          <p:cNvSpPr/>
-          <p:nvPr/>
-        </p:nvSpPr>
-        <p:spPr>
-          <a:xfrm>
-            <a:off x="5943600" y="2404872"/>
-            <a:ext cx="2834640" cy="402336"/>
+          <p:cNvPr id="38" name="Text 36"/>
+          <p:cNvSpPr/>
+          <p:nvPr/>
+        </p:nvSpPr>
+        <p:spPr>
+          <a:xfrm>
+            <a:off x="365760" y="3611880"/>
+            <a:ext cx="1828800" cy="347472"/>
           </a:xfrm>
           <a:prstGeom prst="rect">
             <a:avLst/>
@@ -33758,59 +36074,61 @@
           <a:bodyPr wrap="square" lIns="0" tIns="0" rIns="0" bIns="0" rtlCol="0" anchor="ctr"/>
           <a:lstStyle/>
           <a:p>
-            <a:pPr algn="ctr" indent="0" marL="0">
-              <a:buNone/>
-            </a:pPr>
-            <a:r>
-              <a:rPr lang="en-US" sz="1300" b="1" dirty="0">
-                <a:solidFill>
-                  <a:srgbClr val="9D174D"/>
+            <a:pPr algn="l" indent="0" marL="0">
+              <a:buNone/>
+            </a:pPr>
+            <a:r>
+              <a:rPr lang="en-US" sz="1200" b="1" dirty="0">
+                <a:solidFill>
+                  <a:srgbClr val="0F172A"/>
                 </a:solidFill>
                 <a:latin typeface="Trebuchet MS" pitchFamily="34" charset="0"/>
                 <a:ea typeface="Trebuchet MS" pitchFamily="34" charset="-122"/>
                 <a:cs typeface="Trebuchet MS" pitchFamily="34" charset="-120"/>
               </a:rPr>
-              <a:t>-ed</a:t>
-            </a:r>
-            <a:endParaRPr lang="en-US" sz="1300" dirty="0"/>
-          </a:p>
-        </p:txBody>
-      </p:sp>
-      <p:sp>
-        <p:nvSpPr>
-          <p:cNvPr id="33" name="Shape 31"/>
-          <p:cNvSpPr/>
-          <p:nvPr/>
-        </p:nvSpPr>
-        <p:spPr>
-          <a:xfrm>
-            <a:off x="365760" y="2825496"/>
-            <a:ext cx="2468880" cy="402336"/>
-          </a:xfrm>
-          <a:prstGeom prst="rect">
-            <a:avLst/>
-          </a:prstGeom>
-          <a:solidFill>
-            <a:srgbClr val="DDD6FE"/>
-          </a:solidFill>
-          <a:ln w="12700">
-            <a:solidFill>
-              <a:srgbClr val="E2E8F0"/>
-            </a:solidFill>
-            <a:prstDash val="solid"/>
-          </a:ln>
-        </p:spPr>
-      </p:sp>
-      <p:sp>
-        <p:nvSpPr>
-          <p:cNvPr id="34" name="Text 32"/>
-          <p:cNvSpPr/>
-          <p:nvPr/>
-        </p:nvSpPr>
-        <p:spPr>
-          <a:xfrm>
-            <a:off x="365760" y="2825496"/>
-            <a:ext cx="2468880" cy="402336"/>
+              <a:t>Sample words:</a:t>
+            </a:r>
+            <a:endParaRPr lang="en-US" sz="1200" dirty="0"/>
+          </a:p>
+        </p:txBody>
+      </p:sp>
+      <p:sp>
+        <p:nvSpPr>
+          <p:cNvPr id="39" name="Shape 37"/>
+          <p:cNvSpPr/>
+          <p:nvPr/>
+        </p:nvSpPr>
+        <p:spPr>
+          <a:xfrm>
+            <a:off x="365760" y="4023360"/>
+            <a:ext cx="2011680" cy="402336"/>
+          </a:xfrm>
+          <a:prstGeom prst="rect">
+            <a:avLst>
+              <a:gd name="adj" fmla="val 13636"/>
+            </a:avLst>
+          </a:prstGeom>
+          <a:solidFill>
+            <a:srgbClr val="EEF2FF"/>
+          </a:solidFill>
+          <a:ln w="12700">
+            <a:solidFill>
+              <a:srgbClr val="6366F1"/>
+            </a:solidFill>
+            <a:prstDash val="solid"/>
+          </a:ln>
+        </p:spPr>
+      </p:sp>
+      <p:sp>
+        <p:nvSpPr>
+          <p:cNvPr id="40" name="Text 38"/>
+          <p:cNvSpPr/>
+          <p:nvPr/>
+        </p:nvSpPr>
+        <p:spPr>
+          <a:xfrm>
+            <a:off x="365760" y="4023360"/>
+            <a:ext cx="2011680" cy="402336"/>
           </a:xfrm>
           <a:prstGeom prst="rect">
             <a:avLst/>
@@ -33826,80 +36144,57 @@
               <a:buNone/>
             </a:pPr>
             <a:r>
-              <a:rPr lang="en-US" sz="1300" b="1" dirty="0">
-                <a:solidFill>
-                  <a:srgbClr val="4C1D95"/>
+              <a:rPr lang="en-US" sz="1200" b="1" dirty="0">
+                <a:solidFill>
+                  <a:srgbClr val="4338CA"/>
                 </a:solidFill>
                 <a:latin typeface="Trebuchet MS" pitchFamily="34" charset="0"/>
                 <a:ea typeface="Trebuchet MS" pitchFamily="34" charset="-122"/>
                 <a:cs typeface="Trebuchet MS" pitchFamily="34" charset="-120"/>
               </a:rPr>
-              <a:t>mis-</a:t>
-            </a:r>
-            <a:endParaRPr lang="en-US" sz="1300" dirty="0"/>
-          </a:p>
-        </p:txBody>
-      </p:sp>
-      <p:sp>
-        <p:nvSpPr>
-          <p:cNvPr id="35" name="Shape 33"/>
-          <p:cNvSpPr/>
-          <p:nvPr/>
-        </p:nvSpPr>
-        <p:spPr>
-          <a:xfrm>
-            <a:off x="2971800" y="2825496"/>
-            <a:ext cx="2834640" cy="402336"/>
-          </a:xfrm>
-          <a:prstGeom prst="rect">
-            <a:avLst/>
-          </a:prstGeom>
-          <a:solidFill>
-            <a:srgbClr val="F1F5F9"/>
-          </a:solidFill>
-          <a:ln w="12700">
-            <a:solidFill>
-              <a:srgbClr val="E2E8F0"/>
-            </a:solidFill>
-            <a:prstDash val="solid"/>
-          </a:ln>
-        </p:spPr>
-      </p:sp>
-      <p:sp>
-        <p:nvSpPr>
-          <p:cNvPr id="36" name="Shape 34"/>
-          <p:cNvSpPr/>
-          <p:nvPr/>
-        </p:nvSpPr>
-        <p:spPr>
-          <a:xfrm>
-            <a:off x="5943600" y="2825496"/>
-            <a:ext cx="2834640" cy="402336"/>
-          </a:xfrm>
-          <a:prstGeom prst="rect">
-            <a:avLst/>
-          </a:prstGeom>
-          <a:solidFill>
-            <a:srgbClr val="FCE7F3"/>
-          </a:solidFill>
-          <a:ln w="12700">
-            <a:solidFill>
-              <a:srgbClr val="E2E8F0"/>
-            </a:solidFill>
-            <a:prstDash val="solid"/>
-          </a:ln>
-        </p:spPr>
-      </p:sp>
-      <p:sp>
-        <p:nvSpPr>
-          <p:cNvPr id="37" name="Text 35"/>
-          <p:cNvSpPr/>
-          <p:nvPr/>
-        </p:nvSpPr>
-        <p:spPr>
-          <a:xfrm>
-            <a:off x="5943600" y="2825496"/>
-            <a:ext cx="2834640" cy="402336"/>
+              <a:t>fear</a:t>
+            </a:r>
+            <a:endParaRPr lang="en-US" sz="1200" dirty="0"/>
+          </a:p>
+        </p:txBody>
+      </p:sp>
+      <p:sp>
+        <p:nvSpPr>
+          <p:cNvPr id="41" name="Shape 39"/>
+          <p:cNvSpPr/>
+          <p:nvPr/>
+        </p:nvSpPr>
+        <p:spPr>
+          <a:xfrm>
+            <a:off x="2542032" y="4023360"/>
+            <a:ext cx="2011680" cy="402336"/>
+          </a:xfrm>
+          <a:prstGeom prst="rect">
+            <a:avLst>
+              <a:gd name="adj" fmla="val 13636"/>
+            </a:avLst>
+          </a:prstGeom>
+          <a:solidFill>
+            <a:srgbClr val="EEF2FF"/>
+          </a:solidFill>
+          <a:ln w="12700">
+            <a:solidFill>
+              <a:srgbClr val="6366F1"/>
+            </a:solidFill>
+            <a:prstDash val="solid"/>
+          </a:ln>
+        </p:spPr>
+      </p:sp>
+      <p:sp>
+        <p:nvSpPr>
+          <p:cNvPr id="42" name="Text 40"/>
+          <p:cNvSpPr/>
+          <p:nvPr/>
+        </p:nvSpPr>
+        <p:spPr>
+          <a:xfrm>
+            <a:off x="2542032" y="4023360"/>
+            <a:ext cx="2011680" cy="402336"/>
           </a:xfrm>
           <a:prstGeom prst="rect">
             <a:avLst/>
@@ -33915,55 +36210,57 @@
               <a:buNone/>
             </a:pPr>
             <a:r>
-              <a:rPr lang="en-US" sz="1300" b="1" dirty="0">
-                <a:solidFill>
-                  <a:srgbClr val="9D174D"/>
+              <a:rPr lang="en-US" sz="1200" b="1" dirty="0">
+                <a:solidFill>
+                  <a:srgbClr val="4338CA"/>
                 </a:solidFill>
                 <a:latin typeface="Trebuchet MS" pitchFamily="34" charset="0"/>
                 <a:ea typeface="Trebuchet MS" pitchFamily="34" charset="-122"/>
                 <a:cs typeface="Trebuchet MS" pitchFamily="34" charset="-120"/>
               </a:rPr>
-              <a:t>-ing</a:t>
-            </a:r>
-            <a:endParaRPr lang="en-US" sz="1300" dirty="0"/>
-          </a:p>
-        </p:txBody>
-      </p:sp>
-      <p:sp>
-        <p:nvSpPr>
-          <p:cNvPr id="38" name="Shape 36"/>
-          <p:cNvSpPr/>
-          <p:nvPr/>
-        </p:nvSpPr>
-        <p:spPr>
-          <a:xfrm>
-            <a:off x="365760" y="3246120"/>
-            <a:ext cx="2468880" cy="402336"/>
-          </a:xfrm>
-          <a:prstGeom prst="rect">
-            <a:avLst/>
-          </a:prstGeom>
-          <a:solidFill>
-            <a:srgbClr val="DDD6FE"/>
-          </a:solidFill>
-          <a:ln w="12700">
-            <a:solidFill>
-              <a:srgbClr val="E2E8F0"/>
-            </a:solidFill>
-            <a:prstDash val="solid"/>
-          </a:ln>
-        </p:spPr>
-      </p:sp>
-      <p:sp>
-        <p:nvSpPr>
-          <p:cNvPr id="39" name="Text 37"/>
-          <p:cNvSpPr/>
-          <p:nvPr/>
-        </p:nvSpPr>
-        <p:spPr>
-          <a:xfrm>
-            <a:off x="365760" y="3246120"/>
-            <a:ext cx="2468880" cy="402336"/>
+              <a:t>fears</a:t>
+            </a:r>
+            <a:endParaRPr lang="en-US" sz="1200" dirty="0"/>
+          </a:p>
+        </p:txBody>
+      </p:sp>
+      <p:sp>
+        <p:nvSpPr>
+          <p:cNvPr id="43" name="Shape 41"/>
+          <p:cNvSpPr/>
+          <p:nvPr/>
+        </p:nvSpPr>
+        <p:spPr>
+          <a:xfrm>
+            <a:off x="4718304" y="4023360"/>
+            <a:ext cx="2011680" cy="402336"/>
+          </a:xfrm>
+          <a:prstGeom prst="rect">
+            <a:avLst>
+              <a:gd name="adj" fmla="val 13636"/>
+            </a:avLst>
+          </a:prstGeom>
+          <a:solidFill>
+            <a:srgbClr val="EEF2FF"/>
+          </a:solidFill>
+          <a:ln w="12700">
+            <a:solidFill>
+              <a:srgbClr val="6366F1"/>
+            </a:solidFill>
+            <a:prstDash val="solid"/>
+          </a:ln>
+        </p:spPr>
+      </p:sp>
+      <p:sp>
+        <p:nvSpPr>
+          <p:cNvPr id="44" name="Text 42"/>
+          <p:cNvSpPr/>
+          <p:nvPr/>
+        </p:nvSpPr>
+        <p:spPr>
+          <a:xfrm>
+            <a:off x="4718304" y="4023360"/>
+            <a:ext cx="2011680" cy="402336"/>
           </a:xfrm>
           <a:prstGeom prst="rect">
             <a:avLst/>
@@ -33979,80 +36276,57 @@
               <a:buNone/>
             </a:pPr>
             <a:r>
-              <a:rPr lang="en-US" sz="1300" b="1" dirty="0">
-                <a:solidFill>
-                  <a:srgbClr val="4C1D95"/>
+              <a:rPr lang="en-US" sz="1200" b="1" dirty="0">
+                <a:solidFill>
+                  <a:srgbClr val="4338CA"/>
                 </a:solidFill>
                 <a:latin typeface="Trebuchet MS" pitchFamily="34" charset="0"/>
                 <a:ea typeface="Trebuchet MS" pitchFamily="34" charset="-122"/>
                 <a:cs typeface="Trebuchet MS" pitchFamily="34" charset="-120"/>
               </a:rPr>
-              <a:t>re-</a:t>
-            </a:r>
-            <a:endParaRPr lang="en-US" sz="1300" dirty="0"/>
-          </a:p>
-        </p:txBody>
-      </p:sp>
-      <p:sp>
-        <p:nvSpPr>
-          <p:cNvPr id="40" name="Shape 38"/>
-          <p:cNvSpPr/>
-          <p:nvPr/>
-        </p:nvSpPr>
-        <p:spPr>
-          <a:xfrm>
-            <a:off x="2971800" y="3246120"/>
-            <a:ext cx="2834640" cy="402336"/>
-          </a:xfrm>
-          <a:prstGeom prst="rect">
-            <a:avLst/>
-          </a:prstGeom>
-          <a:solidFill>
-            <a:srgbClr val="F8FAFC"/>
-          </a:solidFill>
-          <a:ln w="12700">
-            <a:solidFill>
-              <a:srgbClr val="E2E8F0"/>
-            </a:solidFill>
-            <a:prstDash val="solid"/>
-          </a:ln>
-        </p:spPr>
-      </p:sp>
-      <p:sp>
-        <p:nvSpPr>
-          <p:cNvPr id="41" name="Shape 39"/>
-          <p:cNvSpPr/>
-          <p:nvPr/>
-        </p:nvSpPr>
-        <p:spPr>
-          <a:xfrm>
-            <a:off x="5943600" y="3246120"/>
-            <a:ext cx="2834640" cy="402336"/>
-          </a:xfrm>
-          <a:prstGeom prst="rect">
-            <a:avLst/>
-          </a:prstGeom>
-          <a:solidFill>
-            <a:srgbClr val="FCE7F3"/>
-          </a:solidFill>
-          <a:ln w="12700">
-            <a:solidFill>
-              <a:srgbClr val="E2E8F0"/>
-            </a:solidFill>
-            <a:prstDash val="solid"/>
-          </a:ln>
-        </p:spPr>
-      </p:sp>
-      <p:sp>
-        <p:nvSpPr>
-          <p:cNvPr id="42" name="Text 40"/>
-          <p:cNvSpPr/>
-          <p:nvPr/>
-        </p:nvSpPr>
-        <p:spPr>
-          <a:xfrm>
-            <a:off x="5943600" y="3246120"/>
-            <a:ext cx="2834640" cy="402336"/>
+              <a:t>feared</a:t>
+            </a:r>
+            <a:endParaRPr lang="en-US" sz="1200" dirty="0"/>
+          </a:p>
+        </p:txBody>
+      </p:sp>
+      <p:sp>
+        <p:nvSpPr>
+          <p:cNvPr id="45" name="Shape 43"/>
+          <p:cNvSpPr/>
+          <p:nvPr/>
+        </p:nvSpPr>
+        <p:spPr>
+          <a:xfrm>
+            <a:off x="6894576" y="4023360"/>
+            <a:ext cx="2011680" cy="402336"/>
+          </a:xfrm>
+          <a:prstGeom prst="rect">
+            <a:avLst>
+              <a:gd name="adj" fmla="val 13636"/>
+            </a:avLst>
+          </a:prstGeom>
+          <a:solidFill>
+            <a:srgbClr val="EEF2FF"/>
+          </a:solidFill>
+          <a:ln w="12700">
+            <a:solidFill>
+              <a:srgbClr val="6366F1"/>
+            </a:solidFill>
+            <a:prstDash val="solid"/>
+          </a:ln>
+        </p:spPr>
+      </p:sp>
+      <p:sp>
+        <p:nvSpPr>
+          <p:cNvPr id="46" name="Text 44"/>
+          <p:cNvSpPr/>
+          <p:nvPr/>
+        </p:nvSpPr>
+        <p:spPr>
+          <a:xfrm>
+            <a:off x="6894576" y="4023360"/>
+            <a:ext cx="2011680" cy="402336"/>
           </a:xfrm>
           <a:prstGeom prst="rect">
             <a:avLst/>
@@ -34068,30 +36342,57 @@
               <a:buNone/>
             </a:pPr>
             <a:r>
-              <a:rPr lang="en-US" sz="1300" b="1" dirty="0">
-                <a:solidFill>
-                  <a:srgbClr val="9D174D"/>
+              <a:rPr lang="en-US" sz="1200" b="1" dirty="0">
+                <a:solidFill>
+                  <a:srgbClr val="4338CA"/>
                 </a:solidFill>
                 <a:latin typeface="Trebuchet MS" pitchFamily="34" charset="0"/>
                 <a:ea typeface="Trebuchet MS" pitchFamily="34" charset="-122"/>
                 <a:cs typeface="Trebuchet MS" pitchFamily="34" charset="-120"/>
               </a:rPr>
-              <a:t>-some</a:t>
-            </a:r>
-            <a:endParaRPr lang="en-US" sz="1300" dirty="0"/>
-          </a:p>
-        </p:txBody>
-      </p:sp>
-      <p:sp>
-        <p:nvSpPr>
-          <p:cNvPr id="43" name="Text 41"/>
-          <p:cNvSpPr/>
-          <p:nvPr/>
-        </p:nvSpPr>
-        <p:spPr>
-          <a:xfrm>
-            <a:off x="365760" y="3611880"/>
-            <a:ext cx="1828800" cy="347472"/>
+              <a:t>fearful</a:t>
+            </a:r>
+            <a:endParaRPr lang="en-US" sz="1200" dirty="0"/>
+          </a:p>
+        </p:txBody>
+      </p:sp>
+      <p:sp>
+        <p:nvSpPr>
+          <p:cNvPr id="47" name="Shape 45"/>
+          <p:cNvSpPr/>
+          <p:nvPr/>
+        </p:nvSpPr>
+        <p:spPr>
+          <a:xfrm>
+            <a:off x="365760" y="4498848"/>
+            <a:ext cx="2011680" cy="402336"/>
+          </a:xfrm>
+          <a:prstGeom prst="rect">
+            <a:avLst>
+              <a:gd name="adj" fmla="val 13636"/>
+            </a:avLst>
+          </a:prstGeom>
+          <a:solidFill>
+            <a:srgbClr val="EEF2FF"/>
+          </a:solidFill>
+          <a:ln w="12700">
+            <a:solidFill>
+              <a:srgbClr val="6366F1"/>
+            </a:solidFill>
+            <a:prstDash val="solid"/>
+          </a:ln>
+        </p:spPr>
+      </p:sp>
+      <p:sp>
+        <p:nvSpPr>
+          <p:cNvPr id="48" name="Text 46"/>
+          <p:cNvSpPr/>
+          <p:nvPr/>
+        </p:nvSpPr>
+        <p:spPr>
+          <a:xfrm>
+            <a:off x="365760" y="4498848"/>
+            <a:ext cx="2011680" cy="402336"/>
           </a:xfrm>
           <a:prstGeom prst="rect">
             <a:avLst/>
@@ -34103,547 +36404,19 @@
           <a:bodyPr wrap="square" lIns="0" tIns="0" rIns="0" bIns="0" rtlCol="0" anchor="ctr"/>
           <a:lstStyle/>
           <a:p>
-            <a:pPr algn="l" indent="0" marL="0">
+            <a:pPr algn="ctr" indent="0" marL="0">
               <a:buNone/>
             </a:pPr>
             <a:r>
               <a:rPr lang="en-US" sz="1200" b="1" dirty="0">
                 <a:solidFill>
-                  <a:srgbClr val="0F172A"/>
+                  <a:srgbClr val="4338CA"/>
                 </a:solidFill>
                 <a:latin typeface="Trebuchet MS" pitchFamily="34" charset="0"/>
                 <a:ea typeface="Trebuchet MS" pitchFamily="34" charset="-122"/>
                 <a:cs typeface="Trebuchet MS" pitchFamily="34" charset="-120"/>
               </a:rPr>
-              <a:t>Sample words:</a:t>
-            </a:r>
-            <a:endParaRPr lang="en-US" sz="1200" dirty="0"/>
-          </a:p>
-        </p:txBody>
-      </p:sp>
-      <p:sp>
-        <p:nvSpPr>
-          <p:cNvPr id="44" name="Shape 42"/>
-          <p:cNvSpPr/>
-          <p:nvPr/>
-        </p:nvSpPr>
-        <p:spPr>
-          <a:xfrm>
-            <a:off x="365760" y="4023360"/>
-            <a:ext cx="2011680" cy="402336"/>
-          </a:xfrm>
-          <a:prstGeom prst="rect">
-            <a:avLst>
-              <a:gd name="adj" fmla="val 13636"/>
-            </a:avLst>
-          </a:prstGeom>
-          <a:solidFill>
-            <a:srgbClr val="EEF2FF"/>
-          </a:solidFill>
-          <a:ln w="12700">
-            <a:solidFill>
-              <a:srgbClr val="6366F1"/>
-            </a:solidFill>
-            <a:prstDash val="solid"/>
-          </a:ln>
-        </p:spPr>
-      </p:sp>
-      <p:sp>
-        <p:nvSpPr>
-          <p:cNvPr id="45" name="Text 43"/>
-          <p:cNvSpPr/>
-          <p:nvPr/>
-        </p:nvSpPr>
-        <p:spPr>
-          <a:xfrm>
-            <a:off x="365760" y="4023360"/>
-            <a:ext cx="2011680" cy="402336"/>
-          </a:xfrm>
-          <a:prstGeom prst="rect">
-            <a:avLst/>
-          </a:prstGeom>
-          <a:noFill/>
-          <a:ln/>
-        </p:spPr>
-        <p:txBody>
-          <a:bodyPr wrap="square" lIns="0" tIns="0" rIns="0" bIns="0" rtlCol="0" anchor="ctr"/>
-          <a:lstStyle/>
-          <a:p>
-            <a:pPr algn="ctr" indent="0" marL="0">
-              <a:buNone/>
-            </a:pPr>
-            <a:r>
-              <a:rPr lang="en-US" sz="1200" b="1" dirty="0">
-                <a:solidFill>
-                  <a:srgbClr val="4338CA"/>
-                </a:solidFill>
-                <a:latin typeface="Trebuchet MS" pitchFamily="34" charset="0"/>
-                <a:ea typeface="Trebuchet MS" pitchFamily="34" charset="-122"/>
-                <a:cs typeface="Trebuchet MS" pitchFamily="34" charset="-120"/>
-              </a:rPr>
-              <a:t>fearful</a:t>
-            </a:r>
-            <a:endParaRPr lang="en-US" sz="1200" dirty="0"/>
-          </a:p>
-        </p:txBody>
-      </p:sp>
-      <p:sp>
-        <p:nvSpPr>
-          <p:cNvPr id="46" name="Shape 44"/>
-          <p:cNvSpPr/>
-          <p:nvPr/>
-        </p:nvSpPr>
-        <p:spPr>
-          <a:xfrm>
-            <a:off x="2542032" y="4023360"/>
-            <a:ext cx="2011680" cy="402336"/>
-          </a:xfrm>
-          <a:prstGeom prst="rect">
-            <a:avLst>
-              <a:gd name="adj" fmla="val 13636"/>
-            </a:avLst>
-          </a:prstGeom>
-          <a:solidFill>
-            <a:srgbClr val="EEF2FF"/>
-          </a:solidFill>
-          <a:ln w="12700">
-            <a:solidFill>
-              <a:srgbClr val="6366F1"/>
-            </a:solidFill>
-            <a:prstDash val="solid"/>
-          </a:ln>
-        </p:spPr>
-      </p:sp>
-      <p:sp>
-        <p:nvSpPr>
-          <p:cNvPr id="47" name="Text 45"/>
-          <p:cNvSpPr/>
-          <p:nvPr/>
-        </p:nvSpPr>
-        <p:spPr>
-          <a:xfrm>
-            <a:off x="2542032" y="4023360"/>
-            <a:ext cx="2011680" cy="402336"/>
-          </a:xfrm>
-          <a:prstGeom prst="rect">
-            <a:avLst/>
-          </a:prstGeom>
-          <a:noFill/>
-          <a:ln/>
-        </p:spPr>
-        <p:txBody>
-          <a:bodyPr wrap="square" lIns="0" tIns="0" rIns="0" bIns="0" rtlCol="0" anchor="ctr"/>
-          <a:lstStyle/>
-          <a:p>
-            <a:pPr algn="ctr" indent="0" marL="0">
-              <a:buNone/>
-            </a:pPr>
-            <a:r>
-              <a:rPr lang="en-US" sz="1200" b="1" dirty="0">
-                <a:solidFill>
-                  <a:srgbClr val="4338CA"/>
-                </a:solidFill>
-                <a:latin typeface="Trebuchet MS" pitchFamily="34" charset="0"/>
-                <a:ea typeface="Trebuchet MS" pitchFamily="34" charset="-122"/>
-                <a:cs typeface="Trebuchet MS" pitchFamily="34" charset="-120"/>
-              </a:rPr>
-              <a:t>fearless</a:t>
-            </a:r>
-            <a:endParaRPr lang="en-US" sz="1200" dirty="0"/>
-          </a:p>
-        </p:txBody>
-      </p:sp>
-      <p:sp>
-        <p:nvSpPr>
-          <p:cNvPr id="48" name="Shape 46"/>
-          <p:cNvSpPr/>
-          <p:nvPr/>
-        </p:nvSpPr>
-        <p:spPr>
-          <a:xfrm>
-            <a:off x="4718304" y="4023360"/>
-            <a:ext cx="2011680" cy="402336"/>
-          </a:xfrm>
-          <a:prstGeom prst="rect">
-            <a:avLst>
-              <a:gd name="adj" fmla="val 13636"/>
-            </a:avLst>
-          </a:prstGeom>
-          <a:solidFill>
-            <a:srgbClr val="EEF2FF"/>
-          </a:solidFill>
-          <a:ln w="12700">
-            <a:solidFill>
-              <a:srgbClr val="6366F1"/>
-            </a:solidFill>
-            <a:prstDash val="solid"/>
-          </a:ln>
-        </p:spPr>
-      </p:sp>
-      <p:sp>
-        <p:nvSpPr>
-          <p:cNvPr id="49" name="Text 47"/>
-          <p:cNvSpPr/>
-          <p:nvPr/>
-        </p:nvSpPr>
-        <p:spPr>
-          <a:xfrm>
-            <a:off x="4718304" y="4023360"/>
-            <a:ext cx="2011680" cy="402336"/>
-          </a:xfrm>
-          <a:prstGeom prst="rect">
-            <a:avLst/>
-          </a:prstGeom>
-          <a:noFill/>
-          <a:ln/>
-        </p:spPr>
-        <p:txBody>
-          <a:bodyPr wrap="square" lIns="0" tIns="0" rIns="0" bIns="0" rtlCol="0" anchor="ctr"/>
-          <a:lstStyle/>
-          <a:p>
-            <a:pPr algn="ctr" indent="0" marL="0">
-              <a:buNone/>
-            </a:pPr>
-            <a:r>
-              <a:rPr lang="en-US" sz="1200" b="1" dirty="0">
-                <a:solidFill>
-                  <a:srgbClr val="4338CA"/>
-                </a:solidFill>
-                <a:latin typeface="Trebuchet MS" pitchFamily="34" charset="0"/>
-                <a:ea typeface="Trebuchet MS" pitchFamily="34" charset="-122"/>
-                <a:cs typeface="Trebuchet MS" pitchFamily="34" charset="-120"/>
-              </a:rPr>
-              <a:t>feared</a:t>
-            </a:r>
-            <a:endParaRPr lang="en-US" sz="1200" dirty="0"/>
-          </a:p>
-        </p:txBody>
-      </p:sp>
-      <p:sp>
-        <p:nvSpPr>
-          <p:cNvPr id="50" name="Shape 48"/>
-          <p:cNvSpPr/>
-          <p:nvPr/>
-        </p:nvSpPr>
-        <p:spPr>
-          <a:xfrm>
-            <a:off x="6894576" y="4023360"/>
-            <a:ext cx="2011680" cy="402336"/>
-          </a:xfrm>
-          <a:prstGeom prst="rect">
-            <a:avLst>
-              <a:gd name="adj" fmla="val 13636"/>
-            </a:avLst>
-          </a:prstGeom>
-          <a:solidFill>
-            <a:srgbClr val="EEF2FF"/>
-          </a:solidFill>
-          <a:ln w="12700">
-            <a:solidFill>
-              <a:srgbClr val="6366F1"/>
-            </a:solidFill>
-            <a:prstDash val="solid"/>
-          </a:ln>
-        </p:spPr>
-      </p:sp>
-      <p:sp>
-        <p:nvSpPr>
-          <p:cNvPr id="51" name="Text 49"/>
-          <p:cNvSpPr/>
-          <p:nvPr/>
-        </p:nvSpPr>
-        <p:spPr>
-          <a:xfrm>
-            <a:off x="6894576" y="4023360"/>
-            <a:ext cx="2011680" cy="402336"/>
-          </a:xfrm>
-          <a:prstGeom prst="rect">
-            <a:avLst/>
-          </a:prstGeom>
-          <a:noFill/>
-          <a:ln/>
-        </p:spPr>
-        <p:txBody>
-          <a:bodyPr wrap="square" lIns="0" tIns="0" rIns="0" bIns="0" rtlCol="0" anchor="ctr"/>
-          <a:lstStyle/>
-          <a:p>
-            <a:pPr algn="ctr" indent="0" marL="0">
-              <a:buNone/>
-            </a:pPr>
-            <a:r>
-              <a:rPr lang="en-US" sz="1200" b="1" dirty="0">
-                <a:solidFill>
-                  <a:srgbClr val="4338CA"/>
-                </a:solidFill>
-                <a:latin typeface="Trebuchet MS" pitchFamily="34" charset="0"/>
-                <a:ea typeface="Trebuchet MS" pitchFamily="34" charset="-122"/>
-                <a:cs typeface="Trebuchet MS" pitchFamily="34" charset="-120"/>
-              </a:rPr>
               <a:t>fearing</a:t>
-            </a:r>
-            <a:endParaRPr lang="en-US" sz="1200" dirty="0"/>
-          </a:p>
-        </p:txBody>
-      </p:sp>
-      <p:sp>
-        <p:nvSpPr>
-          <p:cNvPr id="52" name="Shape 50"/>
-          <p:cNvSpPr/>
-          <p:nvPr/>
-        </p:nvSpPr>
-        <p:spPr>
-          <a:xfrm>
-            <a:off x="365760" y="4498848"/>
-            <a:ext cx="2011680" cy="402336"/>
-          </a:xfrm>
-          <a:prstGeom prst="rect">
-            <a:avLst>
-              <a:gd name="adj" fmla="val 13636"/>
-            </a:avLst>
-          </a:prstGeom>
-          <a:solidFill>
-            <a:srgbClr val="EEF2FF"/>
-          </a:solidFill>
-          <a:ln w="12700">
-            <a:solidFill>
-              <a:srgbClr val="6366F1"/>
-            </a:solidFill>
-            <a:prstDash val="solid"/>
-          </a:ln>
-        </p:spPr>
-      </p:sp>
-      <p:sp>
-        <p:nvSpPr>
-          <p:cNvPr id="53" name="Text 51"/>
-          <p:cNvSpPr/>
-          <p:nvPr/>
-        </p:nvSpPr>
-        <p:spPr>
-          <a:xfrm>
-            <a:off x="365760" y="4498848"/>
-            <a:ext cx="2011680" cy="402336"/>
-          </a:xfrm>
-          <a:prstGeom prst="rect">
-            <a:avLst/>
-          </a:prstGeom>
-          <a:noFill/>
-          <a:ln/>
-        </p:spPr>
-        <p:txBody>
-          <a:bodyPr wrap="square" lIns="0" tIns="0" rIns="0" bIns="0" rtlCol="0" anchor="ctr"/>
-          <a:lstStyle/>
-          <a:p>
-            <a:pPr algn="ctr" indent="0" marL="0">
-              <a:buNone/>
-            </a:pPr>
-            <a:r>
-              <a:rPr lang="en-US" sz="1200" b="1" dirty="0">
-                <a:solidFill>
-                  <a:srgbClr val="4338CA"/>
-                </a:solidFill>
-                <a:latin typeface="Trebuchet MS" pitchFamily="34" charset="0"/>
-                <a:ea typeface="Trebuchet MS" pitchFamily="34" charset="-122"/>
-                <a:cs typeface="Trebuchet MS" pitchFamily="34" charset="-120"/>
-              </a:rPr>
-              <a:t>fearsome</a:t>
-            </a:r>
-            <a:endParaRPr lang="en-US" sz="1200" dirty="0"/>
-          </a:p>
-        </p:txBody>
-      </p:sp>
-      <p:sp>
-        <p:nvSpPr>
-          <p:cNvPr id="54" name="Shape 52"/>
-          <p:cNvSpPr/>
-          <p:nvPr/>
-        </p:nvSpPr>
-        <p:spPr>
-          <a:xfrm>
-            <a:off x="2542032" y="4498848"/>
-            <a:ext cx="2011680" cy="402336"/>
-          </a:xfrm>
-          <a:prstGeom prst="rect">
-            <a:avLst>
-              <a:gd name="adj" fmla="val 13636"/>
-            </a:avLst>
-          </a:prstGeom>
-          <a:solidFill>
-            <a:srgbClr val="EEF2FF"/>
-          </a:solidFill>
-          <a:ln w="12700">
-            <a:solidFill>
-              <a:srgbClr val="6366F1"/>
-            </a:solidFill>
-            <a:prstDash val="solid"/>
-          </a:ln>
-        </p:spPr>
-      </p:sp>
-      <p:sp>
-        <p:nvSpPr>
-          <p:cNvPr id="55" name="Text 53"/>
-          <p:cNvSpPr/>
-          <p:nvPr/>
-        </p:nvSpPr>
-        <p:spPr>
-          <a:xfrm>
-            <a:off x="2542032" y="4498848"/>
-            <a:ext cx="2011680" cy="402336"/>
-          </a:xfrm>
-          <a:prstGeom prst="rect">
-            <a:avLst/>
-          </a:prstGeom>
-          <a:noFill/>
-          <a:ln/>
-        </p:spPr>
-        <p:txBody>
-          <a:bodyPr wrap="square" lIns="0" tIns="0" rIns="0" bIns="0" rtlCol="0" anchor="ctr"/>
-          <a:lstStyle/>
-          <a:p>
-            <a:pPr algn="ctr" indent="0" marL="0">
-              <a:buNone/>
-            </a:pPr>
-            <a:r>
-              <a:rPr lang="en-US" sz="1200" b="1" dirty="0">
-                <a:solidFill>
-                  <a:srgbClr val="4338CA"/>
-                </a:solidFill>
-                <a:latin typeface="Trebuchet MS" pitchFamily="34" charset="0"/>
-                <a:ea typeface="Trebuchet MS" pitchFamily="34" charset="-122"/>
-                <a:cs typeface="Trebuchet MS" pitchFamily="34" charset="-120"/>
-              </a:rPr>
-              <a:t>unfeared</a:t>
-            </a:r>
-            <a:endParaRPr lang="en-US" sz="1200" dirty="0"/>
-          </a:p>
-        </p:txBody>
-      </p:sp>
-      <p:sp>
-        <p:nvSpPr>
-          <p:cNvPr id="56" name="Shape 54"/>
-          <p:cNvSpPr/>
-          <p:nvPr/>
-        </p:nvSpPr>
-        <p:spPr>
-          <a:xfrm>
-            <a:off x="4718304" y="4498848"/>
-            <a:ext cx="2011680" cy="402336"/>
-          </a:xfrm>
-          <a:prstGeom prst="rect">
-            <a:avLst>
-              <a:gd name="adj" fmla="val 13636"/>
-            </a:avLst>
-          </a:prstGeom>
-          <a:solidFill>
-            <a:srgbClr val="EEF2FF"/>
-          </a:solidFill>
-          <a:ln w="12700">
-            <a:solidFill>
-              <a:srgbClr val="6366F1"/>
-            </a:solidFill>
-            <a:prstDash val="solid"/>
-          </a:ln>
-        </p:spPr>
-      </p:sp>
-      <p:sp>
-        <p:nvSpPr>
-          <p:cNvPr id="57" name="Text 55"/>
-          <p:cNvSpPr/>
-          <p:nvPr/>
-        </p:nvSpPr>
-        <p:spPr>
-          <a:xfrm>
-            <a:off x="4718304" y="4498848"/>
-            <a:ext cx="2011680" cy="402336"/>
-          </a:xfrm>
-          <a:prstGeom prst="rect">
-            <a:avLst/>
-          </a:prstGeom>
-          <a:noFill/>
-          <a:ln/>
-        </p:spPr>
-        <p:txBody>
-          <a:bodyPr wrap="square" lIns="0" tIns="0" rIns="0" bIns="0" rtlCol="0" anchor="ctr"/>
-          <a:lstStyle/>
-          <a:p>
-            <a:pPr algn="ctr" indent="0" marL="0">
-              <a:buNone/>
-            </a:pPr>
-            <a:r>
-              <a:rPr lang="en-US" sz="1200" b="1" dirty="0">
-                <a:solidFill>
-                  <a:srgbClr val="4338CA"/>
-                </a:solidFill>
-                <a:latin typeface="Trebuchet MS" pitchFamily="34" charset="0"/>
-                <a:ea typeface="Trebuchet MS" pitchFamily="34" charset="-122"/>
-                <a:cs typeface="Trebuchet MS" pitchFamily="34" charset="-120"/>
-              </a:rPr>
-              <a:t>fearfully</a:t>
-            </a:r>
-            <a:endParaRPr lang="en-US" sz="1200" dirty="0"/>
-          </a:p>
-        </p:txBody>
-      </p:sp>
-      <p:sp>
-        <p:nvSpPr>
-          <p:cNvPr id="58" name="Shape 56"/>
-          <p:cNvSpPr/>
-          <p:nvPr/>
-        </p:nvSpPr>
-        <p:spPr>
-          <a:xfrm>
-            <a:off x="6894576" y="4498848"/>
-            <a:ext cx="2011680" cy="402336"/>
-          </a:xfrm>
-          <a:prstGeom prst="rect">
-            <a:avLst>
-              <a:gd name="adj" fmla="val 13636"/>
-            </a:avLst>
-          </a:prstGeom>
-          <a:solidFill>
-            <a:srgbClr val="EEF2FF"/>
-          </a:solidFill>
-          <a:ln w="12700">
-            <a:solidFill>
-              <a:srgbClr val="6366F1"/>
-            </a:solidFill>
-            <a:prstDash val="solid"/>
-          </a:ln>
-        </p:spPr>
-      </p:sp>
-      <p:sp>
-        <p:nvSpPr>
-          <p:cNvPr id="59" name="Text 57"/>
-          <p:cNvSpPr/>
-          <p:nvPr/>
-        </p:nvSpPr>
-        <p:spPr>
-          <a:xfrm>
-            <a:off x="6894576" y="4498848"/>
-            <a:ext cx="2011680" cy="402336"/>
-          </a:xfrm>
-          <a:prstGeom prst="rect">
-            <a:avLst/>
-          </a:prstGeom>
-          <a:noFill/>
-          <a:ln/>
-        </p:spPr>
-        <p:txBody>
-          <a:bodyPr wrap="square" lIns="0" tIns="0" rIns="0" bIns="0" rtlCol="0" anchor="ctr"/>
-          <a:lstStyle/>
-          <a:p>
-            <a:pPr algn="ctr" indent="0" marL="0">
-              <a:buNone/>
-            </a:pPr>
-            <a:r>
-              <a:rPr lang="en-US" sz="1200" b="1" dirty="0">
-                <a:solidFill>
-                  <a:srgbClr val="4338CA"/>
-                </a:solidFill>
-                <a:latin typeface="Trebuchet MS" pitchFamily="34" charset="0"/>
-                <a:ea typeface="Trebuchet MS" pitchFamily="34" charset="-122"/>
-                <a:cs typeface="Trebuchet MS" pitchFamily="34" charset="-120"/>
-              </a:rPr>
-              <a:t>fearlessness</a:t>
             </a:r>
             <a:endParaRPr lang="en-US" sz="1200" dirty="0"/>
           </a:p>
@@ -34935,7 +36708,7 @@
                 <a:ea typeface="Calibri" pitchFamily="34" charset="-122"/>
                 <a:cs typeface="Calibri" pitchFamily="34" charset="-120"/>
               </a:rPr>
-              <a:t>Word Labs  •  wordlabs.app  •  Root: 'fear' = feeling of danger or dread</a:t>
+              <a:t>Word Labs  •  wordlabs.app  •  Root: 'fear' = to be afraid of</a:t>
             </a:r>
             <a:endParaRPr lang="en-US" sz="800" dirty="0"/>
           </a:p>
@@ -35099,7 +36872,7 @@
                 <a:ea typeface="Calibri" pitchFamily="34" charset="-122"/>
                 <a:cs typeface="Calibri" pitchFamily="34" charset="-120"/>
               </a:rPr>
-              <a:t>The core part of a word carrying its basic meaning. For example, 'fear' means 'feeling of danger or dread'.</a:t>
+              <a:t>The core part of a word carrying its basic meaning. For example, 'fear' means 'to be afraid of'.</a:t>
             </a:r>
             <a:endParaRPr lang="en-US" sz="1350" dirty="0"/>
           </a:p>
@@ -35719,7 +37492,7 @@
                 <a:ea typeface="Calibri" pitchFamily="34" charset="-122"/>
                 <a:cs typeface="Calibri" pitchFamily="34" charset="-120"/>
               </a:rPr>
-              <a:t>Word Labs  •  wordlabs.app  •  Root: 'fear' = feeling of danger or dread</a:t>
+              <a:t>Word Labs  •  wordlabs.app  •  Root: 'fear' = to be afraid of</a:t>
             </a:r>
             <a:endParaRPr lang="en-US" sz="800" dirty="0"/>
           </a:p>
@@ -35831,7 +37604,7 @@
                 <a:ea typeface="Calibri" pitchFamily="34" charset="-122"/>
                 <a:cs typeface="Calibri" pitchFamily="34" charset="-120"/>
               </a:rPr>
-              <a:t>1.  'Fearless' means someone who is very easily frightened.</a:t>
+              <a:t>1.  'fears' means 'feelings of happiness'.</a:t>
             </a:r>
             <a:endParaRPr lang="en-US" sz="1300" dirty="0"/>
           </a:p>
@@ -35970,7 +37743,7 @@
                 <a:ea typeface="Calibri" pitchFamily="34" charset="-122"/>
                 <a:cs typeface="Calibri" pitchFamily="34" charset="-120"/>
               </a:rPr>
-              <a:t>2.  The word 'fearless' contains the root 'fear' and the suffix '-less'.</a:t>
+              <a:t>2.  'fear' means 'to be afraid of'.</a:t>
             </a:r>
             <a:endParaRPr lang="en-US" sz="1300" dirty="0"/>
           </a:p>
@@ -36109,7 +37882,7 @@
                 <a:ea typeface="Calibri" pitchFamily="34" charset="-122"/>
                 <a:cs typeface="Calibri" pitchFamily="34" charset="-120"/>
               </a:rPr>
-              <a:t>3.  'Fearsome' means something that causes great fright or alarm.</a:t>
+              <a:t>3.  'fears' means 'feelings of being afraid, or worries'.</a:t>
             </a:r>
             <a:endParaRPr lang="en-US" sz="1300" dirty="0"/>
           </a:p>
@@ -36248,7 +38021,7 @@
                 <a:ea typeface="Calibri" pitchFamily="34" charset="-122"/>
                 <a:cs typeface="Calibri" pitchFamily="34" charset="-120"/>
               </a:rPr>
-              <a:t>4.  Adding '-ful' to 'fear' creates the word 'fearful', meaning full of fear.</a:t>
+              <a:t>4.  'fear' means 'a strong feeling of being afraid of something'.</a:t>
             </a:r>
             <a:endParaRPr lang="en-US" sz="1300" dirty="0"/>
           </a:p>
@@ -36387,7 +38160,7 @@
                 <a:ea typeface="Calibri" pitchFamily="34" charset="-122"/>
                 <a:cs typeface="Calibri" pitchFamily="34" charset="-120"/>
               </a:rPr>
-              <a:t>5.  The root 'fear' comes from ancient Greek.</a:t>
+              <a:t>5.  'fear' means 'a strong feeling of happiness and joy'.</a:t>
             </a:r>
             <a:endParaRPr lang="en-US" sz="1300" dirty="0"/>
           </a:p>
@@ -36745,7 +38518,7 @@
                 <a:ea typeface="Calibri" pitchFamily="34" charset="-122"/>
                 <a:cs typeface="Calibri" pitchFamily="34" charset="-120"/>
               </a:rPr>
-              <a:t>Word Labs  •  wordlabs.app  •  Root: 'fear' = feeling of danger or dread</a:t>
+              <a:t>Word Labs  •  wordlabs.app  •  Root: 'fear' = to be afraid of</a:t>
             </a:r>
             <a:endParaRPr lang="en-US" sz="800" dirty="0"/>
           </a:p>
@@ -36882,7 +38655,7 @@
                 <a:ea typeface="Trebuchet MS" pitchFamily="34" charset="-122"/>
                 <a:cs typeface="Trebuchet MS" pitchFamily="34" charset="-120"/>
               </a:rPr>
-              <a:t>feeling of danger or dread</a:t>
+              <a:t>to be afraid of</a:t>
             </a:r>
             <a:endParaRPr lang="en-US" sz="2000" dirty="0"/>
           </a:p>
@@ -36921,7 +38694,7 @@
                 <a:ea typeface="Calibri" pitchFamily="34" charset="-122"/>
                 <a:cs typeface="Calibri" pitchFamily="34" charset="-120"/>
               </a:rPr>
-              <a:t>Origin: Latin: feare</a:t>
+              <a:t>Origin: Anglo-Saxon (Old English) root</a:t>
             </a:r>
             <a:endParaRPr lang="en-US" sz="1100" dirty="0"/>
           </a:p>
@@ -37026,7 +38799,7 @@
                 <a:ea typeface="Trebuchet MS" pitchFamily="34" charset="-122"/>
                 <a:cs typeface="Trebuchet MS" pitchFamily="34" charset="-120"/>
               </a:rPr>
-              <a:t>fearful</a:t>
+              <a:t>fear</a:t>
             </a:r>
             <a:endParaRPr lang="en-US" sz="1300" dirty="0"/>
           </a:p>
@@ -37092,7 +38865,7 @@
                 <a:ea typeface="Trebuchet MS" pitchFamily="34" charset="-122"/>
                 <a:cs typeface="Trebuchet MS" pitchFamily="34" charset="-120"/>
               </a:rPr>
-              <a:t>fearless</a:t>
+              <a:t>fears</a:t>
             </a:r>
             <a:endParaRPr lang="en-US" sz="1300" dirty="0"/>
           </a:p>
@@ -37224,7 +38997,7 @@
                 <a:ea typeface="Trebuchet MS" pitchFamily="34" charset="-122"/>
                 <a:cs typeface="Trebuchet MS" pitchFamily="34" charset="-120"/>
               </a:rPr>
-              <a:t>fearing</a:t>
+              <a:t>fearful</a:t>
             </a:r>
             <a:endParaRPr lang="en-US" sz="1300" dirty="0"/>
           </a:p>
@@ -37290,139 +39063,7 @@
                 <a:ea typeface="Trebuchet MS" pitchFamily="34" charset="-122"/>
                 <a:cs typeface="Trebuchet MS" pitchFamily="34" charset="-120"/>
               </a:rPr>
-              <a:t>fearsome</a:t>
-            </a:r>
-            <a:endParaRPr lang="en-US" sz="1300" dirty="0"/>
-          </a:p>
-        </p:txBody>
-      </p:sp>
-      <p:sp>
-        <p:nvSpPr>
-          <p:cNvPr id="26" name="Shape 24"/>
-          <p:cNvSpPr/>
-          <p:nvPr/>
-        </p:nvSpPr>
-        <p:spPr>
-          <a:xfrm>
-            <a:off x="2514600" y="3401568"/>
-            <a:ext cx="2011680" cy="502920"/>
-          </a:xfrm>
-          <a:prstGeom prst="rect">
-            <a:avLst>
-              <a:gd name="adj" fmla="val 14545"/>
-            </a:avLst>
-          </a:prstGeom>
-          <a:solidFill>
-            <a:srgbClr val="EEF2FF"/>
-          </a:solidFill>
-          <a:ln w="12700">
-            <a:solidFill>
-              <a:srgbClr val="6366F1"/>
-            </a:solidFill>
-            <a:prstDash val="solid"/>
-          </a:ln>
-        </p:spPr>
-      </p:sp>
-      <p:sp>
-        <p:nvSpPr>
-          <p:cNvPr id="27" name="Text 25"/>
-          <p:cNvSpPr/>
-          <p:nvPr/>
-        </p:nvSpPr>
-        <p:spPr>
-          <a:xfrm>
-            <a:off x="2514600" y="3401568"/>
-            <a:ext cx="2011680" cy="502920"/>
-          </a:xfrm>
-          <a:prstGeom prst="rect">
-            <a:avLst/>
-          </a:prstGeom>
-          <a:noFill/>
-          <a:ln/>
-        </p:spPr>
-        <p:txBody>
-          <a:bodyPr wrap="square" lIns="0" tIns="0" rIns="0" bIns="0" rtlCol="0" anchor="ctr"/>
-          <a:lstStyle/>
-          <a:p>
-            <a:pPr algn="ctr" indent="0" marL="0">
-              <a:buNone/>
-            </a:pPr>
-            <a:r>
-              <a:rPr lang="en-US" sz="1300" b="1" dirty="0">
-                <a:solidFill>
-                  <a:srgbClr val="4338CA"/>
-                </a:solidFill>
-                <a:latin typeface="Trebuchet MS" pitchFamily="34" charset="0"/>
-                <a:ea typeface="Trebuchet MS" pitchFamily="34" charset="-122"/>
-                <a:cs typeface="Trebuchet MS" pitchFamily="34" charset="-120"/>
-              </a:rPr>
-              <a:t>unfeared</a:t>
-            </a:r>
-            <a:endParaRPr lang="en-US" sz="1300" dirty="0"/>
-          </a:p>
-        </p:txBody>
-      </p:sp>
-      <p:sp>
-        <p:nvSpPr>
-          <p:cNvPr id="28" name="Shape 26"/>
-          <p:cNvSpPr/>
-          <p:nvPr/>
-        </p:nvSpPr>
-        <p:spPr>
-          <a:xfrm>
-            <a:off x="4663440" y="3401568"/>
-            <a:ext cx="2011680" cy="502920"/>
-          </a:xfrm>
-          <a:prstGeom prst="rect">
-            <a:avLst>
-              <a:gd name="adj" fmla="val 14545"/>
-            </a:avLst>
-          </a:prstGeom>
-          <a:solidFill>
-            <a:srgbClr val="EEF2FF"/>
-          </a:solidFill>
-          <a:ln w="12700">
-            <a:solidFill>
-              <a:srgbClr val="6366F1"/>
-            </a:solidFill>
-            <a:prstDash val="solid"/>
-          </a:ln>
-        </p:spPr>
-      </p:sp>
-      <p:sp>
-        <p:nvSpPr>
-          <p:cNvPr id="29" name="Text 27"/>
-          <p:cNvSpPr/>
-          <p:nvPr/>
-        </p:nvSpPr>
-        <p:spPr>
-          <a:xfrm>
-            <a:off x="4663440" y="3401568"/>
-            <a:ext cx="2011680" cy="502920"/>
-          </a:xfrm>
-          <a:prstGeom prst="rect">
-            <a:avLst/>
-          </a:prstGeom>
-          <a:noFill/>
-          <a:ln/>
-        </p:spPr>
-        <p:txBody>
-          <a:bodyPr wrap="square" lIns="0" tIns="0" rIns="0" bIns="0" rtlCol="0" anchor="ctr"/>
-          <a:lstStyle/>
-          <a:p>
-            <a:pPr algn="ctr" indent="0" marL="0">
-              <a:buNone/>
-            </a:pPr>
-            <a:r>
-              <a:rPr lang="en-US" sz="1300" b="1" dirty="0">
-                <a:solidFill>
-                  <a:srgbClr val="4338CA"/>
-                </a:solidFill>
-                <a:latin typeface="Trebuchet MS" pitchFamily="34" charset="0"/>
-                <a:ea typeface="Trebuchet MS" pitchFamily="34" charset="-122"/>
-                <a:cs typeface="Trebuchet MS" pitchFamily="34" charset="-120"/>
-              </a:rPr>
-              <a:t>fearfully</a:t>
+              <a:t>fearing</a:t>
             </a:r>
             <a:endParaRPr lang="en-US" sz="1300" dirty="0"/>
           </a:p>
@@ -37714,7 +39355,7 @@
                 <a:ea typeface="Calibri" pitchFamily="34" charset="-122"/>
                 <a:cs typeface="Calibri" pitchFamily="34" charset="-120"/>
               </a:rPr>
-              <a:t>Word Labs  •  wordlabs.app  •  Root: 'fear' = feeling of danger or dread</a:t>
+              <a:t>Word Labs  •  wordlabs.app  •  Root: 'fear' = to be afraid of</a:t>
             </a:r>
             <a:endParaRPr lang="en-US" sz="800" dirty="0"/>
           </a:p>
@@ -37972,7 +39613,7 @@
             <a:avLst/>
           </a:prstGeom>
           <a:solidFill>
-            <a:srgbClr val="DDD6FE"/>
+            <a:srgbClr val="F8FAFC"/>
           </a:solidFill>
           <a:ln w="12700">
             <a:solidFill>
@@ -37984,14 +39625,39 @@
       </p:sp>
       <p:sp>
         <p:nvSpPr>
-          <p:cNvPr id="18" name="Text 16"/>
-          <p:cNvSpPr/>
-          <p:nvPr/>
-        </p:nvSpPr>
-        <p:spPr>
-          <a:xfrm>
-            <a:off x="640080" y="1755648"/>
-            <a:ext cx="1463040" cy="420624"/>
+          <p:cNvPr id="18" name="Shape 16"/>
+          <p:cNvSpPr/>
+          <p:nvPr/>
+        </p:nvSpPr>
+        <p:spPr>
+          <a:xfrm>
+            <a:off x="3291840" y="1755648"/>
+            <a:ext cx="1645920" cy="420624"/>
+          </a:xfrm>
+          <a:prstGeom prst="rect">
+            <a:avLst/>
+          </a:prstGeom>
+          <a:solidFill>
+            <a:srgbClr val="CCFBF1"/>
+          </a:solidFill>
+          <a:ln w="12700">
+            <a:solidFill>
+              <a:srgbClr val="E5E7EB"/>
+            </a:solidFill>
+            <a:prstDash val="solid"/>
+          </a:ln>
+        </p:spPr>
+      </p:sp>
+      <p:sp>
+        <p:nvSpPr>
+          <p:cNvPr id="19" name="Text 17"/>
+          <p:cNvSpPr/>
+          <p:nvPr/>
+        </p:nvSpPr>
+        <p:spPr>
+          <a:xfrm>
+            <a:off x="3291840" y="1755648"/>
+            <a:ext cx="1645920" cy="420624"/>
           </a:xfrm>
           <a:prstGeom prst="rect">
             <a:avLst/>
@@ -38009,13 +39675,13 @@
             <a:r>
               <a:rPr lang="en-US" sz="1300" b="1" dirty="0">
                 <a:solidFill>
-                  <a:srgbClr val="4C1D95"/>
+                  <a:srgbClr val="0F766E"/>
                 </a:solidFill>
                 <a:latin typeface="Trebuchet MS" pitchFamily="34" charset="0"/>
                 <a:ea typeface="Trebuchet MS" pitchFamily="34" charset="-122"/>
                 <a:cs typeface="Trebuchet MS" pitchFamily="34" charset="-120"/>
               </a:rPr>
-              <a:t>un-</a:t>
+              <a:t>fear</a:t>
             </a:r>
             <a:endParaRPr lang="en-US" sz="1300" dirty="0"/>
           </a:p>
@@ -38023,20 +39689,20 @@
       </p:sp>
       <p:sp>
         <p:nvSpPr>
-          <p:cNvPr id="19" name="Shape 17"/>
-          <p:cNvSpPr/>
-          <p:nvPr/>
-        </p:nvSpPr>
-        <p:spPr>
-          <a:xfrm>
-            <a:off x="3291840" y="1755648"/>
-            <a:ext cx="1645920" cy="420624"/>
-          </a:xfrm>
-          <a:prstGeom prst="rect">
-            <a:avLst/>
-          </a:prstGeom>
-          <a:solidFill>
-            <a:srgbClr val="CCFBF1"/>
+          <p:cNvPr id="20" name="Shape 18"/>
+          <p:cNvSpPr/>
+          <p:nvPr/>
+        </p:nvSpPr>
+        <p:spPr>
+          <a:xfrm>
+            <a:off x="5943600" y="1755648"/>
+            <a:ext cx="1463040" cy="420624"/>
+          </a:xfrm>
+          <a:prstGeom prst="rect">
+            <a:avLst/>
+          </a:prstGeom>
+          <a:solidFill>
+            <a:srgbClr val="FCE7F3"/>
           </a:solidFill>
           <a:ln w="12700">
             <a:solidFill>
@@ -38048,14 +39714,14 @@
       </p:sp>
       <p:sp>
         <p:nvSpPr>
-          <p:cNvPr id="20" name="Text 18"/>
-          <p:cNvSpPr/>
-          <p:nvPr/>
-        </p:nvSpPr>
-        <p:spPr>
-          <a:xfrm>
-            <a:off x="3291840" y="1755648"/>
-            <a:ext cx="1645920" cy="420624"/>
+          <p:cNvPr id="21" name="Text 19"/>
+          <p:cNvSpPr/>
+          <p:nvPr/>
+        </p:nvSpPr>
+        <p:spPr>
+          <a:xfrm>
+            <a:off x="5943600" y="1755648"/>
+            <a:ext cx="1463040" cy="420624"/>
           </a:xfrm>
           <a:prstGeom prst="rect">
             <a:avLst/>
@@ -38073,13 +39739,13 @@
             <a:r>
               <a:rPr lang="en-US" sz="1300" b="1" dirty="0">
                 <a:solidFill>
-                  <a:srgbClr val="0F766E"/>
+                  <a:srgbClr val="9D174D"/>
                 </a:solidFill>
                 <a:latin typeface="Trebuchet MS" pitchFamily="34" charset="0"/>
                 <a:ea typeface="Trebuchet MS" pitchFamily="34" charset="-122"/>
                 <a:cs typeface="Trebuchet MS" pitchFamily="34" charset="-120"/>
               </a:rPr>
-              <a:t>fear</a:t>
+              <a:t>-ed</a:t>
             </a:r>
             <a:endParaRPr lang="en-US" sz="1300" dirty="0"/>
           </a:p>
@@ -38087,19 +39753,69 @@
       </p:sp>
       <p:sp>
         <p:nvSpPr>
-          <p:cNvPr id="21" name="Shape 19"/>
-          <p:cNvSpPr/>
-          <p:nvPr/>
-        </p:nvSpPr>
-        <p:spPr>
-          <a:xfrm>
-            <a:off x="5943600" y="1755648"/>
+          <p:cNvPr id="22" name="Shape 20"/>
+          <p:cNvSpPr/>
+          <p:nvPr/>
+        </p:nvSpPr>
+        <p:spPr>
+          <a:xfrm>
+            <a:off x="640080" y="2212848"/>
             <a:ext cx="1463040" cy="420624"/>
           </a:xfrm>
           <a:prstGeom prst="rect">
             <a:avLst/>
           </a:prstGeom>
           <a:solidFill>
+            <a:srgbClr val="F1F5F9"/>
+          </a:solidFill>
+          <a:ln w="12700">
+            <a:solidFill>
+              <a:srgbClr val="E5E7EB"/>
+            </a:solidFill>
+            <a:prstDash val="solid"/>
+          </a:ln>
+        </p:spPr>
+      </p:sp>
+      <p:sp>
+        <p:nvSpPr>
+          <p:cNvPr id="23" name="Shape 21"/>
+          <p:cNvSpPr/>
+          <p:nvPr/>
+        </p:nvSpPr>
+        <p:spPr>
+          <a:xfrm>
+            <a:off x="3291840" y="2212848"/>
+            <a:ext cx="1645920" cy="420624"/>
+          </a:xfrm>
+          <a:prstGeom prst="rect">
+            <a:avLst/>
+          </a:prstGeom>
+          <a:solidFill>
+            <a:srgbClr val="F1F5F9"/>
+          </a:solidFill>
+          <a:ln w="12700">
+            <a:solidFill>
+              <a:srgbClr val="E5E7EB"/>
+            </a:solidFill>
+            <a:prstDash val="solid"/>
+          </a:ln>
+        </p:spPr>
+      </p:sp>
+      <p:sp>
+        <p:nvSpPr>
+          <p:cNvPr id="24" name="Shape 22"/>
+          <p:cNvSpPr/>
+          <p:nvPr/>
+        </p:nvSpPr>
+        <p:spPr>
+          <a:xfrm>
+            <a:off x="5943600" y="2212848"/>
+            <a:ext cx="1463040" cy="420624"/>
+          </a:xfrm>
+          <a:prstGeom prst="rect">
+            <a:avLst/>
+          </a:prstGeom>
+          <a:solidFill>
             <a:srgbClr val="FCE7F3"/>
           </a:solidFill>
           <a:ln w="12700">
@@ -38112,13 +39828,13 @@
       </p:sp>
       <p:sp>
         <p:nvSpPr>
-          <p:cNvPr id="22" name="Text 20"/>
-          <p:cNvSpPr/>
-          <p:nvPr/>
-        </p:nvSpPr>
-        <p:spPr>
-          <a:xfrm>
-            <a:off x="5943600" y="1755648"/>
+          <p:cNvPr id="25" name="Text 23"/>
+          <p:cNvSpPr/>
+          <p:nvPr/>
+        </p:nvSpPr>
+        <p:spPr>
+          <a:xfrm>
+            <a:off x="5943600" y="2212848"/>
             <a:ext cx="1463040" cy="420624"/>
           </a:xfrm>
           <a:prstGeom prst="rect">
@@ -38151,20 +39867,20 @@
       </p:sp>
       <p:sp>
         <p:nvSpPr>
-          <p:cNvPr id="23" name="Shape 21"/>
-          <p:cNvSpPr/>
-          <p:nvPr/>
-        </p:nvSpPr>
-        <p:spPr>
-          <a:xfrm>
-            <a:off x="640080" y="2212848"/>
+          <p:cNvPr id="26" name="Shape 24"/>
+          <p:cNvSpPr/>
+          <p:nvPr/>
+        </p:nvSpPr>
+        <p:spPr>
+          <a:xfrm>
+            <a:off x="640080" y="2670048"/>
             <a:ext cx="1463040" cy="420624"/>
           </a:xfrm>
           <a:prstGeom prst="rect">
             <a:avLst/>
           </a:prstGeom>
           <a:solidFill>
-            <a:srgbClr val="DDD6FE"/>
+            <a:srgbClr val="F8FAFC"/>
           </a:solidFill>
           <a:ln w="12700">
             <a:solidFill>
@@ -38176,18 +39892,68 @@
       </p:sp>
       <p:sp>
         <p:nvSpPr>
-          <p:cNvPr id="24" name="Text 22"/>
-          <p:cNvSpPr/>
-          <p:nvPr/>
-        </p:nvSpPr>
-        <p:spPr>
-          <a:xfrm>
-            <a:off x="640080" y="2212848"/>
+          <p:cNvPr id="27" name="Shape 25"/>
+          <p:cNvSpPr/>
+          <p:nvPr/>
+        </p:nvSpPr>
+        <p:spPr>
+          <a:xfrm>
+            <a:off x="3291840" y="2670048"/>
+            <a:ext cx="1645920" cy="420624"/>
+          </a:xfrm>
+          <a:prstGeom prst="rect">
+            <a:avLst/>
+          </a:prstGeom>
+          <a:solidFill>
+            <a:srgbClr val="F8FAFC"/>
+          </a:solidFill>
+          <a:ln w="12700">
+            <a:solidFill>
+              <a:srgbClr val="E5E7EB"/>
+            </a:solidFill>
+            <a:prstDash val="solid"/>
+          </a:ln>
+        </p:spPr>
+      </p:sp>
+      <p:sp>
+        <p:nvSpPr>
+          <p:cNvPr id="28" name="Shape 26"/>
+          <p:cNvSpPr/>
+          <p:nvPr/>
+        </p:nvSpPr>
+        <p:spPr>
+          <a:xfrm>
+            <a:off x="5943600" y="2670048"/>
             <a:ext cx="1463040" cy="420624"/>
           </a:xfrm>
           <a:prstGeom prst="rect">
             <a:avLst/>
           </a:prstGeom>
+          <a:solidFill>
+            <a:srgbClr val="FCE7F3"/>
+          </a:solidFill>
+          <a:ln w="12700">
+            <a:solidFill>
+              <a:srgbClr val="E5E7EB"/>
+            </a:solidFill>
+            <a:prstDash val="solid"/>
+          </a:ln>
+        </p:spPr>
+      </p:sp>
+      <p:sp>
+        <p:nvSpPr>
+          <p:cNvPr id="29" name="Text 27"/>
+          <p:cNvSpPr/>
+          <p:nvPr/>
+        </p:nvSpPr>
+        <p:spPr>
+          <a:xfrm>
+            <a:off x="5943600" y="2670048"/>
+            <a:ext cx="1463040" cy="420624"/>
+          </a:xfrm>
+          <a:prstGeom prst="rect">
+            <a:avLst/>
+          </a:prstGeom>
           <a:noFill/>
           <a:ln/>
         </p:spPr>
@@ -38201,13 +39967,13 @@
             <a:r>
               <a:rPr lang="en-US" sz="1300" b="1" dirty="0">
                 <a:solidFill>
-                  <a:srgbClr val="4C1D95"/>
+                  <a:srgbClr val="9D174D"/>
                 </a:solidFill>
                 <a:latin typeface="Trebuchet MS" pitchFamily="34" charset="0"/>
                 <a:ea typeface="Trebuchet MS" pitchFamily="34" charset="-122"/>
                 <a:cs typeface="Trebuchet MS" pitchFamily="34" charset="-120"/>
               </a:rPr>
-              <a:t>over-</a:t>
+              <a:t>-ing</a:t>
             </a:r>
             <a:endParaRPr lang="en-US" sz="1300" dirty="0"/>
           </a:p>
@@ -38215,13 +39981,38 @@
       </p:sp>
       <p:sp>
         <p:nvSpPr>
-          <p:cNvPr id="25" name="Shape 23"/>
-          <p:cNvSpPr/>
-          <p:nvPr/>
-        </p:nvSpPr>
-        <p:spPr>
-          <a:xfrm>
-            <a:off x="3291840" y="2212848"/>
+          <p:cNvPr id="30" name="Shape 28"/>
+          <p:cNvSpPr/>
+          <p:nvPr/>
+        </p:nvSpPr>
+        <p:spPr>
+          <a:xfrm>
+            <a:off x="640080" y="3127248"/>
+            <a:ext cx="1463040" cy="420624"/>
+          </a:xfrm>
+          <a:prstGeom prst="rect">
+            <a:avLst/>
+          </a:prstGeom>
+          <a:solidFill>
+            <a:srgbClr val="F1F5F9"/>
+          </a:solidFill>
+          <a:ln w="12700">
+            <a:solidFill>
+              <a:srgbClr val="E5E7EB"/>
+            </a:solidFill>
+            <a:prstDash val="solid"/>
+          </a:ln>
+        </p:spPr>
+      </p:sp>
+      <p:sp>
+        <p:nvSpPr>
+          <p:cNvPr id="31" name="Shape 29"/>
+          <p:cNvSpPr/>
+          <p:nvPr/>
+        </p:nvSpPr>
+        <p:spPr>
+          <a:xfrm>
+            <a:off x="3291840" y="3127248"/>
             <a:ext cx="1645920" cy="420624"/>
           </a:xfrm>
           <a:prstGeom prst="rect">
@@ -38240,13 +40031,13 @@
       </p:sp>
       <p:sp>
         <p:nvSpPr>
-          <p:cNvPr id="26" name="Shape 24"/>
-          <p:cNvSpPr/>
-          <p:nvPr/>
-        </p:nvSpPr>
-        <p:spPr>
-          <a:xfrm>
-            <a:off x="5943600" y="2212848"/>
+          <p:cNvPr id="32" name="Shape 30"/>
+          <p:cNvSpPr/>
+          <p:nvPr/>
+        </p:nvSpPr>
+        <p:spPr>
+          <a:xfrm>
+            <a:off x="5943600" y="3127248"/>
             <a:ext cx="1463040" cy="420624"/>
           </a:xfrm>
           <a:prstGeom prst="rect">
@@ -38265,13 +40056,13 @@
       </p:sp>
       <p:sp>
         <p:nvSpPr>
-          <p:cNvPr id="27" name="Text 25"/>
-          <p:cNvSpPr/>
-          <p:nvPr/>
-        </p:nvSpPr>
-        <p:spPr>
-          <a:xfrm>
-            <a:off x="5943600" y="2212848"/>
+          <p:cNvPr id="33" name="Text 31"/>
+          <p:cNvSpPr/>
+          <p:nvPr/>
+        </p:nvSpPr>
+        <p:spPr>
+          <a:xfrm>
+            <a:off x="5943600" y="3127248"/>
             <a:ext cx="1463040" cy="420624"/>
           </a:xfrm>
           <a:prstGeom prst="rect">
@@ -38304,20 +40095,20 @@
       </p:sp>
       <p:sp>
         <p:nvSpPr>
-          <p:cNvPr id="28" name="Shape 26"/>
-          <p:cNvSpPr/>
-          <p:nvPr/>
-        </p:nvSpPr>
-        <p:spPr>
-          <a:xfrm>
-            <a:off x="640080" y="2670048"/>
+          <p:cNvPr id="34" name="Shape 32"/>
+          <p:cNvSpPr/>
+          <p:nvPr/>
+        </p:nvSpPr>
+        <p:spPr>
+          <a:xfrm>
+            <a:off x="640080" y="3584448"/>
             <a:ext cx="1463040" cy="420624"/>
           </a:xfrm>
           <a:prstGeom prst="rect">
             <a:avLst/>
           </a:prstGeom>
           <a:solidFill>
-            <a:srgbClr val="DDD6FE"/>
+            <a:srgbClr val="F8FAFC"/>
           </a:solidFill>
           <a:ln w="12700">
             <a:solidFill>
@@ -38329,18 +40120,68 @@
       </p:sp>
       <p:sp>
         <p:nvSpPr>
-          <p:cNvPr id="29" name="Text 27"/>
-          <p:cNvSpPr/>
-          <p:nvPr/>
-        </p:nvSpPr>
-        <p:spPr>
-          <a:xfrm>
-            <a:off x="640080" y="2670048"/>
+          <p:cNvPr id="35" name="Shape 33"/>
+          <p:cNvSpPr/>
+          <p:nvPr/>
+        </p:nvSpPr>
+        <p:spPr>
+          <a:xfrm>
+            <a:off x="3291840" y="3584448"/>
+            <a:ext cx="1645920" cy="420624"/>
+          </a:xfrm>
+          <a:prstGeom prst="rect">
+            <a:avLst/>
+          </a:prstGeom>
+          <a:solidFill>
+            <a:srgbClr val="F8FAFC"/>
+          </a:solidFill>
+          <a:ln w="12700">
+            <a:solidFill>
+              <a:srgbClr val="E5E7EB"/>
+            </a:solidFill>
+            <a:prstDash val="solid"/>
+          </a:ln>
+        </p:spPr>
+      </p:sp>
+      <p:sp>
+        <p:nvSpPr>
+          <p:cNvPr id="36" name="Shape 34"/>
+          <p:cNvSpPr/>
+          <p:nvPr/>
+        </p:nvSpPr>
+        <p:spPr>
+          <a:xfrm>
+            <a:off x="5943600" y="3584448"/>
             <a:ext cx="1463040" cy="420624"/>
           </a:xfrm>
           <a:prstGeom prst="rect">
             <a:avLst/>
           </a:prstGeom>
+          <a:solidFill>
+            <a:srgbClr val="FCE7F3"/>
+          </a:solidFill>
+          <a:ln w="12700">
+            <a:solidFill>
+              <a:srgbClr val="E5E7EB"/>
+            </a:solidFill>
+            <a:prstDash val="solid"/>
+          </a:ln>
+        </p:spPr>
+      </p:sp>
+      <p:sp>
+        <p:nvSpPr>
+          <p:cNvPr id="37" name="Text 35"/>
+          <p:cNvSpPr/>
+          <p:nvPr/>
+        </p:nvSpPr>
+        <p:spPr>
+          <a:xfrm>
+            <a:off x="5943600" y="3584448"/>
+            <a:ext cx="1463040" cy="420624"/>
+          </a:xfrm>
+          <a:prstGeom prst="rect">
+            <a:avLst/>
+          </a:prstGeom>
           <a:noFill/>
           <a:ln/>
         </p:spPr>
@@ -38354,13 +40195,13 @@
             <a:r>
               <a:rPr lang="en-US" sz="1300" b="1" dirty="0">
                 <a:solidFill>
-                  <a:srgbClr val="4C1D95"/>
+                  <a:srgbClr val="9D174D"/>
                 </a:solidFill>
                 <a:latin typeface="Trebuchet MS" pitchFamily="34" charset="0"/>
                 <a:ea typeface="Trebuchet MS" pitchFamily="34" charset="-122"/>
                 <a:cs typeface="Trebuchet MS" pitchFamily="34" charset="-120"/>
               </a:rPr>
-              <a:t>out-</a:t>
+              <a:t>-s</a:t>
             </a:r>
             <a:endParaRPr lang="en-US" sz="1300" dirty="0"/>
           </a:p>
@@ -38368,402 +40209,7 @@
       </p:sp>
       <p:sp>
         <p:nvSpPr>
-          <p:cNvPr id="30" name="Shape 28"/>
-          <p:cNvSpPr/>
-          <p:nvPr/>
-        </p:nvSpPr>
-        <p:spPr>
-          <a:xfrm>
-            <a:off x="3291840" y="2670048"/>
-            <a:ext cx="1645920" cy="420624"/>
-          </a:xfrm>
-          <a:prstGeom prst="rect">
-            <a:avLst/>
-          </a:prstGeom>
-          <a:solidFill>
-            <a:srgbClr val="F8FAFC"/>
-          </a:solidFill>
-          <a:ln w="12700">
-            <a:solidFill>
-              <a:srgbClr val="E5E7EB"/>
-            </a:solidFill>
-            <a:prstDash val="solid"/>
-          </a:ln>
-        </p:spPr>
-      </p:sp>
-      <p:sp>
-        <p:nvSpPr>
-          <p:cNvPr id="31" name="Shape 29"/>
-          <p:cNvSpPr/>
-          <p:nvPr/>
-        </p:nvSpPr>
-        <p:spPr>
-          <a:xfrm>
-            <a:off x="5943600" y="2670048"/>
-            <a:ext cx="1463040" cy="420624"/>
-          </a:xfrm>
-          <a:prstGeom prst="rect">
-            <a:avLst/>
-          </a:prstGeom>
-          <a:solidFill>
-            <a:srgbClr val="FCE7F3"/>
-          </a:solidFill>
-          <a:ln w="12700">
-            <a:solidFill>
-              <a:srgbClr val="E5E7EB"/>
-            </a:solidFill>
-            <a:prstDash val="solid"/>
-          </a:ln>
-        </p:spPr>
-      </p:sp>
-      <p:sp>
-        <p:nvSpPr>
-          <p:cNvPr id="32" name="Text 30"/>
-          <p:cNvSpPr/>
-          <p:nvPr/>
-        </p:nvSpPr>
-        <p:spPr>
-          <a:xfrm>
-            <a:off x="5943600" y="2670048"/>
-            <a:ext cx="1463040" cy="420624"/>
-          </a:xfrm>
-          <a:prstGeom prst="rect">
-            <a:avLst/>
-          </a:prstGeom>
-          <a:noFill/>
-          <a:ln/>
-        </p:spPr>
-        <p:txBody>
-          <a:bodyPr wrap="square" lIns="0" tIns="0" rIns="0" bIns="0" rtlCol="0" anchor="ctr"/>
-          <a:lstStyle/>
-          <a:p>
-            <a:pPr algn="ctr" indent="0" marL="0">
-              <a:buNone/>
-            </a:pPr>
-            <a:r>
-              <a:rPr lang="en-US" sz="1300" b="1" dirty="0">
-                <a:solidFill>
-                  <a:srgbClr val="9D174D"/>
-                </a:solidFill>
-                <a:latin typeface="Trebuchet MS" pitchFamily="34" charset="0"/>
-                <a:ea typeface="Trebuchet MS" pitchFamily="34" charset="-122"/>
-                <a:cs typeface="Trebuchet MS" pitchFamily="34" charset="-120"/>
-              </a:rPr>
-              <a:t>-ed</a:t>
-            </a:r>
-            <a:endParaRPr lang="en-US" sz="1300" dirty="0"/>
-          </a:p>
-        </p:txBody>
-      </p:sp>
-      <p:sp>
-        <p:nvSpPr>
-          <p:cNvPr id="33" name="Shape 31"/>
-          <p:cNvSpPr/>
-          <p:nvPr/>
-        </p:nvSpPr>
-        <p:spPr>
-          <a:xfrm>
-            <a:off x="640080" y="3127248"/>
-            <a:ext cx="1463040" cy="420624"/>
-          </a:xfrm>
-          <a:prstGeom prst="rect">
-            <a:avLst/>
-          </a:prstGeom>
-          <a:solidFill>
-            <a:srgbClr val="DDD6FE"/>
-          </a:solidFill>
-          <a:ln w="12700">
-            <a:solidFill>
-              <a:srgbClr val="E5E7EB"/>
-            </a:solidFill>
-            <a:prstDash val="solid"/>
-          </a:ln>
-        </p:spPr>
-      </p:sp>
-      <p:sp>
-        <p:nvSpPr>
-          <p:cNvPr id="34" name="Text 32"/>
-          <p:cNvSpPr/>
-          <p:nvPr/>
-        </p:nvSpPr>
-        <p:spPr>
-          <a:xfrm>
-            <a:off x="640080" y="3127248"/>
-            <a:ext cx="1463040" cy="420624"/>
-          </a:xfrm>
-          <a:prstGeom prst="rect">
-            <a:avLst/>
-          </a:prstGeom>
-          <a:noFill/>
-          <a:ln/>
-        </p:spPr>
-        <p:txBody>
-          <a:bodyPr wrap="square" lIns="0" tIns="0" rIns="0" bIns="0" rtlCol="0" anchor="ctr"/>
-          <a:lstStyle/>
-          <a:p>
-            <a:pPr algn="ctr" indent="0" marL="0">
-              <a:buNone/>
-            </a:pPr>
-            <a:r>
-              <a:rPr lang="en-US" sz="1300" b="1" dirty="0">
-                <a:solidFill>
-                  <a:srgbClr val="4C1D95"/>
-                </a:solidFill>
-                <a:latin typeface="Trebuchet MS" pitchFamily="34" charset="0"/>
-                <a:ea typeface="Trebuchet MS" pitchFamily="34" charset="-122"/>
-                <a:cs typeface="Trebuchet MS" pitchFamily="34" charset="-120"/>
-              </a:rPr>
-              <a:t>mis-</a:t>
-            </a:r>
-            <a:endParaRPr lang="en-US" sz="1300" dirty="0"/>
-          </a:p>
-        </p:txBody>
-      </p:sp>
-      <p:sp>
-        <p:nvSpPr>
-          <p:cNvPr id="35" name="Shape 33"/>
-          <p:cNvSpPr/>
-          <p:nvPr/>
-        </p:nvSpPr>
-        <p:spPr>
-          <a:xfrm>
-            <a:off x="3291840" y="3127248"/>
-            <a:ext cx="1645920" cy="420624"/>
-          </a:xfrm>
-          <a:prstGeom prst="rect">
-            <a:avLst/>
-          </a:prstGeom>
-          <a:solidFill>
-            <a:srgbClr val="F1F5F9"/>
-          </a:solidFill>
-          <a:ln w="12700">
-            <a:solidFill>
-              <a:srgbClr val="E5E7EB"/>
-            </a:solidFill>
-            <a:prstDash val="solid"/>
-          </a:ln>
-        </p:spPr>
-      </p:sp>
-      <p:sp>
-        <p:nvSpPr>
-          <p:cNvPr id="36" name="Shape 34"/>
-          <p:cNvSpPr/>
-          <p:nvPr/>
-        </p:nvSpPr>
-        <p:spPr>
-          <a:xfrm>
-            <a:off x="5943600" y="3127248"/>
-            <a:ext cx="1463040" cy="420624"/>
-          </a:xfrm>
-          <a:prstGeom prst="rect">
-            <a:avLst/>
-          </a:prstGeom>
-          <a:solidFill>
-            <a:srgbClr val="FCE7F3"/>
-          </a:solidFill>
-          <a:ln w="12700">
-            <a:solidFill>
-              <a:srgbClr val="E5E7EB"/>
-            </a:solidFill>
-            <a:prstDash val="solid"/>
-          </a:ln>
-        </p:spPr>
-      </p:sp>
-      <p:sp>
-        <p:nvSpPr>
-          <p:cNvPr id="37" name="Text 35"/>
-          <p:cNvSpPr/>
-          <p:nvPr/>
-        </p:nvSpPr>
-        <p:spPr>
-          <a:xfrm>
-            <a:off x="5943600" y="3127248"/>
-            <a:ext cx="1463040" cy="420624"/>
-          </a:xfrm>
-          <a:prstGeom prst="rect">
-            <a:avLst/>
-          </a:prstGeom>
-          <a:noFill/>
-          <a:ln/>
-        </p:spPr>
-        <p:txBody>
-          <a:bodyPr wrap="square" lIns="0" tIns="0" rIns="0" bIns="0" rtlCol="0" anchor="ctr"/>
-          <a:lstStyle/>
-          <a:p>
-            <a:pPr algn="ctr" indent="0" marL="0">
-              <a:buNone/>
-            </a:pPr>
-            <a:r>
-              <a:rPr lang="en-US" sz="1300" b="1" dirty="0">
-                <a:solidFill>
-                  <a:srgbClr val="9D174D"/>
-                </a:solidFill>
-                <a:latin typeface="Trebuchet MS" pitchFamily="34" charset="0"/>
-                <a:ea typeface="Trebuchet MS" pitchFamily="34" charset="-122"/>
-                <a:cs typeface="Trebuchet MS" pitchFamily="34" charset="-120"/>
-              </a:rPr>
-              <a:t>-ing</a:t>
-            </a:r>
-            <a:endParaRPr lang="en-US" sz="1300" dirty="0"/>
-          </a:p>
-        </p:txBody>
-      </p:sp>
-      <p:sp>
-        <p:nvSpPr>
-          <p:cNvPr id="38" name="Shape 36"/>
-          <p:cNvSpPr/>
-          <p:nvPr/>
-        </p:nvSpPr>
-        <p:spPr>
-          <a:xfrm>
-            <a:off x="640080" y="3584448"/>
-            <a:ext cx="1463040" cy="420624"/>
-          </a:xfrm>
-          <a:prstGeom prst="rect">
-            <a:avLst/>
-          </a:prstGeom>
-          <a:solidFill>
-            <a:srgbClr val="DDD6FE"/>
-          </a:solidFill>
-          <a:ln w="12700">
-            <a:solidFill>
-              <a:srgbClr val="E5E7EB"/>
-            </a:solidFill>
-            <a:prstDash val="solid"/>
-          </a:ln>
-        </p:spPr>
-      </p:sp>
-      <p:sp>
-        <p:nvSpPr>
-          <p:cNvPr id="39" name="Text 37"/>
-          <p:cNvSpPr/>
-          <p:nvPr/>
-        </p:nvSpPr>
-        <p:spPr>
-          <a:xfrm>
-            <a:off x="640080" y="3584448"/>
-            <a:ext cx="1463040" cy="420624"/>
-          </a:xfrm>
-          <a:prstGeom prst="rect">
-            <a:avLst/>
-          </a:prstGeom>
-          <a:noFill/>
-          <a:ln/>
-        </p:spPr>
-        <p:txBody>
-          <a:bodyPr wrap="square" lIns="0" tIns="0" rIns="0" bIns="0" rtlCol="0" anchor="ctr"/>
-          <a:lstStyle/>
-          <a:p>
-            <a:pPr algn="ctr" indent="0" marL="0">
-              <a:buNone/>
-            </a:pPr>
-            <a:r>
-              <a:rPr lang="en-US" sz="1300" b="1" dirty="0">
-                <a:solidFill>
-                  <a:srgbClr val="4C1D95"/>
-                </a:solidFill>
-                <a:latin typeface="Trebuchet MS" pitchFamily="34" charset="0"/>
-                <a:ea typeface="Trebuchet MS" pitchFamily="34" charset="-122"/>
-                <a:cs typeface="Trebuchet MS" pitchFamily="34" charset="-120"/>
-              </a:rPr>
-              <a:t>re-</a:t>
-            </a:r>
-            <a:endParaRPr lang="en-US" sz="1300" dirty="0"/>
-          </a:p>
-        </p:txBody>
-      </p:sp>
-      <p:sp>
-        <p:nvSpPr>
-          <p:cNvPr id="40" name="Shape 38"/>
-          <p:cNvSpPr/>
-          <p:nvPr/>
-        </p:nvSpPr>
-        <p:spPr>
-          <a:xfrm>
-            <a:off x="3291840" y="3584448"/>
-            <a:ext cx="1645920" cy="420624"/>
-          </a:xfrm>
-          <a:prstGeom prst="rect">
-            <a:avLst/>
-          </a:prstGeom>
-          <a:solidFill>
-            <a:srgbClr val="F8FAFC"/>
-          </a:solidFill>
-          <a:ln w="12700">
-            <a:solidFill>
-              <a:srgbClr val="E5E7EB"/>
-            </a:solidFill>
-            <a:prstDash val="solid"/>
-          </a:ln>
-        </p:spPr>
-      </p:sp>
-      <p:sp>
-        <p:nvSpPr>
-          <p:cNvPr id="41" name="Shape 39"/>
-          <p:cNvSpPr/>
-          <p:nvPr/>
-        </p:nvSpPr>
-        <p:spPr>
-          <a:xfrm>
-            <a:off x="5943600" y="3584448"/>
-            <a:ext cx="1463040" cy="420624"/>
-          </a:xfrm>
-          <a:prstGeom prst="rect">
-            <a:avLst/>
-          </a:prstGeom>
-          <a:solidFill>
-            <a:srgbClr val="FCE7F3"/>
-          </a:solidFill>
-          <a:ln w="12700">
-            <a:solidFill>
-              <a:srgbClr val="E5E7EB"/>
-            </a:solidFill>
-            <a:prstDash val="solid"/>
-          </a:ln>
-        </p:spPr>
-      </p:sp>
-      <p:sp>
-        <p:nvSpPr>
-          <p:cNvPr id="42" name="Text 40"/>
-          <p:cNvSpPr/>
-          <p:nvPr/>
-        </p:nvSpPr>
-        <p:spPr>
-          <a:xfrm>
-            <a:off x="5943600" y="3584448"/>
-            <a:ext cx="1463040" cy="420624"/>
-          </a:xfrm>
-          <a:prstGeom prst="rect">
-            <a:avLst/>
-          </a:prstGeom>
-          <a:noFill/>
-          <a:ln/>
-        </p:spPr>
-        <p:txBody>
-          <a:bodyPr wrap="square" lIns="0" tIns="0" rIns="0" bIns="0" rtlCol="0" anchor="ctr"/>
-          <a:lstStyle/>
-          <a:p>
-            <a:pPr algn="ctr" indent="0" marL="0">
-              <a:buNone/>
-            </a:pPr>
-            <a:r>
-              <a:rPr lang="en-US" sz="1300" b="1" dirty="0">
-                <a:solidFill>
-                  <a:srgbClr val="9D174D"/>
-                </a:solidFill>
-                <a:latin typeface="Trebuchet MS" pitchFamily="34" charset="0"/>
-                <a:ea typeface="Trebuchet MS" pitchFamily="34" charset="-122"/>
-                <a:cs typeface="Trebuchet MS" pitchFamily="34" charset="-120"/>
-              </a:rPr>
-              <a:t>-some</a:t>
-            </a:r>
-            <a:endParaRPr lang="en-US" sz="1300" dirty="0"/>
-          </a:p>
-        </p:txBody>
-      </p:sp>
-      <p:sp>
-        <p:nvSpPr>
-          <p:cNvPr id="43" name="Text 41"/>
+          <p:cNvPr id="38" name="Text 36"/>
           <p:cNvSpPr/>
           <p:nvPr/>
         </p:nvSpPr>
@@ -38802,14 +40248,14 @@
       </p:sp>
       <p:sp>
         <p:nvSpPr>
-          <p:cNvPr id="44" name="Shape 42"/>
+          <p:cNvPr id="39" name="Shape 37"/>
           <p:cNvSpPr/>
           <p:nvPr/>
         </p:nvSpPr>
         <p:spPr>
           <a:xfrm>
             <a:off x="1508760" y="4178808"/>
-            <a:ext cx="822960" cy="420624"/>
+            <a:ext cx="1243584" cy="420624"/>
           </a:xfrm>
           <a:prstGeom prst="rect">
             <a:avLst>
@@ -38817,11 +40263,11 @@
             </a:avLst>
           </a:prstGeom>
           <a:solidFill>
-            <a:srgbClr val="DDD6FE"/>
+            <a:srgbClr val="CCFBF1"/>
           </a:solidFill>
           <a:ln w="19050">
             <a:solidFill>
-              <a:srgbClr val="7C3AED"/>
+              <a:srgbClr val="0D9488"/>
             </a:solidFill>
             <a:prstDash val="solid"/>
           </a:ln>
@@ -38836,14 +40282,14 @@
       </p:sp>
       <p:sp>
         <p:nvSpPr>
-          <p:cNvPr id="45" name="Text 43"/>
+          <p:cNvPr id="40" name="Text 38"/>
           <p:cNvSpPr/>
           <p:nvPr/>
         </p:nvSpPr>
         <p:spPr>
           <a:xfrm>
             <a:off x="1508760" y="4178808"/>
-            <a:ext cx="822960" cy="420624"/>
+            <a:ext cx="1243584" cy="420624"/>
           </a:xfrm>
           <a:prstGeom prst="rect">
             <a:avLst/>
@@ -38861,13 +40307,13 @@
             <a:r>
               <a:rPr lang="en-US" sz="1300" b="1" dirty="0">
                 <a:solidFill>
-                  <a:srgbClr val="4C1D95"/>
+                  <a:srgbClr val="0F766E"/>
                 </a:solidFill>
                 <a:latin typeface="Trebuchet MS" pitchFamily="34" charset="0"/>
                 <a:ea typeface="Trebuchet MS" pitchFamily="34" charset="-122"/>
                 <a:cs typeface="Trebuchet MS" pitchFamily="34" charset="-120"/>
               </a:rPr>
-              <a:t>un-</a:t>
+              <a:t>'fear'</a:t>
             </a:r>
             <a:endParaRPr lang="en-US" sz="1300" dirty="0"/>
           </a:p>
@@ -38875,13 +40321,13 @@
       </p:sp>
       <p:sp>
         <p:nvSpPr>
-          <p:cNvPr id="46" name="Text 44"/>
-          <p:cNvSpPr/>
-          <p:nvPr/>
-        </p:nvSpPr>
-        <p:spPr>
-          <a:xfrm>
-            <a:off x="2359152" y="4178808"/>
+          <p:cNvPr id="41" name="Text 39"/>
+          <p:cNvSpPr/>
+          <p:nvPr/>
+        </p:nvSpPr>
+        <p:spPr>
+          <a:xfrm>
+            <a:off x="2779776" y="4178808"/>
             <a:ext cx="320040" cy="420624"/>
           </a:xfrm>
           <a:prstGeom prst="rect">
@@ -38914,14 +40360,14 @@
       </p:sp>
       <p:sp>
         <p:nvSpPr>
-          <p:cNvPr id="47" name="Shape 45"/>
-          <p:cNvSpPr/>
-          <p:nvPr/>
-        </p:nvSpPr>
-        <p:spPr>
-          <a:xfrm>
-            <a:off x="2706624" y="4178808"/>
-            <a:ext cx="1243584" cy="420624"/>
+          <p:cNvPr id="42" name="Shape 40"/>
+          <p:cNvSpPr/>
+          <p:nvPr/>
+        </p:nvSpPr>
+        <p:spPr>
+          <a:xfrm>
+            <a:off x="3127248" y="4178808"/>
+            <a:ext cx="822960" cy="420624"/>
           </a:xfrm>
           <a:prstGeom prst="rect">
             <a:avLst>
@@ -38929,11 +40375,11 @@
             </a:avLst>
           </a:prstGeom>
           <a:solidFill>
-            <a:srgbClr val="CCFBF1"/>
+            <a:srgbClr val="FCE7F3"/>
           </a:solidFill>
           <a:ln w="19050">
             <a:solidFill>
-              <a:srgbClr val="0D9488"/>
+              <a:srgbClr val="DB2777"/>
             </a:solidFill>
             <a:prstDash val="solid"/>
           </a:ln>
@@ -38948,14 +40394,14 @@
       </p:sp>
       <p:sp>
         <p:nvSpPr>
-          <p:cNvPr id="48" name="Text 46"/>
-          <p:cNvSpPr/>
-          <p:nvPr/>
-        </p:nvSpPr>
-        <p:spPr>
-          <a:xfrm>
-            <a:off x="2706624" y="4178808"/>
-            <a:ext cx="1243584" cy="420624"/>
+          <p:cNvPr id="43" name="Text 41"/>
+          <p:cNvSpPr/>
+          <p:nvPr/>
+        </p:nvSpPr>
+        <p:spPr>
+          <a:xfrm>
+            <a:off x="3127248" y="4178808"/>
+            <a:ext cx="822960" cy="420624"/>
           </a:xfrm>
           <a:prstGeom prst="rect">
             <a:avLst/>
@@ -38973,13 +40419,13 @@
             <a:r>
               <a:rPr lang="en-US" sz="1300" b="1" dirty="0">
                 <a:solidFill>
-                  <a:srgbClr val="0F766E"/>
+                  <a:srgbClr val="9D174D"/>
                 </a:solidFill>
                 <a:latin typeface="Trebuchet MS" pitchFamily="34" charset="0"/>
                 <a:ea typeface="Trebuchet MS" pitchFamily="34" charset="-122"/>
                 <a:cs typeface="Trebuchet MS" pitchFamily="34" charset="-120"/>
               </a:rPr>
-              <a:t>'fear'</a:t>
+              <a:t>-ed</a:t>
             </a:r>
             <a:endParaRPr lang="en-US" sz="1300" dirty="0"/>
           </a:p>
@@ -38987,14 +40433,14 @@
       </p:sp>
       <p:sp>
         <p:nvSpPr>
-          <p:cNvPr id="49" name="Text 47"/>
-          <p:cNvSpPr/>
-          <p:nvPr/>
-        </p:nvSpPr>
-        <p:spPr>
-          <a:xfrm>
-            <a:off x="3977640" y="4178808"/>
-            <a:ext cx="320040" cy="420624"/>
+          <p:cNvPr id="44" name="Text 42"/>
+          <p:cNvSpPr/>
+          <p:nvPr/>
+        </p:nvSpPr>
+        <p:spPr>
+          <a:xfrm>
+            <a:off x="4023360" y="4178808"/>
+            <a:ext cx="365760" cy="420624"/>
           </a:xfrm>
           <a:prstGeom prst="rect">
             <a:avLst/>
@@ -39010,30 +40456,30 @@
               <a:buNone/>
             </a:pPr>
             <a:r>
-              <a:rPr lang="en-US" sz="1400" dirty="0">
-                <a:solidFill>
-                  <a:srgbClr val="475569"/>
+              <a:rPr lang="en-US" sz="1800" b="1" dirty="0">
+                <a:solidFill>
+                  <a:srgbClr val="0D9488"/>
                 </a:solidFill>
                 <a:latin typeface="Trebuchet MS" pitchFamily="34" charset="0"/>
                 <a:ea typeface="Trebuchet MS" pitchFamily="34" charset="-122"/>
                 <a:cs typeface="Trebuchet MS" pitchFamily="34" charset="-120"/>
               </a:rPr>
-              <a:t>+</a:t>
-            </a:r>
-            <a:endParaRPr lang="en-US" sz="1400" dirty="0"/>
-          </a:p>
-        </p:txBody>
-      </p:sp>
-      <p:sp>
-        <p:nvSpPr>
-          <p:cNvPr id="50" name="Shape 48"/>
-          <p:cNvSpPr/>
-          <p:nvPr/>
-        </p:nvSpPr>
-        <p:spPr>
-          <a:xfrm>
-            <a:off x="4325112" y="4178808"/>
-            <a:ext cx="950976" cy="420624"/>
+              <a:t>=</a:t>
+            </a:r>
+            <a:endParaRPr lang="en-US" sz="1800" dirty="0"/>
+          </a:p>
+        </p:txBody>
+      </p:sp>
+      <p:sp>
+        <p:nvSpPr>
+          <p:cNvPr id="45" name="Shape 43"/>
+          <p:cNvSpPr/>
+          <p:nvPr/>
+        </p:nvSpPr>
+        <p:spPr>
+          <a:xfrm>
+            <a:off x="4434840" y="4178808"/>
+            <a:ext cx="2194560" cy="420624"/>
           </a:xfrm>
           <a:prstGeom prst="rect">
             <a:avLst>
@@ -39041,33 +40487,26 @@
             </a:avLst>
           </a:prstGeom>
           <a:solidFill>
-            <a:srgbClr val="FCE7F3"/>
-          </a:solidFill>
-          <a:ln w="19050">
-            <a:solidFill>
-              <a:srgbClr val="DB2777"/>
-            </a:solidFill>
-            <a:prstDash val="solid"/>
-          </a:ln>
-          <a:effectLst>
-            <a:outerShdw sx="100000" sy="100000" kx="0" ky="0" algn="bl" rotWithShape="0" blurRad="101600" dist="38100" dir="8100000">
-              <a:srgbClr val="000000">
-                <a:alpha val="12000"/>
-              </a:srgbClr>
-            </a:outerShdw>
-          </a:effectLst>
-        </p:spPr>
-      </p:sp>
-      <p:sp>
-        <p:nvSpPr>
-          <p:cNvPr id="51" name="Text 49"/>
-          <p:cNvSpPr/>
-          <p:nvPr/>
-        </p:nvSpPr>
-        <p:spPr>
-          <a:xfrm>
-            <a:off x="4325112" y="4178808"/>
-            <a:ext cx="950976" cy="420624"/>
+            <a:srgbClr val="0D9488"/>
+          </a:solidFill>
+          <a:ln w="12700">
+            <a:solidFill>
+              <a:srgbClr val="0D9488"/>
+            </a:solidFill>
+            <a:prstDash val="solid"/>
+          </a:ln>
+        </p:spPr>
+      </p:sp>
+      <p:sp>
+        <p:nvSpPr>
+          <p:cNvPr id="46" name="Text 44"/>
+          <p:cNvSpPr/>
+          <p:nvPr/>
+        </p:nvSpPr>
+        <p:spPr>
+          <a:xfrm>
+            <a:off x="4434840" y="4178808"/>
+            <a:ext cx="2194560" cy="420624"/>
           </a:xfrm>
           <a:prstGeom prst="rect">
             <a:avLst/>
@@ -39083,120 +40522,15 @@
               <a:buNone/>
             </a:pPr>
             <a:r>
-              <a:rPr lang="en-US" sz="1300" b="1" dirty="0">
-                <a:solidFill>
-                  <a:srgbClr val="9D174D"/>
+              <a:rPr lang="en-US" sz="1400" b="1" dirty="0">
+                <a:solidFill>
+                  <a:srgbClr val="FFFFFF"/>
                 </a:solidFill>
                 <a:latin typeface="Trebuchet MS" pitchFamily="34" charset="0"/>
                 <a:ea typeface="Trebuchet MS" pitchFamily="34" charset="-122"/>
                 <a:cs typeface="Trebuchet MS" pitchFamily="34" charset="-120"/>
               </a:rPr>
-              <a:t>-ful</a:t>
-            </a:r>
-            <a:endParaRPr lang="en-US" sz="1300" dirty="0"/>
-          </a:p>
-        </p:txBody>
-      </p:sp>
-      <p:sp>
-        <p:nvSpPr>
-          <p:cNvPr id="52" name="Text 50"/>
-          <p:cNvSpPr/>
-          <p:nvPr/>
-        </p:nvSpPr>
-        <p:spPr>
-          <a:xfrm>
-            <a:off x="5349240" y="4178808"/>
-            <a:ext cx="365760" cy="420624"/>
-          </a:xfrm>
-          <a:prstGeom prst="rect">
-            <a:avLst/>
-          </a:prstGeom>
-          <a:noFill/>
-          <a:ln/>
-        </p:spPr>
-        <p:txBody>
-          <a:bodyPr wrap="square" lIns="0" tIns="0" rIns="0" bIns="0" rtlCol="0" anchor="ctr"/>
-          <a:lstStyle/>
-          <a:p>
-            <a:pPr algn="ctr" indent="0" marL="0">
-              <a:buNone/>
-            </a:pPr>
-            <a:r>
-              <a:rPr lang="en-US" sz="1800" b="1" dirty="0">
-                <a:solidFill>
-                  <a:srgbClr val="0D9488"/>
-                </a:solidFill>
-                <a:latin typeface="Trebuchet MS" pitchFamily="34" charset="0"/>
-                <a:ea typeface="Trebuchet MS" pitchFamily="34" charset="-122"/>
-                <a:cs typeface="Trebuchet MS" pitchFamily="34" charset="-120"/>
-              </a:rPr>
-              <a:t>=</a:t>
-            </a:r>
-            <a:endParaRPr lang="en-US" sz="1800" dirty="0"/>
-          </a:p>
-        </p:txBody>
-      </p:sp>
-      <p:sp>
-        <p:nvSpPr>
-          <p:cNvPr id="53" name="Shape 51"/>
-          <p:cNvSpPr/>
-          <p:nvPr/>
-        </p:nvSpPr>
-        <p:spPr>
-          <a:xfrm>
-            <a:off x="5760720" y="4178808"/>
-            <a:ext cx="2194560" cy="420624"/>
-          </a:xfrm>
-          <a:prstGeom prst="rect">
-            <a:avLst>
-              <a:gd name="adj" fmla="val 17391"/>
-            </a:avLst>
-          </a:prstGeom>
-          <a:solidFill>
-            <a:srgbClr val="0D9488"/>
-          </a:solidFill>
-          <a:ln w="12700">
-            <a:solidFill>
-              <a:srgbClr val="0D9488"/>
-            </a:solidFill>
-            <a:prstDash val="solid"/>
-          </a:ln>
-        </p:spPr>
-      </p:sp>
-      <p:sp>
-        <p:nvSpPr>
-          <p:cNvPr id="54" name="Text 52"/>
-          <p:cNvSpPr/>
-          <p:nvPr/>
-        </p:nvSpPr>
-        <p:spPr>
-          <a:xfrm>
-            <a:off x="5760720" y="4178808"/>
-            <a:ext cx="2194560" cy="420624"/>
-          </a:xfrm>
-          <a:prstGeom prst="rect">
-            <a:avLst/>
-          </a:prstGeom>
-          <a:noFill/>
-          <a:ln/>
-        </p:spPr>
-        <p:txBody>
-          <a:bodyPr wrap="square" lIns="0" tIns="0" rIns="0" bIns="0" rtlCol="0" anchor="ctr"/>
-          <a:lstStyle/>
-          <a:p>
-            <a:pPr algn="ctr" indent="0" marL="0">
-              <a:buNone/>
-            </a:pPr>
-            <a:r>
-              <a:rPr lang="en-US" sz="1400" b="1" dirty="0">
-                <a:solidFill>
-                  <a:srgbClr val="FFFFFF"/>
-                </a:solidFill>
-                <a:latin typeface="Trebuchet MS" pitchFamily="34" charset="0"/>
-                <a:ea typeface="Trebuchet MS" pitchFamily="34" charset="-122"/>
-                <a:cs typeface="Trebuchet MS" pitchFamily="34" charset="-120"/>
-              </a:rPr>
-              <a:t>fearful</a:t>
+              <a:t>fear</a:t>
             </a:r>
             <a:endParaRPr lang="en-US" sz="1400" dirty="0"/>
           </a:p>
@@ -39488,7 +40822,7 @@
                 <a:ea typeface="Calibri" pitchFamily="34" charset="-122"/>
                 <a:cs typeface="Calibri" pitchFamily="34" charset="-120"/>
               </a:rPr>
-              <a:t>Word Labs  •  wordlabs.app  •  Root: 'fear' = feeling of danger or dread</a:t>
+              <a:t>Word Labs  •  wordlabs.app  •  Root: 'fear' = to be afraid of</a:t>
             </a:r>
             <a:endParaRPr lang="en-US" sz="800" dirty="0"/>
           </a:p>
@@ -39600,7 +40934,7 @@
                 <a:ea typeface="Trebuchet MS" pitchFamily="34" charset="-122"/>
                 <a:cs typeface="Trebuchet MS" pitchFamily="34" charset="-120"/>
               </a:rPr>
-              <a:t>fearful</a:t>
+              <a:t>fear</a:t>
             </a:r>
             <a:endParaRPr lang="en-US" sz="1200" dirty="0"/>
           </a:p>
@@ -39666,7 +41000,7 @@
                 <a:ea typeface="Calibri" pitchFamily="34" charset="-122"/>
                 <a:cs typeface="Calibri" pitchFamily="34" charset="-120"/>
               </a:rPr>
-              <a:t>Feeling very scared or worried about something.</a:t>
+              <a:t>a strong feeling of being afraid of something</a:t>
             </a:r>
             <a:endParaRPr lang="en-US" sz="1200" dirty="0"/>
           </a:p>
@@ -39739,7 +41073,7 @@
                 <a:ea typeface="Trebuchet MS" pitchFamily="34" charset="-122"/>
                 <a:cs typeface="Trebuchet MS" pitchFamily="34" charset="-120"/>
               </a:rPr>
-              <a:t>fearless</a:t>
+              <a:t>fears</a:t>
             </a:r>
             <a:endParaRPr lang="en-US" sz="1200" dirty="0"/>
           </a:p>
@@ -39805,7 +41139,7 @@
                 <a:ea typeface="Calibri" pitchFamily="34" charset="-122"/>
                 <a:cs typeface="Calibri" pitchFamily="34" charset="-120"/>
               </a:rPr>
-              <a:t>Feeling scared about something right now.</a:t>
+              <a:t>feeling or showing fear; afraid</a:t>
             </a:r>
             <a:endParaRPr lang="en-US" sz="1200" dirty="0"/>
           </a:p>
@@ -39944,7 +41278,7 @@
                 <a:ea typeface="Calibri" pitchFamily="34" charset="-122"/>
                 <a:cs typeface="Calibri" pitchFamily="34" charset="-120"/>
               </a:rPr>
-              <a:t>Was scared of something or someone.</a:t>
+              <a:t>was afraid of something in the past</a:t>
             </a:r>
             <a:endParaRPr lang="en-US" sz="1200" dirty="0"/>
           </a:p>
@@ -40017,7 +41351,7 @@
                 <a:ea typeface="Trebuchet MS" pitchFamily="34" charset="-122"/>
                 <a:cs typeface="Trebuchet MS" pitchFamily="34" charset="-120"/>
               </a:rPr>
-              <a:t>fearing</a:t>
+              <a:t>fearful</a:t>
             </a:r>
             <a:endParaRPr lang="en-US" sz="1200" dirty="0"/>
           </a:p>
@@ -40083,7 +41417,7 @@
                 <a:ea typeface="Calibri" pitchFamily="34" charset="-122"/>
                 <a:cs typeface="Calibri" pitchFamily="34" charset="-120"/>
               </a:rPr>
-              <a:t>Something that looks or seems very frightening.</a:t>
+              <a:t>feeling afraid of something</a:t>
             </a:r>
             <a:endParaRPr lang="en-US" sz="1200" dirty="0"/>
           </a:p>
@@ -40156,7 +41490,7 @@
                 <a:ea typeface="Trebuchet MS" pitchFamily="34" charset="-122"/>
                 <a:cs typeface="Trebuchet MS" pitchFamily="34" charset="-120"/>
               </a:rPr>
-              <a:t>fearsome</a:t>
+              <a:t>fearing</a:t>
             </a:r>
             <a:endParaRPr lang="en-US" sz="1200" dirty="0"/>
           </a:p>
@@ -40222,285 +41556,7 @@
                 <a:ea typeface="Calibri" pitchFamily="34" charset="-122"/>
                 <a:cs typeface="Calibri" pitchFamily="34" charset="-120"/>
               </a:rPr>
-              <a:t>Done in a way that shows you are very scared.</a:t>
-            </a:r>
-            <a:endParaRPr lang="en-US" sz="1200" dirty="0"/>
-          </a:p>
-        </p:txBody>
-      </p:sp>
-      <p:sp>
-        <p:nvSpPr>
-          <p:cNvPr id="31" name="Shape 29"/>
-          <p:cNvSpPr/>
-          <p:nvPr/>
-        </p:nvSpPr>
-        <p:spPr>
-          <a:xfrm>
-            <a:off x="365760" y="3840480"/>
-            <a:ext cx="2011680" cy="457200"/>
-          </a:xfrm>
-          <a:prstGeom prst="rect">
-            <a:avLst>
-              <a:gd name="adj" fmla="val 12000"/>
-            </a:avLst>
-          </a:prstGeom>
-          <a:solidFill>
-            <a:srgbClr val="EEF2FF"/>
-          </a:solidFill>
-          <a:ln w="12700">
-            <a:solidFill>
-              <a:srgbClr val="6366F1"/>
-            </a:solidFill>
-            <a:prstDash val="solid"/>
-          </a:ln>
-          <a:effectLst>
-            <a:outerShdw sx="100000" sy="100000" kx="0" ky="0" algn="bl" rotWithShape="0" blurRad="101600" dist="38100" dir="8100000">
-              <a:srgbClr val="000000">
-                <a:alpha val="12000"/>
-              </a:srgbClr>
-            </a:outerShdw>
-          </a:effectLst>
-        </p:spPr>
-      </p:sp>
-      <p:sp>
-        <p:nvSpPr>
-          <p:cNvPr id="32" name="Text 30"/>
-          <p:cNvSpPr/>
-          <p:nvPr/>
-        </p:nvSpPr>
-        <p:spPr>
-          <a:xfrm>
-            <a:off x="365760" y="3840480"/>
-            <a:ext cx="2011680" cy="457200"/>
-          </a:xfrm>
-          <a:prstGeom prst="rect">
-            <a:avLst/>
-          </a:prstGeom>
-          <a:noFill/>
-          <a:ln/>
-        </p:spPr>
-        <p:txBody>
-          <a:bodyPr wrap="square" lIns="0" tIns="0" rIns="0" bIns="0" rtlCol="0" anchor="ctr"/>
-          <a:lstStyle/>
-          <a:p>
-            <a:pPr algn="ctr" indent="0" marL="0">
-              <a:buNone/>
-            </a:pPr>
-            <a:r>
-              <a:rPr lang="en-US" sz="1200" b="1" dirty="0">
-                <a:solidFill>
-                  <a:srgbClr val="4338CA"/>
-                </a:solidFill>
-                <a:latin typeface="Trebuchet MS" pitchFamily="34" charset="0"/>
-                <a:ea typeface="Trebuchet MS" pitchFamily="34" charset="-122"/>
-                <a:cs typeface="Trebuchet MS" pitchFamily="34" charset="-120"/>
-              </a:rPr>
-              <a:t>unfeared</a:t>
-            </a:r>
-            <a:endParaRPr lang="en-US" sz="1200" dirty="0"/>
-          </a:p>
-        </p:txBody>
-      </p:sp>
-      <p:sp>
-        <p:nvSpPr>
-          <p:cNvPr id="33" name="Shape 31"/>
-          <p:cNvSpPr/>
-          <p:nvPr/>
-        </p:nvSpPr>
-        <p:spPr>
-          <a:xfrm>
-            <a:off x="2514600" y="3840480"/>
-            <a:ext cx="6263640" cy="457200"/>
-          </a:xfrm>
-          <a:prstGeom prst="rect">
-            <a:avLst>
-              <a:gd name="adj" fmla="val 12000"/>
-            </a:avLst>
-          </a:prstGeom>
-          <a:solidFill>
-            <a:srgbClr val="F8FAFC"/>
-          </a:solidFill>
-          <a:ln w="12700">
-            <a:solidFill>
-              <a:srgbClr val="E2E8F0"/>
-            </a:solidFill>
-            <a:prstDash val="solid"/>
-          </a:ln>
-        </p:spPr>
-      </p:sp>
-      <p:sp>
-        <p:nvSpPr>
-          <p:cNvPr id="34" name="Text 32"/>
-          <p:cNvSpPr/>
-          <p:nvPr/>
-        </p:nvSpPr>
-        <p:spPr>
-          <a:xfrm>
-            <a:off x="2651760" y="3840480"/>
-            <a:ext cx="6035040" cy="457200"/>
-          </a:xfrm>
-          <a:prstGeom prst="rect">
-            <a:avLst/>
-          </a:prstGeom>
-          <a:noFill/>
-          <a:ln/>
-        </p:spPr>
-        <p:txBody>
-          <a:bodyPr wrap="square" rtlCol="0" anchor="ctr"/>
-          <a:lstStyle/>
-          <a:p>
-            <a:pPr algn="l" indent="0" marL="0">
-              <a:buNone/>
-            </a:pPr>
-            <a:r>
-              <a:rPr lang="en-US" sz="1200" dirty="0">
-                <a:solidFill>
-                  <a:srgbClr val="0F172A"/>
-                </a:solidFill>
-                <a:latin typeface="Calibri" pitchFamily="34" charset="0"/>
-                <a:ea typeface="Calibri" pitchFamily="34" charset="-122"/>
-                <a:cs typeface="Calibri" pitchFamily="34" charset="-120"/>
-              </a:rPr>
-              <a:t>Not feared or treated as scary by others.</a:t>
-            </a:r>
-            <a:endParaRPr lang="en-US" sz="1200" dirty="0"/>
-          </a:p>
-        </p:txBody>
-      </p:sp>
-      <p:sp>
-        <p:nvSpPr>
-          <p:cNvPr id="35" name="Shape 33"/>
-          <p:cNvSpPr/>
-          <p:nvPr/>
-        </p:nvSpPr>
-        <p:spPr>
-          <a:xfrm>
-            <a:off x="365760" y="4370832"/>
-            <a:ext cx="2011680" cy="457200"/>
-          </a:xfrm>
-          <a:prstGeom prst="rect">
-            <a:avLst>
-              <a:gd name="adj" fmla="val 12000"/>
-            </a:avLst>
-          </a:prstGeom>
-          <a:solidFill>
-            <a:srgbClr val="EEF2FF"/>
-          </a:solidFill>
-          <a:ln w="12700">
-            <a:solidFill>
-              <a:srgbClr val="6366F1"/>
-            </a:solidFill>
-            <a:prstDash val="solid"/>
-          </a:ln>
-          <a:effectLst>
-            <a:outerShdw sx="100000" sy="100000" kx="0" ky="0" algn="bl" rotWithShape="0" blurRad="101600" dist="38100" dir="8100000">
-              <a:srgbClr val="000000">
-                <a:alpha val="12000"/>
-              </a:srgbClr>
-            </a:outerShdw>
-          </a:effectLst>
-        </p:spPr>
-      </p:sp>
-      <p:sp>
-        <p:nvSpPr>
-          <p:cNvPr id="36" name="Text 34"/>
-          <p:cNvSpPr/>
-          <p:nvPr/>
-        </p:nvSpPr>
-        <p:spPr>
-          <a:xfrm>
-            <a:off x="365760" y="4370832"/>
-            <a:ext cx="2011680" cy="457200"/>
-          </a:xfrm>
-          <a:prstGeom prst="rect">
-            <a:avLst/>
-          </a:prstGeom>
-          <a:noFill/>
-          <a:ln/>
-        </p:spPr>
-        <p:txBody>
-          <a:bodyPr wrap="square" lIns="0" tIns="0" rIns="0" bIns="0" rtlCol="0" anchor="ctr"/>
-          <a:lstStyle/>
-          <a:p>
-            <a:pPr algn="ctr" indent="0" marL="0">
-              <a:buNone/>
-            </a:pPr>
-            <a:r>
-              <a:rPr lang="en-US" sz="1200" b="1" dirty="0">
-                <a:solidFill>
-                  <a:srgbClr val="4338CA"/>
-                </a:solidFill>
-                <a:latin typeface="Trebuchet MS" pitchFamily="34" charset="0"/>
-                <a:ea typeface="Trebuchet MS" pitchFamily="34" charset="-122"/>
-                <a:cs typeface="Trebuchet MS" pitchFamily="34" charset="-120"/>
-              </a:rPr>
-              <a:t>fearfully</a:t>
-            </a:r>
-            <a:endParaRPr lang="en-US" sz="1200" dirty="0"/>
-          </a:p>
-        </p:txBody>
-      </p:sp>
-      <p:sp>
-        <p:nvSpPr>
-          <p:cNvPr id="37" name="Shape 35"/>
-          <p:cNvSpPr/>
-          <p:nvPr/>
-        </p:nvSpPr>
-        <p:spPr>
-          <a:xfrm>
-            <a:off x="2514600" y="4370832"/>
-            <a:ext cx="6263640" cy="457200"/>
-          </a:xfrm>
-          <a:prstGeom prst="rect">
-            <a:avLst>
-              <a:gd name="adj" fmla="val 12000"/>
-            </a:avLst>
-          </a:prstGeom>
-          <a:solidFill>
-            <a:srgbClr val="F8FAFC"/>
-          </a:solidFill>
-          <a:ln w="12700">
-            <a:solidFill>
-              <a:srgbClr val="E2E8F0"/>
-            </a:solidFill>
-            <a:prstDash val="solid"/>
-          </a:ln>
-        </p:spPr>
-      </p:sp>
-      <p:sp>
-        <p:nvSpPr>
-          <p:cNvPr id="38" name="Text 36"/>
-          <p:cNvSpPr/>
-          <p:nvPr/>
-        </p:nvSpPr>
-        <p:spPr>
-          <a:xfrm>
-            <a:off x="2651760" y="4370832"/>
-            <a:ext cx="6035040" cy="457200"/>
-          </a:xfrm>
-          <a:prstGeom prst="rect">
-            <a:avLst/>
-          </a:prstGeom>
-          <a:noFill/>
-          <a:ln/>
-        </p:spPr>
-        <p:txBody>
-          <a:bodyPr wrap="square" rtlCol="0" anchor="ctr"/>
-          <a:lstStyle/>
-          <a:p>
-            <a:pPr algn="l" indent="0" marL="0">
-              <a:buNone/>
-            </a:pPr>
-            <a:r>
-              <a:rPr lang="en-US" sz="1200" dirty="0">
-                <a:solidFill>
-                  <a:srgbClr val="0F172A"/>
-                </a:solidFill>
-                <a:latin typeface="Calibri" pitchFamily="34" charset="0"/>
-                <a:ea typeface="Calibri" pitchFamily="34" charset="-122"/>
-                <a:cs typeface="Calibri" pitchFamily="34" charset="-120"/>
-              </a:rPr>
-              <a:t>Having no fear at all; very brave.</a:t>
+              <a:t>feelings of being afraid, or worries</a:t>
             </a:r>
             <a:endParaRPr lang="en-US" sz="1200" dirty="0"/>
           </a:p>
@@ -40792,7 +41848,7 @@
                 <a:ea typeface="Calibri" pitchFamily="34" charset="-122"/>
                 <a:cs typeface="Calibri" pitchFamily="34" charset="-120"/>
               </a:rPr>
-              <a:t>Word Labs  •  wordlabs.app  •  Root: 'fear' = feeling of danger or dread</a:t>
+              <a:t>Word Labs  •  wordlabs.app  •  Root: 'fear' = to be afraid of</a:t>
             </a:r>
             <a:endParaRPr lang="en-US" sz="800" dirty="0"/>
           </a:p>
@@ -40995,7 +42051,7 @@
                 <a:ea typeface="Calibri" pitchFamily="34" charset="-122"/>
                 <a:cs typeface="Calibri" pitchFamily="34" charset="-120"/>
               </a:rPr>
-              <a:t>The fearless firefighter ran into the burning building without hesitating.</a:t>
+              <a:t>She felt a sudden fear when the lights went out.</a:t>
             </a:r>
             <a:endParaRPr lang="en-US" sz="1500" dirty="0"/>
           </a:p>
@@ -41159,7 +42215,7 @@
                 <a:ea typeface="Calibri" pitchFamily="34" charset="-122"/>
                 <a:cs typeface="Calibri" pitchFamily="34" charset="-120"/>
               </a:rPr>
-              <a:t>The young child looked fearfully at the large dog barking behind the fence.</a:t>
+              <a:t>Talking about it helped calm her fears.</a:t>
             </a:r>
             <a:endParaRPr lang="en-US" sz="1500" dirty="0"/>
           </a:p>
@@ -41323,7 +42379,7 @@
                 <a:ea typeface="Calibri" pitchFamily="34" charset="-122"/>
                 <a:cs typeface="Calibri" pitchFamily="34" charset="-120"/>
               </a:rPr>
-              <a:t>The fearsome dragon in the story breathed fire and guarded a pile of gold.</a:t>
+              <a:t>The villagers feared the coming storm.</a:t>
             </a:r>
             <a:endParaRPr lang="en-US" sz="1500" dirty="0"/>
           </a:p>
